--- a/outputs/製品DEG色相悪化_対策会議.pptx
+++ b/outputs/製品DEG色相悪化_対策会議.pptx
@@ -23,7 +23,6 @@
     <p:sldId id="2147483575" r:id="rId30"/>
     <p:sldId id="2147483576" r:id="rId31"/>
     <p:sldId id="2147483577" r:id="rId32"/>
-    <p:sldId id="2147483578" r:id="rId33"/>
   </p:sldIdLst>
   <p:sldSz cx="12192000" cy="6858000"/>
   <p:notesSz cx="6807200" cy="9939338"/>
@@ -16597,851 +16596,79 @@
                 <a:ea typeface="游ゴシック"/>
                 <a:cs typeface="游ゴシック"/>
               </a:rPr>
-              <a:t>工程別の整理（①運転 ②RD ③文献 → 筋）</a:t>
-            </a:r>
-          </a:p>
-        </p:txBody>
-      </p:sp>
-      <p:graphicFrame>
-        <p:nvGraphicFramePr>
-          <p:cNvPr id="3" name="Table 2"/>
-          <p:cNvGraphicFramePr>
-            <a:graphicFrameLocks noGrp="1"/>
-          </p:cNvGraphicFramePr>
+              <a:t>どこで何が起きるか（工程フロー）</a:t>
+            </a:r>
+          </a:p>
+        </p:txBody>
+      </p:sp>
+      <p:pic>
+        <p:nvPicPr>
+          <p:cNvPr id="3" name="Picture 2" descr="mechanism_flow.png"/>
+          <p:cNvPicPr>
+            <a:picLocks noChangeAspect="1"/>
+          </p:cNvPicPr>
           <p:nvPr/>
-        </p:nvGraphicFramePr>
-        <p:xfrm>
-          <a:off x="365760" y="1280160"/>
-          <a:ext cx="11430000" cy="5029200"/>
-        </p:xfrm>
-        <a:graphic>
-          <a:graphicData uri="http://schemas.openxmlformats.org/drawingml/2006/table">
-            <a:tbl>
-              <a:tblPr firstRow="1" bandRow="1">
-                <a:tableStyleId>{5C22544A-7EE6-4342-B048-85BDC9FD1C3A}</a:tableStyleId>
-              </a:tblPr>
-              <a:tblGrid>
-                <a:gridCol w="1554480"/>
-                <a:gridCol w="2651760"/>
-                <a:gridCol w="2651760"/>
-                <a:gridCol w="2651760"/>
-                <a:gridCol w="1920240"/>
-              </a:tblGrid>
-              <a:tr h="718457">
-                <a:tc>
-                  <a:txBody>
-                    <a:bodyPr/>
-                    <a:lstStyle/>
-                    <a:p>
-                      <a:r>
-                        <a:rPr sz="950" b="1">
-                          <a:solidFill>
-                            <a:srgbClr val="003F7E"/>
-                          </a:solidFill>
-                          <a:latin typeface="游ゴシック"/>
-                          <a:ea typeface="游ゴシック"/>
-                          <a:cs typeface="游ゴシック"/>
-                        </a:rPr>
-                        <a:t>工程</a:t>
-                      </a:r>
-                    </a:p>
-                  </a:txBody>
-                  <a:tcPr marL="45720" marR="27432" marT="18288" marB="18288" anchor="t">
-                    <a:solidFill>
-                      <a:srgbClr val="D7E0E5"/>
-                    </a:solidFill>
-                  </a:tcPr>
-                </a:tc>
-                <a:tc>
-                  <a:txBody>
-                    <a:bodyPr/>
-                    <a:lstStyle/>
-                    <a:p>
-                      <a:r>
-                        <a:rPr sz="950" b="1">
-                          <a:solidFill>
-                            <a:srgbClr val="003F7E"/>
-                          </a:solidFill>
-                          <a:latin typeface="游ゴシック"/>
-                          <a:ea typeface="游ゴシック"/>
-                          <a:cs typeface="游ゴシック"/>
-                        </a:rPr>
-                        <a:t>① 運転で見えた事実（運転・解放結果）</a:t>
-                      </a:r>
-                    </a:p>
-                  </a:txBody>
-                  <a:tcPr marL="45720" marR="27432" marT="18288" marB="18288" anchor="t">
-                    <a:solidFill>
-                      <a:srgbClr val="E8F1E5"/>
-                    </a:solidFill>
-                  </a:tcPr>
-                </a:tc>
-                <a:tc>
-                  <a:txBody>
-                    <a:bodyPr/>
-                    <a:lstStyle/>
-                    <a:p>
-                      <a:r>
-                        <a:rPr sz="950" b="1">
-                          <a:solidFill>
-                            <a:srgbClr val="003F7E"/>
-                          </a:solidFill>
-                          <a:latin typeface="游ゴシック"/>
-                          <a:ea typeface="游ゴシック"/>
-                          <a:cs typeface="游ゴシック"/>
-                        </a:rPr>
-                        <a:t>② RDで検証した事実（分析・ベンチ）</a:t>
-                      </a:r>
-                    </a:p>
-                  </a:txBody>
-                  <a:tcPr marL="45720" marR="27432" marT="18288" marB="18288" anchor="t">
-                    <a:solidFill>
-                      <a:srgbClr val="FBF1DC"/>
-                    </a:solidFill>
-                  </a:tcPr>
-                </a:tc>
-                <a:tc>
-                  <a:txBody>
-                    <a:bodyPr/>
-                    <a:lstStyle/>
-                    <a:p>
-                      <a:r>
-                        <a:rPr sz="950" b="1">
-                          <a:solidFill>
-                            <a:srgbClr val="003F7E"/>
-                          </a:solidFill>
-                          <a:latin typeface="游ゴシック"/>
-                          <a:ea typeface="游ゴシック"/>
-                          <a:cs typeface="游ゴシック"/>
-                        </a:rPr>
-                        <a:t>③ 文献・原理（この工程で起こる反応）</a:t>
-                      </a:r>
-                    </a:p>
-                  </a:txBody>
-                  <a:tcPr marL="45720" marR="27432" marT="18288" marB="18288" anchor="t">
-                    <a:solidFill>
-                      <a:srgbClr val="E9F0F7"/>
-                    </a:solidFill>
-                  </a:tcPr>
-                </a:tc>
-                <a:tc>
-                  <a:txBody>
-                    <a:bodyPr/>
-                    <a:lstStyle/>
-                    <a:p>
-                      <a:r>
-                        <a:rPr sz="950" b="1">
-                          <a:solidFill>
-                            <a:srgbClr val="003F7E"/>
-                          </a:solidFill>
-                          <a:latin typeface="游ゴシック"/>
-                          <a:ea typeface="游ゴシック"/>
-                          <a:cs typeface="游ゴシック"/>
-                        </a:rPr>
-                        <a:t>④ この工程の筋</a:t>
-                      </a:r>
-                    </a:p>
-                  </a:txBody>
-                  <a:tcPr marL="45720" marR="27432" marT="18288" marB="18288" anchor="t">
-                    <a:solidFill>
-                      <a:srgbClr val="DCE6EF"/>
-                    </a:solidFill>
-                  </a:tcPr>
-                </a:tc>
-              </a:tr>
-              <a:tr h="718457">
-                <a:tc>
-                  <a:txBody>
-                    <a:bodyPr/>
-                    <a:lstStyle/>
-                    <a:p>
-                      <a:r>
-                        <a:rPr sz="900" b="1">
-                          <a:solidFill>
-                            <a:srgbClr val="003F7E"/>
-                          </a:solidFill>
-                          <a:latin typeface="游ゴシック"/>
-                          <a:ea typeface="游ゴシック"/>
-                          <a:cs typeface="游ゴシック"/>
-                        </a:rPr>
-                        <a:t>EO反応器
-(R-1101)</a:t>
-                      </a:r>
-                    </a:p>
-                  </a:txBody>
-                  <a:tcPr marL="45720" marR="27432" marT="18288" marB="18288" anchor="t">
-                    <a:solidFill>
-                      <a:srgbClr val="D7E0E5"/>
-                    </a:solidFill>
-                  </a:tcPr>
-                </a:tc>
-                <a:tc>
-                  <a:txBody>
-                    <a:bodyPr/>
-                    <a:lstStyle/>
-                    <a:p>
-                      <a:r>
-                        <a:rPr sz="900" b="0">
-                          <a:solidFill>
-                            <a:srgbClr val="222222"/>
-                          </a:solidFill>
-                          <a:latin typeface="游ゴシック"/>
-                          <a:ea typeface="游ゴシック"/>
-                          <a:cs typeface="游ゴシック"/>
-                        </a:rPr>
-                        <a:t>原料EO中A-ALD/EO=0.78kg/t（過去実績の上位、通常0.11〜0.35）。F-ALDも増加。製品出口は規格内。</a:t>
-                      </a:r>
-                    </a:p>
-                  </a:txBody>
-                  <a:tcPr marL="45720" marR="27432" marT="18288" marB="18288" anchor="t">
-                    <a:solidFill>
-                      <a:srgbClr val="E8F1E5"/>
-                    </a:solidFill>
-                  </a:tcPr>
-                </a:tc>
-                <a:tc>
-                  <a:txBody>
-                    <a:bodyPr/>
-                    <a:lstStyle/>
-                    <a:p>
-                      <a:r>
-                        <a:rPr sz="900" b="0">
-                          <a:solidFill>
-                            <a:srgbClr val="222222"/>
-                          </a:solidFill>
-                          <a:latin typeface="游ゴシック"/>
-                          <a:ea typeface="游ゴシック"/>
-                          <a:cs typeface="游ゴシック"/>
-                        </a:rPr>
-                        <a:t>ラボでF/A-ALD添加→反応器出口相当でUV220/260が上昇。反応器で生じたUV成分はほぼそのまま後段へ持ち越す。</a:t>
-                      </a:r>
-                    </a:p>
-                  </a:txBody>
-                  <a:tcPr marL="45720" marR="27432" marT="18288" marB="18288" anchor="t">
-                    <a:solidFill>
-                      <a:srgbClr val="FBF1DC"/>
-                    </a:solidFill>
-                  </a:tcPr>
-                </a:tc>
-                <a:tc>
-                  <a:txBody>
-                    <a:bodyPr/>
-                    <a:lstStyle/>
-                    <a:p>
-                      <a:r>
-                        <a:rPr sz="900" b="0">
-                          <a:solidFill>
-                            <a:srgbClr val="222222"/>
-                          </a:solidFill>
-                          <a:latin typeface="游ゴシック"/>
-                          <a:ea typeface="游ゴシック"/>
-                          <a:cs typeface="游ゴシック"/>
-                        </a:rPr>
-                        <a:t>触媒選択性低下でアルデヒド類が副生増。アルデヒドはアルドール縮合・着色の出発物質。</a:t>
-                      </a:r>
-                    </a:p>
-                  </a:txBody>
-                  <a:tcPr marL="45720" marR="27432" marT="18288" marB="18288" anchor="t">
-                    <a:solidFill>
-                      <a:srgbClr val="E9F0F7"/>
-                    </a:solidFill>
-                  </a:tcPr>
-                </a:tc>
-                <a:tc>
-                  <a:txBody>
-                    <a:bodyPr/>
-                    <a:lstStyle/>
-                    <a:p>
-                      <a:r>
-                        <a:rPr sz="900" b="1">
-                          <a:solidFill>
-                            <a:srgbClr val="003F7E"/>
-                          </a:solidFill>
-                          <a:latin typeface="游ゴシック"/>
-                          <a:ea typeface="游ゴシック"/>
-                          <a:cs typeface="游ゴシック"/>
-                        </a:rPr>
-                        <a:t>種となるアルデヒドが増えた＝着色の起点。</a:t>
-                      </a:r>
-                    </a:p>
-                  </a:txBody>
-                  <a:tcPr marL="45720" marR="27432" marT="18288" marB="18288" anchor="t">
-                    <a:solidFill>
-                      <a:srgbClr val="DCE6EF"/>
-                    </a:solidFill>
-                  </a:tcPr>
-                </a:tc>
-              </a:tr>
-              <a:tr h="718457">
-                <a:tc>
-                  <a:txBody>
-                    <a:bodyPr/>
-                    <a:lstStyle/>
-                    <a:p>
-                      <a:r>
-                        <a:rPr sz="900" b="1">
-                          <a:solidFill>
-                            <a:srgbClr val="003F7E"/>
-                          </a:solidFill>
-                          <a:latin typeface="游ゴシック"/>
-                          <a:ea typeface="游ゴシック"/>
-                          <a:cs typeface="游ゴシック"/>
-                        </a:rPr>
-                        <a:t>脱水塔まわり
-(C-1404)</a:t>
-                      </a:r>
-                    </a:p>
-                  </a:txBody>
-                  <a:tcPr marL="45720" marR="27432" marT="18288" marB="18288" anchor="t">
-                    <a:solidFill>
-                      <a:srgbClr val="D7E0E5"/>
-                    </a:solidFill>
-                  </a:tcPr>
-                </a:tc>
-                <a:tc>
-                  <a:txBody>
-                    <a:bodyPr/>
-                    <a:lstStyle/>
-                    <a:p>
-                      <a:r>
-                        <a:rPr sz="900" b="0">
-                          <a:solidFill>
-                            <a:srgbClr val="222222"/>
-                          </a:solidFill>
-                          <a:latin typeface="游ゴシック"/>
-                          <a:ea typeface="游ゴシック"/>
-                          <a:cs typeface="游ゴシック"/>
-                        </a:rPr>
-                        <a:t>脱水塔ボトムは低水分（修理後10ppm台）。※MEG塔リボイラーの穴で従来は50ppm台と誤認、修理後に低下。</a:t>
-                      </a:r>
-                    </a:p>
-                  </a:txBody>
-                  <a:tcPr marL="45720" marR="27432" marT="18288" marB="18288" anchor="t">
-                    <a:solidFill>
-                      <a:srgbClr val="E8F1E5"/>
-                    </a:solidFill>
-                  </a:tcPr>
-                </a:tc>
-                <a:tc>
-                  <a:txBody>
-                    <a:bodyPr/>
-                    <a:lstStyle/>
-                    <a:p>
-                      <a:r>
-                        <a:rPr sz="900" b="0">
-                          <a:solidFill>
-                            <a:srgbClr val="222222"/>
-                          </a:solidFill>
-                          <a:latin typeface="游ゴシック"/>
-                          <a:ea typeface="游ゴシック"/>
-                          <a:cs typeface="游ゴシック"/>
-                        </a:rPr>
-                        <a:t>水分があると縮合は進みにくい（脱水反応）。水分の効きは感度2〜3割の見立て。</a:t>
-                      </a:r>
-                    </a:p>
-                  </a:txBody>
-                  <a:tcPr marL="45720" marR="27432" marT="18288" marB="18288" anchor="t">
-                    <a:solidFill>
-                      <a:srgbClr val="FBF1DC"/>
-                    </a:solidFill>
-                  </a:tcPr>
-                </a:tc>
-                <a:tc>
-                  <a:txBody>
-                    <a:bodyPr/>
-                    <a:lstStyle/>
-                    <a:p>
-                      <a:r>
-                        <a:rPr sz="900" b="0">
-                          <a:solidFill>
-                            <a:srgbClr val="222222"/>
-                          </a:solidFill>
-                          <a:latin typeface="游ゴシック"/>
-                          <a:ea typeface="游ゴシック"/>
-                          <a:cs typeface="游ゴシック"/>
-                        </a:rPr>
-                        <a:t>アルドール縮合は脱水を伴う平衡。低水分ほど縮合（脱水）側へ寄る。</a:t>
-                      </a:r>
-                    </a:p>
-                  </a:txBody>
-                  <a:tcPr marL="45720" marR="27432" marT="18288" marB="18288" anchor="t">
-                    <a:solidFill>
-                      <a:srgbClr val="E9F0F7"/>
-                    </a:solidFill>
-                  </a:tcPr>
-                </a:tc>
-                <a:tc>
-                  <a:txBody>
-                    <a:bodyPr/>
-                    <a:lstStyle/>
-                    <a:p>
-                      <a:r>
-                        <a:rPr sz="900" b="1">
-                          <a:solidFill>
-                            <a:srgbClr val="003F7E"/>
-                          </a:solidFill>
-                          <a:latin typeface="游ゴシック"/>
-                          <a:ea typeface="游ゴシック"/>
-                          <a:cs typeface="游ゴシック"/>
-                        </a:rPr>
-                        <a:t>低水分が縮合を後押しする条件。</a:t>
-                      </a:r>
-                    </a:p>
-                  </a:txBody>
-                  <a:tcPr marL="45720" marR="27432" marT="18288" marB="18288" anchor="t">
-                    <a:solidFill>
-                      <a:srgbClr val="DCE6EF"/>
-                    </a:solidFill>
-                  </a:tcPr>
-                </a:tc>
-              </a:tr>
-              <a:tr h="718457">
-                <a:tc>
-                  <a:txBody>
-                    <a:bodyPr/>
-                    <a:lstStyle/>
-                    <a:p>
-                      <a:r>
-                        <a:rPr sz="900" b="1">
-                          <a:solidFill>
-                            <a:srgbClr val="003F7E"/>
-                          </a:solidFill>
-                          <a:latin typeface="游ゴシック"/>
-                          <a:ea typeface="游ゴシック"/>
-                          <a:cs typeface="游ゴシック"/>
-                        </a:rPr>
-                        <a:t>MEG塔／リサイクル塔
-(C-1501/C-1502)</a:t>
-                      </a:r>
-                    </a:p>
-                  </a:txBody>
-                  <a:tcPr marL="45720" marR="27432" marT="18288" marB="18288" anchor="t">
-                    <a:solidFill>
-                      <a:srgbClr val="D7E0E5"/>
-                    </a:solidFill>
-                  </a:tcPr>
-                </a:tc>
-                <a:tc>
-                  <a:txBody>
-                    <a:bodyPr/>
-                    <a:lstStyle/>
-                    <a:p>
-                      <a:r>
-                        <a:rPr sz="900" b="0">
-                          <a:solidFill>
-                            <a:srgbClr val="222222"/>
-                          </a:solidFill>
-                          <a:latin typeface="游ゴシック"/>
-                          <a:ea typeface="游ゴシック"/>
-                          <a:cs typeface="游ゴシック"/>
-                        </a:rPr>
-                        <a:t>C-1502トップでA-ALDが一時的に異常高（3〜7ppm、過去1ppm以下）。脱水塔BTM・C-1501BTMは過去同水準。開放で異常な汚れ・活性金属なし（CS→SUS改造部も錆込みなし）。</a:t>
-                      </a:r>
-                    </a:p>
-                  </a:txBody>
-                  <a:tcPr marL="45720" marR="27432" marT="18288" marB="18288" anchor="t">
-                    <a:solidFill>
-                      <a:srgbClr val="E8F1E5"/>
-                    </a:solidFill>
-                  </a:tcPr>
-                </a:tc>
-                <a:tc>
-                  <a:txBody>
-                    <a:bodyPr/>
-                    <a:lstStyle/>
-                    <a:p>
-                      <a:r>
-                        <a:rPr sz="900" b="0">
-                          <a:solidFill>
-                            <a:srgbClr val="222222"/>
-                          </a:solidFill>
-                          <a:latin typeface="游ゴシック"/>
-                          <a:ea typeface="游ゴシック"/>
-                          <a:cs typeface="游ゴシック"/>
-                        </a:rPr>
-                        <a:t>物質収支上はC-1502でALD生成に見えるが、重質側で生じた縮合体が軽質ゆえ蒸留で上に運ばれた塔間循環で説明（検出位置≠生成位置）。</a:t>
-                      </a:r>
-                    </a:p>
-                  </a:txBody>
-                  <a:tcPr marL="45720" marR="27432" marT="18288" marB="18288" anchor="t">
-                    <a:solidFill>
-                      <a:srgbClr val="FBF1DC"/>
-                    </a:solidFill>
-                  </a:tcPr>
-                </a:tc>
-                <a:tc>
-                  <a:txBody>
-                    <a:bodyPr/>
-                    <a:lstStyle/>
-                    <a:p>
-                      <a:r>
-                        <a:rPr sz="900" b="0">
-                          <a:solidFill>
-                            <a:srgbClr val="222222"/>
-                          </a:solidFill>
-                          <a:latin typeface="游ゴシック"/>
-                          <a:ea typeface="游ゴシック"/>
-                          <a:cs typeface="游ゴシック"/>
-                        </a:rPr>
-                        <a:t>重質化した縮合体は蒸留系を循環し、一部はレトロ的に分解してALDに見える。</a:t>
-                      </a:r>
-                    </a:p>
-                  </a:txBody>
-                  <a:tcPr marL="45720" marR="27432" marT="18288" marB="18288" anchor="t">
-                    <a:solidFill>
-                      <a:srgbClr val="E9F0F7"/>
-                    </a:solidFill>
-                  </a:tcPr>
-                </a:tc>
-                <a:tc>
-                  <a:txBody>
-                    <a:bodyPr/>
-                    <a:lstStyle/>
-                    <a:p>
-                      <a:r>
-                        <a:rPr sz="900" b="1">
-                          <a:solidFill>
-                            <a:srgbClr val="003F7E"/>
-                          </a:solidFill>
-                          <a:latin typeface="游ゴシック"/>
-                          <a:ea typeface="游ゴシック"/>
-                          <a:cs typeface="游ゴシック"/>
-                        </a:rPr>
-                        <a:t>MEG系は着色の場ではない（活性金属なし）。縮合体が系内を回りDEG留分へ向かう通過点。</a:t>
-                      </a:r>
-                    </a:p>
-                  </a:txBody>
-                  <a:tcPr marL="45720" marR="27432" marT="18288" marB="18288" anchor="t">
-                    <a:solidFill>
-                      <a:srgbClr val="DCE6EF"/>
-                    </a:solidFill>
-                  </a:tcPr>
-                </a:tc>
-              </a:tr>
-              <a:tr h="718457">
-                <a:tc>
-                  <a:txBody>
-                    <a:bodyPr/>
-                    <a:lstStyle/>
-                    <a:p>
-                      <a:r>
-                        <a:rPr sz="900" b="1">
-                          <a:solidFill>
-                            <a:srgbClr val="003F7E"/>
-                          </a:solidFill>
-                          <a:latin typeface="游ゴシック"/>
-                          <a:ea typeface="游ゴシック"/>
-                          <a:cs typeface="游ゴシック"/>
-                        </a:rPr>
-                        <a:t>DEG塔
-(C-1503)</a:t>
-                      </a:r>
-                    </a:p>
-                  </a:txBody>
-                  <a:tcPr marL="45720" marR="27432" marT="18288" marB="18288" anchor="t">
-                    <a:solidFill>
-                      <a:srgbClr val="D7E0E5"/>
-                    </a:solidFill>
-                  </a:tcPr>
-                </a:tc>
-                <a:tc>
-                  <a:txBody>
-                    <a:bodyPr/>
-                    <a:lstStyle/>
-                    <a:p>
-                      <a:r>
-                        <a:rPr sz="900" b="0">
-                          <a:solidFill>
-                            <a:srgbClr val="222222"/>
-                          </a:solidFill>
-                          <a:latin typeface="游ゴシック"/>
-                          <a:ea typeface="游ゴシック"/>
-                          <a:cs typeface="游ゴシック"/>
-                        </a:rPr>
-                        <a:t>C-1503トップに黒色付着物（XRFでほぼ鉄＝サビ）。水抽出でギ酸70ppm・グリコール酸12ppmを検出。</a:t>
-                      </a:r>
-                    </a:p>
-                  </a:txBody>
-                  <a:tcPr marL="45720" marR="27432" marT="18288" marB="18288" anchor="t">
-                    <a:solidFill>
-                      <a:srgbClr val="E8F1E5"/>
-                    </a:solidFill>
-                  </a:tcPr>
-                </a:tc>
-                <a:tc>
-                  <a:txBody>
-                    <a:bodyPr/>
-                    <a:lstStyle/>
-                    <a:p>
-                      <a:r>
-                        <a:rPr sz="900" b="0">
-                          <a:solidFill>
-                            <a:srgbClr val="222222"/>
-                          </a:solidFill>
-                          <a:latin typeface="游ゴシック"/>
-                          <a:ea typeface="游ゴシック"/>
-                          <a:cs typeface="游ゴシック"/>
-                        </a:rPr>
-                        <a:t>付着物をDEGに共存させてもλmax380nmのみで450nmは再現せず。蒸留DEGの短時間保管でも450nmは出ない。</a:t>
-                      </a:r>
-                    </a:p>
-                  </a:txBody>
-                  <a:tcPr marL="45720" marR="27432" marT="18288" marB="18288" anchor="t">
-                    <a:solidFill>
-                      <a:srgbClr val="FBF1DC"/>
-                    </a:solidFill>
-                  </a:tcPr>
-                </a:tc>
-                <a:tc>
-                  <a:txBody>
-                    <a:bodyPr/>
-                    <a:lstStyle/>
-                    <a:p>
-                      <a:r>
-                        <a:rPr sz="900" b="0">
-                          <a:solidFill>
-                            <a:srgbClr val="222222"/>
-                          </a:solidFill>
-                          <a:latin typeface="游ゴシック"/>
-                          <a:ea typeface="游ゴシック"/>
-                          <a:cs typeface="游ゴシック"/>
-                        </a:rPr>
-                        <a:t>塩基・高温下でアルドール縮合が進み、共役の短い前駆体（UV330nm付近、分子量150程度）が生成。鉄サビは局所の腐食・380nm寄与。</a:t>
-                      </a:r>
-                    </a:p>
-                  </a:txBody>
-                  <a:tcPr marL="45720" marR="27432" marT="18288" marB="18288" anchor="t">
-                    <a:solidFill>
-                      <a:srgbClr val="E9F0F7"/>
-                    </a:solidFill>
-                  </a:tcPr>
-                </a:tc>
-                <a:tc>
-                  <a:txBody>
-                    <a:bodyPr/>
-                    <a:lstStyle/>
-                    <a:p>
-                      <a:r>
-                        <a:rPr sz="900" b="1">
-                          <a:solidFill>
-                            <a:srgbClr val="003F7E"/>
-                          </a:solidFill>
-                          <a:latin typeface="游ゴシック"/>
-                          <a:ea typeface="游ゴシック"/>
-                          <a:cs typeface="游ゴシック"/>
-                        </a:rPr>
-                        <a:t>前駆体が生成する場。鉄サビ・付着物は450nmの主因でない（局所380nm）。</a:t>
-                      </a:r>
-                    </a:p>
-                  </a:txBody>
-                  <a:tcPr marL="45720" marR="27432" marT="18288" marB="18288" anchor="t">
-                    <a:solidFill>
-                      <a:srgbClr val="DCE6EF"/>
-                    </a:solidFill>
-                  </a:tcPr>
-                </a:tc>
-              </a:tr>
-              <a:tr h="718457">
-                <a:tc>
-                  <a:txBody>
-                    <a:bodyPr/>
-                    <a:lstStyle/>
-                    <a:p>
-                      <a:r>
-                        <a:rPr sz="900" b="1">
-                          <a:solidFill>
-                            <a:srgbClr val="003F7E"/>
-                          </a:solidFill>
-                          <a:latin typeface="游ゴシック"/>
-                          <a:ea typeface="游ゴシック"/>
-                          <a:cs typeface="游ゴシック"/>
-                        </a:rPr>
-                        <a:t>製品タンク
-(T-555)</a:t>
-                      </a:r>
-                    </a:p>
-                  </a:txBody>
-                  <a:tcPr marL="45720" marR="27432" marT="18288" marB="18288" anchor="t">
-                    <a:solidFill>
-                      <a:srgbClr val="D7E0E5"/>
-                    </a:solidFill>
-                  </a:tcPr>
-                </a:tc>
-                <a:tc>
-                  <a:txBody>
-                    <a:bodyPr/>
-                    <a:lstStyle/>
-                    <a:p>
-                      <a:r>
-                        <a:rPr sz="900" b="0">
-                          <a:solidFill>
-                            <a:srgbClr val="222222"/>
-                          </a:solidFill>
-                          <a:latin typeface="游ゴシック"/>
-                          <a:ea typeface="游ゴシック"/>
-                          <a:cs typeface="游ゴシック"/>
-                        </a:rPr>
-                        <a:t>窒素封入タンクで約6週間でAPHA&lt;5→25〜35。出口は規格内。残液は5/18(APHA30)以降は上昇せず。ドラム・SP（大気接触）は悪化なし。</a:t>
-                      </a:r>
-                    </a:p>
-                  </a:txBody>
-                  <a:tcPr marL="45720" marR="27432" marT="18288" marB="18288" anchor="t">
-                    <a:solidFill>
-                      <a:srgbClr val="E8F1E5"/>
-                    </a:solidFill>
-                  </a:tcPr>
-                </a:tc>
-                <a:tc>
-                  <a:txBody>
-                    <a:bodyPr/>
-                    <a:lstStyle/>
-                    <a:p>
-                      <a:r>
-                        <a:rPr sz="900" b="0">
-                          <a:solidFill>
-                            <a:srgbClr val="222222"/>
-                          </a:solidFill>
-                          <a:latin typeface="游ゴシック"/>
-                          <a:ea typeface="游ゴシック"/>
-                          <a:cs typeface="游ゴシック"/>
-                        </a:rPr>
-                        <a:t>GPCで分子量200〜800、GCの複数検体が457nmを捕捉＝ポリエナール。吸光度換算で数〜10ppb。酸素があると前駆体が有機酸へ酸化され縮合が進まない。</a:t>
-                      </a:r>
-                    </a:p>
-                  </a:txBody>
-                  <a:tcPr marL="45720" marR="27432" marT="18288" marB="18288" anchor="t">
-                    <a:solidFill>
-                      <a:srgbClr val="FBF1DC"/>
-                    </a:solidFill>
-                  </a:tcPr>
-                </a:tc>
-                <a:tc>
-                  <a:txBody>
-                    <a:bodyPr/>
-                    <a:lstStyle/>
-                    <a:p>
-                      <a:r>
-                        <a:rPr sz="900" b="0">
-                          <a:solidFill>
-                            <a:srgbClr val="222222"/>
-                          </a:solidFill>
-                          <a:latin typeface="游ゴシック"/>
-                          <a:ea typeface="游ゴシック"/>
-                          <a:cs typeface="游ゴシック"/>
-                        </a:rPr>
-                        <a:t>前駆体どうしが脱水縮合して共役が伸び450nm（黄）に。プール律速で、使い切るとAPHA30で頭打ち。共役系は微量で発色。</a:t>
-                      </a:r>
-                    </a:p>
-                  </a:txBody>
-                  <a:tcPr marL="45720" marR="27432" marT="18288" marB="18288" anchor="t">
-                    <a:solidFill>
-                      <a:srgbClr val="E9F0F7"/>
-                    </a:solidFill>
-                  </a:tcPr>
-                </a:tc>
-                <a:tc>
-                  <a:txBody>
-                    <a:bodyPr/>
-                    <a:lstStyle/>
-                    <a:p>
-                      <a:r>
-                        <a:rPr sz="900" b="1">
-                          <a:solidFill>
-                            <a:srgbClr val="003F7E"/>
-                          </a:solidFill>
-                          <a:latin typeface="游ゴシック"/>
-                          <a:ea typeface="游ゴシック"/>
-                          <a:cs typeface="游ゴシック"/>
-                        </a:rPr>
-                        <a:t>着色が成長する＝熟成の場。窒素で進行・大気で抑制。</a:t>
-                      </a:r>
-                    </a:p>
-                  </a:txBody>
-                  <a:tcPr marL="45720" marR="27432" marT="18288" marB="18288" anchor="t">
-                    <a:solidFill>
-                      <a:srgbClr val="DCE6EF"/>
-                    </a:solidFill>
-                  </a:tcPr>
-                </a:tc>
-              </a:tr>
-              <a:tr h="718458">
-                <a:tc>
-                  <a:txBody>
-                    <a:bodyPr/>
-                    <a:lstStyle/>
-                    <a:p>
-                      <a:r>
-                        <a:rPr sz="900" b="1">
-                          <a:solidFill>
-                            <a:srgbClr val="FFFFFF"/>
-                          </a:solidFill>
-                          <a:latin typeface="游ゴシック"/>
-                          <a:ea typeface="游ゴシック"/>
-                          <a:cs typeface="游ゴシック"/>
-                        </a:rPr>
-                        <a:t>トータル＝1本の筋</a:t>
-                      </a:r>
-                    </a:p>
-                  </a:txBody>
-                  <a:tcPr marL="45720" marR="27432" marT="18288" marB="18288" anchor="t">
-                    <a:solidFill>
-                      <a:srgbClr val="005BAB"/>
-                    </a:solidFill>
-                  </a:tcPr>
-                </a:tc>
-                <a:tc gridSpan="4">
-                  <a:txBody>
-                    <a:bodyPr/>
-                    <a:lstStyle/>
-                    <a:p>
-                      <a:r>
-                        <a:rPr sz="950" b="1">
-                          <a:solidFill>
-                            <a:srgbClr val="003F7E"/>
-                          </a:solidFill>
-                          <a:latin typeface="游ゴシック"/>
-                          <a:ea typeface="游ゴシック"/>
-                          <a:cs typeface="游ゴシック"/>
-                        </a:rPr>
-                        <a:t>触媒劣化で増えたアルデヒドが、アルドール縮合で高沸点の前駆体になってDEG留分へ移り、窒素タンクの長期保管で前駆体どうしが縮合・脱水して共役が伸び、約10ppb（推定）で450nm＝黄色に着色する。前駆体を使い切るとAPHA30程度で頭打ちになる。</a:t>
-                      </a:r>
-                    </a:p>
-                  </a:txBody>
-                  <a:tcPr>
-                    <a:solidFill>
-                      <a:srgbClr val="DCE6EF"/>
-                    </a:solidFill>
-                  </a:tcPr>
-                </a:tc>
-                <a:tc hMerge="1">
-                  <a:txBody>
-                    <a:bodyPr/>
-                    <a:lstStyle/>
-                    <a:p/>
-                  </a:txBody>
-                  <a:tcPr/>
-                </a:tc>
-                <a:tc hMerge="1">
-                  <a:txBody>
-                    <a:bodyPr/>
-                    <a:lstStyle/>
-                    <a:p/>
-                  </a:txBody>
-                  <a:tcPr/>
-                </a:tc>
-                <a:tc hMerge="1">
-                  <a:txBody>
-                    <a:bodyPr/>
-                    <a:lstStyle/>
-                    <a:p/>
-                  </a:txBody>
-                  <a:tcPr/>
-                </a:tc>
-              </a:tr>
-            </a:tbl>
-          </a:graphicData>
-        </a:graphic>
-      </p:graphicFrame>
+        </p:nvPicPr>
+        <p:blipFill>
+          <a:blip r:embed="rId2"/>
+          <a:stretch>
+            <a:fillRect/>
+          </a:stretch>
+        </p:blipFill>
+        <p:spPr>
+          <a:xfrm>
+            <a:off x="320040" y="1600200"/>
+            <a:ext cx="11521440" cy="2848442"/>
+          </a:xfrm>
+          <a:prstGeom prst="rect">
+            <a:avLst/>
+          </a:prstGeom>
+        </p:spPr>
+      </p:pic>
+      <p:sp>
+        <p:nvSpPr>
+          <p:cNvPr id="4" name="TextBox 3"/>
+          <p:cNvSpPr txBox="1"/>
+          <p:nvPr/>
+        </p:nvSpPr>
+        <p:spPr>
+          <a:xfrm>
+            <a:off x="548640" y="5212080"/>
+            <a:ext cx="11064240" cy="1097280"/>
+          </a:xfrm>
+          <a:prstGeom prst="rect">
+            <a:avLst/>
+          </a:prstGeom>
+          <a:noFill/>
+        </p:spPr>
+        <p:txBody>
+          <a:bodyPr wrap="square">
+            <a:spAutoFit/>
+          </a:bodyPr>
+          <a:lstStyle/>
+          <a:p>
+            <a:pPr>
+              <a:spcBef>
+                <a:spcPts val="0"/>
+              </a:spcBef>
+              <a:spcAft>
+                <a:spcPts val="400"/>
+              </a:spcAft>
+            </a:pPr>
+            <a:r>
+              <a:rPr sz="1100" b="0">
+                <a:solidFill>
+                  <a:srgbClr val="666666"/>
+                </a:solidFill>
+                <a:latin typeface="游ゴシック"/>
+                <a:ea typeface="游ゴシック"/>
+                <a:cs typeface="游ゴシック"/>
+              </a:rPr>
+              <a:t>工程ごとの事実（運転・解放・RD）／文献・社外知見／一般原理の切り分けは「事実整理（工程別グリッド）」に整理。</a:t>
+            </a:r>
+          </a:p>
+        </p:txBody>
+      </p:sp>
     </p:spTree>
   </p:cSld>
   <p:clrMapOvr>
@@ -17484,35 +16711,379 @@
                 <a:ea typeface="游ゴシック"/>
                 <a:cs typeface="游ゴシック"/>
               </a:rPr>
-              <a:t>どこで何が起きるか（工程フロー）</a:t>
-            </a:r>
-          </a:p>
-        </p:txBody>
-      </p:sp>
-      <p:pic>
-        <p:nvPicPr>
-          <p:cNvPr id="3" name="Picture 2" descr="mechanism_flow.png"/>
-          <p:cNvPicPr>
-            <a:picLocks noChangeAspect="1"/>
-          </p:cNvPicPr>
+              <a:t>なぜ今回だけ起きたか（条件の重なり）</a:t>
+            </a:r>
+          </a:p>
+        </p:txBody>
+      </p:sp>
+      <p:sp>
+        <p:nvSpPr>
+          <p:cNvPr id="3" name="TextBox 2"/>
+          <p:cNvSpPr txBox="1"/>
           <p:nvPr/>
-        </p:nvPicPr>
-        <p:blipFill>
-          <a:blip r:embed="rId2"/>
-          <a:stretch>
-            <a:fillRect/>
-          </a:stretch>
-        </p:blipFill>
-        <p:spPr>
-          <a:xfrm>
-            <a:off x="365760" y="1554480"/>
-            <a:ext cx="11430000" cy="2825835"/>
+        </p:nvSpPr>
+        <p:spPr>
+          <a:xfrm>
+            <a:off x="548640" y="1325880"/>
+            <a:ext cx="11064240" cy="457200"/>
           </a:xfrm>
           <a:prstGeom prst="rect">
             <a:avLst/>
           </a:prstGeom>
-        </p:spPr>
-      </p:pic>
+          <a:noFill/>
+        </p:spPr>
+        <p:txBody>
+          <a:bodyPr wrap="square">
+            <a:spAutoFit/>
+          </a:bodyPr>
+          <a:lstStyle/>
+          <a:p>
+            <a:pPr>
+              <a:spcBef>
+                <a:spcPts val="0"/>
+              </a:spcBef>
+              <a:spcAft>
+                <a:spcPts val="400"/>
+              </a:spcAft>
+            </a:pPr>
+            <a:r>
+              <a:rPr sz="1250" b="0">
+                <a:solidFill>
+                  <a:srgbClr val="666666"/>
+                </a:solidFill>
+                <a:latin typeface="游ゴシック"/>
+                <a:ea typeface="游ゴシック"/>
+                <a:cs typeface="游ゴシック"/>
+              </a:rPr>
+              <a:t>過去にもアルデヒドが高い時期はあったが、今回は反応させてしまう条件がそろった。</a:t>
+            </a:r>
+          </a:p>
+        </p:txBody>
+      </p:sp>
+      <p:sp>
+        <p:nvSpPr>
+          <p:cNvPr id="4" name="Rounded Rectangle 3"/>
+          <p:cNvSpPr/>
+          <p:nvPr/>
+        </p:nvSpPr>
+        <p:spPr>
+          <a:xfrm>
+            <a:off x="548640" y="1874519"/>
+            <a:ext cx="11064240" cy="960120"/>
+          </a:xfrm>
+          <a:prstGeom prst="roundRect">
+            <a:avLst/>
+          </a:prstGeom>
+          <a:solidFill>
+            <a:srgbClr val="EBEFF2"/>
+          </a:solidFill>
+          <a:ln w="12700">
+            <a:solidFill>
+              <a:srgbClr val="C9D2D8"/>
+            </a:solidFill>
+          </a:ln>
+          <a:effectLst/>
+        </p:spPr>
+        <p:style>
+          <a:lnRef idx="1">
+            <a:schemeClr val="accent1"/>
+          </a:lnRef>
+          <a:fillRef idx="3">
+            <a:schemeClr val="accent1"/>
+          </a:fillRef>
+          <a:effectRef idx="2">
+            <a:schemeClr val="accent1"/>
+          </a:effectRef>
+          <a:fontRef idx="minor">
+            <a:schemeClr val="lt1"/>
+          </a:fontRef>
+        </p:style>
+        <p:txBody>
+          <a:bodyPr rtlCol="0" anchor="ctr" wrap="square" lIns="128016"/>
+          <a:lstStyle/>
+          <a:p>
+            <a:pPr algn="ctr"/>
+            <a:r>
+              <a:rPr sz="1300" b="1">
+                <a:solidFill>
+                  <a:srgbClr val="003F7E"/>
+                </a:solidFill>
+                <a:latin typeface="游ゴシック"/>
+                <a:ea typeface="游ゴシック"/>
+                <a:cs typeface="游ゴシック"/>
+              </a:rPr>
+              <a:t>【アルデヒドが多かった（必要条件）】 </a:t>
+            </a:r>
+            <a:r>
+              <a:rPr sz="1150">
+                <a:solidFill>
+                  <a:srgbClr val="222222"/>
+                </a:solidFill>
+                <a:latin typeface="游ゴシック"/>
+                <a:ea typeface="游ゴシック"/>
+                <a:cs typeface="游ゴシック"/>
+              </a:rPr>
+              <a:t>触媒選択性低下でA-ALD・F-ALDが増加（A-ALD/EO=0.78kg/t、過去実績の上位）。種となるアルデヒドの絶対量が多かった。</a:t>
+            </a:r>
+          </a:p>
+          <a:p>
+            <a:r>
+              <a:rPr sz="1150" b="1">
+                <a:solidFill>
+                  <a:srgbClr val="005BAB"/>
+                </a:solidFill>
+                <a:latin typeface="游ゴシック"/>
+                <a:ea typeface="游ゴシック"/>
+                <a:cs typeface="游ゴシック"/>
+              </a:rPr>
+              <a:t>→ 触媒交換で除去</a:t>
+            </a:r>
+          </a:p>
+        </p:txBody>
+      </p:sp>
+      <p:sp>
+        <p:nvSpPr>
+          <p:cNvPr id="5" name="Rounded Rectangle 4"/>
+          <p:cNvSpPr/>
+          <p:nvPr/>
+        </p:nvSpPr>
+        <p:spPr>
+          <a:xfrm>
+            <a:off x="548640" y="2935224"/>
+            <a:ext cx="11064240" cy="960120"/>
+          </a:xfrm>
+          <a:prstGeom prst="roundRect">
+            <a:avLst/>
+          </a:prstGeom>
+          <a:solidFill>
+            <a:srgbClr val="EBEFF2"/>
+          </a:solidFill>
+          <a:ln w="12700">
+            <a:solidFill>
+              <a:srgbClr val="C9D2D8"/>
+            </a:solidFill>
+          </a:ln>
+          <a:effectLst/>
+        </p:spPr>
+        <p:style>
+          <a:lnRef idx="1">
+            <a:schemeClr val="accent1"/>
+          </a:lnRef>
+          <a:fillRef idx="3">
+            <a:schemeClr val="accent1"/>
+          </a:fillRef>
+          <a:effectRef idx="2">
+            <a:schemeClr val="accent1"/>
+          </a:effectRef>
+          <a:fontRef idx="minor">
+            <a:schemeClr val="lt1"/>
+          </a:fontRef>
+        </p:style>
+        <p:txBody>
+          <a:bodyPr rtlCol="0" anchor="ctr" wrap="square" lIns="128016"/>
+          <a:lstStyle/>
+          <a:p>
+            <a:pPr algn="ctr"/>
+            <a:r>
+              <a:rPr sz="1300" b="1">
+                <a:solidFill>
+                  <a:srgbClr val="003F7E"/>
+                </a:solidFill>
+                <a:latin typeface="游ゴシック"/>
+                <a:ea typeface="游ゴシック"/>
+                <a:cs typeface="游ゴシック"/>
+              </a:rPr>
+              <a:t>【水分が少ない条件だった（促進）】 </a:t>
+            </a:r>
+            <a:r>
+              <a:rPr sz="1150">
+                <a:solidFill>
+                  <a:srgbClr val="222222"/>
+                </a:solidFill>
+                <a:latin typeface="游ゴシック"/>
+                <a:ea typeface="游ゴシック"/>
+                <a:cs typeface="游ゴシック"/>
+              </a:rPr>
+              <a:t>脱水・縮合は水があると進みにくい平衡反応。脱水塔ボトムが低水分で縮合が進みやすかった。</a:t>
+            </a:r>
+          </a:p>
+          <a:p>
+            <a:r>
+              <a:rPr sz="1150" b="1">
+                <a:solidFill>
+                  <a:srgbClr val="005BAB"/>
+                </a:solidFill>
+                <a:latin typeface="游ゴシック"/>
+                <a:ea typeface="游ゴシック"/>
+                <a:cs typeface="游ゴシック"/>
+              </a:rPr>
+              <a:t>→ 水分管理で確認</a:t>
+            </a:r>
+          </a:p>
+        </p:txBody>
+      </p:sp>
+      <p:sp>
+        <p:nvSpPr>
+          <p:cNvPr id="6" name="Rounded Rectangle 5"/>
+          <p:cNvSpPr/>
+          <p:nvPr/>
+        </p:nvSpPr>
+        <p:spPr>
+          <a:xfrm>
+            <a:off x="548640" y="3995928"/>
+            <a:ext cx="11064240" cy="960120"/>
+          </a:xfrm>
+          <a:prstGeom prst="roundRect">
+            <a:avLst/>
+          </a:prstGeom>
+          <a:solidFill>
+            <a:srgbClr val="EBEFF2"/>
+          </a:solidFill>
+          <a:ln w="12700">
+            <a:solidFill>
+              <a:srgbClr val="C9D2D8"/>
+            </a:solidFill>
+          </a:ln>
+          <a:effectLst/>
+        </p:spPr>
+        <p:style>
+          <a:lnRef idx="1">
+            <a:schemeClr val="accent1"/>
+          </a:lnRef>
+          <a:fillRef idx="3">
+            <a:schemeClr val="accent1"/>
+          </a:fillRef>
+          <a:effectRef idx="2">
+            <a:schemeClr val="accent1"/>
+          </a:effectRef>
+          <a:fontRef idx="minor">
+            <a:schemeClr val="lt1"/>
+          </a:fontRef>
+        </p:style>
+        <p:txBody>
+          <a:bodyPr rtlCol="0" anchor="ctr" wrap="square" lIns="128016"/>
+          <a:lstStyle/>
+          <a:p>
+            <a:pPr algn="ctr"/>
+            <a:r>
+              <a:rPr sz="1300" b="1">
+                <a:solidFill>
+                  <a:srgbClr val="003F7E"/>
+                </a:solidFill>
+                <a:latin typeface="游ゴシック"/>
+                <a:ea typeface="游ゴシック"/>
+                <a:cs typeface="游ゴシック"/>
+              </a:rPr>
+              <a:t>【塩基条件（苛性ソーダ）が後押し（促進）】 </a:t>
+            </a:r>
+            <a:r>
+              <a:rPr sz="1150">
+                <a:solidFill>
+                  <a:srgbClr val="222222"/>
+                </a:solidFill>
+                <a:latin typeface="游ゴシック"/>
+                <a:ea typeface="游ゴシック"/>
+                <a:cs typeface="游ゴシック"/>
+              </a:rPr>
+              <a:t>NaOHの塩基がアルドール縮合を促進する側に働いた（NaOH→リン酸Na切替で330nm低下と整合）。</a:t>
+            </a:r>
+          </a:p>
+          <a:p>
+            <a:r>
+              <a:rPr sz="1150" b="1">
+                <a:solidFill>
+                  <a:srgbClr val="005BAB"/>
+                </a:solidFill>
+                <a:latin typeface="游ゴシック"/>
+                <a:ea typeface="游ゴシック"/>
+                <a:cs typeface="游ゴシック"/>
+              </a:rPr>
+              <a:t>→ SU時はNaOH非投入</a:t>
+            </a:r>
+          </a:p>
+        </p:txBody>
+      </p:sp>
+      <p:sp>
+        <p:nvSpPr>
+          <p:cNvPr id="7" name="Rounded Rectangle 6"/>
+          <p:cNvSpPr/>
+          <p:nvPr/>
+        </p:nvSpPr>
+        <p:spPr>
+          <a:xfrm>
+            <a:off x="548640" y="5056632"/>
+            <a:ext cx="11064240" cy="960120"/>
+          </a:xfrm>
+          <a:prstGeom prst="roundRect">
+            <a:avLst/>
+          </a:prstGeom>
+          <a:solidFill>
+            <a:srgbClr val="EBEFF2"/>
+          </a:solidFill>
+          <a:ln w="12700">
+            <a:solidFill>
+              <a:srgbClr val="C9D2D8"/>
+            </a:solidFill>
+          </a:ln>
+          <a:effectLst/>
+        </p:spPr>
+        <p:style>
+          <a:lnRef idx="1">
+            <a:schemeClr val="accent1"/>
+          </a:lnRef>
+          <a:fillRef idx="3">
+            <a:schemeClr val="accent1"/>
+          </a:fillRef>
+          <a:effectRef idx="2">
+            <a:schemeClr val="accent1"/>
+          </a:effectRef>
+          <a:fontRef idx="minor">
+            <a:schemeClr val="lt1"/>
+          </a:fontRef>
+        </p:style>
+        <p:txBody>
+          <a:bodyPr rtlCol="0" anchor="ctr" wrap="square" lIns="128016"/>
+          <a:lstStyle/>
+          <a:p>
+            <a:pPr algn="ctr"/>
+            <a:r>
+              <a:rPr sz="1300" b="1">
+                <a:solidFill>
+                  <a:srgbClr val="003F7E"/>
+                </a:solidFill>
+                <a:latin typeface="游ゴシック"/>
+                <a:ea typeface="游ゴシック"/>
+                <a:cs typeface="游ゴシック"/>
+              </a:rPr>
+              <a:t>【DEG留分には樹脂（IER）が無い（DEG特有・除去機構の欠如）】 </a:t>
+            </a:r>
+            <a:r>
+              <a:rPr sz="1150">
+                <a:solidFill>
+                  <a:srgbClr val="222222"/>
+                </a:solidFill>
+                <a:latin typeface="游ゴシック"/>
+                <a:ea typeface="游ゴシック"/>
+                <a:cs typeface="游ゴシック"/>
+              </a:rPr>
+              <a:t>MEG・TEGはイオン交換樹脂で前駆体を除去して製品を安定化できるが、DEG留分には樹脂が無く前駆体がそのまま製品に持ち込まれる。</a:t>
+            </a:r>
+          </a:p>
+          <a:p>
+            <a:r>
+              <a:rPr sz="1150" b="1">
+                <a:solidFill>
+                  <a:srgbClr val="005BAB"/>
+                </a:solidFill>
+                <a:latin typeface="游ゴシック"/>
+                <a:ea typeface="游ゴシック"/>
+                <a:cs typeface="游ゴシック"/>
+              </a:rPr>
+              <a:t>→ 出口でDEGラインIERを検討</a:t>
+            </a:r>
+          </a:p>
+        </p:txBody>
+      </p:sp>
     </p:spTree>
   </p:cSld>
   <p:clrMapOvr>
@@ -17555,7 +17126,7 @@
                 <a:ea typeface="游ゴシック"/>
                 <a:cs typeface="游ゴシック"/>
               </a:rPr>
-              <a:t>なぜ今回だけ起きたか（条件の重なり）</a:t>
+              <a:t>設備（鉄サビ）は色相の主因ではない</a:t>
             </a:r>
           </a:p>
         </p:txBody>
@@ -17568,8 +17139,8 @@
         </p:nvSpPr>
         <p:spPr>
           <a:xfrm>
-            <a:off x="548640" y="1325880"/>
-            <a:ext cx="11064240" cy="457200"/>
+            <a:off x="548640" y="1371600"/>
+            <a:ext cx="11064240" cy="4937760"/>
           </a:xfrm>
           <a:prstGeom prst="rect">
             <a:avLst/>
@@ -17587,68 +17158,74 @@
                 <a:spcPts val="0"/>
               </a:spcBef>
               <a:spcAft>
-                <a:spcPts val="400"/>
+                <a:spcPts val="1100"/>
               </a:spcAft>
             </a:pPr>
             <a:r>
-              <a:rPr sz="1250" b="0">
+              <a:rPr sz="1350" b="0">
                 <a:solidFill>
-                  <a:srgbClr val="666666"/>
+                  <a:srgbClr val="222222"/>
                 </a:solidFill>
                 <a:latin typeface="游ゴシック"/>
                 <a:ea typeface="游ゴシック"/>
                 <a:cs typeface="游ゴシック"/>
               </a:rPr>
-              <a:t>過去にもアルデヒドが高い時期はあったが、今回は反応させてしまう条件がそろった。</a:t>
-            </a:r>
-          </a:p>
-        </p:txBody>
-      </p:sp>
-      <p:sp>
-        <p:nvSpPr>
-          <p:cNvPr id="4" name="Rounded Rectangle 3"/>
-          <p:cNvSpPr/>
-          <p:nvPr/>
-        </p:nvSpPr>
-        <p:spPr>
-          <a:xfrm>
-            <a:off x="548640" y="1874519"/>
-            <a:ext cx="11064240" cy="960120"/>
-          </a:xfrm>
-          <a:prstGeom prst="roundRect">
-            <a:avLst/>
-          </a:prstGeom>
-          <a:solidFill>
-            <a:srgbClr val="EBEFF2"/>
-          </a:solidFill>
-          <a:ln w="12700">
-            <a:solidFill>
-              <a:srgbClr val="C9D2D8"/>
-            </a:solidFill>
-          </a:ln>
-          <a:effectLst/>
-        </p:spPr>
-        <p:style>
-          <a:lnRef idx="1">
-            <a:schemeClr val="accent1"/>
-          </a:lnRef>
-          <a:fillRef idx="3">
-            <a:schemeClr val="accent1"/>
-          </a:fillRef>
-          <a:effectRef idx="2">
-            <a:schemeClr val="accent1"/>
-          </a:effectRef>
-          <a:fontRef idx="minor">
-            <a:schemeClr val="lt1"/>
-          </a:fontRef>
-        </p:style>
-        <p:txBody>
-          <a:bodyPr rtlCol="0" anchor="ctr" wrap="square" lIns="128016"/>
-          <a:lstStyle/>
-          <a:p>
-            <a:pPr algn="ctr"/>
-            <a:r>
-              <a:rPr sz="1300" b="1">
+              <a:t>・C-1503トップに黒色付着物（XRFでほぼ鉄＝サビ）。水抽出からギ酸・グリコール酸を検出＝局所で有機酸が生じ腐食したものと整合。</a:t>
+            </a:r>
+          </a:p>
+          <a:p>
+            <a:pPr>
+              <a:spcBef>
+                <a:spcPts val="0"/>
+              </a:spcBef>
+              <a:spcAft>
+                <a:spcPts val="1100"/>
+              </a:spcAft>
+            </a:pPr>
+            <a:r>
+              <a:rPr sz="1350" b="0">
+                <a:solidFill>
+                  <a:srgbClr val="222222"/>
+                </a:solidFill>
+                <a:latin typeface="游ゴシック"/>
+                <a:ea typeface="游ゴシック"/>
+                <a:cs typeface="游ゴシック"/>
+              </a:rPr>
+              <a:t>・この付着物をDEGに共存させてもλmax380nmが出るのみで、実機の450nmは再現しない。蒸留DEGの短時間保管でも450nmは出ない。</a:t>
+            </a:r>
+          </a:p>
+          <a:p>
+            <a:pPr>
+              <a:spcBef>
+                <a:spcPts val="0"/>
+              </a:spcBef>
+              <a:spcAft>
+                <a:spcPts val="1100"/>
+              </a:spcAft>
+            </a:pPr>
+            <a:r>
+              <a:rPr sz="1350" b="0">
+                <a:solidFill>
+                  <a:srgbClr val="222222"/>
+                </a:solidFill>
+                <a:latin typeface="游ゴシック"/>
+                <a:ea typeface="游ゴシック"/>
+                <a:cs typeface="游ゴシック"/>
+              </a:rPr>
+              <a:t>・T-555タンク内の異物も鉄サビだが、残液は5/18時点のAPHA30から上昇していない。</a:t>
+            </a:r>
+          </a:p>
+          <a:p>
+            <a:pPr>
+              <a:spcBef>
+                <a:spcPts val="0"/>
+              </a:spcBef>
+              <a:spcAft>
+                <a:spcPts val="1100"/>
+              </a:spcAft>
+            </a:pPr>
+            <a:r>
+              <a:rPr sz="1350" b="1">
                 <a:solidFill>
                   <a:srgbClr val="003F7E"/>
                 </a:solidFill>
@@ -17656,274 +17233,7 @@
                 <a:ea typeface="游ゴシック"/>
                 <a:cs typeface="游ゴシック"/>
               </a:rPr>
-              <a:t>【アルデヒドが多かった（必要条件）】 </a:t>
-            </a:r>
-            <a:r>
-              <a:rPr sz="1150">
-                <a:solidFill>
-                  <a:srgbClr val="222222"/>
-                </a:solidFill>
-                <a:latin typeface="游ゴシック"/>
-                <a:ea typeface="游ゴシック"/>
-                <a:cs typeface="游ゴシック"/>
-              </a:rPr>
-              <a:t>触媒選択性低下でA-ALD・F-ALDが増加（A-ALD/EO=0.78kg/t、過去実績の上位）。種となるアルデヒドの絶対量が多かった。</a:t>
-            </a:r>
-          </a:p>
-          <a:p>
-            <a:r>
-              <a:rPr sz="1150" b="1">
-                <a:solidFill>
-                  <a:srgbClr val="005BAB"/>
-                </a:solidFill>
-                <a:latin typeface="游ゴシック"/>
-                <a:ea typeface="游ゴシック"/>
-                <a:cs typeface="游ゴシック"/>
-              </a:rPr>
-              <a:t>→ 触媒交換で除去</a:t>
-            </a:r>
-          </a:p>
-        </p:txBody>
-      </p:sp>
-      <p:sp>
-        <p:nvSpPr>
-          <p:cNvPr id="5" name="Rounded Rectangle 4"/>
-          <p:cNvSpPr/>
-          <p:nvPr/>
-        </p:nvSpPr>
-        <p:spPr>
-          <a:xfrm>
-            <a:off x="548640" y="2935224"/>
-            <a:ext cx="11064240" cy="960120"/>
-          </a:xfrm>
-          <a:prstGeom prst="roundRect">
-            <a:avLst/>
-          </a:prstGeom>
-          <a:solidFill>
-            <a:srgbClr val="EBEFF2"/>
-          </a:solidFill>
-          <a:ln w="12700">
-            <a:solidFill>
-              <a:srgbClr val="C9D2D8"/>
-            </a:solidFill>
-          </a:ln>
-          <a:effectLst/>
-        </p:spPr>
-        <p:style>
-          <a:lnRef idx="1">
-            <a:schemeClr val="accent1"/>
-          </a:lnRef>
-          <a:fillRef idx="3">
-            <a:schemeClr val="accent1"/>
-          </a:fillRef>
-          <a:effectRef idx="2">
-            <a:schemeClr val="accent1"/>
-          </a:effectRef>
-          <a:fontRef idx="minor">
-            <a:schemeClr val="lt1"/>
-          </a:fontRef>
-        </p:style>
-        <p:txBody>
-          <a:bodyPr rtlCol="0" anchor="ctr" wrap="square" lIns="128016"/>
-          <a:lstStyle/>
-          <a:p>
-            <a:pPr algn="ctr"/>
-            <a:r>
-              <a:rPr sz="1300" b="1">
-                <a:solidFill>
-                  <a:srgbClr val="003F7E"/>
-                </a:solidFill>
-                <a:latin typeface="游ゴシック"/>
-                <a:ea typeface="游ゴシック"/>
-                <a:cs typeface="游ゴシック"/>
-              </a:rPr>
-              <a:t>【水分が少ない条件だった（促進）】 </a:t>
-            </a:r>
-            <a:r>
-              <a:rPr sz="1150">
-                <a:solidFill>
-                  <a:srgbClr val="222222"/>
-                </a:solidFill>
-                <a:latin typeface="游ゴシック"/>
-                <a:ea typeface="游ゴシック"/>
-                <a:cs typeface="游ゴシック"/>
-              </a:rPr>
-              <a:t>脱水・縮合は水があると進みにくい平衡反応。脱水塔ボトムが低水分で縮合が進みやすかった。</a:t>
-            </a:r>
-          </a:p>
-          <a:p>
-            <a:r>
-              <a:rPr sz="1150" b="1">
-                <a:solidFill>
-                  <a:srgbClr val="005BAB"/>
-                </a:solidFill>
-                <a:latin typeface="游ゴシック"/>
-                <a:ea typeface="游ゴシック"/>
-                <a:cs typeface="游ゴシック"/>
-              </a:rPr>
-              <a:t>→ 水分管理で確認</a:t>
-            </a:r>
-          </a:p>
-        </p:txBody>
-      </p:sp>
-      <p:sp>
-        <p:nvSpPr>
-          <p:cNvPr id="6" name="Rounded Rectangle 5"/>
-          <p:cNvSpPr/>
-          <p:nvPr/>
-        </p:nvSpPr>
-        <p:spPr>
-          <a:xfrm>
-            <a:off x="548640" y="3995928"/>
-            <a:ext cx="11064240" cy="960120"/>
-          </a:xfrm>
-          <a:prstGeom prst="roundRect">
-            <a:avLst/>
-          </a:prstGeom>
-          <a:solidFill>
-            <a:srgbClr val="EBEFF2"/>
-          </a:solidFill>
-          <a:ln w="12700">
-            <a:solidFill>
-              <a:srgbClr val="C9D2D8"/>
-            </a:solidFill>
-          </a:ln>
-          <a:effectLst/>
-        </p:spPr>
-        <p:style>
-          <a:lnRef idx="1">
-            <a:schemeClr val="accent1"/>
-          </a:lnRef>
-          <a:fillRef idx="3">
-            <a:schemeClr val="accent1"/>
-          </a:fillRef>
-          <a:effectRef idx="2">
-            <a:schemeClr val="accent1"/>
-          </a:effectRef>
-          <a:fontRef idx="minor">
-            <a:schemeClr val="lt1"/>
-          </a:fontRef>
-        </p:style>
-        <p:txBody>
-          <a:bodyPr rtlCol="0" anchor="ctr" wrap="square" lIns="128016"/>
-          <a:lstStyle/>
-          <a:p>
-            <a:pPr algn="ctr"/>
-            <a:r>
-              <a:rPr sz="1300" b="1">
-                <a:solidFill>
-                  <a:srgbClr val="003F7E"/>
-                </a:solidFill>
-                <a:latin typeface="游ゴシック"/>
-                <a:ea typeface="游ゴシック"/>
-                <a:cs typeface="游ゴシック"/>
-              </a:rPr>
-              <a:t>【塩基条件（苛性ソーダ）が後押し（促進）】 </a:t>
-            </a:r>
-            <a:r>
-              <a:rPr sz="1150">
-                <a:solidFill>
-                  <a:srgbClr val="222222"/>
-                </a:solidFill>
-                <a:latin typeface="游ゴシック"/>
-                <a:ea typeface="游ゴシック"/>
-                <a:cs typeface="游ゴシック"/>
-              </a:rPr>
-              <a:t>NaOHの塩基がアルドール縮合を促進する側に働いた（NaOH→リン酸Na切替で330nm低下と整合）。</a:t>
-            </a:r>
-          </a:p>
-          <a:p>
-            <a:r>
-              <a:rPr sz="1150" b="1">
-                <a:solidFill>
-                  <a:srgbClr val="005BAB"/>
-                </a:solidFill>
-                <a:latin typeface="游ゴシック"/>
-                <a:ea typeface="游ゴシック"/>
-                <a:cs typeface="游ゴシック"/>
-              </a:rPr>
-              <a:t>→ SU時はNaOH非投入</a:t>
-            </a:r>
-          </a:p>
-        </p:txBody>
-      </p:sp>
-      <p:sp>
-        <p:nvSpPr>
-          <p:cNvPr id="7" name="Rounded Rectangle 6"/>
-          <p:cNvSpPr/>
-          <p:nvPr/>
-        </p:nvSpPr>
-        <p:spPr>
-          <a:xfrm>
-            <a:off x="548640" y="5056632"/>
-            <a:ext cx="11064240" cy="960120"/>
-          </a:xfrm>
-          <a:prstGeom prst="roundRect">
-            <a:avLst/>
-          </a:prstGeom>
-          <a:solidFill>
-            <a:srgbClr val="EBEFF2"/>
-          </a:solidFill>
-          <a:ln w="12700">
-            <a:solidFill>
-              <a:srgbClr val="C9D2D8"/>
-            </a:solidFill>
-          </a:ln>
-          <a:effectLst/>
-        </p:spPr>
-        <p:style>
-          <a:lnRef idx="1">
-            <a:schemeClr val="accent1"/>
-          </a:lnRef>
-          <a:fillRef idx="3">
-            <a:schemeClr val="accent1"/>
-          </a:fillRef>
-          <a:effectRef idx="2">
-            <a:schemeClr val="accent1"/>
-          </a:effectRef>
-          <a:fontRef idx="minor">
-            <a:schemeClr val="lt1"/>
-          </a:fontRef>
-        </p:style>
-        <p:txBody>
-          <a:bodyPr rtlCol="0" anchor="ctr" wrap="square" lIns="128016"/>
-          <a:lstStyle/>
-          <a:p>
-            <a:pPr algn="ctr"/>
-            <a:r>
-              <a:rPr sz="1300" b="1">
-                <a:solidFill>
-                  <a:srgbClr val="003F7E"/>
-                </a:solidFill>
-                <a:latin typeface="游ゴシック"/>
-                <a:ea typeface="游ゴシック"/>
-                <a:cs typeface="游ゴシック"/>
-              </a:rPr>
-              <a:t>【DEG留分には樹脂（IER）が無い（DEG特有・除去機構の欠如）】 </a:t>
-            </a:r>
-            <a:r>
-              <a:rPr sz="1150">
-                <a:solidFill>
-                  <a:srgbClr val="222222"/>
-                </a:solidFill>
-                <a:latin typeface="游ゴシック"/>
-                <a:ea typeface="游ゴシック"/>
-                <a:cs typeface="游ゴシック"/>
-              </a:rPr>
-              <a:t>MEG・TEGはイオン交換樹脂で前駆体を除去して製品を安定化できるが、DEG留分には樹脂が無く前駆体がそのまま製品に持ち込まれる。</a:t>
-            </a:r>
-          </a:p>
-          <a:p>
-            <a:r>
-              <a:rPr sz="1150" b="1">
-                <a:solidFill>
-                  <a:srgbClr val="005BAB"/>
-                </a:solidFill>
-                <a:latin typeface="游ゴシック"/>
-                <a:ea typeface="游ゴシック"/>
-                <a:cs typeface="游ゴシック"/>
-              </a:rPr>
-              <a:t>→ 出口でDEGラインIERを検討</a:t>
+              <a:t>・以上より、鉄サビ・付着物は色相（450nm）を進める触媒ではなく、寄与は局所の腐食・380nmにとどまる（主因ではない）。保管試験・残液分析という実測で判断している。金属が無くてもアルデヒドとpHだけで着色は説明できる。付着物は予防保全として洗浄する。</a:t>
             </a:r>
           </a:p>
         </p:txBody>
@@ -17937,160 +17247,6 @@
 </file>
 
 <file path=ppt/slides/slide16.xml><?xml version="1.0" encoding="utf-8"?>
-<p:sld xmlns:a="http://schemas.openxmlformats.org/drawingml/2006/main" xmlns:p="http://schemas.openxmlformats.org/presentationml/2006/main" xmlns:r="http://schemas.openxmlformats.org/officeDocument/2006/relationships">
-  <p:cSld>
-    <p:spTree>
-      <p:nvGrpSpPr>
-        <p:cNvPr id="1" name=""/>
-        <p:cNvGrpSpPr/>
-        <p:nvPr/>
-      </p:nvGrpSpPr>
-      <p:grpSpPr/>
-      <p:sp>
-        <p:nvSpPr>
-          <p:cNvPr id="2" name="Title 1"/>
-          <p:cNvSpPr>
-            <a:spLocks noGrp="1"/>
-          </p:cNvSpPr>
-          <p:nvPr>
-            <p:ph type="title"/>
-          </p:nvPr>
-        </p:nvSpPr>
-        <p:spPr/>
-        <p:txBody>
-          <a:bodyPr/>
-          <a:lstStyle/>
-          <a:p>
-            <a:r>
-              <a:rPr sz="2200" b="1">
-                <a:solidFill>
-                  <a:srgbClr val="003F7E"/>
-                </a:solidFill>
-                <a:latin typeface="游ゴシック"/>
-                <a:ea typeface="游ゴシック"/>
-                <a:cs typeface="游ゴシック"/>
-              </a:rPr>
-              <a:t>設備（鉄サビ）は色相の主因ではない</a:t>
-            </a:r>
-          </a:p>
-        </p:txBody>
-      </p:sp>
-      <p:sp>
-        <p:nvSpPr>
-          <p:cNvPr id="3" name="TextBox 2"/>
-          <p:cNvSpPr txBox="1"/>
-          <p:nvPr/>
-        </p:nvSpPr>
-        <p:spPr>
-          <a:xfrm>
-            <a:off x="548640" y="1371600"/>
-            <a:ext cx="11064240" cy="4937760"/>
-          </a:xfrm>
-          <a:prstGeom prst="rect">
-            <a:avLst/>
-          </a:prstGeom>
-          <a:noFill/>
-        </p:spPr>
-        <p:txBody>
-          <a:bodyPr wrap="square">
-            <a:spAutoFit/>
-          </a:bodyPr>
-          <a:lstStyle/>
-          <a:p>
-            <a:pPr>
-              <a:spcBef>
-                <a:spcPts val="0"/>
-              </a:spcBef>
-              <a:spcAft>
-                <a:spcPts val="1100"/>
-              </a:spcAft>
-            </a:pPr>
-            <a:r>
-              <a:rPr sz="1350" b="0">
-                <a:solidFill>
-                  <a:srgbClr val="222222"/>
-                </a:solidFill>
-                <a:latin typeface="游ゴシック"/>
-                <a:ea typeface="游ゴシック"/>
-                <a:cs typeface="游ゴシック"/>
-              </a:rPr>
-              <a:t>・C-1503トップに黒色付着物（XRFでほぼ鉄＝サビ）。水抽出からギ酸・グリコール酸を検出＝局所で有機酸が生じ腐食したものと整合。</a:t>
-            </a:r>
-          </a:p>
-          <a:p>
-            <a:pPr>
-              <a:spcBef>
-                <a:spcPts val="0"/>
-              </a:spcBef>
-              <a:spcAft>
-                <a:spcPts val="1100"/>
-              </a:spcAft>
-            </a:pPr>
-            <a:r>
-              <a:rPr sz="1350" b="0">
-                <a:solidFill>
-                  <a:srgbClr val="222222"/>
-                </a:solidFill>
-                <a:latin typeface="游ゴシック"/>
-                <a:ea typeface="游ゴシック"/>
-                <a:cs typeface="游ゴシック"/>
-              </a:rPr>
-              <a:t>・この付着物をDEGに共存させてもλmax380nmが出るのみで、実機の450nmは再現しない。蒸留DEGの短時間保管でも450nmは出ない。</a:t>
-            </a:r>
-          </a:p>
-          <a:p>
-            <a:pPr>
-              <a:spcBef>
-                <a:spcPts val="0"/>
-              </a:spcBef>
-              <a:spcAft>
-                <a:spcPts val="1100"/>
-              </a:spcAft>
-            </a:pPr>
-            <a:r>
-              <a:rPr sz="1350" b="0">
-                <a:solidFill>
-                  <a:srgbClr val="222222"/>
-                </a:solidFill>
-                <a:latin typeface="游ゴシック"/>
-                <a:ea typeface="游ゴシック"/>
-                <a:cs typeface="游ゴシック"/>
-              </a:rPr>
-              <a:t>・T-555タンク内の異物も鉄サビだが、残液は5/18時点のAPHA30から上昇していない。</a:t>
-            </a:r>
-          </a:p>
-          <a:p>
-            <a:pPr>
-              <a:spcBef>
-                <a:spcPts val="0"/>
-              </a:spcBef>
-              <a:spcAft>
-                <a:spcPts val="1100"/>
-              </a:spcAft>
-            </a:pPr>
-            <a:r>
-              <a:rPr sz="1350" b="1">
-                <a:solidFill>
-                  <a:srgbClr val="003F7E"/>
-                </a:solidFill>
-                <a:latin typeface="游ゴシック"/>
-                <a:ea typeface="游ゴシック"/>
-                <a:cs typeface="游ゴシック"/>
-              </a:rPr>
-              <a:t>・以上より、鉄サビ・付着物は色相（450nm）を進める触媒ではなく、寄与は局所の腐食・380nmにとどまる（主因ではない）。保管試験・残液分析という実測で判断している。金属が無くてもアルデヒドとpHだけで着色は説明できる。付着物は予防保全として洗浄する。</a:t>
-            </a:r>
-          </a:p>
-        </p:txBody>
-      </p:sp>
-    </p:spTree>
-  </p:cSld>
-  <p:clrMapOvr>
-    <a:masterClrMapping/>
-  </p:clrMapOvr>
-</p:sld>
-</file>
-
-<file path=ppt/slides/slide17.xml><?xml version="1.0" encoding="utf-8"?>
 <p:sld xmlns:a="http://schemas.openxmlformats.org/drawingml/2006/main" xmlns:p="http://schemas.openxmlformats.org/presentationml/2006/main" xmlns:r="http://schemas.openxmlformats.org/officeDocument/2006/relationships">
   <p:cSld>
     <p:spTree>
@@ -18607,6 +17763,317 @@
 </p:sld>
 </file>
 
+<file path=ppt/slides/slide17.xml><?xml version="1.0" encoding="utf-8"?>
+<p:sld xmlns:a="http://schemas.openxmlformats.org/drawingml/2006/main" xmlns:p="http://schemas.openxmlformats.org/presentationml/2006/main" xmlns:r="http://schemas.openxmlformats.org/officeDocument/2006/relationships">
+  <p:cSld>
+    <p:spTree>
+      <p:nvGrpSpPr>
+        <p:cNvPr id="1" name=""/>
+        <p:cNvGrpSpPr/>
+        <p:nvPr/>
+      </p:nvGrpSpPr>
+      <p:grpSpPr/>
+      <p:sp>
+        <p:nvSpPr>
+          <p:cNvPr id="2" name="Title 1"/>
+          <p:cNvSpPr>
+            <a:spLocks noGrp="1"/>
+          </p:cNvSpPr>
+          <p:nvPr>
+            <p:ph type="title"/>
+          </p:nvPr>
+        </p:nvSpPr>
+        <p:spPr/>
+        <p:txBody>
+          <a:bodyPr/>
+          <a:lstStyle/>
+          <a:p>
+            <a:r>
+              <a:rPr sz="2200" b="1">
+                <a:solidFill>
+                  <a:srgbClr val="003F7E"/>
+                </a:solidFill>
+                <a:latin typeface="游ゴシック"/>
+                <a:ea typeface="游ゴシック"/>
+                <a:cs typeface="游ゴシック"/>
+              </a:rPr>
+              <a:t>対応（再発防止・スタートアップ運転条件）</a:t>
+            </a:r>
+          </a:p>
+        </p:txBody>
+      </p:sp>
+      <p:sp>
+        <p:nvSpPr>
+          <p:cNvPr id="3" name="TextBox 2"/>
+          <p:cNvSpPr txBox="1"/>
+          <p:nvPr/>
+        </p:nvSpPr>
+        <p:spPr>
+          <a:xfrm>
+            <a:off x="548640" y="1371600"/>
+            <a:ext cx="11064240" cy="4937760"/>
+          </a:xfrm>
+          <a:prstGeom prst="rect">
+            <a:avLst/>
+          </a:prstGeom>
+          <a:noFill/>
+        </p:spPr>
+        <p:txBody>
+          <a:bodyPr wrap="square">
+            <a:spAutoFit/>
+          </a:bodyPr>
+          <a:lstStyle/>
+          <a:p/>
+          <a:p>
+            <a:pPr>
+              <a:spcAft>
+                <a:spcPts val="800"/>
+              </a:spcAft>
+            </a:pPr>
+            <a:r>
+              <a:rPr sz="1300" b="1">
+                <a:solidFill>
+                  <a:srgbClr val="003F7E"/>
+                </a:solidFill>
+                <a:latin typeface="游ゴシック"/>
+                <a:ea typeface="游ゴシック"/>
+                <a:cs typeface="游ゴシック"/>
+              </a:rPr>
+              <a:t>【触媒交換（原因除去）】 </a:t>
+            </a:r>
+            <a:r>
+              <a:rPr sz="1200">
+                <a:solidFill>
+                  <a:srgbClr val="222222"/>
+                </a:solidFill>
+                <a:latin typeface="游ゴシック"/>
+                <a:ea typeface="游ゴシック"/>
+                <a:cs typeface="游ゴシック"/>
+              </a:rPr>
+              <a:t>計画停止で触媒交換済。アルデヒド類の生成を抑える。 </a:t>
+            </a:r>
+            <a:r>
+              <a:rPr sz="1150" b="1">
+                <a:solidFill>
+                  <a:srgbClr val="005BAB"/>
+                </a:solidFill>
+                <a:latin typeface="游ゴシック"/>
+                <a:ea typeface="游ゴシック"/>
+                <a:cs typeface="游ゴシック"/>
+              </a:rPr>
+              <a:t>（実施済）</a:t>
+            </a:r>
+          </a:p>
+          <a:p>
+            <a:pPr>
+              <a:spcAft>
+                <a:spcPts val="800"/>
+              </a:spcAft>
+            </a:pPr>
+            <a:r>
+              <a:rPr sz="1300" b="1">
+                <a:solidFill>
+                  <a:srgbClr val="003F7E"/>
+                </a:solidFill>
+                <a:latin typeface="游ゴシック"/>
+                <a:ea typeface="游ゴシック"/>
+                <a:cs typeface="游ゴシック"/>
+              </a:rPr>
+              <a:t>【タンク・配管の洗浄】 </a:t>
+            </a:r>
+            <a:r>
+              <a:rPr sz="1200">
+                <a:solidFill>
+                  <a:srgbClr val="222222"/>
+                </a:solidFill>
+                <a:latin typeface="游ゴシック"/>
+                <a:ea typeface="游ゴシック"/>
+                <a:cs typeface="游ゴシック"/>
+              </a:rPr>
+              <a:t>色相上昇を確認したタンク等を開放・洗浄し付着物を除去、保管設備を健全化。 </a:t>
+            </a:r>
+            <a:r>
+              <a:rPr sz="1150" b="1">
+                <a:solidFill>
+                  <a:srgbClr val="005BAB"/>
+                </a:solidFill>
+                <a:latin typeface="游ゴシック"/>
+                <a:ea typeface="游ゴシック"/>
+                <a:cs typeface="游ゴシック"/>
+              </a:rPr>
+              <a:t>（実施済）</a:t>
+            </a:r>
+          </a:p>
+          <a:p>
+            <a:pPr>
+              <a:spcAft>
+                <a:spcPts val="800"/>
+              </a:spcAft>
+            </a:pPr>
+            <a:r>
+              <a:rPr sz="1300" b="1">
+                <a:solidFill>
+                  <a:srgbClr val="003F7E"/>
+                </a:solidFill>
+                <a:latin typeface="游ゴシック"/>
+                <a:ea typeface="游ゴシック"/>
+                <a:cs typeface="游ゴシック"/>
+              </a:rPr>
+              <a:t>【苛性ソーダ（NaOH）】 </a:t>
+            </a:r>
+            <a:r>
+              <a:rPr sz="1200">
+                <a:solidFill>
+                  <a:srgbClr val="222222"/>
+                </a:solidFill>
+                <a:latin typeface="游ゴシック"/>
+                <a:ea typeface="游ゴシック"/>
+                <a:cs typeface="游ゴシック"/>
+              </a:rPr>
+              <a:t>スタートアップ時は投入しないベース。アルデヒドが多い局面ではアルドール縮合を促進し得るため、触媒交換後にアルデヒド低下を確認してから要否判断。 </a:t>
+            </a:r>
+            <a:r>
+              <a:rPr sz="1150" b="1">
+                <a:solidFill>
+                  <a:srgbClr val="005BAB"/>
+                </a:solidFill>
+                <a:latin typeface="游ゴシック"/>
+                <a:ea typeface="游ゴシック"/>
+                <a:cs typeface="游ゴシック"/>
+              </a:rPr>
+              <a:t>（方針）</a:t>
+            </a:r>
+          </a:p>
+          <a:p>
+            <a:pPr>
+              <a:spcAft>
+                <a:spcPts val="800"/>
+              </a:spcAft>
+            </a:pPr>
+            <a:r>
+              <a:rPr sz="1300" b="1">
+                <a:solidFill>
+                  <a:srgbClr val="003F7E"/>
+                </a:solidFill>
+                <a:latin typeface="游ゴシック"/>
+                <a:ea typeface="游ゴシック"/>
+                <a:cs typeface="游ゴシック"/>
+              </a:rPr>
+              <a:t>【MEG塔温度】 </a:t>
+            </a:r>
+            <a:r>
+              <a:rPr sz="1200">
+                <a:solidFill>
+                  <a:srgbClr val="222222"/>
+                </a:solidFill>
+                <a:latin typeface="游ゴシック"/>
+                <a:ea typeface="游ゴシック"/>
+                <a:cs typeface="游ゴシック"/>
+              </a:rPr>
+              <a:t>下げない方針。温度を下げるとアルデヒドが分解されず前駆体として下流に回り、かえって色相側に出る懸念があるため。 </a:t>
+            </a:r>
+            <a:r>
+              <a:rPr sz="1150" b="1">
+                <a:solidFill>
+                  <a:srgbClr val="005BAB"/>
+                </a:solidFill>
+                <a:latin typeface="游ゴシック"/>
+                <a:ea typeface="游ゴシック"/>
+                <a:cs typeface="游ゴシック"/>
+              </a:rPr>
+              <a:t>（方針）</a:t>
+            </a:r>
+          </a:p>
+          <a:p>
+            <a:pPr>
+              <a:spcAft>
+                <a:spcPts val="800"/>
+              </a:spcAft>
+            </a:pPr>
+            <a:r>
+              <a:rPr sz="1300" b="1">
+                <a:solidFill>
+                  <a:srgbClr val="003F7E"/>
+                </a:solidFill>
+                <a:latin typeface="游ゴシック"/>
+                <a:ea typeface="游ゴシック"/>
+                <a:cs typeface="游ゴシック"/>
+              </a:rPr>
+              <a:t>【リン酸ナトリウム（Na₃PO₄）】 </a:t>
+            </a:r>
+            <a:r>
+              <a:rPr sz="1200">
+                <a:solidFill>
+                  <a:srgbClr val="222222"/>
+                </a:solidFill>
+                <a:latin typeface="游ゴシック"/>
+                <a:ea typeface="游ゴシック"/>
+                <a:cs typeface="游ゴシック"/>
+              </a:rPr>
+              <a:t>保管中反応の緩和策。pH低下で縮合を抑える／金属を不活性化する効きがある（効き方は要検証）。置換（払い出しを伴う入替）とセットで運用。 </a:t>
+            </a:r>
+            <a:r>
+              <a:rPr sz="1150" b="1">
+                <a:solidFill>
+                  <a:srgbClr val="005BAB"/>
+                </a:solidFill>
+                <a:latin typeface="游ゴシック"/>
+                <a:ea typeface="游ゴシック"/>
+                <a:cs typeface="游ゴシック"/>
+              </a:rPr>
+              <a:t>（緩和・要検証）</a:t>
+            </a:r>
+          </a:p>
+          <a:p>
+            <a:pPr>
+              <a:spcAft>
+                <a:spcPts val="800"/>
+              </a:spcAft>
+            </a:pPr>
+            <a:r>
+              <a:rPr sz="1300" b="1">
+                <a:solidFill>
+                  <a:srgbClr val="003F7E"/>
+                </a:solidFill>
+                <a:latin typeface="游ゴシック"/>
+                <a:ea typeface="游ゴシック"/>
+                <a:cs typeface="游ゴシック"/>
+              </a:rPr>
+              <a:t>【出口（DEGラインのIER）】 </a:t>
+            </a:r>
+            <a:r>
+              <a:rPr sz="1200">
+                <a:solidFill>
+                  <a:srgbClr val="222222"/>
+                </a:solidFill>
+                <a:latin typeface="游ゴシック"/>
+                <a:ea typeface="游ゴシック"/>
+                <a:cs typeface="游ゴシック"/>
+              </a:rPr>
+              <a:t>前段で抑えきれない場合の出口戦略として、DEGラインへの樹脂設置を検討（実DEGの通液テストを予定）。 </a:t>
+            </a:r>
+            <a:r>
+              <a:rPr sz="1150" b="1">
+                <a:solidFill>
+                  <a:srgbClr val="005BAB"/>
+                </a:solidFill>
+                <a:latin typeface="游ゴシック"/>
+                <a:ea typeface="游ゴシック"/>
+                <a:cs typeface="游ゴシック"/>
+              </a:rPr>
+              <a:t>（検討中）</a:t>
+            </a:r>
+          </a:p>
+        </p:txBody>
+      </p:sp>
+    </p:spTree>
+  </p:cSld>
+  <p:clrMapOvr>
+    <a:masterClrMapping/>
+  </p:clrMapOvr>
+</p:sld>
+</file>
+
 <file path=ppt/slides/slide18.xml><?xml version="1.0" encoding="utf-8"?>
 <p:sld xmlns:a="http://schemas.openxmlformats.org/drawingml/2006/main" xmlns:p="http://schemas.openxmlformats.org/presentationml/2006/main" xmlns:r="http://schemas.openxmlformats.org/officeDocument/2006/relationships">
   <p:cSld>
@@ -18641,7 +18108,7 @@
                 <a:ea typeface="游ゴシック"/>
                 <a:cs typeface="游ゴシック"/>
               </a:rPr>
-              <a:t>対応（再発防止・スタートアップ運転条件）</a:t>
+              <a:t>出荷再開に向けた品質管理・早期判定</a:t>
             </a:r>
           </a:p>
         </p:txBody>
@@ -18667,26 +18134,17 @@
             <a:spAutoFit/>
           </a:bodyPr>
           <a:lstStyle/>
-          <a:p/>
           <a:p>
             <a:pPr>
+              <a:spcBef>
+                <a:spcPts val="0"/>
+              </a:spcBef>
               <a:spcAft>
-                <a:spcPts val="800"/>
+                <a:spcPts val="1000"/>
               </a:spcAft>
             </a:pPr>
             <a:r>
-              <a:rPr sz="1300" b="1">
-                <a:solidFill>
-                  <a:srgbClr val="003F7E"/>
-                </a:solidFill>
-                <a:latin typeface="游ゴシック"/>
-                <a:ea typeface="游ゴシック"/>
-                <a:cs typeface="游ゴシック"/>
-              </a:rPr>
-              <a:t>【触媒交換（原因除去）】 </a:t>
-            </a:r>
-            <a:r>
-              <a:rPr sz="1200">
+              <a:rPr sz="1300" b="0">
                 <a:solidFill>
                   <a:srgbClr val="222222"/>
                 </a:solidFill>
@@ -18694,39 +18152,20 @@
                 <a:ea typeface="游ゴシック"/>
                 <a:cs typeface="游ゴシック"/>
               </a:rPr>
-              <a:t>計画停止で触媒交換済。アルデヒド類の生成を抑える。 </a:t>
-            </a:r>
-            <a:r>
-              <a:rPr sz="1150" b="1">
-                <a:solidFill>
-                  <a:srgbClr val="005BAB"/>
-                </a:solidFill>
-                <a:latin typeface="游ゴシック"/>
-                <a:ea typeface="游ゴシック"/>
-                <a:cs typeface="游ゴシック"/>
-              </a:rPr>
-              <a:t>（実施済）</a:t>
+              <a:t>・再稼働後の初期流動品は、APHAを含む社内規格全項目で規格内を確認。</a:t>
             </a:r>
           </a:p>
           <a:p>
             <a:pPr>
+              <a:spcBef>
+                <a:spcPts val="0"/>
+              </a:spcBef>
               <a:spcAft>
-                <a:spcPts val="800"/>
+                <a:spcPts val="1000"/>
               </a:spcAft>
             </a:pPr>
             <a:r>
-              <a:rPr sz="1300" b="1">
-                <a:solidFill>
-                  <a:srgbClr val="003F7E"/>
-                </a:solidFill>
-                <a:latin typeface="游ゴシック"/>
-                <a:ea typeface="游ゴシック"/>
-                <a:cs typeface="游ゴシック"/>
-              </a:rPr>
-              <a:t>【タンク・配管の洗浄】 </a:t>
-            </a:r>
-            <a:r>
-              <a:rPr sz="1200">
+              <a:rPr sz="1300" b="0">
                 <a:solidFill>
                   <a:srgbClr val="222222"/>
                 </a:solidFill>
@@ -18734,39 +18173,20 @@
                 <a:ea typeface="游ゴシック"/>
                 <a:cs typeface="游ゴシック"/>
               </a:rPr>
-              <a:t>色相上昇を確認したタンク等を開放・洗浄し付着物を除去、保管設備を健全化。 </a:t>
-            </a:r>
-            <a:r>
-              <a:rPr sz="1150" b="1">
-                <a:solidFill>
-                  <a:srgbClr val="005BAB"/>
-                </a:solidFill>
-                <a:latin typeface="游ゴシック"/>
-                <a:ea typeface="游ゴシック"/>
-                <a:cs typeface="游ゴシック"/>
-              </a:rPr>
-              <a:t>（実施済）</a:t>
+              <a:t>・初期流動品はタンク保管中の色相・UVスペクトルの経時変化が無いことを確認してから出荷。</a:t>
             </a:r>
           </a:p>
           <a:p>
             <a:pPr>
+              <a:spcBef>
+                <a:spcPts val="0"/>
+              </a:spcBef>
               <a:spcAft>
-                <a:spcPts val="800"/>
+                <a:spcPts val="1000"/>
               </a:spcAft>
             </a:pPr>
             <a:r>
-              <a:rPr sz="1300" b="1">
-                <a:solidFill>
-                  <a:srgbClr val="003F7E"/>
-                </a:solidFill>
-                <a:latin typeface="游ゴシック"/>
-                <a:ea typeface="游ゴシック"/>
-                <a:cs typeface="游ゴシック"/>
-              </a:rPr>
-              <a:t>【苛性ソーダ（NaOH）】 </a:t>
-            </a:r>
-            <a:r>
-              <a:rPr sz="1200">
+              <a:rPr sz="1300" b="0">
                 <a:solidFill>
                   <a:srgbClr val="222222"/>
                 </a:solidFill>
@@ -18774,39 +18194,20 @@
                 <a:ea typeface="游ゴシック"/>
                 <a:cs typeface="游ゴシック"/>
               </a:rPr>
-              <a:t>スタートアップ時は投入しないベース。アルデヒドが多い局面ではアルドール縮合を促進し得るため、触媒交換後にアルデヒド低下を確認してから要否判断。 </a:t>
-            </a:r>
-            <a:r>
-              <a:rPr sz="1150" b="1">
-                <a:solidFill>
-                  <a:srgbClr val="005BAB"/>
-                </a:solidFill>
-                <a:latin typeface="游ゴシック"/>
-                <a:ea typeface="游ゴシック"/>
-                <a:cs typeface="游ゴシック"/>
-              </a:rPr>
-              <a:t>（方針）</a:t>
+              <a:t>・早期判定はUV450nmを主指標とする（悪化品は約0.004/日上昇、正常品は0.002で不動）。UV330nm（Na非含有領域）を補助に用いる。</a:t>
             </a:r>
           </a:p>
           <a:p>
             <a:pPr>
+              <a:spcBef>
+                <a:spcPts val="0"/>
+              </a:spcBef>
               <a:spcAft>
-                <a:spcPts val="800"/>
+                <a:spcPts val="1000"/>
               </a:spcAft>
             </a:pPr>
             <a:r>
-              <a:rPr sz="1300" b="1">
-                <a:solidFill>
-                  <a:srgbClr val="003F7E"/>
-                </a:solidFill>
-                <a:latin typeface="游ゴシック"/>
-                <a:ea typeface="游ゴシック"/>
-                <a:cs typeface="游ゴシック"/>
-              </a:rPr>
-              <a:t>【MEG塔温度】 </a:t>
-            </a:r>
-            <a:r>
-              <a:rPr sz="1200">
+              <a:rPr sz="1300" b="0">
                 <a:solidFill>
                   <a:srgbClr val="222222"/>
                 </a:solidFill>
@@ -18814,39 +18215,20 @@
                 <a:ea typeface="游ゴシック"/>
                 <a:cs typeface="游ゴシック"/>
               </a:rPr>
-              <a:t>下げない方針。温度を下げるとアルデヒドが分解されず前駆体として下流に回り、かえって色相側に出る懸念があるため。 </a:t>
-            </a:r>
-            <a:r>
-              <a:rPr sz="1150" b="1">
-                <a:solidFill>
-                  <a:srgbClr val="005BAB"/>
-                </a:solidFill>
-                <a:latin typeface="游ゴシック"/>
-                <a:ea typeface="游ゴシック"/>
-                <a:cs typeface="游ゴシック"/>
-              </a:rPr>
-              <a:t>（方針）</a:t>
+              <a:t>・色相の律速は後段の縮合（UV450nm）であり、アルデヒド量は先行指標としての相関が弱い（アクロレインとAPHAも相関しない）。このためトータルアルデヒド監視は採用しない（現行のDNPH法以上の情報は得られない見込み）。</a:t>
             </a:r>
           </a:p>
           <a:p>
             <a:pPr>
+              <a:spcBef>
+                <a:spcPts val="0"/>
+              </a:spcBef>
               <a:spcAft>
-                <a:spcPts val="800"/>
+                <a:spcPts val="1000"/>
               </a:spcAft>
             </a:pPr>
             <a:r>
-              <a:rPr sz="1300" b="1">
-                <a:solidFill>
-                  <a:srgbClr val="003F7E"/>
-                </a:solidFill>
-                <a:latin typeface="游ゴシック"/>
-                <a:ea typeface="游ゴシック"/>
-                <a:cs typeface="游ゴシック"/>
-              </a:rPr>
-              <a:t>【リン酸ナトリウム（Na₃PO₄）】 </a:t>
-            </a:r>
-            <a:r>
-              <a:rPr sz="1200">
+              <a:rPr sz="1300" b="0">
                 <a:solidFill>
                   <a:srgbClr val="222222"/>
                 </a:solidFill>
@@ -18854,39 +18236,20 @@
                 <a:ea typeface="游ゴシック"/>
                 <a:cs typeface="游ゴシック"/>
               </a:rPr>
-              <a:t>保管中反応の緩和策。pH低下で縮合を抑える／金属を不活性化する効きがある（効き方は要検証）。置換（払い出しを伴う入替）とセットで運用。 </a:t>
-            </a:r>
-            <a:r>
-              <a:rPr sz="1150" b="1">
-                <a:solidFill>
-                  <a:srgbClr val="005BAB"/>
-                </a:solidFill>
-                <a:latin typeface="游ゴシック"/>
-                <a:ea typeface="游ゴシック"/>
-                <a:cs typeface="游ゴシック"/>
-              </a:rPr>
-              <a:t>（緩和・要検証）</a:t>
+              <a:t>・ストリーム／タンクの切り分けのため、製品ストリームを窒素雰囲気のボンベで採取し経時を確認する。</a:t>
             </a:r>
           </a:p>
           <a:p>
             <a:pPr>
+              <a:spcBef>
+                <a:spcPts val="0"/>
+              </a:spcBef>
               <a:spcAft>
-                <a:spcPts val="800"/>
+                <a:spcPts val="1000"/>
               </a:spcAft>
             </a:pPr>
             <a:r>
-              <a:rPr sz="1300" b="1">
-                <a:solidFill>
-                  <a:srgbClr val="003F7E"/>
-                </a:solidFill>
-                <a:latin typeface="游ゴシック"/>
-                <a:ea typeface="游ゴシック"/>
-                <a:cs typeface="游ゴシック"/>
-              </a:rPr>
-              <a:t>【出口（DEGラインのIER）】 </a:t>
-            </a:r>
-            <a:r>
-              <a:rPr sz="1200">
+              <a:rPr sz="1300" b="0">
                 <a:solidFill>
                   <a:srgbClr val="222222"/>
                 </a:solidFill>
@@ -18894,18 +18257,7 @@
                 <a:ea typeface="游ゴシック"/>
                 <a:cs typeface="游ゴシック"/>
               </a:rPr>
-              <a:t>前段で抑えきれない場合の出口戦略として、DEGラインへの樹脂設置を検討（実DEGの通液テストを予定）。 </a:t>
-            </a:r>
-            <a:r>
-              <a:rPr sz="1150" b="1">
-                <a:solidFill>
-                  <a:srgbClr val="005BAB"/>
-                </a:solidFill>
-                <a:latin typeface="游ゴシック"/>
-                <a:ea typeface="游ゴシック"/>
-                <a:cs typeface="游ゴシック"/>
-              </a:rPr>
-              <a:t>（検討中）</a:t>
+              <a:t>・出荷再開の判定基準（オンスペック判定／タンク経時の観察期間／UV450nmの日次傾きの閾値／初期流動品の解除ロット数）は、本対策会議で具体値を確定する（決め事）。</a:t>
             </a:r>
           </a:p>
         </p:txBody>
@@ -18919,202 +18271,6 @@
 </file>
 
 <file path=ppt/slides/slide19.xml><?xml version="1.0" encoding="utf-8"?>
-<p:sld xmlns:a="http://schemas.openxmlformats.org/drawingml/2006/main" xmlns:p="http://schemas.openxmlformats.org/presentationml/2006/main" xmlns:r="http://schemas.openxmlformats.org/officeDocument/2006/relationships">
-  <p:cSld>
-    <p:spTree>
-      <p:nvGrpSpPr>
-        <p:cNvPr id="1" name=""/>
-        <p:cNvGrpSpPr/>
-        <p:nvPr/>
-      </p:nvGrpSpPr>
-      <p:grpSpPr/>
-      <p:sp>
-        <p:nvSpPr>
-          <p:cNvPr id="2" name="Title 1"/>
-          <p:cNvSpPr>
-            <a:spLocks noGrp="1"/>
-          </p:cNvSpPr>
-          <p:nvPr>
-            <p:ph type="title"/>
-          </p:nvPr>
-        </p:nvSpPr>
-        <p:spPr/>
-        <p:txBody>
-          <a:bodyPr/>
-          <a:lstStyle/>
-          <a:p>
-            <a:r>
-              <a:rPr sz="2200" b="1">
-                <a:solidFill>
-                  <a:srgbClr val="003F7E"/>
-                </a:solidFill>
-                <a:latin typeface="游ゴシック"/>
-                <a:ea typeface="游ゴシック"/>
-                <a:cs typeface="游ゴシック"/>
-              </a:rPr>
-              <a:t>出荷再開に向けた品質管理・早期判定</a:t>
-            </a:r>
-          </a:p>
-        </p:txBody>
-      </p:sp>
-      <p:sp>
-        <p:nvSpPr>
-          <p:cNvPr id="3" name="TextBox 2"/>
-          <p:cNvSpPr txBox="1"/>
-          <p:nvPr/>
-        </p:nvSpPr>
-        <p:spPr>
-          <a:xfrm>
-            <a:off x="548640" y="1371600"/>
-            <a:ext cx="11064240" cy="4937760"/>
-          </a:xfrm>
-          <a:prstGeom prst="rect">
-            <a:avLst/>
-          </a:prstGeom>
-          <a:noFill/>
-        </p:spPr>
-        <p:txBody>
-          <a:bodyPr wrap="square">
-            <a:spAutoFit/>
-          </a:bodyPr>
-          <a:lstStyle/>
-          <a:p>
-            <a:pPr>
-              <a:spcBef>
-                <a:spcPts val="0"/>
-              </a:spcBef>
-              <a:spcAft>
-                <a:spcPts val="1000"/>
-              </a:spcAft>
-            </a:pPr>
-            <a:r>
-              <a:rPr sz="1300" b="0">
-                <a:solidFill>
-                  <a:srgbClr val="222222"/>
-                </a:solidFill>
-                <a:latin typeface="游ゴシック"/>
-                <a:ea typeface="游ゴシック"/>
-                <a:cs typeface="游ゴシック"/>
-              </a:rPr>
-              <a:t>・再稼働後の初期流動品は、APHAを含む社内規格全項目で規格内を確認。</a:t>
-            </a:r>
-          </a:p>
-          <a:p>
-            <a:pPr>
-              <a:spcBef>
-                <a:spcPts val="0"/>
-              </a:spcBef>
-              <a:spcAft>
-                <a:spcPts val="1000"/>
-              </a:spcAft>
-            </a:pPr>
-            <a:r>
-              <a:rPr sz="1300" b="0">
-                <a:solidFill>
-                  <a:srgbClr val="222222"/>
-                </a:solidFill>
-                <a:latin typeface="游ゴシック"/>
-                <a:ea typeface="游ゴシック"/>
-                <a:cs typeface="游ゴシック"/>
-              </a:rPr>
-              <a:t>・初期流動品はタンク保管中の色相・UVスペクトルの経時変化が無いことを確認してから出荷。</a:t>
-            </a:r>
-          </a:p>
-          <a:p>
-            <a:pPr>
-              <a:spcBef>
-                <a:spcPts val="0"/>
-              </a:spcBef>
-              <a:spcAft>
-                <a:spcPts val="1000"/>
-              </a:spcAft>
-            </a:pPr>
-            <a:r>
-              <a:rPr sz="1300" b="0">
-                <a:solidFill>
-                  <a:srgbClr val="222222"/>
-                </a:solidFill>
-                <a:latin typeface="游ゴシック"/>
-                <a:ea typeface="游ゴシック"/>
-                <a:cs typeface="游ゴシック"/>
-              </a:rPr>
-              <a:t>・早期判定はUV450nmを主指標とする（悪化品は約0.004/日上昇、正常品は0.002で不動）。UV330nm（Na非含有領域）を補助に用いる。</a:t>
-            </a:r>
-          </a:p>
-          <a:p>
-            <a:pPr>
-              <a:spcBef>
-                <a:spcPts val="0"/>
-              </a:spcBef>
-              <a:spcAft>
-                <a:spcPts val="1000"/>
-              </a:spcAft>
-            </a:pPr>
-            <a:r>
-              <a:rPr sz="1300" b="0">
-                <a:solidFill>
-                  <a:srgbClr val="222222"/>
-                </a:solidFill>
-                <a:latin typeface="游ゴシック"/>
-                <a:ea typeface="游ゴシック"/>
-                <a:cs typeface="游ゴシック"/>
-              </a:rPr>
-              <a:t>・色相の律速は後段の縮合（UV450nm）であり、アルデヒド量は先行指標としての相関が弱い（アクロレインとAPHAも相関しない）。このためトータルアルデヒド監視は採用しない（現行のDNPH法以上の情報は得られない見込み）。</a:t>
-            </a:r>
-          </a:p>
-          <a:p>
-            <a:pPr>
-              <a:spcBef>
-                <a:spcPts val="0"/>
-              </a:spcBef>
-              <a:spcAft>
-                <a:spcPts val="1000"/>
-              </a:spcAft>
-            </a:pPr>
-            <a:r>
-              <a:rPr sz="1300" b="0">
-                <a:solidFill>
-                  <a:srgbClr val="222222"/>
-                </a:solidFill>
-                <a:latin typeface="游ゴシック"/>
-                <a:ea typeface="游ゴシック"/>
-                <a:cs typeface="游ゴシック"/>
-              </a:rPr>
-              <a:t>・ストリーム／タンクの切り分けのため、製品ストリームを窒素雰囲気のボンベで採取し経時を確認する。</a:t>
-            </a:r>
-          </a:p>
-          <a:p>
-            <a:pPr>
-              <a:spcBef>
-                <a:spcPts val="0"/>
-              </a:spcBef>
-              <a:spcAft>
-                <a:spcPts val="1000"/>
-              </a:spcAft>
-            </a:pPr>
-            <a:r>
-              <a:rPr sz="1300" b="0">
-                <a:solidFill>
-                  <a:srgbClr val="222222"/>
-                </a:solidFill>
-                <a:latin typeface="游ゴシック"/>
-                <a:ea typeface="游ゴシック"/>
-                <a:cs typeface="游ゴシック"/>
-              </a:rPr>
-              <a:t>・出荷再開の判定基準（オンスペック判定／タンク経時の観察期間／UV450nmの日次傾きの閾値／初期流動品の解除ロット数）は、本対策会議で具体値を確定する（決め事）。</a:t>
-            </a:r>
-          </a:p>
-        </p:txBody>
-      </p:sp>
-    </p:spTree>
-  </p:cSld>
-  <p:clrMapOvr>
-    <a:masterClrMapping/>
-  </p:clrMapOvr>
-</p:sld>
-</file>
-
-<file path=ppt/slides/slide20.xml><?xml version="1.0" encoding="utf-8"?>
 <p:sld xmlns:a="http://schemas.openxmlformats.org/drawingml/2006/main" xmlns:p="http://schemas.openxmlformats.org/presentationml/2006/main" xmlns:r="http://schemas.openxmlformats.org/officeDocument/2006/relationships">
   <p:cSld>
     <p:spTree>

--- a/outputs/製品DEG色相悪化_対策会議.pptx
+++ b/outputs/製品DEG色相悪化_対策会議.pptx
@@ -23,6 +23,7 @@
     <p:sldId id="2147483575" r:id="rId30"/>
     <p:sldId id="2147483576" r:id="rId31"/>
     <p:sldId id="2147483577" r:id="rId32"/>
+    <p:sldId id="2147483578" r:id="rId33"/>
   </p:sldIdLst>
   <p:sldSz cx="12192000" cy="6858000"/>
   <p:notesSz cx="6807200" cy="9939338"/>
@@ -15864,8 +15865,8 @@
         </p:nvSpPr>
         <p:spPr>
           <a:xfrm>
-            <a:off x="548640" y="1371600"/>
-            <a:ext cx="11064240" cy="4937760"/>
+            <a:off x="502920" y="1371600"/>
+            <a:ext cx="6126480" cy="4937760"/>
           </a:xfrm>
           <a:prstGeom prst="rect">
             <a:avLst/>
@@ -15883,11 +15884,11 @@
                 <a:spcPts val="0"/>
               </a:spcBef>
               <a:spcAft>
-                <a:spcPts val="1000"/>
+                <a:spcPts val="1200"/>
               </a:spcAft>
             </a:pPr>
             <a:r>
-              <a:rPr sz="1500" b="0">
+              <a:rPr sz="1350" b="0">
                 <a:solidFill>
                   <a:srgbClr val="222222"/>
                 </a:solidFill>
@@ -15904,11 +15905,11 @@
                 <a:spcPts val="0"/>
               </a:spcBef>
               <a:spcAft>
-                <a:spcPts val="1000"/>
+                <a:spcPts val="1200"/>
               </a:spcAft>
             </a:pPr>
             <a:r>
-              <a:rPr sz="1500" b="0">
+              <a:rPr sz="1350" b="0">
                 <a:solidFill>
                   <a:srgbClr val="222222"/>
                 </a:solidFill>
@@ -15925,11 +15926,11 @@
                 <a:spcPts val="0"/>
               </a:spcBef>
               <a:spcAft>
-                <a:spcPts val="1000"/>
+                <a:spcPts val="1200"/>
               </a:spcAft>
             </a:pPr>
             <a:r>
-              <a:rPr sz="1500" b="0">
+              <a:rPr sz="1350" b="0">
                 <a:solidFill>
                   <a:srgbClr val="222222"/>
                 </a:solidFill>
@@ -15946,11 +15947,11 @@
                 <a:spcPts val="0"/>
               </a:spcBef>
               <a:spcAft>
-                <a:spcPts val="1000"/>
+                <a:spcPts val="1200"/>
               </a:spcAft>
             </a:pPr>
             <a:r>
-              <a:rPr sz="1500" b="0">
+              <a:rPr sz="1350" b="0">
                 <a:solidFill>
                   <a:srgbClr val="222222"/>
                 </a:solidFill>
@@ -15963,6 +15964,30 @@
           </a:p>
         </p:txBody>
       </p:sp>
+      <p:pic>
+        <p:nvPicPr>
+          <p:cNvPr id="4" name="Picture 3" descr="apha_trend.png"/>
+          <p:cNvPicPr>
+            <a:picLocks noChangeAspect="1"/>
+          </p:cNvPicPr>
+          <p:nvPr/>
+        </p:nvPicPr>
+        <p:blipFill>
+          <a:blip r:embed="rId2"/>
+          <a:stretch>
+            <a:fillRect/>
+          </a:stretch>
+        </p:blipFill>
+        <p:spPr>
+          <a:xfrm>
+            <a:off x="6858000" y="1828800"/>
+            <a:ext cx="4937760" cy="2887297"/>
+          </a:xfrm>
+          <a:prstGeom prst="rect">
+            <a:avLst/>
+          </a:prstGeom>
+        </p:spPr>
+      </p:pic>
     </p:spTree>
   </p:cSld>
   <p:clrMapOvr>
@@ -16018,8 +16043,8 @@
         </p:nvSpPr>
         <p:spPr>
           <a:xfrm>
-            <a:off x="502920" y="1325880"/>
-            <a:ext cx="6766560" cy="2103120"/>
+            <a:off x="502920" y="1280160"/>
+            <a:ext cx="6035040" cy="2148840"/>
           </a:xfrm>
           <a:prstGeom prst="roundRect">
             <a:avLst/>
@@ -16166,8 +16191,8 @@
         </p:nvSpPr>
         <p:spPr>
           <a:xfrm>
-            <a:off x="502920" y="3611880"/>
-            <a:ext cx="6766560" cy="2697480"/>
+            <a:off x="502920" y="3566160"/>
+            <a:ext cx="6035040" cy="2743200"/>
           </a:xfrm>
           <a:prstGeom prst="roundRect">
             <a:avLst/>
@@ -16287,7 +16312,7 @@
       </p:sp>
       <p:pic>
         <p:nvPicPr>
-          <p:cNvPr id="5" name="Picture 4" descr="polyenal_long.png"/>
+          <p:cNvPr id="5" name="Picture 4" descr="uv_spectrum.png"/>
           <p:cNvPicPr>
             <a:picLocks noChangeAspect="1"/>
           </p:cNvPicPr>
@@ -16301,24 +16326,48 @@
         </p:blipFill>
         <p:spPr>
           <a:xfrm>
-            <a:off x="7543800" y="1554480"/>
-            <a:ext cx="4114800" cy="1873275"/>
+            <a:off x="6720840" y="1280160"/>
+            <a:ext cx="5120640" cy="2939461"/>
           </a:xfrm>
           <a:prstGeom prst="rect">
             <a:avLst/>
           </a:prstGeom>
         </p:spPr>
       </p:pic>
-      <p:sp>
-        <p:nvSpPr>
-          <p:cNvPr id="6" name="TextBox 5"/>
+      <p:pic>
+        <p:nvPicPr>
+          <p:cNvPr id="6" name="Picture 5" descr="polyenal_long.png"/>
+          <p:cNvPicPr>
+            <a:picLocks noChangeAspect="1"/>
+          </p:cNvPicPr>
+          <p:nvPr/>
+        </p:nvPicPr>
+        <p:blipFill>
+          <a:blip r:embed="rId3"/>
+          <a:stretch>
+            <a:fillRect/>
+          </a:stretch>
+        </p:blipFill>
+        <p:spPr>
+          <a:xfrm>
+            <a:off x="6949440" y="4297680"/>
+            <a:ext cx="4663440" cy="2123045"/>
+          </a:xfrm>
+          <a:prstGeom prst="rect">
+            <a:avLst/>
+          </a:prstGeom>
+        </p:spPr>
+      </p:pic>
+      <p:sp>
+        <p:nvSpPr>
+          <p:cNvPr id="7" name="TextBox 6"/>
           <p:cNvSpPr txBox="1"/>
           <p:nvPr/>
         </p:nvSpPr>
         <p:spPr>
           <a:xfrm>
-            <a:off x="7543800" y="4480560"/>
-            <a:ext cx="4114800" cy="1828800"/>
+            <a:off x="6766560" y="5897880"/>
+            <a:ext cx="5120640" cy="640080"/>
           </a:xfrm>
           <a:prstGeom prst="rect">
             <a:avLst/>
@@ -16336,11 +16385,11 @@
                 <a:spcPts val="0"/>
               </a:spcBef>
               <a:spcAft>
-                <a:spcPts val="200"/>
+                <a:spcPts val="400"/>
               </a:spcAft>
             </a:pPr>
             <a:r>
-              <a:rPr sz="1200" b="1">
+              <a:rPr sz="1050" b="1">
                 <a:solidFill>
                   <a:srgbClr val="003F7E"/>
                 </a:solidFill>
@@ -16348,49 +16397,7 @@
                 <a:ea typeface="游ゴシック"/>
                 <a:cs typeface="游ゴシック"/>
               </a:rPr>
-              <a:t>着色物質＝共役ポリエナール</a:t>
-            </a:r>
-          </a:p>
-          <a:p>
-            <a:pPr>
-              <a:spcBef>
-                <a:spcPts val="0"/>
-              </a:spcBef>
-              <a:spcAft>
-                <a:spcPts val="200"/>
-              </a:spcAft>
-            </a:pPr>
-            <a:r>
-              <a:rPr sz="1200" b="1">
-                <a:solidFill>
-                  <a:srgbClr val="222222"/>
-                </a:solidFill>
-                <a:latin typeface="游ゴシック"/>
-                <a:ea typeface="游ゴシック"/>
-                <a:cs typeface="游ゴシック"/>
-              </a:rPr>
-              <a:t>CH3-(CH=CH)n-CHO</a:t>
-            </a:r>
-          </a:p>
-          <a:p>
-            <a:pPr>
-              <a:spcBef>
-                <a:spcPts val="0"/>
-              </a:spcBef>
-              <a:spcAft>
-                <a:spcPts val="200"/>
-              </a:spcAft>
-            </a:pPr>
-            <a:r>
-              <a:rPr sz="1050" b="0">
-                <a:solidFill>
-                  <a:srgbClr val="666666"/>
-                </a:solidFill>
-                <a:latin typeface="游ゴシック"/>
-                <a:ea typeface="游ゴシック"/>
-                <a:cs typeface="游ゴシック"/>
-              </a:rPr>
-              <a:t>共役が伸びるほど長波長化し、十分伸びると450nm（黄）。数〜10ppbの微量で発色。</a:t>
+              <a:t>着色物質＝共役ポリエナール CH3-(CH=CH)n-CHO（数〜10ppbで発色）</a:t>
             </a:r>
           </a:p>
         </p:txBody>
@@ -16711,7 +16718,7 @@
                 <a:ea typeface="游ゴシック"/>
                 <a:cs typeface="游ゴシック"/>
               </a:rPr>
-              <a:t>なぜ今回だけ起きたか（条件の重なり）</a:t>
+              <a:t>工程別サマリ（事実の裏付け強度と小結論）</a:t>
             </a:r>
           </a:p>
         </p:txBody>
@@ -16724,7 +16731,7 @@
         </p:nvSpPr>
         <p:spPr>
           <a:xfrm>
-            <a:off x="548640" y="1325880"/>
+            <a:off x="548640" y="1207008"/>
             <a:ext cx="11064240" cy="457200"/>
           </a:xfrm>
           <a:prstGeom prst="rect">
@@ -16747,7 +16754,7 @@
               </a:spcAft>
             </a:pPr>
             <a:r>
-              <a:rPr sz="1250" b="0">
+              <a:rPr sz="1050" b="0">
                 <a:solidFill>
                   <a:srgbClr val="666666"/>
                 </a:solidFill>
@@ -16755,335 +16762,638 @@
                 <a:ea typeface="游ゴシック"/>
                 <a:cs typeface="游ゴシック"/>
               </a:rPr>
-              <a:t>過去にもアルデヒドが高い時期はあったが、今回は反応させてしまう条件がそろった。</a:t>
-            </a:r>
-          </a:p>
-        </p:txBody>
-      </p:sp>
-      <p:sp>
-        <p:nvSpPr>
-          <p:cNvPr id="4" name="Rounded Rectangle 3"/>
-          <p:cNvSpPr/>
+              <a:t>裏付け強度 ◎事実複数で確定／○一部事実＋原理／△収支・原理のみで確度低。工程ごとの事実の詳細は「事実整理（工程別グリッド）」に集約。</a:t>
+            </a:r>
+          </a:p>
+        </p:txBody>
+      </p:sp>
+      <p:graphicFrame>
+        <p:nvGraphicFramePr>
+          <p:cNvPr id="4" name="Table 3"/>
+          <p:cNvGraphicFramePr>
+            <a:graphicFrameLocks noGrp="1"/>
+          </p:cNvGraphicFramePr>
           <p:nvPr/>
-        </p:nvSpPr>
-        <p:spPr>
-          <a:xfrm>
-            <a:off x="548640" y="1874519"/>
-            <a:ext cx="11064240" cy="960120"/>
-          </a:xfrm>
-          <a:prstGeom prst="roundRect">
-            <a:avLst/>
-          </a:prstGeom>
-          <a:solidFill>
-            <a:srgbClr val="EBEFF2"/>
-          </a:solidFill>
-          <a:ln w="12700">
-            <a:solidFill>
-              <a:srgbClr val="C9D2D8"/>
-            </a:solidFill>
-          </a:ln>
-          <a:effectLst/>
-        </p:spPr>
-        <p:style>
-          <a:lnRef idx="1">
-            <a:schemeClr val="accent1"/>
-          </a:lnRef>
-          <a:fillRef idx="3">
-            <a:schemeClr val="accent1"/>
-          </a:fillRef>
-          <a:effectRef idx="2">
-            <a:schemeClr val="accent1"/>
-          </a:effectRef>
-          <a:fontRef idx="minor">
-            <a:schemeClr val="lt1"/>
-          </a:fontRef>
-        </p:style>
-        <p:txBody>
-          <a:bodyPr rtlCol="0" anchor="ctr" wrap="square" lIns="128016"/>
-          <a:lstStyle/>
-          <a:p>
-            <a:pPr algn="ctr"/>
-            <a:r>
-              <a:rPr sz="1300" b="1">
-                <a:solidFill>
-                  <a:srgbClr val="003F7E"/>
-                </a:solidFill>
-                <a:latin typeface="游ゴシック"/>
-                <a:ea typeface="游ゴシック"/>
-                <a:cs typeface="游ゴシック"/>
-              </a:rPr>
-              <a:t>【アルデヒドが多かった（必要条件）】 </a:t>
-            </a:r>
-            <a:r>
-              <a:rPr sz="1150">
-                <a:solidFill>
-                  <a:srgbClr val="222222"/>
-                </a:solidFill>
-                <a:latin typeface="游ゴシック"/>
-                <a:ea typeface="游ゴシック"/>
-                <a:cs typeface="游ゴシック"/>
-              </a:rPr>
-              <a:t>触媒選択性低下でA-ALD・F-ALDが増加（A-ALD/EO=0.78kg/t、過去実績の上位）。種となるアルデヒドの絶対量が多かった。</a:t>
-            </a:r>
-          </a:p>
-          <a:p>
-            <a:r>
-              <a:rPr sz="1150" b="1">
-                <a:solidFill>
-                  <a:srgbClr val="005BAB"/>
-                </a:solidFill>
-                <a:latin typeface="游ゴシック"/>
-                <a:ea typeface="游ゴシック"/>
-                <a:cs typeface="游ゴシック"/>
-              </a:rPr>
-              <a:t>→ 触媒交換で除去</a:t>
-            </a:r>
-          </a:p>
-        </p:txBody>
-      </p:sp>
-      <p:sp>
-        <p:nvSpPr>
-          <p:cNvPr id="5" name="Rounded Rectangle 4"/>
-          <p:cNvSpPr/>
-          <p:nvPr/>
-        </p:nvSpPr>
-        <p:spPr>
-          <a:xfrm>
-            <a:off x="548640" y="2935224"/>
-            <a:ext cx="11064240" cy="960120"/>
-          </a:xfrm>
-          <a:prstGeom prst="roundRect">
-            <a:avLst/>
-          </a:prstGeom>
-          <a:solidFill>
-            <a:srgbClr val="EBEFF2"/>
-          </a:solidFill>
-          <a:ln w="12700">
-            <a:solidFill>
-              <a:srgbClr val="C9D2D8"/>
-            </a:solidFill>
-          </a:ln>
-          <a:effectLst/>
-        </p:spPr>
-        <p:style>
-          <a:lnRef idx="1">
-            <a:schemeClr val="accent1"/>
-          </a:lnRef>
-          <a:fillRef idx="3">
-            <a:schemeClr val="accent1"/>
-          </a:fillRef>
-          <a:effectRef idx="2">
-            <a:schemeClr val="accent1"/>
-          </a:effectRef>
-          <a:fontRef idx="minor">
-            <a:schemeClr val="lt1"/>
-          </a:fontRef>
-        </p:style>
-        <p:txBody>
-          <a:bodyPr rtlCol="0" anchor="ctr" wrap="square" lIns="128016"/>
-          <a:lstStyle/>
-          <a:p>
-            <a:pPr algn="ctr"/>
-            <a:r>
-              <a:rPr sz="1300" b="1">
-                <a:solidFill>
-                  <a:srgbClr val="003F7E"/>
-                </a:solidFill>
-                <a:latin typeface="游ゴシック"/>
-                <a:ea typeface="游ゴシック"/>
-                <a:cs typeface="游ゴシック"/>
-              </a:rPr>
-              <a:t>【水分が少ない条件だった（促進）】 </a:t>
-            </a:r>
-            <a:r>
-              <a:rPr sz="1150">
-                <a:solidFill>
-                  <a:srgbClr val="222222"/>
-                </a:solidFill>
-                <a:latin typeface="游ゴシック"/>
-                <a:ea typeface="游ゴシック"/>
-                <a:cs typeface="游ゴシック"/>
-              </a:rPr>
-              <a:t>脱水・縮合は水があると進みにくい平衡反応。脱水塔ボトムが低水分で縮合が進みやすかった。</a:t>
-            </a:r>
-          </a:p>
-          <a:p>
-            <a:r>
-              <a:rPr sz="1150" b="1">
-                <a:solidFill>
-                  <a:srgbClr val="005BAB"/>
-                </a:solidFill>
-                <a:latin typeface="游ゴシック"/>
-                <a:ea typeface="游ゴシック"/>
-                <a:cs typeface="游ゴシック"/>
-              </a:rPr>
-              <a:t>→ 水分管理で確認</a:t>
-            </a:r>
-          </a:p>
-        </p:txBody>
-      </p:sp>
-      <p:sp>
-        <p:nvSpPr>
-          <p:cNvPr id="6" name="Rounded Rectangle 5"/>
-          <p:cNvSpPr/>
-          <p:nvPr/>
-        </p:nvSpPr>
-        <p:spPr>
-          <a:xfrm>
-            <a:off x="548640" y="3995928"/>
-            <a:ext cx="11064240" cy="960120"/>
-          </a:xfrm>
-          <a:prstGeom prst="roundRect">
-            <a:avLst/>
-          </a:prstGeom>
-          <a:solidFill>
-            <a:srgbClr val="EBEFF2"/>
-          </a:solidFill>
-          <a:ln w="12700">
-            <a:solidFill>
-              <a:srgbClr val="C9D2D8"/>
-            </a:solidFill>
-          </a:ln>
-          <a:effectLst/>
-        </p:spPr>
-        <p:style>
-          <a:lnRef idx="1">
-            <a:schemeClr val="accent1"/>
-          </a:lnRef>
-          <a:fillRef idx="3">
-            <a:schemeClr val="accent1"/>
-          </a:fillRef>
-          <a:effectRef idx="2">
-            <a:schemeClr val="accent1"/>
-          </a:effectRef>
-          <a:fontRef idx="minor">
-            <a:schemeClr val="lt1"/>
-          </a:fontRef>
-        </p:style>
-        <p:txBody>
-          <a:bodyPr rtlCol="0" anchor="ctr" wrap="square" lIns="128016"/>
-          <a:lstStyle/>
-          <a:p>
-            <a:pPr algn="ctr"/>
-            <a:r>
-              <a:rPr sz="1300" b="1">
-                <a:solidFill>
-                  <a:srgbClr val="003F7E"/>
-                </a:solidFill>
-                <a:latin typeface="游ゴシック"/>
-                <a:ea typeface="游ゴシック"/>
-                <a:cs typeface="游ゴシック"/>
-              </a:rPr>
-              <a:t>【塩基条件（苛性ソーダ）が後押し（促進）】 </a:t>
-            </a:r>
-            <a:r>
-              <a:rPr sz="1150">
-                <a:solidFill>
-                  <a:srgbClr val="222222"/>
-                </a:solidFill>
-                <a:latin typeface="游ゴシック"/>
-                <a:ea typeface="游ゴシック"/>
-                <a:cs typeface="游ゴシック"/>
-              </a:rPr>
-              <a:t>NaOHの塩基がアルドール縮合を促進する側に働いた（NaOH→リン酸Na切替で330nm低下と整合）。</a:t>
-            </a:r>
-          </a:p>
-          <a:p>
-            <a:r>
-              <a:rPr sz="1150" b="1">
-                <a:solidFill>
-                  <a:srgbClr val="005BAB"/>
-                </a:solidFill>
-                <a:latin typeface="游ゴシック"/>
-                <a:ea typeface="游ゴシック"/>
-                <a:cs typeface="游ゴシック"/>
-              </a:rPr>
-              <a:t>→ SU時はNaOH非投入</a:t>
-            </a:r>
-          </a:p>
-        </p:txBody>
-      </p:sp>
-      <p:sp>
-        <p:nvSpPr>
-          <p:cNvPr id="7" name="Rounded Rectangle 6"/>
-          <p:cNvSpPr/>
-          <p:nvPr/>
-        </p:nvSpPr>
-        <p:spPr>
-          <a:xfrm>
-            <a:off x="548640" y="5056632"/>
-            <a:ext cx="11064240" cy="960120"/>
-          </a:xfrm>
-          <a:prstGeom prst="roundRect">
-            <a:avLst/>
-          </a:prstGeom>
-          <a:solidFill>
-            <a:srgbClr val="EBEFF2"/>
-          </a:solidFill>
-          <a:ln w="12700">
-            <a:solidFill>
-              <a:srgbClr val="C9D2D8"/>
-            </a:solidFill>
-          </a:ln>
-          <a:effectLst/>
-        </p:spPr>
-        <p:style>
-          <a:lnRef idx="1">
-            <a:schemeClr val="accent1"/>
-          </a:lnRef>
-          <a:fillRef idx="3">
-            <a:schemeClr val="accent1"/>
-          </a:fillRef>
-          <a:effectRef idx="2">
-            <a:schemeClr val="accent1"/>
-          </a:effectRef>
-          <a:fontRef idx="minor">
-            <a:schemeClr val="lt1"/>
-          </a:fontRef>
-        </p:style>
-        <p:txBody>
-          <a:bodyPr rtlCol="0" anchor="ctr" wrap="square" lIns="128016"/>
-          <a:lstStyle/>
-          <a:p>
-            <a:pPr algn="ctr"/>
-            <a:r>
-              <a:rPr sz="1300" b="1">
-                <a:solidFill>
-                  <a:srgbClr val="003F7E"/>
-                </a:solidFill>
-                <a:latin typeface="游ゴシック"/>
-                <a:ea typeface="游ゴシック"/>
-                <a:cs typeface="游ゴシック"/>
-              </a:rPr>
-              <a:t>【DEG留分には樹脂（IER）が無い（DEG特有・除去機構の欠如）】 </a:t>
-            </a:r>
-            <a:r>
-              <a:rPr sz="1150">
-                <a:solidFill>
-                  <a:srgbClr val="222222"/>
-                </a:solidFill>
-                <a:latin typeface="游ゴシック"/>
-                <a:ea typeface="游ゴシック"/>
-                <a:cs typeface="游ゴシック"/>
-              </a:rPr>
-              <a:t>MEG・TEGはイオン交換樹脂で前駆体を除去して製品を安定化できるが、DEG留分には樹脂が無く前駆体がそのまま製品に持ち込まれる。</a:t>
-            </a:r>
-          </a:p>
-          <a:p>
-            <a:r>
-              <a:rPr sz="1150" b="1">
-                <a:solidFill>
-                  <a:srgbClr val="005BAB"/>
-                </a:solidFill>
-                <a:latin typeface="游ゴシック"/>
-                <a:ea typeface="游ゴシック"/>
-                <a:cs typeface="游ゴシック"/>
-              </a:rPr>
-              <a:t>→ 出口でDEGラインIERを検討</a:t>
-            </a:r>
-          </a:p>
-        </p:txBody>
-      </p:sp>
+        </p:nvGraphicFramePr>
+        <p:xfrm>
+          <a:off x="548640" y="1783080"/>
+          <a:ext cx="11064240" cy="4343400"/>
+        </p:xfrm>
+        <a:graphic>
+          <a:graphicData uri="http://schemas.openxmlformats.org/drawingml/2006/table">
+            <a:tbl>
+              <a:tblPr firstRow="1" bandRow="1">
+                <a:tableStyleId>{5C22544A-7EE6-4342-B048-85BDC9FD1C3A}</a:tableStyleId>
+              </a:tblPr>
+              <a:tblGrid>
+                <a:gridCol w="2743200"/>
+                <a:gridCol w="1280160"/>
+                <a:gridCol w="7040880"/>
+              </a:tblGrid>
+              <a:tr h="542925">
+                <a:tc>
+                  <a:txBody>
+                    <a:bodyPr/>
+                    <a:lstStyle/>
+                    <a:p>
+                      <a:r>
+                        <a:rPr sz="1100" b="1">
+                          <a:solidFill>
+                            <a:srgbClr val="003F7E"/>
+                          </a:solidFill>
+                          <a:latin typeface="游ゴシック"/>
+                          <a:ea typeface="游ゴシック"/>
+                          <a:cs typeface="游ゴシック"/>
+                        </a:rPr>
+                        <a:t>工程</a:t>
+                      </a:r>
+                    </a:p>
+                  </a:txBody>
+                  <a:tcPr anchor="ctr" marT="27432" marB="27432" marL="54864">
+                    <a:solidFill>
+                      <a:srgbClr val="EBEFF2"/>
+                    </a:solidFill>
+                  </a:tcPr>
+                </a:tc>
+                <a:tc>
+                  <a:txBody>
+                    <a:bodyPr/>
+                    <a:lstStyle/>
+                    <a:p>
+                      <a:pPr algn="ctr"/>
+                      <a:r>
+                        <a:rPr sz="1100" b="1">
+                          <a:solidFill>
+                            <a:srgbClr val="003F7E"/>
+                          </a:solidFill>
+                          <a:latin typeface="游ゴシック"/>
+                          <a:ea typeface="游ゴシック"/>
+                          <a:cs typeface="游ゴシック"/>
+                        </a:rPr>
+                        <a:t>裏付け</a:t>
+                      </a:r>
+                    </a:p>
+                  </a:txBody>
+                  <a:tcPr anchor="ctr" marT="27432" marB="27432" marL="54864">
+                    <a:solidFill>
+                      <a:srgbClr val="EBEFF2"/>
+                    </a:solidFill>
+                  </a:tcPr>
+                </a:tc>
+                <a:tc>
+                  <a:txBody>
+                    <a:bodyPr/>
+                    <a:lstStyle/>
+                    <a:p>
+                      <a:r>
+                        <a:rPr sz="1100" b="1">
+                          <a:solidFill>
+                            <a:srgbClr val="003F7E"/>
+                          </a:solidFill>
+                          <a:latin typeface="游ゴシック"/>
+                          <a:ea typeface="游ゴシック"/>
+                          <a:cs typeface="游ゴシック"/>
+                        </a:rPr>
+                        <a:t>この工程で言えること</a:t>
+                      </a:r>
+                    </a:p>
+                  </a:txBody>
+                  <a:tcPr anchor="ctr" marT="27432" marB="27432" marL="54864">
+                    <a:solidFill>
+                      <a:srgbClr val="EBEFF2"/>
+                    </a:solidFill>
+                  </a:tcPr>
+                </a:tc>
+              </a:tr>
+              <a:tr h="542925">
+                <a:tc>
+                  <a:txBody>
+                    <a:bodyPr/>
+                    <a:lstStyle/>
+                    <a:p>
+                      <a:r>
+                        <a:rPr sz="1050" b="1">
+                          <a:solidFill>
+                            <a:srgbClr val="003F7E"/>
+                          </a:solidFill>
+                          <a:latin typeface="游ゴシック"/>
+                          <a:ea typeface="游ゴシック"/>
+                          <a:cs typeface="游ゴシック"/>
+                        </a:rPr>
+                        <a:t>EO反応系 (R-1101)</a:t>
+                      </a:r>
+                    </a:p>
+                  </a:txBody>
+                  <a:tcPr anchor="ctr" marT="27432" marB="27432" marL="54864">
+                    <a:solidFill>
+                      <a:srgbClr val="D7E0E5"/>
+                    </a:solidFill>
+                  </a:tcPr>
+                </a:tc>
+                <a:tc>
+                  <a:txBody>
+                    <a:bodyPr/>
+                    <a:lstStyle/>
+                    <a:p>
+                      <a:pPr algn="ctr"/>
+                      <a:r>
+                        <a:rPr sz="1500" b="1">
+                          <a:solidFill>
+                            <a:srgbClr val="003F7E"/>
+                          </a:solidFill>
+                          <a:latin typeface="游ゴシック"/>
+                          <a:ea typeface="游ゴシック"/>
+                          <a:cs typeface="游ゴシック"/>
+                        </a:rPr>
+                        <a:t>○</a:t>
+                      </a:r>
+                    </a:p>
+                  </a:txBody>
+                  <a:tcPr anchor="ctr" marT="27432" marB="27432" marL="54864">
+                    <a:solidFill>
+                      <a:srgbClr val="FFFFFF"/>
+                    </a:solidFill>
+                  </a:tcPr>
+                </a:tc>
+                <a:tc>
+                  <a:txBody>
+                    <a:bodyPr/>
+                    <a:lstStyle/>
+                    <a:p>
+                      <a:r>
+                        <a:rPr sz="1000" b="0">
+                          <a:solidFill>
+                            <a:srgbClr val="222222"/>
+                          </a:solidFill>
+                          <a:latin typeface="游ゴシック"/>
+                          <a:ea typeface="游ゴシック"/>
+                          <a:cs typeface="游ゴシック"/>
+                        </a:rPr>
+                        <a:t>種となるアルデヒドが増えた＝着色の起点。</a:t>
+                      </a:r>
+                    </a:p>
+                  </a:txBody>
+                  <a:tcPr anchor="ctr" marT="27432" marB="27432" marL="54864">
+                    <a:solidFill>
+                      <a:srgbClr val="FFFFFF"/>
+                    </a:solidFill>
+                  </a:tcPr>
+                </a:tc>
+              </a:tr>
+              <a:tr h="542925">
+                <a:tc>
+                  <a:txBody>
+                    <a:bodyPr/>
+                    <a:lstStyle/>
+                    <a:p>
+                      <a:r>
+                        <a:rPr sz="1050" b="1">
+                          <a:solidFill>
+                            <a:srgbClr val="003F7E"/>
+                          </a:solidFill>
+                          <a:latin typeface="游ゴシック"/>
+                          <a:ea typeface="游ゴシック"/>
+                          <a:cs typeface="游ゴシック"/>
+                        </a:rPr>
+                        <a:t>EG反応系 (R-1401)</a:t>
+                      </a:r>
+                    </a:p>
+                  </a:txBody>
+                  <a:tcPr anchor="ctr" marT="27432" marB="27432" marL="54864">
+                    <a:solidFill>
+                      <a:srgbClr val="D7E0E5"/>
+                    </a:solidFill>
+                  </a:tcPr>
+                </a:tc>
+                <a:tc>
+                  <a:txBody>
+                    <a:bodyPr/>
+                    <a:lstStyle/>
+                    <a:p>
+                      <a:pPr algn="ctr"/>
+                      <a:r>
+                        <a:rPr sz="1500" b="1">
+                          <a:solidFill>
+                            <a:srgbClr val="003F7E"/>
+                          </a:solidFill>
+                          <a:latin typeface="游ゴシック"/>
+                          <a:ea typeface="游ゴシック"/>
+                          <a:cs typeface="游ゴシック"/>
+                        </a:rPr>
+                        <a:t>○</a:t>
+                      </a:r>
+                    </a:p>
+                  </a:txBody>
+                  <a:tcPr anchor="ctr" marT="27432" marB="27432" marL="54864">
+                    <a:solidFill>
+                      <a:srgbClr val="FFFFFF"/>
+                    </a:solidFill>
+                  </a:tcPr>
+                </a:tc>
+                <a:tc>
+                  <a:txBody>
+                    <a:bodyPr/>
+                    <a:lstStyle/>
+                    <a:p>
+                      <a:r>
+                        <a:rPr sz="1000" b="0">
+                          <a:solidFill>
+                            <a:srgbClr val="222222"/>
+                          </a:solidFill>
+                          <a:latin typeface="游ゴシック"/>
+                          <a:ea typeface="游ゴシック"/>
+                          <a:cs typeface="游ゴシック"/>
+                        </a:rPr>
+                        <a:t>アルデヒドがEG生成系に持ち込まれ、UV成分の素地になる。</a:t>
+                      </a:r>
+                    </a:p>
+                  </a:txBody>
+                  <a:tcPr anchor="ctr" marT="27432" marB="27432" marL="54864">
+                    <a:solidFill>
+                      <a:srgbClr val="FFFFFF"/>
+                    </a:solidFill>
+                  </a:tcPr>
+                </a:tc>
+              </a:tr>
+              <a:tr h="542925">
+                <a:tc>
+                  <a:txBody>
+                    <a:bodyPr/>
+                    <a:lstStyle/>
+                    <a:p>
+                      <a:r>
+                        <a:rPr sz="1050" b="1">
+                          <a:solidFill>
+                            <a:srgbClr val="003F7E"/>
+                          </a:solidFill>
+                          <a:latin typeface="游ゴシック"/>
+                          <a:ea typeface="游ゴシック"/>
+                          <a:cs typeface="游ゴシック"/>
+                        </a:rPr>
+                        <a:t>EG濃縮系</a:t>
+                      </a:r>
+                    </a:p>
+                  </a:txBody>
+                  <a:tcPr anchor="ctr" marT="27432" marB="27432" marL="54864">
+                    <a:solidFill>
+                      <a:srgbClr val="D7E0E5"/>
+                    </a:solidFill>
+                  </a:tcPr>
+                </a:tc>
+                <a:tc>
+                  <a:txBody>
+                    <a:bodyPr/>
+                    <a:lstStyle/>
+                    <a:p>
+                      <a:pPr algn="ctr"/>
+                      <a:r>
+                        <a:rPr sz="1500" b="1">
+                          <a:solidFill>
+                            <a:srgbClr val="C07A00"/>
+                          </a:solidFill>
+                          <a:latin typeface="游ゴシック"/>
+                          <a:ea typeface="游ゴシック"/>
+                          <a:cs typeface="游ゴシック"/>
+                        </a:rPr>
+                        <a:t>△</a:t>
+                      </a:r>
+                    </a:p>
+                  </a:txBody>
+                  <a:tcPr anchor="ctr" marT="27432" marB="27432" marL="54864">
+                    <a:solidFill>
+                      <a:srgbClr val="FFFFFF"/>
+                    </a:solidFill>
+                  </a:tcPr>
+                </a:tc>
+                <a:tc>
+                  <a:txBody>
+                    <a:bodyPr/>
+                    <a:lstStyle/>
+                    <a:p>
+                      <a:r>
+                        <a:rPr sz="1000" b="0">
+                          <a:solidFill>
+                            <a:srgbClr val="222222"/>
+                          </a:solidFill>
+                          <a:latin typeface="游ゴシック"/>
+                          <a:ea typeface="游ゴシック"/>
+                          <a:cs typeface="游ゴシック"/>
+                        </a:rPr>
+                        <a:t>収支上は大半パージ・一部下流と推定（解放・RDの裏付けなし＝確度低）。</a:t>
+                      </a:r>
+                    </a:p>
+                  </a:txBody>
+                  <a:tcPr anchor="ctr" marT="27432" marB="27432" marL="54864">
+                    <a:solidFill>
+                      <a:srgbClr val="FFFFFF"/>
+                    </a:solidFill>
+                  </a:tcPr>
+                </a:tc>
+              </a:tr>
+              <a:tr h="542925">
+                <a:tc>
+                  <a:txBody>
+                    <a:bodyPr/>
+                    <a:lstStyle/>
+                    <a:p>
+                      <a:r>
+                        <a:rPr sz="1050" b="1">
+                          <a:solidFill>
+                            <a:srgbClr val="003F7E"/>
+                          </a:solidFill>
+                          <a:latin typeface="游ゴシック"/>
+                          <a:ea typeface="游ゴシック"/>
+                          <a:cs typeface="游ゴシック"/>
+                        </a:rPr>
+                        <a:t>EG脱水系 (C-1404)</a:t>
+                      </a:r>
+                    </a:p>
+                  </a:txBody>
+                  <a:tcPr anchor="ctr" marT="27432" marB="27432" marL="54864">
+                    <a:solidFill>
+                      <a:srgbClr val="D7E0E5"/>
+                    </a:solidFill>
+                  </a:tcPr>
+                </a:tc>
+                <a:tc>
+                  <a:txBody>
+                    <a:bodyPr/>
+                    <a:lstStyle/>
+                    <a:p>
+                      <a:pPr algn="ctr"/>
+                      <a:r>
+                        <a:rPr sz="1500" b="1">
+                          <a:solidFill>
+                            <a:srgbClr val="003F7E"/>
+                          </a:solidFill>
+                          <a:latin typeface="游ゴシック"/>
+                          <a:ea typeface="游ゴシック"/>
+                          <a:cs typeface="游ゴシック"/>
+                        </a:rPr>
+                        <a:t>○</a:t>
+                      </a:r>
+                    </a:p>
+                  </a:txBody>
+                  <a:tcPr anchor="ctr" marT="27432" marB="27432" marL="54864">
+                    <a:solidFill>
+                      <a:srgbClr val="FFFFFF"/>
+                    </a:solidFill>
+                  </a:tcPr>
+                </a:tc>
+                <a:tc>
+                  <a:txBody>
+                    <a:bodyPr/>
+                    <a:lstStyle/>
+                    <a:p>
+                      <a:r>
+                        <a:rPr sz="1000" b="0">
+                          <a:solidFill>
+                            <a:srgbClr val="222222"/>
+                          </a:solidFill>
+                          <a:latin typeface="游ゴシック"/>
+                          <a:ea typeface="游ゴシック"/>
+                          <a:cs typeface="游ゴシック"/>
+                        </a:rPr>
+                        <a:t>低水分が縮合を後押し。重質化し得る形（原理上）で下流へ運ばれる。</a:t>
+                      </a:r>
+                    </a:p>
+                  </a:txBody>
+                  <a:tcPr anchor="ctr" marT="27432" marB="27432" marL="54864">
+                    <a:solidFill>
+                      <a:srgbClr val="FFFFFF"/>
+                    </a:solidFill>
+                  </a:tcPr>
+                </a:tc>
+              </a:tr>
+              <a:tr h="542925">
+                <a:tc>
+                  <a:txBody>
+                    <a:bodyPr/>
+                    <a:lstStyle/>
+                    <a:p>
+                      <a:r>
+                        <a:rPr sz="1050" b="1">
+                          <a:solidFill>
+                            <a:srgbClr val="003F7E"/>
+                          </a:solidFill>
+                          <a:latin typeface="游ゴシック"/>
+                          <a:ea typeface="游ゴシック"/>
+                          <a:cs typeface="游ゴシック"/>
+                        </a:rPr>
+                        <a:t>MEG精製系 (C-1501/1502)</a:t>
+                      </a:r>
+                    </a:p>
+                  </a:txBody>
+                  <a:tcPr anchor="ctr" marT="27432" marB="27432" marL="54864">
+                    <a:solidFill>
+                      <a:srgbClr val="D7E0E5"/>
+                    </a:solidFill>
+                  </a:tcPr>
+                </a:tc>
+                <a:tc>
+                  <a:txBody>
+                    <a:bodyPr/>
+                    <a:lstStyle/>
+                    <a:p>
+                      <a:pPr algn="ctr"/>
+                      <a:r>
+                        <a:rPr sz="1500" b="1">
+                          <a:solidFill>
+                            <a:srgbClr val="003F7E"/>
+                          </a:solidFill>
+                          <a:latin typeface="游ゴシック"/>
+                          <a:ea typeface="游ゴシック"/>
+                          <a:cs typeface="游ゴシック"/>
+                        </a:rPr>
+                        <a:t>○</a:t>
+                      </a:r>
+                    </a:p>
+                  </a:txBody>
+                  <a:tcPr anchor="ctr" marT="27432" marB="27432" marL="54864">
+                    <a:solidFill>
+                      <a:srgbClr val="FFFFFF"/>
+                    </a:solidFill>
+                  </a:tcPr>
+                </a:tc>
+                <a:tc>
+                  <a:txBody>
+                    <a:bodyPr/>
+                    <a:lstStyle/>
+                    <a:p>
+                      <a:r>
+                        <a:rPr sz="1000" b="0">
+                          <a:solidFill>
+                            <a:srgbClr val="222222"/>
+                          </a:solidFill>
+                          <a:latin typeface="游ゴシック"/>
+                          <a:ea typeface="游ゴシック"/>
+                          <a:cs typeface="游ゴシック"/>
+                        </a:rPr>
+                        <a:t>活性金属なし＝着色の生成場でない。C-1502の見かけ生成は循環由来の通過点（循環解釈は収支依存で要追検証）。</a:t>
+                      </a:r>
+                    </a:p>
+                  </a:txBody>
+                  <a:tcPr anchor="ctr" marT="27432" marB="27432" marL="54864">
+                    <a:solidFill>
+                      <a:srgbClr val="FFFFFF"/>
+                    </a:solidFill>
+                  </a:tcPr>
+                </a:tc>
+              </a:tr>
+              <a:tr h="542925">
+                <a:tc>
+                  <a:txBody>
+                    <a:bodyPr/>
+                    <a:lstStyle/>
+                    <a:p>
+                      <a:r>
+                        <a:rPr sz="1050" b="1">
+                          <a:solidFill>
+                            <a:srgbClr val="003F7E"/>
+                          </a:solidFill>
+                          <a:latin typeface="游ゴシック"/>
+                          <a:ea typeface="游ゴシック"/>
+                          <a:cs typeface="游ゴシック"/>
+                        </a:rPr>
+                        <a:t>DEG精製系 (C-1503)</a:t>
+                      </a:r>
+                    </a:p>
+                  </a:txBody>
+                  <a:tcPr anchor="ctr" marT="27432" marB="27432" marL="54864">
+                    <a:solidFill>
+                      <a:srgbClr val="D7E0E5"/>
+                    </a:solidFill>
+                  </a:tcPr>
+                </a:tc>
+                <a:tc>
+                  <a:txBody>
+                    <a:bodyPr/>
+                    <a:lstStyle/>
+                    <a:p>
+                      <a:pPr algn="ctr"/>
+                      <a:r>
+                        <a:rPr sz="1500" b="1">
+                          <a:solidFill>
+                            <a:srgbClr val="005BAB"/>
+                          </a:solidFill>
+                          <a:latin typeface="游ゴシック"/>
+                          <a:ea typeface="游ゴシック"/>
+                          <a:cs typeface="游ゴシック"/>
+                        </a:rPr>
+                        <a:t>◎</a:t>
+                      </a:r>
+                    </a:p>
+                  </a:txBody>
+                  <a:tcPr anchor="ctr" marT="27432" marB="27432" marL="54864">
+                    <a:solidFill>
+                      <a:srgbClr val="FFFFFF"/>
+                    </a:solidFill>
+                  </a:tcPr>
+                </a:tc>
+                <a:tc>
+                  <a:txBody>
+                    <a:bodyPr/>
+                    <a:lstStyle/>
+                    <a:p>
+                      <a:r>
+                        <a:rPr sz="1000" b="0">
+                          <a:solidFill>
+                            <a:srgbClr val="222222"/>
+                          </a:solidFill>
+                          <a:latin typeface="游ゴシック"/>
+                          <a:ea typeface="游ゴシック"/>
+                          <a:cs typeface="游ゴシック"/>
+                        </a:rPr>
+                        <a:t>前駆体が生成する場。鉄サビ・付着物は450nmの主因でない（局所380nm）。</a:t>
+                      </a:r>
+                    </a:p>
+                  </a:txBody>
+                  <a:tcPr anchor="ctr" marT="27432" marB="27432" marL="54864">
+                    <a:solidFill>
+                      <a:srgbClr val="FFFFFF"/>
+                    </a:solidFill>
+                  </a:tcPr>
+                </a:tc>
+              </a:tr>
+              <a:tr h="542925">
+                <a:tc>
+                  <a:txBody>
+                    <a:bodyPr/>
+                    <a:lstStyle/>
+                    <a:p>
+                      <a:r>
+                        <a:rPr sz="1050" b="1">
+                          <a:solidFill>
+                            <a:srgbClr val="003F7E"/>
+                          </a:solidFill>
+                          <a:latin typeface="游ゴシック"/>
+                          <a:ea typeface="游ゴシック"/>
+                          <a:cs typeface="游ゴシック"/>
+                        </a:rPr>
+                        <a:t>製品タンク (T-555)</a:t>
+                      </a:r>
+                    </a:p>
+                  </a:txBody>
+                  <a:tcPr anchor="ctr" marT="27432" marB="27432" marL="54864">
+                    <a:solidFill>
+                      <a:srgbClr val="D7E0E5"/>
+                    </a:solidFill>
+                  </a:tcPr>
+                </a:tc>
+                <a:tc>
+                  <a:txBody>
+                    <a:bodyPr/>
+                    <a:lstStyle/>
+                    <a:p>
+                      <a:pPr algn="ctr"/>
+                      <a:r>
+                        <a:rPr sz="1500" b="1">
+                          <a:solidFill>
+                            <a:srgbClr val="005BAB"/>
+                          </a:solidFill>
+                          <a:latin typeface="游ゴシック"/>
+                          <a:ea typeface="游ゴシック"/>
+                          <a:cs typeface="游ゴシック"/>
+                        </a:rPr>
+                        <a:t>◎</a:t>
+                      </a:r>
+                    </a:p>
+                  </a:txBody>
+                  <a:tcPr anchor="ctr" marT="27432" marB="27432" marL="54864">
+                    <a:solidFill>
+                      <a:srgbClr val="FFFFFF"/>
+                    </a:solidFill>
+                  </a:tcPr>
+                </a:tc>
+                <a:tc>
+                  <a:txBody>
+                    <a:bodyPr/>
+                    <a:lstStyle/>
+                    <a:p>
+                      <a:r>
+                        <a:rPr sz="1000" b="0">
+                          <a:solidFill>
+                            <a:srgbClr val="222222"/>
+                          </a:solidFill>
+                          <a:latin typeface="游ゴシック"/>
+                          <a:ea typeface="游ゴシック"/>
+                          <a:cs typeface="游ゴシック"/>
+                        </a:rPr>
+                        <a:t>着色が成長＝熟成の場。窒素で進行・大気で抑制。</a:t>
+                      </a:r>
+                    </a:p>
+                  </a:txBody>
+                  <a:tcPr anchor="ctr" marT="27432" marB="27432" marL="54864">
+                    <a:solidFill>
+                      <a:srgbClr val="FFFFFF"/>
+                    </a:solidFill>
+                  </a:tcPr>
+                </a:tc>
+              </a:tr>
+            </a:tbl>
+          </a:graphicData>
+        </a:graphic>
+      </p:graphicFrame>
     </p:spTree>
   </p:cSld>
   <p:clrMapOvr>
@@ -17126,7 +17436,7 @@
                 <a:ea typeface="游ゴシック"/>
                 <a:cs typeface="游ゴシック"/>
               </a:rPr>
-              <a:t>設備（鉄サビ）は色相の主因ではない</a:t>
+              <a:t>なぜ今回だけ起きたか（条件の重なり）</a:t>
             </a:r>
           </a:p>
         </p:txBody>
@@ -17139,8 +17449,8 @@
         </p:nvSpPr>
         <p:spPr>
           <a:xfrm>
-            <a:off x="548640" y="1371600"/>
-            <a:ext cx="11064240" cy="4937760"/>
+            <a:off x="548640" y="1325880"/>
+            <a:ext cx="11064240" cy="457200"/>
           </a:xfrm>
           <a:prstGeom prst="rect">
             <a:avLst/>
@@ -17158,11 +17468,79 @@
                 <a:spcPts val="0"/>
               </a:spcBef>
               <a:spcAft>
-                <a:spcPts val="1100"/>
+                <a:spcPts val="400"/>
               </a:spcAft>
             </a:pPr>
             <a:r>
-              <a:rPr sz="1350" b="0">
+              <a:rPr sz="1250" b="0">
+                <a:solidFill>
+                  <a:srgbClr val="666666"/>
+                </a:solidFill>
+                <a:latin typeface="游ゴシック"/>
+                <a:ea typeface="游ゴシック"/>
+                <a:cs typeface="游ゴシック"/>
+              </a:rPr>
+              <a:t>過去にもアルデヒドが高い時期はあったが、今回は反応させてしまう条件がそろった。</a:t>
+            </a:r>
+          </a:p>
+        </p:txBody>
+      </p:sp>
+      <p:sp>
+        <p:nvSpPr>
+          <p:cNvPr id="4" name="Rounded Rectangle 3"/>
+          <p:cNvSpPr/>
+          <p:nvPr/>
+        </p:nvSpPr>
+        <p:spPr>
+          <a:xfrm>
+            <a:off x="548640" y="1874519"/>
+            <a:ext cx="11064240" cy="960120"/>
+          </a:xfrm>
+          <a:prstGeom prst="roundRect">
+            <a:avLst/>
+          </a:prstGeom>
+          <a:solidFill>
+            <a:srgbClr val="EBEFF2"/>
+          </a:solidFill>
+          <a:ln w="12700">
+            <a:solidFill>
+              <a:srgbClr val="C9D2D8"/>
+            </a:solidFill>
+          </a:ln>
+          <a:effectLst/>
+        </p:spPr>
+        <p:style>
+          <a:lnRef idx="1">
+            <a:schemeClr val="accent1"/>
+          </a:lnRef>
+          <a:fillRef idx="3">
+            <a:schemeClr val="accent1"/>
+          </a:fillRef>
+          <a:effectRef idx="2">
+            <a:schemeClr val="accent1"/>
+          </a:effectRef>
+          <a:fontRef idx="minor">
+            <a:schemeClr val="lt1"/>
+          </a:fontRef>
+        </p:style>
+        <p:txBody>
+          <a:bodyPr rtlCol="0" anchor="ctr" wrap="square" lIns="128016"/>
+          <a:lstStyle/>
+          <a:p>
+            <a:pPr algn="ctr"/>
+            <a:r>
+              <a:rPr sz="1300" b="1">
+                <a:solidFill>
+                  <a:srgbClr val="003F7E"/>
+                </a:solidFill>
+                <a:latin typeface="游ゴシック"/>
+                <a:ea typeface="游ゴシック"/>
+                <a:cs typeface="游ゴシック"/>
+              </a:rPr>
+              <a:t>【アルデヒドが多かった（必要条件）】 </a:t>
+            </a:r>
+            <a:r>
+              <a:rPr sz="1150">
                 <a:solidFill>
                   <a:srgbClr val="222222"/>
                 </a:solidFill>
@@ -17170,20 +17548,80 @@
                 <a:ea typeface="游ゴシック"/>
                 <a:cs typeface="游ゴシック"/>
               </a:rPr>
-              <a:t>・C-1503トップに黒色付着物（XRFでほぼ鉄＝サビ）。水抽出からギ酸・グリコール酸を検出＝局所で有機酸が生じ腐食したものと整合。</a:t>
-            </a:r>
-          </a:p>
-          <a:p>
-            <a:pPr>
-              <a:spcBef>
-                <a:spcPts val="0"/>
-              </a:spcBef>
-              <a:spcAft>
-                <a:spcPts val="1100"/>
-              </a:spcAft>
-            </a:pPr>
-            <a:r>
-              <a:rPr sz="1350" b="0">
+              <a:t>触媒選択性低下でA-ALD・F-ALDが増加（A-ALD/EO=0.78kg/t、過去実績の上位）。種となるアルデヒドの絶対量が多かった。</a:t>
+            </a:r>
+          </a:p>
+          <a:p>
+            <a:r>
+              <a:rPr sz="1150" b="1">
+                <a:solidFill>
+                  <a:srgbClr val="005BAB"/>
+                </a:solidFill>
+                <a:latin typeface="游ゴシック"/>
+                <a:ea typeface="游ゴシック"/>
+                <a:cs typeface="游ゴシック"/>
+              </a:rPr>
+              <a:t>→ 触媒交換で除去</a:t>
+            </a:r>
+          </a:p>
+        </p:txBody>
+      </p:sp>
+      <p:sp>
+        <p:nvSpPr>
+          <p:cNvPr id="5" name="Rounded Rectangle 4"/>
+          <p:cNvSpPr/>
+          <p:nvPr/>
+        </p:nvSpPr>
+        <p:spPr>
+          <a:xfrm>
+            <a:off x="548640" y="2935224"/>
+            <a:ext cx="11064240" cy="960120"/>
+          </a:xfrm>
+          <a:prstGeom prst="roundRect">
+            <a:avLst/>
+          </a:prstGeom>
+          <a:solidFill>
+            <a:srgbClr val="EBEFF2"/>
+          </a:solidFill>
+          <a:ln w="12700">
+            <a:solidFill>
+              <a:srgbClr val="C9D2D8"/>
+            </a:solidFill>
+          </a:ln>
+          <a:effectLst/>
+        </p:spPr>
+        <p:style>
+          <a:lnRef idx="1">
+            <a:schemeClr val="accent1"/>
+          </a:lnRef>
+          <a:fillRef idx="3">
+            <a:schemeClr val="accent1"/>
+          </a:fillRef>
+          <a:effectRef idx="2">
+            <a:schemeClr val="accent1"/>
+          </a:effectRef>
+          <a:fontRef idx="minor">
+            <a:schemeClr val="lt1"/>
+          </a:fontRef>
+        </p:style>
+        <p:txBody>
+          <a:bodyPr rtlCol="0" anchor="ctr" wrap="square" lIns="128016"/>
+          <a:lstStyle/>
+          <a:p>
+            <a:pPr algn="ctr"/>
+            <a:r>
+              <a:rPr sz="1300" b="1">
+                <a:solidFill>
+                  <a:srgbClr val="003F7E"/>
+                </a:solidFill>
+                <a:latin typeface="游ゴシック"/>
+                <a:ea typeface="游ゴシック"/>
+                <a:cs typeface="游ゴシック"/>
+              </a:rPr>
+              <a:t>【水分が少ない条件だった（促進）】 </a:t>
+            </a:r>
+            <a:r>
+              <a:rPr sz="1150">
                 <a:solidFill>
                   <a:srgbClr val="222222"/>
                 </a:solidFill>
@@ -17191,20 +17629,80 @@
                 <a:ea typeface="游ゴシック"/>
                 <a:cs typeface="游ゴシック"/>
               </a:rPr>
-              <a:t>・この付着物をDEGに共存させてもλmax380nmが出るのみで、実機の450nmは再現しない。蒸留DEGの短時間保管でも450nmは出ない。</a:t>
-            </a:r>
-          </a:p>
-          <a:p>
-            <a:pPr>
-              <a:spcBef>
-                <a:spcPts val="0"/>
-              </a:spcBef>
-              <a:spcAft>
-                <a:spcPts val="1100"/>
-              </a:spcAft>
-            </a:pPr>
-            <a:r>
-              <a:rPr sz="1350" b="0">
+              <a:t>脱水・縮合は水があると進みにくい平衡反応。脱水塔ボトムが低水分で縮合が進みやすかった。</a:t>
+            </a:r>
+          </a:p>
+          <a:p>
+            <a:r>
+              <a:rPr sz="1150" b="1">
+                <a:solidFill>
+                  <a:srgbClr val="005BAB"/>
+                </a:solidFill>
+                <a:latin typeface="游ゴシック"/>
+                <a:ea typeface="游ゴシック"/>
+                <a:cs typeface="游ゴシック"/>
+              </a:rPr>
+              <a:t>→ 水分管理で確認</a:t>
+            </a:r>
+          </a:p>
+        </p:txBody>
+      </p:sp>
+      <p:sp>
+        <p:nvSpPr>
+          <p:cNvPr id="6" name="Rounded Rectangle 5"/>
+          <p:cNvSpPr/>
+          <p:nvPr/>
+        </p:nvSpPr>
+        <p:spPr>
+          <a:xfrm>
+            <a:off x="548640" y="3995928"/>
+            <a:ext cx="11064240" cy="960120"/>
+          </a:xfrm>
+          <a:prstGeom prst="roundRect">
+            <a:avLst/>
+          </a:prstGeom>
+          <a:solidFill>
+            <a:srgbClr val="EBEFF2"/>
+          </a:solidFill>
+          <a:ln w="12700">
+            <a:solidFill>
+              <a:srgbClr val="C9D2D8"/>
+            </a:solidFill>
+          </a:ln>
+          <a:effectLst/>
+        </p:spPr>
+        <p:style>
+          <a:lnRef idx="1">
+            <a:schemeClr val="accent1"/>
+          </a:lnRef>
+          <a:fillRef idx="3">
+            <a:schemeClr val="accent1"/>
+          </a:fillRef>
+          <a:effectRef idx="2">
+            <a:schemeClr val="accent1"/>
+          </a:effectRef>
+          <a:fontRef idx="minor">
+            <a:schemeClr val="lt1"/>
+          </a:fontRef>
+        </p:style>
+        <p:txBody>
+          <a:bodyPr rtlCol="0" anchor="ctr" wrap="square" lIns="128016"/>
+          <a:lstStyle/>
+          <a:p>
+            <a:pPr algn="ctr"/>
+            <a:r>
+              <a:rPr sz="1300" b="1">
+                <a:solidFill>
+                  <a:srgbClr val="003F7E"/>
+                </a:solidFill>
+                <a:latin typeface="游ゴシック"/>
+                <a:ea typeface="游ゴシック"/>
+                <a:cs typeface="游ゴシック"/>
+              </a:rPr>
+              <a:t>【塩基条件（苛性ソーダ）が後押し（促進）】 </a:t>
+            </a:r>
+            <a:r>
+              <a:rPr sz="1150">
                 <a:solidFill>
                   <a:srgbClr val="222222"/>
                 </a:solidFill>
@@ -17212,20 +17710,69 @@
                 <a:ea typeface="游ゴシック"/>
                 <a:cs typeface="游ゴシック"/>
               </a:rPr>
-              <a:t>・T-555タンク内の異物も鉄サビだが、残液は5/18時点のAPHA30から上昇していない。</a:t>
-            </a:r>
-          </a:p>
-          <a:p>
-            <a:pPr>
-              <a:spcBef>
-                <a:spcPts val="0"/>
-              </a:spcBef>
-              <a:spcAft>
-                <a:spcPts val="1100"/>
-              </a:spcAft>
-            </a:pPr>
-            <a:r>
-              <a:rPr sz="1350" b="1">
+              <a:t>NaOHの塩基がアルドール縮合を促進する側に働いた（NaOH→リン酸Na切替で330nm低下と整合）。</a:t>
+            </a:r>
+          </a:p>
+          <a:p>
+            <a:r>
+              <a:rPr sz="1150" b="1">
+                <a:solidFill>
+                  <a:srgbClr val="005BAB"/>
+                </a:solidFill>
+                <a:latin typeface="游ゴシック"/>
+                <a:ea typeface="游ゴシック"/>
+                <a:cs typeface="游ゴシック"/>
+              </a:rPr>
+              <a:t>→ SU時はNaOH非投入</a:t>
+            </a:r>
+          </a:p>
+        </p:txBody>
+      </p:sp>
+      <p:sp>
+        <p:nvSpPr>
+          <p:cNvPr id="7" name="Rounded Rectangle 6"/>
+          <p:cNvSpPr/>
+          <p:nvPr/>
+        </p:nvSpPr>
+        <p:spPr>
+          <a:xfrm>
+            <a:off x="548640" y="5056632"/>
+            <a:ext cx="11064240" cy="960120"/>
+          </a:xfrm>
+          <a:prstGeom prst="roundRect">
+            <a:avLst/>
+          </a:prstGeom>
+          <a:solidFill>
+            <a:srgbClr val="EBEFF2"/>
+          </a:solidFill>
+          <a:ln w="12700">
+            <a:solidFill>
+              <a:srgbClr val="C9D2D8"/>
+            </a:solidFill>
+          </a:ln>
+          <a:effectLst/>
+        </p:spPr>
+        <p:style>
+          <a:lnRef idx="1">
+            <a:schemeClr val="accent1"/>
+          </a:lnRef>
+          <a:fillRef idx="3">
+            <a:schemeClr val="accent1"/>
+          </a:fillRef>
+          <a:effectRef idx="2">
+            <a:schemeClr val="accent1"/>
+          </a:effectRef>
+          <a:fontRef idx="minor">
+            <a:schemeClr val="lt1"/>
+          </a:fontRef>
+        </p:style>
+        <p:txBody>
+          <a:bodyPr rtlCol="0" anchor="ctr" wrap="square" lIns="128016"/>
+          <a:lstStyle/>
+          <a:p>
+            <a:pPr algn="ctr"/>
+            <a:r>
+              <a:rPr sz="1300" b="1">
                 <a:solidFill>
                   <a:srgbClr val="003F7E"/>
                 </a:solidFill>
@@ -17233,7 +17780,31 @@
                 <a:ea typeface="游ゴシック"/>
                 <a:cs typeface="游ゴシック"/>
               </a:rPr>
-              <a:t>・以上より、鉄サビ・付着物は色相（450nm）を進める触媒ではなく、寄与は局所の腐食・380nmにとどまる（主因ではない）。保管試験・残液分析という実測で判断している。金属が無くてもアルデヒドとpHだけで着色は説明できる。付着物は予防保全として洗浄する。</a:t>
+              <a:t>【DEG留分には樹脂（IER）が無い（DEG特有・除去機構の欠如）】 </a:t>
+            </a:r>
+            <a:r>
+              <a:rPr sz="1150">
+                <a:solidFill>
+                  <a:srgbClr val="222222"/>
+                </a:solidFill>
+                <a:latin typeface="游ゴシック"/>
+                <a:ea typeface="游ゴシック"/>
+                <a:cs typeface="游ゴシック"/>
+              </a:rPr>
+              <a:t>MEG・TEGはイオン交換樹脂で前駆体を除去して製品を安定化できるが、DEG留分には樹脂が無く前駆体がそのまま製品に持ち込まれる。</a:t>
+            </a:r>
+          </a:p>
+          <a:p>
+            <a:r>
+              <a:rPr sz="1150" b="1">
+                <a:solidFill>
+                  <a:srgbClr val="005BAB"/>
+                </a:solidFill>
+                <a:latin typeface="游ゴシック"/>
+                <a:ea typeface="游ゴシック"/>
+                <a:cs typeface="游ゴシック"/>
+              </a:rPr>
+              <a:t>→ 出口でDEGラインIERを検討</a:t>
             </a:r>
           </a:p>
         </p:txBody>
@@ -17247,6 +17818,228 @@
 </file>
 
 <file path=ppt/slides/slide16.xml><?xml version="1.0" encoding="utf-8"?>
+<p:sld xmlns:a="http://schemas.openxmlformats.org/drawingml/2006/main" xmlns:p="http://schemas.openxmlformats.org/presentationml/2006/main" xmlns:r="http://schemas.openxmlformats.org/officeDocument/2006/relationships">
+  <p:cSld>
+    <p:spTree>
+      <p:nvGrpSpPr>
+        <p:cNvPr id="1" name=""/>
+        <p:cNvGrpSpPr/>
+        <p:nvPr/>
+      </p:nvGrpSpPr>
+      <p:grpSpPr/>
+      <p:sp>
+        <p:nvSpPr>
+          <p:cNvPr id="2" name="Title 1"/>
+          <p:cNvSpPr>
+            <a:spLocks noGrp="1"/>
+          </p:cNvSpPr>
+          <p:nvPr>
+            <p:ph type="title"/>
+          </p:nvPr>
+        </p:nvSpPr>
+        <p:spPr/>
+        <p:txBody>
+          <a:bodyPr/>
+          <a:lstStyle/>
+          <a:p>
+            <a:r>
+              <a:rPr sz="2200" b="1">
+                <a:solidFill>
+                  <a:srgbClr val="003F7E"/>
+                </a:solidFill>
+                <a:latin typeface="游ゴシック"/>
+                <a:ea typeface="游ゴシック"/>
+                <a:cs typeface="游ゴシック"/>
+              </a:rPr>
+              <a:t>設備（鉄サビ）は色相の主因ではない</a:t>
+            </a:r>
+          </a:p>
+        </p:txBody>
+      </p:sp>
+      <p:sp>
+        <p:nvSpPr>
+          <p:cNvPr id="3" name="TextBox 2"/>
+          <p:cNvSpPr txBox="1"/>
+          <p:nvPr/>
+        </p:nvSpPr>
+        <p:spPr>
+          <a:xfrm>
+            <a:off x="502920" y="1371600"/>
+            <a:ext cx="6400800" cy="4937760"/>
+          </a:xfrm>
+          <a:prstGeom prst="rect">
+            <a:avLst/>
+          </a:prstGeom>
+          <a:noFill/>
+        </p:spPr>
+        <p:txBody>
+          <a:bodyPr wrap="square">
+            <a:spAutoFit/>
+          </a:bodyPr>
+          <a:lstStyle/>
+          <a:p>
+            <a:pPr>
+              <a:spcBef>
+                <a:spcPts val="0"/>
+              </a:spcBef>
+              <a:spcAft>
+                <a:spcPts val="1200"/>
+              </a:spcAft>
+            </a:pPr>
+            <a:r>
+              <a:rPr sz="1200" b="0">
+                <a:solidFill>
+                  <a:srgbClr val="222222"/>
+                </a:solidFill>
+                <a:latin typeface="游ゴシック"/>
+                <a:ea typeface="游ゴシック"/>
+                <a:cs typeface="游ゴシック"/>
+              </a:rPr>
+              <a:t>・C-1503トップに黒色付着物（XRFでほぼ鉄＝サビ）。水抽出からギ酸・グリコール酸を検出＝局所で有機酸が生じ腐食したものと整合。</a:t>
+            </a:r>
+          </a:p>
+          <a:p>
+            <a:pPr>
+              <a:spcBef>
+                <a:spcPts val="0"/>
+              </a:spcBef>
+              <a:spcAft>
+                <a:spcPts val="1200"/>
+              </a:spcAft>
+            </a:pPr>
+            <a:r>
+              <a:rPr sz="1200" b="0">
+                <a:solidFill>
+                  <a:srgbClr val="222222"/>
+                </a:solidFill>
+                <a:latin typeface="游ゴシック"/>
+                <a:ea typeface="游ゴシック"/>
+                <a:cs typeface="游ゴシック"/>
+              </a:rPr>
+              <a:t>・この付着物をDEGに共存させてもλmax380nmが出るのみで、実機の450nmは再現しない。蒸留DEGの短時間保管でも450nmは出ない。</a:t>
+            </a:r>
+          </a:p>
+          <a:p>
+            <a:pPr>
+              <a:spcBef>
+                <a:spcPts val="0"/>
+              </a:spcBef>
+              <a:spcAft>
+                <a:spcPts val="1200"/>
+              </a:spcAft>
+            </a:pPr>
+            <a:r>
+              <a:rPr sz="1200" b="0">
+                <a:solidFill>
+                  <a:srgbClr val="222222"/>
+                </a:solidFill>
+                <a:latin typeface="游ゴシック"/>
+                <a:ea typeface="游ゴシック"/>
+                <a:cs typeface="游ゴシック"/>
+              </a:rPr>
+              <a:t>・T-555タンク内の異物も鉄サビだが、残液は5/18時点のAPHA30から上昇していない。</a:t>
+            </a:r>
+          </a:p>
+          <a:p>
+            <a:pPr>
+              <a:spcBef>
+                <a:spcPts val="0"/>
+              </a:spcBef>
+              <a:spcAft>
+                <a:spcPts val="1200"/>
+              </a:spcAft>
+            </a:pPr>
+            <a:r>
+              <a:rPr sz="1200" b="1">
+                <a:solidFill>
+                  <a:srgbClr val="003F7E"/>
+                </a:solidFill>
+                <a:latin typeface="游ゴシック"/>
+                <a:ea typeface="游ゴシック"/>
+                <a:cs typeface="游ゴシック"/>
+              </a:rPr>
+              <a:t>・以上より、鉄サビ・付着物は色相（450nm）を進める触媒ではなく、寄与は局所の腐食・380nmにとどまる（主因ではない）。保管試験・残液分析という実測で判断している。金属が無くてもアルデヒドとpHだけで着色は説明できる。付着物は予防保全として洗浄する。</a:t>
+            </a:r>
+          </a:p>
+        </p:txBody>
+      </p:sp>
+      <p:pic>
+        <p:nvPicPr>
+          <p:cNvPr id="4" name="Picture 3" descr="uv_spectrum.png"/>
+          <p:cNvPicPr>
+            <a:picLocks noChangeAspect="1"/>
+          </p:cNvPicPr>
+          <p:nvPr/>
+        </p:nvPicPr>
+        <p:blipFill>
+          <a:blip r:embed="rId2"/>
+          <a:stretch>
+            <a:fillRect/>
+          </a:stretch>
+        </p:blipFill>
+        <p:spPr>
+          <a:xfrm>
+            <a:off x="7040880" y="2057400"/>
+            <a:ext cx="4937760" cy="2834481"/>
+          </a:xfrm>
+          <a:prstGeom prst="rect">
+            <a:avLst/>
+          </a:prstGeom>
+        </p:spPr>
+      </p:pic>
+      <p:sp>
+        <p:nvSpPr>
+          <p:cNvPr id="5" name="TextBox 4"/>
+          <p:cNvSpPr txBox="1"/>
+          <p:nvPr/>
+        </p:nvSpPr>
+        <p:spPr>
+          <a:xfrm>
+            <a:off x="7040880" y="5074920"/>
+            <a:ext cx="4937760" cy="731520"/>
+          </a:xfrm>
+          <a:prstGeom prst="rect">
+            <a:avLst/>
+          </a:prstGeom>
+          <a:noFill/>
+        </p:spPr>
+        <p:txBody>
+          <a:bodyPr wrap="square">
+            <a:spAutoFit/>
+          </a:bodyPr>
+          <a:lstStyle/>
+          <a:p>
+            <a:pPr>
+              <a:spcBef>
+                <a:spcPts val="0"/>
+              </a:spcBef>
+              <a:spcAft>
+                <a:spcPts val="400"/>
+              </a:spcAft>
+            </a:pPr>
+            <a:r>
+              <a:rPr sz="1050" b="1">
+                <a:solidFill>
+                  <a:srgbClr val="003F7E"/>
+                </a:solidFill>
+                <a:latin typeface="游ゴシック"/>
+                <a:ea typeface="游ゴシック"/>
+                <a:cs typeface="游ゴシック"/>
+              </a:rPr>
+              <a:t>付着物は380nmのみ・実機は450nm＝別現象（保管試験で確認）</a:t>
+            </a:r>
+          </a:p>
+        </p:txBody>
+      </p:sp>
+    </p:spTree>
+  </p:cSld>
+  <p:clrMapOvr>
+    <a:masterClrMapping/>
+  </p:clrMapOvr>
+</p:sld>
+</file>
+
+<file path=ppt/slides/slide17.xml><?xml version="1.0" encoding="utf-8"?>
 <p:sld xmlns:a="http://schemas.openxmlformats.org/drawingml/2006/main" xmlns:p="http://schemas.openxmlformats.org/presentationml/2006/main" xmlns:r="http://schemas.openxmlformats.org/officeDocument/2006/relationships">
   <p:cSld>
     <p:spTree>
@@ -17763,317 +18556,6 @@
 </p:sld>
 </file>
 
-<file path=ppt/slides/slide17.xml><?xml version="1.0" encoding="utf-8"?>
-<p:sld xmlns:a="http://schemas.openxmlformats.org/drawingml/2006/main" xmlns:p="http://schemas.openxmlformats.org/presentationml/2006/main" xmlns:r="http://schemas.openxmlformats.org/officeDocument/2006/relationships">
-  <p:cSld>
-    <p:spTree>
-      <p:nvGrpSpPr>
-        <p:cNvPr id="1" name=""/>
-        <p:cNvGrpSpPr/>
-        <p:nvPr/>
-      </p:nvGrpSpPr>
-      <p:grpSpPr/>
-      <p:sp>
-        <p:nvSpPr>
-          <p:cNvPr id="2" name="Title 1"/>
-          <p:cNvSpPr>
-            <a:spLocks noGrp="1"/>
-          </p:cNvSpPr>
-          <p:nvPr>
-            <p:ph type="title"/>
-          </p:nvPr>
-        </p:nvSpPr>
-        <p:spPr/>
-        <p:txBody>
-          <a:bodyPr/>
-          <a:lstStyle/>
-          <a:p>
-            <a:r>
-              <a:rPr sz="2200" b="1">
-                <a:solidFill>
-                  <a:srgbClr val="003F7E"/>
-                </a:solidFill>
-                <a:latin typeface="游ゴシック"/>
-                <a:ea typeface="游ゴシック"/>
-                <a:cs typeface="游ゴシック"/>
-              </a:rPr>
-              <a:t>対応（再発防止・スタートアップ運転条件）</a:t>
-            </a:r>
-          </a:p>
-        </p:txBody>
-      </p:sp>
-      <p:sp>
-        <p:nvSpPr>
-          <p:cNvPr id="3" name="TextBox 2"/>
-          <p:cNvSpPr txBox="1"/>
-          <p:nvPr/>
-        </p:nvSpPr>
-        <p:spPr>
-          <a:xfrm>
-            <a:off x="548640" y="1371600"/>
-            <a:ext cx="11064240" cy="4937760"/>
-          </a:xfrm>
-          <a:prstGeom prst="rect">
-            <a:avLst/>
-          </a:prstGeom>
-          <a:noFill/>
-        </p:spPr>
-        <p:txBody>
-          <a:bodyPr wrap="square">
-            <a:spAutoFit/>
-          </a:bodyPr>
-          <a:lstStyle/>
-          <a:p/>
-          <a:p>
-            <a:pPr>
-              <a:spcAft>
-                <a:spcPts val="800"/>
-              </a:spcAft>
-            </a:pPr>
-            <a:r>
-              <a:rPr sz="1300" b="1">
-                <a:solidFill>
-                  <a:srgbClr val="003F7E"/>
-                </a:solidFill>
-                <a:latin typeface="游ゴシック"/>
-                <a:ea typeface="游ゴシック"/>
-                <a:cs typeface="游ゴシック"/>
-              </a:rPr>
-              <a:t>【触媒交換（原因除去）】 </a:t>
-            </a:r>
-            <a:r>
-              <a:rPr sz="1200">
-                <a:solidFill>
-                  <a:srgbClr val="222222"/>
-                </a:solidFill>
-                <a:latin typeface="游ゴシック"/>
-                <a:ea typeface="游ゴシック"/>
-                <a:cs typeface="游ゴシック"/>
-              </a:rPr>
-              <a:t>計画停止で触媒交換済。アルデヒド類の生成を抑える。 </a:t>
-            </a:r>
-            <a:r>
-              <a:rPr sz="1150" b="1">
-                <a:solidFill>
-                  <a:srgbClr val="005BAB"/>
-                </a:solidFill>
-                <a:latin typeface="游ゴシック"/>
-                <a:ea typeface="游ゴシック"/>
-                <a:cs typeface="游ゴシック"/>
-              </a:rPr>
-              <a:t>（実施済）</a:t>
-            </a:r>
-          </a:p>
-          <a:p>
-            <a:pPr>
-              <a:spcAft>
-                <a:spcPts val="800"/>
-              </a:spcAft>
-            </a:pPr>
-            <a:r>
-              <a:rPr sz="1300" b="1">
-                <a:solidFill>
-                  <a:srgbClr val="003F7E"/>
-                </a:solidFill>
-                <a:latin typeface="游ゴシック"/>
-                <a:ea typeface="游ゴシック"/>
-                <a:cs typeface="游ゴシック"/>
-              </a:rPr>
-              <a:t>【タンク・配管の洗浄】 </a:t>
-            </a:r>
-            <a:r>
-              <a:rPr sz="1200">
-                <a:solidFill>
-                  <a:srgbClr val="222222"/>
-                </a:solidFill>
-                <a:latin typeface="游ゴシック"/>
-                <a:ea typeface="游ゴシック"/>
-                <a:cs typeface="游ゴシック"/>
-              </a:rPr>
-              <a:t>色相上昇を確認したタンク等を開放・洗浄し付着物を除去、保管設備を健全化。 </a:t>
-            </a:r>
-            <a:r>
-              <a:rPr sz="1150" b="1">
-                <a:solidFill>
-                  <a:srgbClr val="005BAB"/>
-                </a:solidFill>
-                <a:latin typeface="游ゴシック"/>
-                <a:ea typeface="游ゴシック"/>
-                <a:cs typeface="游ゴシック"/>
-              </a:rPr>
-              <a:t>（実施済）</a:t>
-            </a:r>
-          </a:p>
-          <a:p>
-            <a:pPr>
-              <a:spcAft>
-                <a:spcPts val="800"/>
-              </a:spcAft>
-            </a:pPr>
-            <a:r>
-              <a:rPr sz="1300" b="1">
-                <a:solidFill>
-                  <a:srgbClr val="003F7E"/>
-                </a:solidFill>
-                <a:latin typeface="游ゴシック"/>
-                <a:ea typeface="游ゴシック"/>
-                <a:cs typeface="游ゴシック"/>
-              </a:rPr>
-              <a:t>【苛性ソーダ（NaOH）】 </a:t>
-            </a:r>
-            <a:r>
-              <a:rPr sz="1200">
-                <a:solidFill>
-                  <a:srgbClr val="222222"/>
-                </a:solidFill>
-                <a:latin typeface="游ゴシック"/>
-                <a:ea typeface="游ゴシック"/>
-                <a:cs typeface="游ゴシック"/>
-              </a:rPr>
-              <a:t>スタートアップ時は投入しないベース。アルデヒドが多い局面ではアルドール縮合を促進し得るため、触媒交換後にアルデヒド低下を確認してから要否判断。 </a:t>
-            </a:r>
-            <a:r>
-              <a:rPr sz="1150" b="1">
-                <a:solidFill>
-                  <a:srgbClr val="005BAB"/>
-                </a:solidFill>
-                <a:latin typeface="游ゴシック"/>
-                <a:ea typeface="游ゴシック"/>
-                <a:cs typeface="游ゴシック"/>
-              </a:rPr>
-              <a:t>（方針）</a:t>
-            </a:r>
-          </a:p>
-          <a:p>
-            <a:pPr>
-              <a:spcAft>
-                <a:spcPts val="800"/>
-              </a:spcAft>
-            </a:pPr>
-            <a:r>
-              <a:rPr sz="1300" b="1">
-                <a:solidFill>
-                  <a:srgbClr val="003F7E"/>
-                </a:solidFill>
-                <a:latin typeface="游ゴシック"/>
-                <a:ea typeface="游ゴシック"/>
-                <a:cs typeface="游ゴシック"/>
-              </a:rPr>
-              <a:t>【MEG塔温度】 </a:t>
-            </a:r>
-            <a:r>
-              <a:rPr sz="1200">
-                <a:solidFill>
-                  <a:srgbClr val="222222"/>
-                </a:solidFill>
-                <a:latin typeface="游ゴシック"/>
-                <a:ea typeface="游ゴシック"/>
-                <a:cs typeface="游ゴシック"/>
-              </a:rPr>
-              <a:t>下げない方針。温度を下げるとアルデヒドが分解されず前駆体として下流に回り、かえって色相側に出る懸念があるため。 </a:t>
-            </a:r>
-            <a:r>
-              <a:rPr sz="1150" b="1">
-                <a:solidFill>
-                  <a:srgbClr val="005BAB"/>
-                </a:solidFill>
-                <a:latin typeface="游ゴシック"/>
-                <a:ea typeface="游ゴシック"/>
-                <a:cs typeface="游ゴシック"/>
-              </a:rPr>
-              <a:t>（方針）</a:t>
-            </a:r>
-          </a:p>
-          <a:p>
-            <a:pPr>
-              <a:spcAft>
-                <a:spcPts val="800"/>
-              </a:spcAft>
-            </a:pPr>
-            <a:r>
-              <a:rPr sz="1300" b="1">
-                <a:solidFill>
-                  <a:srgbClr val="003F7E"/>
-                </a:solidFill>
-                <a:latin typeface="游ゴシック"/>
-                <a:ea typeface="游ゴシック"/>
-                <a:cs typeface="游ゴシック"/>
-              </a:rPr>
-              <a:t>【リン酸ナトリウム（Na₃PO₄）】 </a:t>
-            </a:r>
-            <a:r>
-              <a:rPr sz="1200">
-                <a:solidFill>
-                  <a:srgbClr val="222222"/>
-                </a:solidFill>
-                <a:latin typeface="游ゴシック"/>
-                <a:ea typeface="游ゴシック"/>
-                <a:cs typeface="游ゴシック"/>
-              </a:rPr>
-              <a:t>保管中反応の緩和策。pH低下で縮合を抑える／金属を不活性化する効きがある（効き方は要検証）。置換（払い出しを伴う入替）とセットで運用。 </a:t>
-            </a:r>
-            <a:r>
-              <a:rPr sz="1150" b="1">
-                <a:solidFill>
-                  <a:srgbClr val="005BAB"/>
-                </a:solidFill>
-                <a:latin typeface="游ゴシック"/>
-                <a:ea typeface="游ゴシック"/>
-                <a:cs typeface="游ゴシック"/>
-              </a:rPr>
-              <a:t>（緩和・要検証）</a:t>
-            </a:r>
-          </a:p>
-          <a:p>
-            <a:pPr>
-              <a:spcAft>
-                <a:spcPts val="800"/>
-              </a:spcAft>
-            </a:pPr>
-            <a:r>
-              <a:rPr sz="1300" b="1">
-                <a:solidFill>
-                  <a:srgbClr val="003F7E"/>
-                </a:solidFill>
-                <a:latin typeface="游ゴシック"/>
-                <a:ea typeface="游ゴシック"/>
-                <a:cs typeface="游ゴシック"/>
-              </a:rPr>
-              <a:t>【出口（DEGラインのIER）】 </a:t>
-            </a:r>
-            <a:r>
-              <a:rPr sz="1200">
-                <a:solidFill>
-                  <a:srgbClr val="222222"/>
-                </a:solidFill>
-                <a:latin typeface="游ゴシック"/>
-                <a:ea typeface="游ゴシック"/>
-                <a:cs typeface="游ゴシック"/>
-              </a:rPr>
-              <a:t>前段で抑えきれない場合の出口戦略として、DEGラインへの樹脂設置を検討（実DEGの通液テストを予定）。 </a:t>
-            </a:r>
-            <a:r>
-              <a:rPr sz="1150" b="1">
-                <a:solidFill>
-                  <a:srgbClr val="005BAB"/>
-                </a:solidFill>
-                <a:latin typeface="游ゴシック"/>
-                <a:ea typeface="游ゴシック"/>
-                <a:cs typeface="游ゴシック"/>
-              </a:rPr>
-              <a:t>（検討中）</a:t>
-            </a:r>
-          </a:p>
-        </p:txBody>
-      </p:sp>
-    </p:spTree>
-  </p:cSld>
-  <p:clrMapOvr>
-    <a:masterClrMapping/>
-  </p:clrMapOvr>
-</p:sld>
-</file>
-
 <file path=ppt/slides/slide18.xml><?xml version="1.0" encoding="utf-8"?>
 <p:sld xmlns:a="http://schemas.openxmlformats.org/drawingml/2006/main" xmlns:p="http://schemas.openxmlformats.org/presentationml/2006/main" xmlns:r="http://schemas.openxmlformats.org/officeDocument/2006/relationships">
   <p:cSld>
@@ -18108,160 +18590,563 @@
                 <a:ea typeface="游ゴシック"/>
                 <a:cs typeface="游ゴシック"/>
               </a:rPr>
-              <a:t>出荷再開に向けた品質管理・早期判定</a:t>
-            </a:r>
-          </a:p>
-        </p:txBody>
-      </p:sp>
-      <p:sp>
-        <p:nvSpPr>
-          <p:cNvPr id="3" name="TextBox 2"/>
-          <p:cNvSpPr txBox="1"/>
+              <a:t>対応（再発防止・スタートアップ運転条件）</a:t>
+            </a:r>
+          </a:p>
+        </p:txBody>
+      </p:sp>
+      <p:graphicFrame>
+        <p:nvGraphicFramePr>
+          <p:cNvPr id="3" name="Table 2"/>
+          <p:cNvGraphicFramePr>
+            <a:graphicFrameLocks noGrp="1"/>
+          </p:cNvGraphicFramePr>
           <p:nvPr/>
-        </p:nvSpPr>
-        <p:spPr>
-          <a:xfrm>
-            <a:off x="548640" y="1371600"/>
-            <a:ext cx="11064240" cy="4937760"/>
-          </a:xfrm>
-          <a:prstGeom prst="rect">
-            <a:avLst/>
-          </a:prstGeom>
-          <a:noFill/>
-        </p:spPr>
-        <p:txBody>
-          <a:bodyPr wrap="square">
-            <a:spAutoFit/>
-          </a:bodyPr>
-          <a:lstStyle/>
-          <a:p>
-            <a:pPr>
-              <a:spcBef>
-                <a:spcPts val="0"/>
-              </a:spcBef>
-              <a:spcAft>
-                <a:spcPts val="1000"/>
-              </a:spcAft>
-            </a:pPr>
-            <a:r>
-              <a:rPr sz="1300" b="0">
-                <a:solidFill>
-                  <a:srgbClr val="222222"/>
-                </a:solidFill>
-                <a:latin typeface="游ゴシック"/>
-                <a:ea typeface="游ゴシック"/>
-                <a:cs typeface="游ゴシック"/>
-              </a:rPr>
-              <a:t>・再稼働後の初期流動品は、APHAを含む社内規格全項目で規格内を確認。</a:t>
-            </a:r>
-          </a:p>
-          <a:p>
-            <a:pPr>
-              <a:spcBef>
-                <a:spcPts val="0"/>
-              </a:spcBef>
-              <a:spcAft>
-                <a:spcPts val="1000"/>
-              </a:spcAft>
-            </a:pPr>
-            <a:r>
-              <a:rPr sz="1300" b="0">
-                <a:solidFill>
-                  <a:srgbClr val="222222"/>
-                </a:solidFill>
-                <a:latin typeface="游ゴシック"/>
-                <a:ea typeface="游ゴシック"/>
-                <a:cs typeface="游ゴシック"/>
-              </a:rPr>
-              <a:t>・初期流動品はタンク保管中の色相・UVスペクトルの経時変化が無いことを確認してから出荷。</a:t>
-            </a:r>
-          </a:p>
-          <a:p>
-            <a:pPr>
-              <a:spcBef>
-                <a:spcPts val="0"/>
-              </a:spcBef>
-              <a:spcAft>
-                <a:spcPts val="1000"/>
-              </a:spcAft>
-            </a:pPr>
-            <a:r>
-              <a:rPr sz="1300" b="0">
-                <a:solidFill>
-                  <a:srgbClr val="222222"/>
-                </a:solidFill>
-                <a:latin typeface="游ゴシック"/>
-                <a:ea typeface="游ゴシック"/>
-                <a:cs typeface="游ゴシック"/>
-              </a:rPr>
-              <a:t>・早期判定はUV450nmを主指標とする（悪化品は約0.004/日上昇、正常品は0.002で不動）。UV330nm（Na非含有領域）を補助に用いる。</a:t>
-            </a:r>
-          </a:p>
-          <a:p>
-            <a:pPr>
-              <a:spcBef>
-                <a:spcPts val="0"/>
-              </a:spcBef>
-              <a:spcAft>
-                <a:spcPts val="1000"/>
-              </a:spcAft>
-            </a:pPr>
-            <a:r>
-              <a:rPr sz="1300" b="0">
-                <a:solidFill>
-                  <a:srgbClr val="222222"/>
-                </a:solidFill>
-                <a:latin typeface="游ゴシック"/>
-                <a:ea typeface="游ゴシック"/>
-                <a:cs typeface="游ゴシック"/>
-              </a:rPr>
-              <a:t>・色相の律速は後段の縮合（UV450nm）であり、アルデヒド量は先行指標としての相関が弱い（アクロレインとAPHAも相関しない）。このためトータルアルデヒド監視は採用しない（現行のDNPH法以上の情報は得られない見込み）。</a:t>
-            </a:r>
-          </a:p>
-          <a:p>
-            <a:pPr>
-              <a:spcBef>
-                <a:spcPts val="0"/>
-              </a:spcBef>
-              <a:spcAft>
-                <a:spcPts val="1000"/>
-              </a:spcAft>
-            </a:pPr>
-            <a:r>
-              <a:rPr sz="1300" b="0">
-                <a:solidFill>
-                  <a:srgbClr val="222222"/>
-                </a:solidFill>
-                <a:latin typeface="游ゴシック"/>
-                <a:ea typeface="游ゴシック"/>
-                <a:cs typeface="游ゴシック"/>
-              </a:rPr>
-              <a:t>・ストリーム／タンクの切り分けのため、製品ストリームを窒素雰囲気のボンベで採取し経時を確認する。</a:t>
-            </a:r>
-          </a:p>
-          <a:p>
-            <a:pPr>
-              <a:spcBef>
-                <a:spcPts val="0"/>
-              </a:spcBef>
-              <a:spcAft>
-                <a:spcPts val="1000"/>
-              </a:spcAft>
-            </a:pPr>
-            <a:r>
-              <a:rPr sz="1300" b="0">
-                <a:solidFill>
-                  <a:srgbClr val="222222"/>
-                </a:solidFill>
-                <a:latin typeface="游ゴシック"/>
-                <a:ea typeface="游ゴシック"/>
-                <a:cs typeface="游ゴシック"/>
-              </a:rPr>
-              <a:t>・出荷再開の判定基準（オンスペック判定／タンク経時の観察期間／UV450nmの日次傾きの閾値／初期流動品の解除ロット数）は、本対策会議で具体値を確定する（決め事）。</a:t>
-            </a:r>
-          </a:p>
-        </p:txBody>
-      </p:sp>
+        </p:nvGraphicFramePr>
+        <p:xfrm>
+          <a:off x="548640" y="1371600"/>
+          <a:ext cx="11064240" cy="4572000"/>
+        </p:xfrm>
+        <a:graphic>
+          <a:graphicData uri="http://schemas.openxmlformats.org/drawingml/2006/table">
+            <a:tbl>
+              <a:tblPr firstRow="1" bandRow="1">
+                <a:tableStyleId>{5C22544A-7EE6-4342-B048-85BDC9FD1C3A}</a:tableStyleId>
+              </a:tblPr>
+              <a:tblGrid>
+                <a:gridCol w="2377440"/>
+                <a:gridCol w="7040880"/>
+                <a:gridCol w="1645920"/>
+              </a:tblGrid>
+              <a:tr h="653142">
+                <a:tc>
+                  <a:txBody>
+                    <a:bodyPr/>
+                    <a:lstStyle/>
+                    <a:p>
+                      <a:r>
+                        <a:rPr sz="1100" b="1">
+                          <a:solidFill>
+                            <a:srgbClr val="003F7E"/>
+                          </a:solidFill>
+                          <a:latin typeface="游ゴシック"/>
+                          <a:ea typeface="游ゴシック"/>
+                          <a:cs typeface="游ゴシック"/>
+                        </a:rPr>
+                        <a:t>項目</a:t>
+                      </a:r>
+                    </a:p>
+                  </a:txBody>
+                  <a:tcPr anchor="ctr" marT="27432" marB="27432" marL="54864">
+                    <a:solidFill>
+                      <a:srgbClr val="EBEFF2"/>
+                    </a:solidFill>
+                  </a:tcPr>
+                </a:tc>
+                <a:tc>
+                  <a:txBody>
+                    <a:bodyPr/>
+                    <a:lstStyle/>
+                    <a:p>
+                      <a:r>
+                        <a:rPr sz="1100" b="1">
+                          <a:solidFill>
+                            <a:srgbClr val="003F7E"/>
+                          </a:solidFill>
+                          <a:latin typeface="游ゴシック"/>
+                          <a:ea typeface="游ゴシック"/>
+                          <a:cs typeface="游ゴシック"/>
+                        </a:rPr>
+                        <a:t>内容</a:t>
+                      </a:r>
+                    </a:p>
+                  </a:txBody>
+                  <a:tcPr anchor="ctr" marT="27432" marB="27432" marL="54864">
+                    <a:solidFill>
+                      <a:srgbClr val="EBEFF2"/>
+                    </a:solidFill>
+                  </a:tcPr>
+                </a:tc>
+                <a:tc>
+                  <a:txBody>
+                    <a:bodyPr/>
+                    <a:lstStyle/>
+                    <a:p>
+                      <a:pPr algn="ctr"/>
+                      <a:r>
+                        <a:rPr sz="1100" b="1">
+                          <a:solidFill>
+                            <a:srgbClr val="003F7E"/>
+                          </a:solidFill>
+                          <a:latin typeface="游ゴシック"/>
+                          <a:ea typeface="游ゴシック"/>
+                          <a:cs typeface="游ゴシック"/>
+                        </a:rPr>
+                        <a:t>状況</a:t>
+                      </a:r>
+                    </a:p>
+                  </a:txBody>
+                  <a:tcPr anchor="ctr" marT="27432" marB="27432" marL="54864">
+                    <a:solidFill>
+                      <a:srgbClr val="EBEFF2"/>
+                    </a:solidFill>
+                  </a:tcPr>
+                </a:tc>
+              </a:tr>
+              <a:tr h="653142">
+                <a:tc>
+                  <a:txBody>
+                    <a:bodyPr/>
+                    <a:lstStyle/>
+                    <a:p>
+                      <a:r>
+                        <a:rPr sz="1050" b="1">
+                          <a:solidFill>
+                            <a:srgbClr val="003F7E"/>
+                          </a:solidFill>
+                          <a:latin typeface="游ゴシック"/>
+                          <a:ea typeface="游ゴシック"/>
+                          <a:cs typeface="游ゴシック"/>
+                        </a:rPr>
+                        <a:t>触媒交換（原因除去）</a:t>
+                      </a:r>
+                    </a:p>
+                  </a:txBody>
+                  <a:tcPr anchor="ctr" marT="27432" marB="27432" marL="54864">
+                    <a:solidFill>
+                      <a:srgbClr val="D7E0E5"/>
+                    </a:solidFill>
+                  </a:tcPr>
+                </a:tc>
+                <a:tc>
+                  <a:txBody>
+                    <a:bodyPr/>
+                    <a:lstStyle/>
+                    <a:p>
+                      <a:r>
+                        <a:rPr sz="950" b="0">
+                          <a:solidFill>
+                            <a:srgbClr val="222222"/>
+                          </a:solidFill>
+                          <a:latin typeface="游ゴシック"/>
+                          <a:ea typeface="游ゴシック"/>
+                          <a:cs typeface="游ゴシック"/>
+                        </a:rPr>
+                        <a:t>計画停止で触媒交換済。アルデヒド類の生成を抑える。</a:t>
+                      </a:r>
+                    </a:p>
+                  </a:txBody>
+                  <a:tcPr anchor="ctr" marT="27432" marB="27432" marL="54864">
+                    <a:solidFill>
+                      <a:srgbClr val="FFFFFF"/>
+                    </a:solidFill>
+                  </a:tcPr>
+                </a:tc>
+                <a:tc>
+                  <a:txBody>
+                    <a:bodyPr/>
+                    <a:lstStyle/>
+                    <a:p>
+                      <a:pPr algn="ctr"/>
+                      <a:r>
+                        <a:rPr sz="950" b="0">
+                          <a:solidFill>
+                            <a:srgbClr val="222222"/>
+                          </a:solidFill>
+                          <a:latin typeface="游ゴシック"/>
+                          <a:ea typeface="游ゴシック"/>
+                          <a:cs typeface="游ゴシック"/>
+                        </a:rPr>
+                        <a:t>実施済</a:t>
+                      </a:r>
+                    </a:p>
+                  </a:txBody>
+                  <a:tcPr anchor="ctr" marT="27432" marB="27432" marL="54864">
+                    <a:solidFill>
+                      <a:srgbClr val="FFFFFF"/>
+                    </a:solidFill>
+                  </a:tcPr>
+                </a:tc>
+              </a:tr>
+              <a:tr h="653142">
+                <a:tc>
+                  <a:txBody>
+                    <a:bodyPr/>
+                    <a:lstStyle/>
+                    <a:p>
+                      <a:r>
+                        <a:rPr sz="1050" b="1">
+                          <a:solidFill>
+                            <a:srgbClr val="003F7E"/>
+                          </a:solidFill>
+                          <a:latin typeface="游ゴシック"/>
+                          <a:ea typeface="游ゴシック"/>
+                          <a:cs typeface="游ゴシック"/>
+                        </a:rPr>
+                        <a:t>タンク・配管の洗浄</a:t>
+                      </a:r>
+                    </a:p>
+                  </a:txBody>
+                  <a:tcPr anchor="ctr" marT="27432" marB="27432" marL="54864">
+                    <a:solidFill>
+                      <a:srgbClr val="D7E0E5"/>
+                    </a:solidFill>
+                  </a:tcPr>
+                </a:tc>
+                <a:tc>
+                  <a:txBody>
+                    <a:bodyPr/>
+                    <a:lstStyle/>
+                    <a:p>
+                      <a:r>
+                        <a:rPr sz="950" b="0">
+                          <a:solidFill>
+                            <a:srgbClr val="222222"/>
+                          </a:solidFill>
+                          <a:latin typeface="游ゴシック"/>
+                          <a:ea typeface="游ゴシック"/>
+                          <a:cs typeface="游ゴシック"/>
+                        </a:rPr>
+                        <a:t>色相上昇を確認したタンク等を開放・洗浄し付着物を除去、保管設備を健全化。</a:t>
+                      </a:r>
+                    </a:p>
+                  </a:txBody>
+                  <a:tcPr anchor="ctr" marT="27432" marB="27432" marL="54864">
+                    <a:solidFill>
+                      <a:srgbClr val="FFFFFF"/>
+                    </a:solidFill>
+                  </a:tcPr>
+                </a:tc>
+                <a:tc>
+                  <a:txBody>
+                    <a:bodyPr/>
+                    <a:lstStyle/>
+                    <a:p>
+                      <a:pPr algn="ctr"/>
+                      <a:r>
+                        <a:rPr sz="950" b="0">
+                          <a:solidFill>
+                            <a:srgbClr val="222222"/>
+                          </a:solidFill>
+                          <a:latin typeface="游ゴシック"/>
+                          <a:ea typeface="游ゴシック"/>
+                          <a:cs typeface="游ゴシック"/>
+                        </a:rPr>
+                        <a:t>実施済</a:t>
+                      </a:r>
+                    </a:p>
+                  </a:txBody>
+                  <a:tcPr anchor="ctr" marT="27432" marB="27432" marL="54864">
+                    <a:solidFill>
+                      <a:srgbClr val="FFFFFF"/>
+                    </a:solidFill>
+                  </a:tcPr>
+                </a:tc>
+              </a:tr>
+              <a:tr h="653142">
+                <a:tc>
+                  <a:txBody>
+                    <a:bodyPr/>
+                    <a:lstStyle/>
+                    <a:p>
+                      <a:r>
+                        <a:rPr sz="1050" b="1">
+                          <a:solidFill>
+                            <a:srgbClr val="003F7E"/>
+                          </a:solidFill>
+                          <a:latin typeface="游ゴシック"/>
+                          <a:ea typeface="游ゴシック"/>
+                          <a:cs typeface="游ゴシック"/>
+                        </a:rPr>
+                        <a:t>苛性ソーダ（NaOH）</a:t>
+                      </a:r>
+                    </a:p>
+                  </a:txBody>
+                  <a:tcPr anchor="ctr" marT="27432" marB="27432" marL="54864">
+                    <a:solidFill>
+                      <a:srgbClr val="D7E0E5"/>
+                    </a:solidFill>
+                  </a:tcPr>
+                </a:tc>
+                <a:tc>
+                  <a:txBody>
+                    <a:bodyPr/>
+                    <a:lstStyle/>
+                    <a:p>
+                      <a:r>
+                        <a:rPr sz="950" b="0">
+                          <a:solidFill>
+                            <a:srgbClr val="222222"/>
+                          </a:solidFill>
+                          <a:latin typeface="游ゴシック"/>
+                          <a:ea typeface="游ゴシック"/>
+                          <a:cs typeface="游ゴシック"/>
+                        </a:rPr>
+                        <a:t>スタートアップ時は投入しないベース。アルデヒドが多い局面ではアルドール縮合を促進し得るため、触媒交換後にアルデヒド低下を確認してから要否判断。</a:t>
+                      </a:r>
+                    </a:p>
+                  </a:txBody>
+                  <a:tcPr anchor="ctr" marT="27432" marB="27432" marL="54864">
+                    <a:solidFill>
+                      <a:srgbClr val="FFFFFF"/>
+                    </a:solidFill>
+                  </a:tcPr>
+                </a:tc>
+                <a:tc>
+                  <a:txBody>
+                    <a:bodyPr/>
+                    <a:lstStyle/>
+                    <a:p>
+                      <a:pPr algn="ctr"/>
+                      <a:r>
+                        <a:rPr sz="950" b="0">
+                          <a:solidFill>
+                            <a:srgbClr val="222222"/>
+                          </a:solidFill>
+                          <a:latin typeface="游ゴシック"/>
+                          <a:ea typeface="游ゴシック"/>
+                          <a:cs typeface="游ゴシック"/>
+                        </a:rPr>
+                        <a:t>方針</a:t>
+                      </a:r>
+                    </a:p>
+                  </a:txBody>
+                  <a:tcPr anchor="ctr" marT="27432" marB="27432" marL="54864">
+                    <a:solidFill>
+                      <a:srgbClr val="FFFFFF"/>
+                    </a:solidFill>
+                  </a:tcPr>
+                </a:tc>
+              </a:tr>
+              <a:tr h="653142">
+                <a:tc>
+                  <a:txBody>
+                    <a:bodyPr/>
+                    <a:lstStyle/>
+                    <a:p>
+                      <a:r>
+                        <a:rPr sz="1050" b="1">
+                          <a:solidFill>
+                            <a:srgbClr val="003F7E"/>
+                          </a:solidFill>
+                          <a:latin typeface="游ゴシック"/>
+                          <a:ea typeface="游ゴシック"/>
+                          <a:cs typeface="游ゴシック"/>
+                        </a:rPr>
+                        <a:t>MEG塔温度</a:t>
+                      </a:r>
+                    </a:p>
+                  </a:txBody>
+                  <a:tcPr anchor="ctr" marT="27432" marB="27432" marL="54864">
+                    <a:solidFill>
+                      <a:srgbClr val="D7E0E5"/>
+                    </a:solidFill>
+                  </a:tcPr>
+                </a:tc>
+                <a:tc>
+                  <a:txBody>
+                    <a:bodyPr/>
+                    <a:lstStyle/>
+                    <a:p>
+                      <a:r>
+                        <a:rPr sz="950" b="0">
+                          <a:solidFill>
+                            <a:srgbClr val="222222"/>
+                          </a:solidFill>
+                          <a:latin typeface="游ゴシック"/>
+                          <a:ea typeface="游ゴシック"/>
+                          <a:cs typeface="游ゴシック"/>
+                        </a:rPr>
+                        <a:t>下げない方針。温度を下げるとアルデヒドが分解されず前駆体として下流に回り、かえって色相側に出る懸念があるため。</a:t>
+                      </a:r>
+                    </a:p>
+                  </a:txBody>
+                  <a:tcPr anchor="ctr" marT="27432" marB="27432" marL="54864">
+                    <a:solidFill>
+                      <a:srgbClr val="FFFFFF"/>
+                    </a:solidFill>
+                  </a:tcPr>
+                </a:tc>
+                <a:tc>
+                  <a:txBody>
+                    <a:bodyPr/>
+                    <a:lstStyle/>
+                    <a:p>
+                      <a:pPr algn="ctr"/>
+                      <a:r>
+                        <a:rPr sz="950" b="0">
+                          <a:solidFill>
+                            <a:srgbClr val="222222"/>
+                          </a:solidFill>
+                          <a:latin typeface="游ゴシック"/>
+                          <a:ea typeface="游ゴシック"/>
+                          <a:cs typeface="游ゴシック"/>
+                        </a:rPr>
+                        <a:t>方針</a:t>
+                      </a:r>
+                    </a:p>
+                  </a:txBody>
+                  <a:tcPr anchor="ctr" marT="27432" marB="27432" marL="54864">
+                    <a:solidFill>
+                      <a:srgbClr val="FFFFFF"/>
+                    </a:solidFill>
+                  </a:tcPr>
+                </a:tc>
+              </a:tr>
+              <a:tr h="653142">
+                <a:tc>
+                  <a:txBody>
+                    <a:bodyPr/>
+                    <a:lstStyle/>
+                    <a:p>
+                      <a:r>
+                        <a:rPr sz="1050" b="1">
+                          <a:solidFill>
+                            <a:srgbClr val="003F7E"/>
+                          </a:solidFill>
+                          <a:latin typeface="游ゴシック"/>
+                          <a:ea typeface="游ゴシック"/>
+                          <a:cs typeface="游ゴシック"/>
+                        </a:rPr>
+                        <a:t>リン酸ナトリウム（Na₃PO₄）</a:t>
+                      </a:r>
+                    </a:p>
+                  </a:txBody>
+                  <a:tcPr anchor="ctr" marT="27432" marB="27432" marL="54864">
+                    <a:solidFill>
+                      <a:srgbClr val="D7E0E5"/>
+                    </a:solidFill>
+                  </a:tcPr>
+                </a:tc>
+                <a:tc>
+                  <a:txBody>
+                    <a:bodyPr/>
+                    <a:lstStyle/>
+                    <a:p>
+                      <a:r>
+                        <a:rPr sz="950" b="0">
+                          <a:solidFill>
+                            <a:srgbClr val="222222"/>
+                          </a:solidFill>
+                          <a:latin typeface="游ゴシック"/>
+                          <a:ea typeface="游ゴシック"/>
+                          <a:cs typeface="游ゴシック"/>
+                        </a:rPr>
+                        <a:t>保管中反応の緩和策。pH低下で縮合を抑える／金属を不活性化する効きがある（効き方は要検証）。置換（払い出しを伴う入替）とセットで運用。</a:t>
+                      </a:r>
+                    </a:p>
+                  </a:txBody>
+                  <a:tcPr anchor="ctr" marT="27432" marB="27432" marL="54864">
+                    <a:solidFill>
+                      <a:srgbClr val="FFFFFF"/>
+                    </a:solidFill>
+                  </a:tcPr>
+                </a:tc>
+                <a:tc>
+                  <a:txBody>
+                    <a:bodyPr/>
+                    <a:lstStyle/>
+                    <a:p>
+                      <a:pPr algn="ctr"/>
+                      <a:r>
+                        <a:rPr sz="950" b="0">
+                          <a:solidFill>
+                            <a:srgbClr val="222222"/>
+                          </a:solidFill>
+                          <a:latin typeface="游ゴシック"/>
+                          <a:ea typeface="游ゴシック"/>
+                          <a:cs typeface="游ゴシック"/>
+                        </a:rPr>
+                        <a:t>緩和・要検証</a:t>
+                      </a:r>
+                    </a:p>
+                  </a:txBody>
+                  <a:tcPr anchor="ctr" marT="27432" marB="27432" marL="54864">
+                    <a:solidFill>
+                      <a:srgbClr val="FFFFFF"/>
+                    </a:solidFill>
+                  </a:tcPr>
+                </a:tc>
+              </a:tr>
+              <a:tr h="653148">
+                <a:tc>
+                  <a:txBody>
+                    <a:bodyPr/>
+                    <a:lstStyle/>
+                    <a:p>
+                      <a:r>
+                        <a:rPr sz="1050" b="1">
+                          <a:solidFill>
+                            <a:srgbClr val="003F7E"/>
+                          </a:solidFill>
+                          <a:latin typeface="游ゴシック"/>
+                          <a:ea typeface="游ゴシック"/>
+                          <a:cs typeface="游ゴシック"/>
+                        </a:rPr>
+                        <a:t>出口（DEGラインのIER）</a:t>
+                      </a:r>
+                    </a:p>
+                  </a:txBody>
+                  <a:tcPr anchor="ctr" marT="27432" marB="27432" marL="54864">
+                    <a:solidFill>
+                      <a:srgbClr val="D7E0E5"/>
+                    </a:solidFill>
+                  </a:tcPr>
+                </a:tc>
+                <a:tc>
+                  <a:txBody>
+                    <a:bodyPr/>
+                    <a:lstStyle/>
+                    <a:p>
+                      <a:r>
+                        <a:rPr sz="950" b="0">
+                          <a:solidFill>
+                            <a:srgbClr val="222222"/>
+                          </a:solidFill>
+                          <a:latin typeface="游ゴシック"/>
+                          <a:ea typeface="游ゴシック"/>
+                          <a:cs typeface="游ゴシック"/>
+                        </a:rPr>
+                        <a:t>前段で抑えきれない場合の出口戦略として、DEGラインへの樹脂設置を検討（実DEGの通液テストを予定）。</a:t>
+                      </a:r>
+                    </a:p>
+                  </a:txBody>
+                  <a:tcPr anchor="ctr" marT="27432" marB="27432" marL="54864">
+                    <a:solidFill>
+                      <a:srgbClr val="FFFFFF"/>
+                    </a:solidFill>
+                  </a:tcPr>
+                </a:tc>
+                <a:tc>
+                  <a:txBody>
+                    <a:bodyPr/>
+                    <a:lstStyle/>
+                    <a:p>
+                      <a:pPr algn="ctr"/>
+                      <a:r>
+                        <a:rPr sz="950" b="0">
+                          <a:solidFill>
+                            <a:srgbClr val="222222"/>
+                          </a:solidFill>
+                          <a:latin typeface="游ゴシック"/>
+                          <a:ea typeface="游ゴシック"/>
+                          <a:cs typeface="游ゴシック"/>
+                        </a:rPr>
+                        <a:t>検討中</a:t>
+                      </a:r>
+                    </a:p>
+                  </a:txBody>
+                  <a:tcPr anchor="ctr" marT="27432" marB="27432" marL="54864">
+                    <a:solidFill>
+                      <a:srgbClr val="FFFFFF"/>
+                    </a:solidFill>
+                  </a:tcPr>
+                </a:tc>
+              </a:tr>
+            </a:tbl>
+          </a:graphicData>
+        </a:graphic>
+      </p:graphicFrame>
     </p:spTree>
   </p:cSld>
   <p:clrMapOvr>
@@ -18304,6 +19189,226 @@
                 <a:ea typeface="游ゴシック"/>
                 <a:cs typeface="游ゴシック"/>
               </a:rPr>
+              <a:t>出荷再開に向けた品質管理・早期判定</a:t>
+            </a:r>
+          </a:p>
+        </p:txBody>
+      </p:sp>
+      <p:sp>
+        <p:nvSpPr>
+          <p:cNvPr id="3" name="TextBox 2"/>
+          <p:cNvSpPr txBox="1"/>
+          <p:nvPr/>
+        </p:nvSpPr>
+        <p:spPr>
+          <a:xfrm>
+            <a:off x="502920" y="1371600"/>
+            <a:ext cx="6492240" cy="4937760"/>
+          </a:xfrm>
+          <a:prstGeom prst="rect">
+            <a:avLst/>
+          </a:prstGeom>
+          <a:noFill/>
+        </p:spPr>
+        <p:txBody>
+          <a:bodyPr wrap="square">
+            <a:spAutoFit/>
+          </a:bodyPr>
+          <a:lstStyle/>
+          <a:p>
+            <a:pPr>
+              <a:spcBef>
+                <a:spcPts val="0"/>
+              </a:spcBef>
+              <a:spcAft>
+                <a:spcPts val="1100"/>
+              </a:spcAft>
+            </a:pPr>
+            <a:r>
+              <a:rPr sz="1200" b="0">
+                <a:solidFill>
+                  <a:srgbClr val="222222"/>
+                </a:solidFill>
+                <a:latin typeface="游ゴシック"/>
+                <a:ea typeface="游ゴシック"/>
+                <a:cs typeface="游ゴシック"/>
+              </a:rPr>
+              <a:t>・再稼働後の初期流動品は、APHAを含む社内規格全項目で規格内を確認。</a:t>
+            </a:r>
+          </a:p>
+          <a:p>
+            <a:pPr>
+              <a:spcBef>
+                <a:spcPts val="0"/>
+              </a:spcBef>
+              <a:spcAft>
+                <a:spcPts val="1100"/>
+              </a:spcAft>
+            </a:pPr>
+            <a:r>
+              <a:rPr sz="1200" b="0">
+                <a:solidFill>
+                  <a:srgbClr val="222222"/>
+                </a:solidFill>
+                <a:latin typeface="游ゴシック"/>
+                <a:ea typeface="游ゴシック"/>
+                <a:cs typeface="游ゴシック"/>
+              </a:rPr>
+              <a:t>・初期流動品はタンク保管中の色相・UVスペクトルの経時変化が無いことを確認してから出荷。</a:t>
+            </a:r>
+          </a:p>
+          <a:p>
+            <a:pPr>
+              <a:spcBef>
+                <a:spcPts val="0"/>
+              </a:spcBef>
+              <a:spcAft>
+                <a:spcPts val="1100"/>
+              </a:spcAft>
+            </a:pPr>
+            <a:r>
+              <a:rPr sz="1200" b="0">
+                <a:solidFill>
+                  <a:srgbClr val="222222"/>
+                </a:solidFill>
+                <a:latin typeface="游ゴシック"/>
+                <a:ea typeface="游ゴシック"/>
+                <a:cs typeface="游ゴシック"/>
+              </a:rPr>
+              <a:t>・早期判定はUV450nmを主指標とする（悪化品は約0.004/日上昇、正常品は0.002で不動）。UV330nm（Na非含有領域）を補助に用いる。</a:t>
+            </a:r>
+          </a:p>
+          <a:p>
+            <a:pPr>
+              <a:spcBef>
+                <a:spcPts val="0"/>
+              </a:spcBef>
+              <a:spcAft>
+                <a:spcPts val="1100"/>
+              </a:spcAft>
+            </a:pPr>
+            <a:r>
+              <a:rPr sz="1200" b="0">
+                <a:solidFill>
+                  <a:srgbClr val="222222"/>
+                </a:solidFill>
+                <a:latin typeface="游ゴシック"/>
+                <a:ea typeface="游ゴシック"/>
+                <a:cs typeface="游ゴシック"/>
+              </a:rPr>
+              <a:t>・色相の律速は後段の縮合（UV450nm）であり、アルデヒド量は先行指標としての相関が弱い（アクロレインとAPHAも相関しない）。このためトータルアルデヒド監視は採用しない（現行のDNPH法以上の情報は得られない見込み）。</a:t>
+            </a:r>
+          </a:p>
+          <a:p>
+            <a:pPr>
+              <a:spcBef>
+                <a:spcPts val="0"/>
+              </a:spcBef>
+              <a:spcAft>
+                <a:spcPts val="1100"/>
+              </a:spcAft>
+            </a:pPr>
+            <a:r>
+              <a:rPr sz="1200" b="0">
+                <a:solidFill>
+                  <a:srgbClr val="222222"/>
+                </a:solidFill>
+                <a:latin typeface="游ゴシック"/>
+                <a:ea typeface="游ゴシック"/>
+                <a:cs typeface="游ゴシック"/>
+              </a:rPr>
+              <a:t>・ストリーム／タンクの切り分けのため、製品ストリームを窒素雰囲気のボンベで採取し経時を確認する。</a:t>
+            </a:r>
+          </a:p>
+          <a:p>
+            <a:pPr>
+              <a:spcBef>
+                <a:spcPts val="0"/>
+              </a:spcBef>
+              <a:spcAft>
+                <a:spcPts val="1100"/>
+              </a:spcAft>
+            </a:pPr>
+            <a:r>
+              <a:rPr sz="1200" b="0">
+                <a:solidFill>
+                  <a:srgbClr val="222222"/>
+                </a:solidFill>
+                <a:latin typeface="游ゴシック"/>
+                <a:ea typeface="游ゴシック"/>
+                <a:cs typeface="游ゴシック"/>
+              </a:rPr>
+              <a:t>・出荷再開の判定基準（オンスペック判定／タンク経時の観察期間／UV450nmの日次傾きの閾値／初期流動品の解除ロット数）は、本対策会議で具体値を確定する（決め事）。</a:t>
+            </a:r>
+          </a:p>
+        </p:txBody>
+      </p:sp>
+      <p:pic>
+        <p:nvPicPr>
+          <p:cNvPr id="4" name="Picture 3" descr="uv450_trend.png"/>
+          <p:cNvPicPr>
+            <a:picLocks noChangeAspect="1"/>
+          </p:cNvPicPr>
+          <p:nvPr/>
+        </p:nvPicPr>
+        <p:blipFill>
+          <a:blip r:embed="rId2"/>
+          <a:stretch>
+            <a:fillRect/>
+          </a:stretch>
+        </p:blipFill>
+        <p:spPr>
+          <a:xfrm>
+            <a:off x="7132320" y="2286000"/>
+            <a:ext cx="4846320" cy="2635055"/>
+          </a:xfrm>
+          <a:prstGeom prst="rect">
+            <a:avLst/>
+          </a:prstGeom>
+        </p:spPr>
+      </p:pic>
+    </p:spTree>
+  </p:cSld>
+  <p:clrMapOvr>
+    <a:masterClrMapping/>
+  </p:clrMapOvr>
+</p:sld>
+</file>
+
+<file path=ppt/slides/slide20.xml><?xml version="1.0" encoding="utf-8"?>
+<p:sld xmlns:a="http://schemas.openxmlformats.org/drawingml/2006/main" xmlns:p="http://schemas.openxmlformats.org/presentationml/2006/main" xmlns:r="http://schemas.openxmlformats.org/officeDocument/2006/relationships">
+  <p:cSld>
+    <p:spTree>
+      <p:nvGrpSpPr>
+        <p:cNvPr id="1" name=""/>
+        <p:cNvGrpSpPr/>
+        <p:nvPr/>
+      </p:nvGrpSpPr>
+      <p:grpSpPr/>
+      <p:sp>
+        <p:nvSpPr>
+          <p:cNvPr id="2" name="Title 1"/>
+          <p:cNvSpPr>
+            <a:spLocks noGrp="1"/>
+          </p:cNvSpPr>
+          <p:nvPr>
+            <p:ph type="title"/>
+          </p:nvPr>
+        </p:nvSpPr>
+        <p:spPr/>
+        <p:txBody>
+          <a:bodyPr/>
+          <a:lstStyle/>
+          <a:p>
+            <a:r>
+              <a:rPr sz="2200" b="1">
+                <a:solidFill>
+                  <a:srgbClr val="003F7E"/>
+                </a:solidFill>
+                <a:latin typeface="游ゴシック"/>
+                <a:ea typeface="游ゴシック"/>
+                <a:cs typeface="游ゴシック"/>
+              </a:rPr>
               <a:t>出荷再開の判断（ご承認のお願い）</a:t>
             </a:r>
           </a:p>
@@ -18484,9 +19589,129 @@
         <p:txBody>
           <a:bodyPr/>
           <a:lstStyle/>
-          <a:p>
-            <a:r>
-              <a:rPr sz="2200" b="1">
+          <a:p/>
+        </p:txBody>
+      </p:sp>
+      <p:sp>
+        <p:nvSpPr>
+          <p:cNvPr id="3" name="Rounded Rectangle 2"/>
+          <p:cNvSpPr/>
+          <p:nvPr/>
+        </p:nvSpPr>
+        <p:spPr>
+          <a:xfrm>
+            <a:off x="0" y="2240280"/>
+            <a:ext cx="12191695" cy="54864"/>
+          </a:xfrm>
+          <a:prstGeom prst="roundRect">
+            <a:avLst/>
+          </a:prstGeom>
+          <a:solidFill>
+            <a:srgbClr val="005BAB"/>
+          </a:solidFill>
+          <a:ln>
+            <a:noFill/>
+          </a:ln>
+          <a:effectLst/>
+        </p:spPr>
+        <p:style>
+          <a:lnRef idx="1">
+            <a:schemeClr val="accent1"/>
+          </a:lnRef>
+          <a:fillRef idx="3">
+            <a:schemeClr val="accent1"/>
+          </a:fillRef>
+          <a:effectRef idx="2">
+            <a:schemeClr val="accent1"/>
+          </a:effectRef>
+          <a:fontRef idx="minor">
+            <a:schemeClr val="lt1"/>
+          </a:fontRef>
+        </p:style>
+        <p:txBody>
+          <a:bodyPr rtlCol="0" anchor="ctr"/>
+          <a:lstStyle/>
+          <a:p>
+            <a:pPr algn="ctr"/>
+          </a:p>
+        </p:txBody>
+      </p:sp>
+      <p:sp>
+        <p:nvSpPr>
+          <p:cNvPr id="4" name="Rounded Rectangle 3"/>
+          <p:cNvSpPr/>
+          <p:nvPr/>
+        </p:nvSpPr>
+        <p:spPr>
+          <a:xfrm>
+            <a:off x="0" y="4160520"/>
+            <a:ext cx="12191695" cy="36576"/>
+          </a:xfrm>
+          <a:prstGeom prst="roundRect">
+            <a:avLst/>
+          </a:prstGeom>
+          <a:solidFill>
+            <a:srgbClr val="C9D2D8"/>
+          </a:solidFill>
+          <a:ln>
+            <a:noFill/>
+          </a:ln>
+          <a:effectLst/>
+        </p:spPr>
+        <p:style>
+          <a:lnRef idx="1">
+            <a:schemeClr val="accent1"/>
+          </a:lnRef>
+          <a:fillRef idx="3">
+            <a:schemeClr val="accent1"/>
+          </a:fillRef>
+          <a:effectRef idx="2">
+            <a:schemeClr val="accent1"/>
+          </a:effectRef>
+          <a:fontRef idx="minor">
+            <a:schemeClr val="lt1"/>
+          </a:fontRef>
+        </p:style>
+        <p:txBody>
+          <a:bodyPr rtlCol="0" anchor="ctr"/>
+          <a:lstStyle/>
+          <a:p>
+            <a:pPr algn="ctr"/>
+          </a:p>
+        </p:txBody>
+      </p:sp>
+      <p:sp>
+        <p:nvSpPr>
+          <p:cNvPr id="5" name="TextBox 4"/>
+          <p:cNvSpPr txBox="1"/>
+          <p:nvPr/>
+        </p:nvSpPr>
+        <p:spPr>
+          <a:xfrm>
+            <a:off x="822960" y="2514600"/>
+            <a:ext cx="10515600" cy="1463040"/>
+          </a:xfrm>
+          <a:prstGeom prst="rect">
+            <a:avLst/>
+          </a:prstGeom>
+          <a:noFill/>
+        </p:spPr>
+        <p:txBody>
+          <a:bodyPr wrap="square">
+            <a:spAutoFit/>
+          </a:bodyPr>
+          <a:lstStyle/>
+          <a:p>
+            <a:pPr>
+              <a:spcBef>
+                <a:spcPts val="0"/>
+              </a:spcBef>
+              <a:spcAft>
+                <a:spcPts val="400"/>
+              </a:spcAft>
+            </a:pPr>
+            <a:r>
+              <a:rPr sz="3400" b="1">
                 <a:solidFill>
                   <a:srgbClr val="003F7E"/>
                 </a:solidFill>
@@ -18497,40 +19722,71 @@
               <a:t>製品DEG色相悪化　対応</a:t>
             </a:r>
           </a:p>
-        </p:txBody>
-      </p:sp>
-      <p:sp>
-        <p:nvSpPr>
-          <p:cNvPr id="3" name="Text Placeholder 2"/>
-          <p:cNvSpPr>
-            <a:spLocks noGrp="1"/>
-          </p:cNvSpPr>
-          <p:nvPr>
-            <p:ph type="body" idx="11" sz="quarter"/>
-          </p:nvPr>
-        </p:nvSpPr>
-        <p:spPr/>
-        <p:txBody>
-          <a:bodyPr/>
+          <a:p>
+            <a:pPr>
+              <a:spcBef>
+                <a:spcPts val="0"/>
+              </a:spcBef>
+              <a:spcAft>
+                <a:spcPts val="200"/>
+              </a:spcAft>
+            </a:pPr>
+            <a:r>
+              <a:rPr sz="1700" b="0">
+                <a:solidFill>
+                  <a:srgbClr val="666666"/>
+                </a:solidFill>
+                <a:latin typeface="游ゴシック"/>
+                <a:ea typeface="游ゴシック"/>
+                <a:cs typeface="游ゴシック"/>
+              </a:rPr>
+              <a:t>事実の整理 → 推定メカニズム → 対応</a:t>
+            </a:r>
+          </a:p>
+        </p:txBody>
+      </p:sp>
+      <p:sp>
+        <p:nvSpPr>
+          <p:cNvPr id="6" name="TextBox 5"/>
+          <p:cNvSpPr txBox="1"/>
+          <p:nvPr/>
+        </p:nvSpPr>
+        <p:spPr>
+          <a:xfrm>
+            <a:off x="822960" y="4343400"/>
+            <a:ext cx="10515600" cy="548640"/>
+          </a:xfrm>
+          <a:prstGeom prst="rect">
+            <a:avLst/>
+          </a:prstGeom>
+          <a:noFill/>
+        </p:spPr>
+        <p:txBody>
+          <a:bodyPr wrap="square">
+            <a:spAutoFit/>
+          </a:bodyPr>
           <a:lstStyle/>
-          <a:p/>
-        </p:txBody>
-      </p:sp>
-      <p:sp>
-        <p:nvSpPr>
-          <p:cNvPr id="4" name="Text Placeholder 3"/>
-          <p:cNvSpPr>
-            <a:spLocks noGrp="1"/>
-          </p:cNvSpPr>
-          <p:nvPr>
-            <p:ph type="body" idx="17" sz="quarter"/>
-          </p:nvPr>
-        </p:nvSpPr>
-        <p:spPr/>
-        <p:txBody>
-          <a:bodyPr/>
-          <a:lstStyle/>
-          <a:p/>
+          <a:p>
+            <a:pPr>
+              <a:spcBef>
+                <a:spcPts val="0"/>
+              </a:spcBef>
+              <a:spcAft>
+                <a:spcPts val="400"/>
+              </a:spcAft>
+            </a:pPr>
+            <a:r>
+              <a:rPr sz="1400" b="0">
+                <a:solidFill>
+                  <a:srgbClr val="666666"/>
+                </a:solidFill>
+                <a:latin typeface="游ゴシック"/>
+                <a:ea typeface="游ゴシック"/>
+                <a:cs typeface="游ゴシック"/>
+              </a:rPr>
+              <a:t>2026年6月</a:t>
+            </a:r>
+          </a:p>
         </p:txBody>
       </p:sp>
     </p:spTree>

--- a/outputs/製品DEG色相悪化_対策会議.pptx
+++ b/outputs/製品DEG色相悪化_対策会議.pptx
@@ -24,6 +24,7 @@
     <p:sldId id="2147483576" r:id="rId31"/>
     <p:sldId id="2147483577" r:id="rId32"/>
     <p:sldId id="2147483578" r:id="rId33"/>
+    <p:sldId id="2147483579" r:id="rId34"/>
   </p:sldIdLst>
   <p:sldSz cx="12192000" cy="6858000"/>
   <p:notesSz cx="6807200" cy="9939338"/>
@@ -15852,21 +15853,124 @@
                 <a:ea typeface="游ゴシック"/>
                 <a:cs typeface="游ゴシック"/>
               </a:rPr>
-              <a:t>発生事象（事実）</a:t>
-            </a:r>
-          </a:p>
-        </p:txBody>
-      </p:sp>
-      <p:sp>
-        <p:nvSpPr>
-          <p:cNvPr id="3" name="TextBox 2"/>
+              <a:t>概要</a:t>
+            </a:r>
+          </a:p>
+        </p:txBody>
+      </p:sp>
+      <p:sp>
+        <p:nvSpPr>
+          <p:cNvPr id="3" name="Rounded Rectangle 2"/>
+          <p:cNvSpPr/>
+          <p:nvPr/>
+        </p:nvSpPr>
+        <p:spPr>
+          <a:xfrm>
+            <a:off x="548640" y="1417320"/>
+            <a:ext cx="11064240" cy="1078992"/>
+          </a:xfrm>
+          <a:prstGeom prst="roundRect">
+            <a:avLst/>
+          </a:prstGeom>
+          <a:solidFill>
+            <a:srgbClr val="E8F1E5"/>
+          </a:solidFill>
+          <a:ln w="12700">
+            <a:solidFill>
+              <a:srgbClr val="C9D2D8"/>
+            </a:solidFill>
+          </a:ln>
+          <a:effectLst/>
+        </p:spPr>
+        <p:style>
+          <a:lnRef idx="1">
+            <a:schemeClr val="accent1"/>
+          </a:lnRef>
+          <a:fillRef idx="3">
+            <a:schemeClr val="accent1"/>
+          </a:fillRef>
+          <a:effectRef idx="2">
+            <a:schemeClr val="accent1"/>
+          </a:effectRef>
+          <a:fontRef idx="minor">
+            <a:schemeClr val="lt1"/>
+          </a:fontRef>
+        </p:style>
+        <p:txBody>
+          <a:bodyPr rtlCol="0" anchor="ctr"/>
+          <a:lstStyle/>
+          <a:p>
+            <a:pPr algn="ctr"/>
+          </a:p>
+        </p:txBody>
+      </p:sp>
+      <p:sp>
+        <p:nvSpPr>
+          <p:cNvPr id="4" name="Rounded Rectangle 3"/>
+          <p:cNvSpPr/>
+          <p:nvPr/>
+        </p:nvSpPr>
+        <p:spPr>
+          <a:xfrm>
+            <a:off x="731520" y="1709928"/>
+            <a:ext cx="1371600" cy="493776"/>
+          </a:xfrm>
+          <a:prstGeom prst="roundRect">
+            <a:avLst/>
+          </a:prstGeom>
+          <a:solidFill>
+            <a:srgbClr val="FFFFFF"/>
+          </a:solidFill>
+          <a:ln w="15875">
+            <a:solidFill>
+              <a:srgbClr val="005BAB"/>
+            </a:solidFill>
+          </a:ln>
+          <a:effectLst/>
+        </p:spPr>
+        <p:style>
+          <a:lnRef idx="1">
+            <a:schemeClr val="accent1"/>
+          </a:lnRef>
+          <a:fillRef idx="3">
+            <a:schemeClr val="accent1"/>
+          </a:fillRef>
+          <a:effectRef idx="2">
+            <a:schemeClr val="accent1"/>
+          </a:effectRef>
+          <a:fontRef idx="minor">
+            <a:schemeClr val="lt1"/>
+          </a:fontRef>
+        </p:style>
+        <p:txBody>
+          <a:bodyPr rtlCol="0" anchor="ctr" wrap="square" lIns="109728" rIns="73152"/>
+          <a:lstStyle/>
+          <a:p>
+            <a:pPr algn="ctr"/>
+            <a:r>
+              <a:rPr sz="1400" b="1">
+                <a:solidFill>
+                  <a:srgbClr val="003F7E"/>
+                </a:solidFill>
+                <a:latin typeface="游ゴシック"/>
+                <a:ea typeface="游ゴシック"/>
+                <a:cs typeface="游ゴシック"/>
+              </a:rPr>
+              <a:t>事実</a:t>
+            </a:r>
+          </a:p>
+        </p:txBody>
+      </p:sp>
+      <p:sp>
+        <p:nvSpPr>
+          <p:cNvPr id="5" name="TextBox 4"/>
           <p:cNvSpPr txBox="1"/>
           <p:nvPr/>
         </p:nvSpPr>
         <p:spPr>
           <a:xfrm>
-            <a:off x="502920" y="1371600"/>
-            <a:ext cx="6126480" cy="4937760"/>
+            <a:off x="2331720" y="1527048"/>
+            <a:ext cx="9144000" cy="868680"/>
           </a:xfrm>
           <a:prstGeom prst="rect">
             <a:avLst/>
@@ -15884,11 +15988,11 @@
                 <a:spcPts val="0"/>
               </a:spcBef>
               <a:spcAft>
-                <a:spcPts val="1200"/>
+                <a:spcPts val="400"/>
               </a:spcAft>
             </a:pPr>
             <a:r>
-              <a:rPr sz="1350" b="0">
+              <a:rPr sz="1300" b="0">
                 <a:solidFill>
                   <a:srgbClr val="222222"/>
                 </a:solidFill>
@@ -15896,20 +16000,146 @@
                 <a:ea typeface="游ゴシック"/>
                 <a:cs typeface="游ゴシック"/>
               </a:rPr>
-              <a:t>・冬定修後の再稼働（3月）以降、製品DEGがタンク保管中に色相（APHA）を経時上昇。約1か月半で検査規格を超過（APHA&lt;5 → 25〜35）。</a:t>
-            </a:r>
-          </a:p>
+              <a:t>出口（ストリーム品）は常に規格内。窒素封入タンクの保管で約6週間にAPHA&lt;5→25〜35へ上昇。ドラム・SP（大気接触）は悪化なし。</a:t>
+            </a:r>
+          </a:p>
+        </p:txBody>
+      </p:sp>
+      <p:sp>
+        <p:nvSpPr>
+          <p:cNvPr id="6" name="Rounded Rectangle 5"/>
+          <p:cNvSpPr/>
+          <p:nvPr/>
+        </p:nvSpPr>
+        <p:spPr>
+          <a:xfrm>
+            <a:off x="548640" y="2624328"/>
+            <a:ext cx="11064240" cy="1078992"/>
+          </a:xfrm>
+          <a:prstGeom prst="roundRect">
+            <a:avLst/>
+          </a:prstGeom>
+          <a:solidFill>
+            <a:srgbClr val="E9F0F7"/>
+          </a:solidFill>
+          <a:ln w="12700">
+            <a:solidFill>
+              <a:srgbClr val="C9D2D8"/>
+            </a:solidFill>
+          </a:ln>
+          <a:effectLst/>
+        </p:spPr>
+        <p:style>
+          <a:lnRef idx="1">
+            <a:schemeClr val="accent1"/>
+          </a:lnRef>
+          <a:fillRef idx="3">
+            <a:schemeClr val="accent1"/>
+          </a:fillRef>
+          <a:effectRef idx="2">
+            <a:schemeClr val="accent1"/>
+          </a:effectRef>
+          <a:fontRef idx="minor">
+            <a:schemeClr val="lt1"/>
+          </a:fontRef>
+        </p:style>
+        <p:txBody>
+          <a:bodyPr rtlCol="0" anchor="ctr"/>
+          <a:lstStyle/>
+          <a:p>
+            <a:pPr algn="ctr"/>
+          </a:p>
+        </p:txBody>
+      </p:sp>
+      <p:sp>
+        <p:nvSpPr>
+          <p:cNvPr id="7" name="Rounded Rectangle 6"/>
+          <p:cNvSpPr/>
+          <p:nvPr/>
+        </p:nvSpPr>
+        <p:spPr>
+          <a:xfrm>
+            <a:off x="731520" y="2916936"/>
+            <a:ext cx="1371600" cy="493776"/>
+          </a:xfrm>
+          <a:prstGeom prst="roundRect">
+            <a:avLst/>
+          </a:prstGeom>
+          <a:solidFill>
+            <a:srgbClr val="FFFFFF"/>
+          </a:solidFill>
+          <a:ln w="15875">
+            <a:solidFill>
+              <a:srgbClr val="005BAB"/>
+            </a:solidFill>
+          </a:ln>
+          <a:effectLst/>
+        </p:spPr>
+        <p:style>
+          <a:lnRef idx="1">
+            <a:schemeClr val="accent1"/>
+          </a:lnRef>
+          <a:fillRef idx="3">
+            <a:schemeClr val="accent1"/>
+          </a:fillRef>
+          <a:effectRef idx="2">
+            <a:schemeClr val="accent1"/>
+          </a:effectRef>
+          <a:fontRef idx="minor">
+            <a:schemeClr val="lt1"/>
+          </a:fontRef>
+        </p:style>
+        <p:txBody>
+          <a:bodyPr rtlCol="0" anchor="ctr" wrap="square" lIns="109728" rIns="73152"/>
+          <a:lstStyle/>
+          <a:p>
+            <a:pPr algn="ctr"/>
+            <a:r>
+              <a:rPr sz="1400" b="1">
+                <a:solidFill>
+                  <a:srgbClr val="003F7E"/>
+                </a:solidFill>
+                <a:latin typeface="游ゴシック"/>
+                <a:ea typeface="游ゴシック"/>
+                <a:cs typeface="游ゴシック"/>
+              </a:rPr>
+              <a:t>仮説</a:t>
+            </a:r>
+          </a:p>
+        </p:txBody>
+      </p:sp>
+      <p:sp>
+        <p:nvSpPr>
+          <p:cNvPr id="8" name="TextBox 7"/>
+          <p:cNvSpPr txBox="1"/>
+          <p:nvPr/>
+        </p:nvSpPr>
+        <p:spPr>
+          <a:xfrm>
+            <a:off x="2331720" y="2734056"/>
+            <a:ext cx="9144000" cy="868680"/>
+          </a:xfrm>
+          <a:prstGeom prst="rect">
+            <a:avLst/>
+          </a:prstGeom>
+          <a:noFill/>
+        </p:spPr>
+        <p:txBody>
+          <a:bodyPr wrap="square">
+            <a:spAutoFit/>
+          </a:bodyPr>
+          <a:lstStyle/>
           <a:p>
             <a:pPr>
               <a:spcBef>
                 <a:spcPts val="0"/>
               </a:spcBef>
               <a:spcAft>
-                <a:spcPts val="1200"/>
+                <a:spcPts val="400"/>
               </a:spcAft>
             </a:pPr>
             <a:r>
-              <a:rPr sz="1350" b="0">
+              <a:rPr sz="1300" b="0">
                 <a:solidFill>
                   <a:srgbClr val="222222"/>
                 </a:solidFill>
@@ -15917,20 +16147,146 @@
                 <a:ea typeface="游ゴシック"/>
                 <a:cs typeface="游ゴシック"/>
               </a:rPr>
-              <a:t>・プラント出口（ストリーム品）は常に規格内（APHA&lt;5）。タンク（窒素封入）で保管中にのみ上昇する。</a:t>
-            </a:r>
-          </a:p>
+              <a:t>触媒劣化で増えたアルデヒドが縮合して前駆体になり、DEG留分を通って製品タンクで熟成・共役伸長し450nm（黄）に（最有力仮説・ベンチ未再現）。</a:t>
+            </a:r>
+          </a:p>
+        </p:txBody>
+      </p:sp>
+      <p:sp>
+        <p:nvSpPr>
+          <p:cNvPr id="9" name="Rounded Rectangle 8"/>
+          <p:cNvSpPr/>
+          <p:nvPr/>
+        </p:nvSpPr>
+        <p:spPr>
+          <a:xfrm>
+            <a:off x="548640" y="3831336"/>
+            <a:ext cx="11064240" cy="1078992"/>
+          </a:xfrm>
+          <a:prstGeom prst="roundRect">
+            <a:avLst/>
+          </a:prstGeom>
+          <a:solidFill>
+            <a:srgbClr val="EBEFF2"/>
+          </a:solidFill>
+          <a:ln w="12700">
+            <a:solidFill>
+              <a:srgbClr val="C9D2D8"/>
+            </a:solidFill>
+          </a:ln>
+          <a:effectLst/>
+        </p:spPr>
+        <p:style>
+          <a:lnRef idx="1">
+            <a:schemeClr val="accent1"/>
+          </a:lnRef>
+          <a:fillRef idx="3">
+            <a:schemeClr val="accent1"/>
+          </a:fillRef>
+          <a:effectRef idx="2">
+            <a:schemeClr val="accent1"/>
+          </a:effectRef>
+          <a:fontRef idx="minor">
+            <a:schemeClr val="lt1"/>
+          </a:fontRef>
+        </p:style>
+        <p:txBody>
+          <a:bodyPr rtlCol="0" anchor="ctr"/>
+          <a:lstStyle/>
+          <a:p>
+            <a:pPr algn="ctr"/>
+          </a:p>
+        </p:txBody>
+      </p:sp>
+      <p:sp>
+        <p:nvSpPr>
+          <p:cNvPr id="10" name="Rounded Rectangle 9"/>
+          <p:cNvSpPr/>
+          <p:nvPr/>
+        </p:nvSpPr>
+        <p:spPr>
+          <a:xfrm>
+            <a:off x="731520" y="4123944"/>
+            <a:ext cx="1371600" cy="493776"/>
+          </a:xfrm>
+          <a:prstGeom prst="roundRect">
+            <a:avLst/>
+          </a:prstGeom>
+          <a:solidFill>
+            <a:srgbClr val="FFFFFF"/>
+          </a:solidFill>
+          <a:ln w="15875">
+            <a:solidFill>
+              <a:srgbClr val="005BAB"/>
+            </a:solidFill>
+          </a:ln>
+          <a:effectLst/>
+        </p:spPr>
+        <p:style>
+          <a:lnRef idx="1">
+            <a:schemeClr val="accent1"/>
+          </a:lnRef>
+          <a:fillRef idx="3">
+            <a:schemeClr val="accent1"/>
+          </a:fillRef>
+          <a:effectRef idx="2">
+            <a:schemeClr val="accent1"/>
+          </a:effectRef>
+          <a:fontRef idx="minor">
+            <a:schemeClr val="lt1"/>
+          </a:fontRef>
+        </p:style>
+        <p:txBody>
+          <a:bodyPr rtlCol="0" anchor="ctr" wrap="square" lIns="109728" rIns="73152"/>
+          <a:lstStyle/>
+          <a:p>
+            <a:pPr algn="ctr"/>
+            <a:r>
+              <a:rPr sz="1400" b="1">
+                <a:solidFill>
+                  <a:srgbClr val="003F7E"/>
+                </a:solidFill>
+                <a:latin typeface="游ゴシック"/>
+                <a:ea typeface="游ゴシック"/>
+                <a:cs typeface="游ゴシック"/>
+              </a:rPr>
+              <a:t>対応</a:t>
+            </a:r>
+          </a:p>
+        </p:txBody>
+      </p:sp>
+      <p:sp>
+        <p:nvSpPr>
+          <p:cNvPr id="11" name="TextBox 10"/>
+          <p:cNvSpPr txBox="1"/>
+          <p:nvPr/>
+        </p:nvSpPr>
+        <p:spPr>
+          <a:xfrm>
+            <a:off x="2331720" y="3941064"/>
+            <a:ext cx="9144000" cy="868680"/>
+          </a:xfrm>
+          <a:prstGeom prst="rect">
+            <a:avLst/>
+          </a:prstGeom>
+          <a:noFill/>
+        </p:spPr>
+        <p:txBody>
+          <a:bodyPr wrap="square">
+            <a:spAutoFit/>
+          </a:bodyPr>
+          <a:lstStyle/>
           <a:p>
             <a:pPr>
               <a:spcBef>
                 <a:spcPts val="0"/>
               </a:spcBef>
               <a:spcAft>
-                <a:spcPts val="1200"/>
+                <a:spcPts val="400"/>
               </a:spcAft>
             </a:pPr>
             <a:r>
-              <a:rPr sz="1350" b="0">
+              <a:rPr sz="1300" b="0">
                 <a:solidFill>
                   <a:srgbClr val="222222"/>
                 </a:solidFill>
@@ -15938,20 +16294,146 @@
                 <a:ea typeface="游ゴシック"/>
                 <a:cs typeface="游ゴシック"/>
               </a:rPr>
-              <a:t>・同じ製品でも、ドラム充填品・SP転送品（大気接触）では色相上昇しない。共配ライン残液（27日保管）も悪化なし。</a:t>
-            </a:r>
-          </a:p>
+              <a:t>触媒交換（実施済）・設備洗浄・運転条件（NaOH非投入／温度を下げない／リン酸で緩和）。早期判定はUV450nm。</a:t>
+            </a:r>
+          </a:p>
+        </p:txBody>
+      </p:sp>
+      <p:sp>
+        <p:nvSpPr>
+          <p:cNvPr id="12" name="Rounded Rectangle 11"/>
+          <p:cNvSpPr/>
+          <p:nvPr/>
+        </p:nvSpPr>
+        <p:spPr>
+          <a:xfrm>
+            <a:off x="548640" y="5038344"/>
+            <a:ext cx="11064240" cy="1078992"/>
+          </a:xfrm>
+          <a:prstGeom prst="roundRect">
+            <a:avLst/>
+          </a:prstGeom>
+          <a:solidFill>
+            <a:srgbClr val="DCE6EF"/>
+          </a:solidFill>
+          <a:ln w="12700">
+            <a:solidFill>
+              <a:srgbClr val="C9D2D8"/>
+            </a:solidFill>
+          </a:ln>
+          <a:effectLst/>
+        </p:spPr>
+        <p:style>
+          <a:lnRef idx="1">
+            <a:schemeClr val="accent1"/>
+          </a:lnRef>
+          <a:fillRef idx="3">
+            <a:schemeClr val="accent1"/>
+          </a:fillRef>
+          <a:effectRef idx="2">
+            <a:schemeClr val="accent1"/>
+          </a:effectRef>
+          <a:fontRef idx="minor">
+            <a:schemeClr val="lt1"/>
+          </a:fontRef>
+        </p:style>
+        <p:txBody>
+          <a:bodyPr rtlCol="0" anchor="ctr"/>
+          <a:lstStyle/>
+          <a:p>
+            <a:pPr algn="ctr"/>
+          </a:p>
+        </p:txBody>
+      </p:sp>
+      <p:sp>
+        <p:nvSpPr>
+          <p:cNvPr id="13" name="Rounded Rectangle 12"/>
+          <p:cNvSpPr/>
+          <p:nvPr/>
+        </p:nvSpPr>
+        <p:spPr>
+          <a:xfrm>
+            <a:off x="731520" y="5330952"/>
+            <a:ext cx="1371600" cy="493776"/>
+          </a:xfrm>
+          <a:prstGeom prst="roundRect">
+            <a:avLst/>
+          </a:prstGeom>
+          <a:solidFill>
+            <a:srgbClr val="FFFFFF"/>
+          </a:solidFill>
+          <a:ln w="15875">
+            <a:solidFill>
+              <a:srgbClr val="005BAB"/>
+            </a:solidFill>
+          </a:ln>
+          <a:effectLst/>
+        </p:spPr>
+        <p:style>
+          <a:lnRef idx="1">
+            <a:schemeClr val="accent1"/>
+          </a:lnRef>
+          <a:fillRef idx="3">
+            <a:schemeClr val="accent1"/>
+          </a:fillRef>
+          <a:effectRef idx="2">
+            <a:schemeClr val="accent1"/>
+          </a:effectRef>
+          <a:fontRef idx="minor">
+            <a:schemeClr val="lt1"/>
+          </a:fontRef>
+        </p:style>
+        <p:txBody>
+          <a:bodyPr rtlCol="0" anchor="ctr" wrap="square" lIns="109728" rIns="73152"/>
+          <a:lstStyle/>
+          <a:p>
+            <a:pPr algn="ctr"/>
+            <a:r>
+              <a:rPr sz="1400" b="1">
+                <a:solidFill>
+                  <a:srgbClr val="003F7E"/>
+                </a:solidFill>
+                <a:latin typeface="游ゴシック"/>
+                <a:ea typeface="游ゴシック"/>
+                <a:cs typeface="游ゴシック"/>
+              </a:rPr>
+              <a:t>ご依頼</a:t>
+            </a:r>
+          </a:p>
+        </p:txBody>
+      </p:sp>
+      <p:sp>
+        <p:nvSpPr>
+          <p:cNvPr id="14" name="TextBox 13"/>
+          <p:cNvSpPr txBox="1"/>
+          <p:nvPr/>
+        </p:nvSpPr>
+        <p:spPr>
+          <a:xfrm>
+            <a:off x="2331720" y="5148072"/>
+            <a:ext cx="9144000" cy="868680"/>
+          </a:xfrm>
+          <a:prstGeom prst="rect">
+            <a:avLst/>
+          </a:prstGeom>
+          <a:noFill/>
+        </p:spPr>
+        <p:txBody>
+          <a:bodyPr wrap="square">
+            <a:spAutoFit/>
+          </a:bodyPr>
+          <a:lstStyle/>
           <a:p>
             <a:pPr>
               <a:spcBef>
                 <a:spcPts val="0"/>
               </a:spcBef>
               <a:spcAft>
-                <a:spcPts val="1200"/>
+                <a:spcPts val="400"/>
               </a:spcAft>
             </a:pPr>
             <a:r>
-              <a:rPr sz="1350" b="0">
+              <a:rPr sz="1300" b="0">
                 <a:solidFill>
                   <a:srgbClr val="222222"/>
                 </a:solidFill>
@@ -15959,35 +16441,11 @@
                 <a:ea typeface="游ゴシック"/>
                 <a:cs typeface="游ゴシック"/>
               </a:rPr>
-              <a:t>・色相・外観以外の品質規格（純度・MEG/TEG・水分・金属・蒸留性状）は実測で正常品の範囲内。pHのみ通常より僅かに高め（+0.1〜0.2程度）。</a:t>
-            </a:r>
-          </a:p>
-        </p:txBody>
-      </p:sp>
-      <p:pic>
-        <p:nvPicPr>
-          <p:cNvPr id="4" name="Picture 3" descr="apha_trend.png"/>
-          <p:cNvPicPr>
-            <a:picLocks noChangeAspect="1"/>
-          </p:cNvPicPr>
-          <p:nvPr/>
-        </p:nvPicPr>
-        <p:blipFill>
-          <a:blip r:embed="rId2"/>
-          <a:stretch>
-            <a:fillRect/>
-          </a:stretch>
-        </p:blipFill>
-        <p:spPr>
-          <a:xfrm>
-            <a:off x="6858000" y="1828800"/>
-            <a:ext cx="4937760" cy="2887297"/>
-          </a:xfrm>
-          <a:prstGeom prst="rect">
-            <a:avLst/>
-          </a:prstGeom>
-        </p:spPr>
-      </p:pic>
+              <a:t>再稼働後の初期流動品が全項目規格内かつタンク経時でUV・色相が不変であることを確認したうえで、出荷再開をご承認ください。</a:t>
+            </a:r>
+          </a:p>
+        </p:txBody>
+      </p:sp>
     </p:spTree>
   </p:cSld>
   <p:clrMapOvr>
@@ -16030,84 +16488,43 @@
                 <a:ea typeface="游ゴシック"/>
                 <a:cs typeface="游ゴシック"/>
               </a:rPr>
-              <a:t>着色物質と着色現象</a:t>
-            </a:r>
-          </a:p>
-        </p:txBody>
-      </p:sp>
-      <p:sp>
-        <p:nvSpPr>
-          <p:cNvPr id="3" name="Rounded Rectangle 2"/>
-          <p:cNvSpPr/>
+              <a:t>発生事象（事実）</a:t>
+            </a:r>
+          </a:p>
+        </p:txBody>
+      </p:sp>
+      <p:sp>
+        <p:nvSpPr>
+          <p:cNvPr id="3" name="TextBox 2"/>
+          <p:cNvSpPr txBox="1"/>
           <p:nvPr/>
         </p:nvSpPr>
         <p:spPr>
           <a:xfrm>
-            <a:off x="502920" y="1280160"/>
-            <a:ext cx="6035040" cy="2148840"/>
-          </a:xfrm>
-          <a:prstGeom prst="roundRect">
-            <a:avLst/>
-          </a:prstGeom>
-          <a:solidFill>
-            <a:srgbClr val="E8F1E5"/>
-          </a:solidFill>
-          <a:ln w="12700">
-            <a:solidFill>
-              <a:srgbClr val="C9D2D8"/>
-            </a:solidFill>
-          </a:ln>
-          <a:effectLst/>
-        </p:spPr>
-        <p:style>
-          <a:lnRef idx="1">
-            <a:schemeClr val="accent1"/>
-          </a:lnRef>
-          <a:fillRef idx="3">
-            <a:schemeClr val="accent1"/>
-          </a:fillRef>
-          <a:effectRef idx="2">
-            <a:schemeClr val="accent1"/>
-          </a:effectRef>
-          <a:fontRef idx="minor">
-            <a:schemeClr val="lt1"/>
-          </a:fontRef>
-        </p:style>
-        <p:txBody>
-          <a:bodyPr rtlCol="0" anchor="t" wrap="square" lIns="109728" tIns="54864"/>
+            <a:off x="502920" y="1371600"/>
+            <a:ext cx="6126480" cy="4937760"/>
+          </a:xfrm>
+          <a:prstGeom prst="rect">
+            <a:avLst/>
+          </a:prstGeom>
+          <a:noFill/>
+        </p:spPr>
+        <p:txBody>
+          <a:bodyPr wrap="square">
+            <a:spAutoFit/>
+          </a:bodyPr>
           <a:lstStyle/>
-          <a:p>
-            <a:pPr algn="ctr">
-              <a:spcBef>
-                <a:spcPts val="0"/>
-              </a:spcBef>
-              <a:spcAft>
-                <a:spcPts val="200"/>
-              </a:spcAft>
-            </a:pPr>
-            <a:r>
-              <a:rPr sz="1250" b="1">
-                <a:solidFill>
-                  <a:srgbClr val="003F7E"/>
-                </a:solidFill>
-                <a:latin typeface="游ゴシック"/>
-                <a:ea typeface="游ゴシック"/>
-                <a:cs typeface="游ゴシック"/>
-              </a:rPr>
-              <a:t>■ 確認した事実</a:t>
-            </a:r>
-          </a:p>
           <a:p>
             <a:pPr>
               <a:spcBef>
                 <a:spcPts val="0"/>
               </a:spcBef>
               <a:spcAft>
-                <a:spcPts val="200"/>
+                <a:spcPts val="1200"/>
               </a:spcAft>
             </a:pPr>
             <a:r>
-              <a:rPr sz="1100" b="0">
+              <a:rPr sz="1350" b="0">
                 <a:solidFill>
                   <a:srgbClr val="222222"/>
                 </a:solidFill>
@@ -16115,7 +16532,7 @@
                 <a:ea typeface="游ゴシック"/>
                 <a:cs typeface="游ゴシック"/>
               </a:rPr>
-              <a:t>・UVスペクトルで300nm付近と450nm付近に吸収。色相（APHA）上昇に伴い450nmが増大（450nmの補色＝黄、観測色と一致）。APHA30以上で550〜650nmにも吸収。</a:t>
+              <a:t>・冬定修後の再稼働（3月）以降、製品DEGがタンク保管中に色相（APHA）を経時上昇。約1か月半で検査規格を超過（APHA&lt;5 → 25〜35）。</a:t>
             </a:r>
           </a:p>
           <a:p>
@@ -16124,11 +16541,11 @@
                 <a:spcPts val="0"/>
               </a:spcBef>
               <a:spcAft>
-                <a:spcPts val="200"/>
+                <a:spcPts val="1200"/>
               </a:spcAft>
             </a:pPr>
             <a:r>
-              <a:rPr sz="1100" b="0">
+              <a:rPr sz="1350" b="0">
                 <a:solidFill>
                   <a:srgbClr val="222222"/>
                 </a:solidFill>
@@ -16136,7 +16553,7 @@
                 <a:ea typeface="游ゴシック"/>
                 <a:cs typeface="游ゴシック"/>
               </a:rPr>
-              <a:t>・450nm吸光度とAPHAが相関。GPCで分子量200〜800の分布。GCの複数検体が457nmを捕捉。</a:t>
+              <a:t>・プラント出口（ストリーム品）は常に規格内（APHA&lt;5）。タンク（窒素封入）で保管中にのみ上昇する。</a:t>
             </a:r>
           </a:p>
           <a:p>
@@ -16145,11 +16562,11 @@
                 <a:spcPts val="0"/>
               </a:spcBef>
               <a:spcAft>
-                <a:spcPts val="200"/>
+                <a:spcPts val="1200"/>
               </a:spcAft>
             </a:pPr>
             <a:r>
-              <a:rPr sz="1100" b="0">
+              <a:rPr sz="1350" b="0">
                 <a:solidFill>
                   <a:srgbClr val="222222"/>
                 </a:solidFill>
@@ -16157,7 +16574,7 @@
                 <a:ea typeface="游ゴシック"/>
                 <a:cs typeface="游ゴシック"/>
               </a:rPr>
-              <a:t>・T-555残液は5/18時点（APHA30）以降、APHAが上昇していない。</a:t>
+              <a:t>・同じ製品でも、ドラム充填品・SP転送品（大気接触）では色相上昇しない。共配ライン残液（27日保管）も悪化なし。</a:t>
             </a:r>
           </a:p>
           <a:p>
@@ -16166,11 +16583,11 @@
                 <a:spcPts val="0"/>
               </a:spcBef>
               <a:spcAft>
-                <a:spcPts val="200"/>
+                <a:spcPts val="1200"/>
               </a:spcAft>
             </a:pPr>
             <a:r>
-              <a:rPr sz="1100" b="0">
+              <a:rPr sz="1350" b="0">
                 <a:solidFill>
                   <a:srgbClr val="222222"/>
                 </a:solidFill>
@@ -16178,141 +16595,14 @@
                 <a:ea typeface="游ゴシック"/>
                 <a:cs typeface="游ゴシック"/>
               </a:rPr>
-              <a:t>・アルデヒド類（A-ALD・F-ALD・アクロレイン）も検出されるが、アクロレイン濃度とAPHAは相関しない。</a:t>
-            </a:r>
-          </a:p>
-        </p:txBody>
-      </p:sp>
-      <p:sp>
-        <p:nvSpPr>
-          <p:cNvPr id="4" name="Rounded Rectangle 3"/>
-          <p:cNvSpPr/>
-          <p:nvPr/>
-        </p:nvSpPr>
-        <p:spPr>
-          <a:xfrm>
-            <a:off x="502920" y="3566160"/>
-            <a:ext cx="6035040" cy="2743200"/>
-          </a:xfrm>
-          <a:prstGeom prst="roundRect">
-            <a:avLst/>
-          </a:prstGeom>
-          <a:solidFill>
-            <a:srgbClr val="E9F0F7"/>
-          </a:solidFill>
-          <a:ln w="12700">
-            <a:solidFill>
-              <a:srgbClr val="C9D2D8"/>
-            </a:solidFill>
-          </a:ln>
-          <a:effectLst/>
-        </p:spPr>
-        <p:style>
-          <a:lnRef idx="1">
-            <a:schemeClr val="accent1"/>
-          </a:lnRef>
-          <a:fillRef idx="3">
-            <a:schemeClr val="accent1"/>
-          </a:fillRef>
-          <a:effectRef idx="2">
-            <a:schemeClr val="accent1"/>
-          </a:effectRef>
-          <a:fontRef idx="minor">
-            <a:schemeClr val="lt1"/>
-          </a:fontRef>
-        </p:style>
-        <p:txBody>
-          <a:bodyPr rtlCol="0" anchor="t" wrap="square" lIns="109728" tIns="54864"/>
-          <a:lstStyle/>
-          <a:p>
-            <a:pPr algn="ctr">
-              <a:spcBef>
-                <a:spcPts val="0"/>
-              </a:spcBef>
-              <a:spcAft>
-                <a:spcPts val="200"/>
-              </a:spcAft>
-            </a:pPr>
-            <a:r>
-              <a:rPr sz="1250" b="1">
-                <a:solidFill>
-                  <a:srgbClr val="003F7E"/>
-                </a:solidFill>
-                <a:latin typeface="游ゴシック"/>
-                <a:ea typeface="游ゴシック"/>
-                <a:cs typeface="游ゴシック"/>
-              </a:rPr>
-              <a:t>■ ここから読める推定</a:t>
-            </a:r>
-          </a:p>
-          <a:p>
-            <a:pPr>
-              <a:spcBef>
-                <a:spcPts val="0"/>
-              </a:spcBef>
-              <a:spcAft>
-                <a:spcPts val="200"/>
-              </a:spcAft>
-            </a:pPr>
-            <a:r>
-              <a:rPr sz="1100" b="0">
-                <a:solidFill>
-                  <a:srgbClr val="222222"/>
-                </a:solidFill>
-                <a:latin typeface="游ゴシック"/>
-                <a:ea typeface="游ゴシック"/>
-                <a:cs typeface="游ゴシック"/>
-              </a:rPr>
-              <a:t>・着色物質は共役ポリエン（CH=CHの連なり）を持つ化合物の混合物と推定。共役が伸びるほど吸収が長波長化し、十分に伸びると可視域450nm（黄）に達する。</a:t>
-            </a:r>
-          </a:p>
-          <a:p>
-            <a:pPr>
-              <a:spcBef>
-                <a:spcPts val="0"/>
-              </a:spcBef>
-              <a:spcAft>
-                <a:spcPts val="200"/>
-              </a:spcAft>
-            </a:pPr>
-            <a:r>
-              <a:rPr sz="1100" b="0">
-                <a:solidFill>
-                  <a:srgbClr val="222222"/>
-                </a:solidFill>
-                <a:latin typeface="游ゴシック"/>
-                <a:ea typeface="游ゴシック"/>
-                <a:cs typeface="游ゴシック"/>
-              </a:rPr>
-              <a:t>・GPCの200〜800という幅は単一物質でなくオリゴマー混合物を示す（数平均の分子量はおよそ280〜300、上限側はオリゴマー化やグリコール付加で大きくなる）。</a:t>
-            </a:r>
-          </a:p>
-          <a:p>
-            <a:pPr>
-              <a:spcBef>
-                <a:spcPts val="0"/>
-              </a:spcBef>
-              <a:spcAft>
-                <a:spcPts val="200"/>
-              </a:spcAft>
-            </a:pPr>
-            <a:r>
-              <a:rPr sz="1100" b="0">
-                <a:solidFill>
-                  <a:srgbClr val="222222"/>
-                </a:solidFill>
-                <a:latin typeface="游ゴシック"/>
-                <a:ea typeface="游ゴシック"/>
-                <a:cs typeface="游ゴシック"/>
-              </a:rPr>
-              <a:t>・存在量はUV吸光度からの換算で数ppb〜10ppb程度（ppbオーダー、絶対定量は未確立）。共役系の吸光係数が極めて大きいため、この微量で色がつく。</a:t>
+              <a:t>・色相・外観以外の品質規格（純度・MEG/TEG・水分・金属・蒸留性状）は実測で正常品の範囲内。pHのみ通常より僅かに高め（+0.1〜0.2程度）。</a:t>
             </a:r>
           </a:p>
         </p:txBody>
       </p:sp>
       <p:pic>
         <p:nvPicPr>
-          <p:cNvPr id="5" name="Picture 4" descr="uv_spectrum.png"/>
+          <p:cNvPr id="4" name="Picture 3" descr="apha_trend.png"/>
           <p:cNvPicPr>
             <a:picLocks noChangeAspect="1"/>
           </p:cNvPicPr>
@@ -16326,82 +16616,14 @@
         </p:blipFill>
         <p:spPr>
           <a:xfrm>
-            <a:off x="6720840" y="1280160"/>
-            <a:ext cx="5120640" cy="2939461"/>
+            <a:off x="6858000" y="1828800"/>
+            <a:ext cx="4937760" cy="2887297"/>
           </a:xfrm>
           <a:prstGeom prst="rect">
             <a:avLst/>
           </a:prstGeom>
         </p:spPr>
       </p:pic>
-      <p:pic>
-        <p:nvPicPr>
-          <p:cNvPr id="6" name="Picture 5" descr="polyenal_long.png"/>
-          <p:cNvPicPr>
-            <a:picLocks noChangeAspect="1"/>
-          </p:cNvPicPr>
-          <p:nvPr/>
-        </p:nvPicPr>
-        <p:blipFill>
-          <a:blip r:embed="rId3"/>
-          <a:stretch>
-            <a:fillRect/>
-          </a:stretch>
-        </p:blipFill>
-        <p:spPr>
-          <a:xfrm>
-            <a:off x="6949440" y="4297680"/>
-            <a:ext cx="4663440" cy="2123045"/>
-          </a:xfrm>
-          <a:prstGeom prst="rect">
-            <a:avLst/>
-          </a:prstGeom>
-        </p:spPr>
-      </p:pic>
-      <p:sp>
-        <p:nvSpPr>
-          <p:cNvPr id="7" name="TextBox 6"/>
-          <p:cNvSpPr txBox="1"/>
-          <p:nvPr/>
-        </p:nvSpPr>
-        <p:spPr>
-          <a:xfrm>
-            <a:off x="6766560" y="5897880"/>
-            <a:ext cx="5120640" cy="640080"/>
-          </a:xfrm>
-          <a:prstGeom prst="rect">
-            <a:avLst/>
-          </a:prstGeom>
-          <a:noFill/>
-        </p:spPr>
-        <p:txBody>
-          <a:bodyPr wrap="square">
-            <a:spAutoFit/>
-          </a:bodyPr>
-          <a:lstStyle/>
-          <a:p>
-            <a:pPr>
-              <a:spcBef>
-                <a:spcPts val="0"/>
-              </a:spcBef>
-              <a:spcAft>
-                <a:spcPts val="400"/>
-              </a:spcAft>
-            </a:pPr>
-            <a:r>
-              <a:rPr sz="1050" b="1">
-                <a:solidFill>
-                  <a:srgbClr val="003F7E"/>
-                </a:solidFill>
-                <a:latin typeface="游ゴシック"/>
-                <a:ea typeface="游ゴシック"/>
-                <a:cs typeface="游ゴシック"/>
-              </a:rPr>
-              <a:t>着色物質＝共役ポリエナール CH3-(CH=CH)n-CHO（数〜10ppbで発色）</a:t>
-            </a:r>
-          </a:p>
-        </p:txBody>
-      </p:sp>
     </p:spTree>
   </p:cSld>
   <p:clrMapOvr>
@@ -16444,14 +16666,289 @@
                 <a:ea typeface="游ゴシック"/>
                 <a:cs typeface="游ゴシック"/>
               </a:rPr>
-              <a:t>推定メカニズム（現時点の最有力仮説・ベンチでは未再現）</a:t>
+              <a:t>着色物質と着色現象</a:t>
+            </a:r>
+          </a:p>
+        </p:txBody>
+      </p:sp>
+      <p:sp>
+        <p:nvSpPr>
+          <p:cNvPr id="3" name="Rounded Rectangle 2"/>
+          <p:cNvSpPr/>
+          <p:nvPr/>
+        </p:nvSpPr>
+        <p:spPr>
+          <a:xfrm>
+            <a:off x="502920" y="1280160"/>
+            <a:ext cx="6035040" cy="2148840"/>
+          </a:xfrm>
+          <a:prstGeom prst="roundRect">
+            <a:avLst/>
+          </a:prstGeom>
+          <a:solidFill>
+            <a:srgbClr val="E8F1E5"/>
+          </a:solidFill>
+          <a:ln w="12700">
+            <a:solidFill>
+              <a:srgbClr val="C9D2D8"/>
+            </a:solidFill>
+          </a:ln>
+          <a:effectLst/>
+        </p:spPr>
+        <p:style>
+          <a:lnRef idx="1">
+            <a:schemeClr val="accent1"/>
+          </a:lnRef>
+          <a:fillRef idx="3">
+            <a:schemeClr val="accent1"/>
+          </a:fillRef>
+          <a:effectRef idx="2">
+            <a:schemeClr val="accent1"/>
+          </a:effectRef>
+          <a:fontRef idx="minor">
+            <a:schemeClr val="lt1"/>
+          </a:fontRef>
+        </p:style>
+        <p:txBody>
+          <a:bodyPr rtlCol="0" anchor="t" wrap="square" lIns="109728" tIns="54864"/>
+          <a:lstStyle/>
+          <a:p>
+            <a:pPr algn="ctr">
+              <a:spcBef>
+                <a:spcPts val="0"/>
+              </a:spcBef>
+              <a:spcAft>
+                <a:spcPts val="200"/>
+              </a:spcAft>
+            </a:pPr>
+            <a:r>
+              <a:rPr sz="1250" b="1">
+                <a:solidFill>
+                  <a:srgbClr val="003F7E"/>
+                </a:solidFill>
+                <a:latin typeface="游ゴシック"/>
+                <a:ea typeface="游ゴシック"/>
+                <a:cs typeface="游ゴシック"/>
+              </a:rPr>
+              <a:t>■ 確認した事実</a:t>
+            </a:r>
+          </a:p>
+          <a:p>
+            <a:pPr>
+              <a:spcBef>
+                <a:spcPts val="0"/>
+              </a:spcBef>
+              <a:spcAft>
+                <a:spcPts val="200"/>
+              </a:spcAft>
+            </a:pPr>
+            <a:r>
+              <a:rPr sz="1100" b="0">
+                <a:solidFill>
+                  <a:srgbClr val="222222"/>
+                </a:solidFill>
+                <a:latin typeface="游ゴシック"/>
+                <a:ea typeface="游ゴシック"/>
+                <a:cs typeface="游ゴシック"/>
+              </a:rPr>
+              <a:t>・UVスペクトルで300nm付近と450nm付近に吸収。色相（APHA）上昇に伴い450nmが増大（450nmの補色＝黄、観測色と一致）。</a:t>
+            </a:r>
+          </a:p>
+          <a:p>
+            <a:pPr>
+              <a:spcBef>
+                <a:spcPts val="0"/>
+              </a:spcBef>
+              <a:spcAft>
+                <a:spcPts val="200"/>
+              </a:spcAft>
+            </a:pPr>
+            <a:r>
+              <a:rPr sz="1100" b="0">
+                <a:solidFill>
+                  <a:srgbClr val="222222"/>
+                </a:solidFill>
+                <a:latin typeface="游ゴシック"/>
+                <a:ea typeface="游ゴシック"/>
+                <a:cs typeface="游ゴシック"/>
+              </a:rPr>
+              <a:t>・450nm吸光度とAPHAが相関。GPCで分子量200〜800の分布。GCの複数検体が457nmを捕捉。</a:t>
+            </a:r>
+          </a:p>
+          <a:p>
+            <a:pPr>
+              <a:spcBef>
+                <a:spcPts val="0"/>
+              </a:spcBef>
+              <a:spcAft>
+                <a:spcPts val="200"/>
+              </a:spcAft>
+            </a:pPr>
+            <a:r>
+              <a:rPr sz="1100" b="0">
+                <a:solidFill>
+                  <a:srgbClr val="222222"/>
+                </a:solidFill>
+                <a:latin typeface="游ゴシック"/>
+                <a:ea typeface="游ゴシック"/>
+                <a:cs typeface="游ゴシック"/>
+              </a:rPr>
+              <a:t>・T-555残液は5/18時点（APHA30）以降、APHAが上昇していない。</a:t>
+            </a:r>
+          </a:p>
+          <a:p>
+            <a:pPr>
+              <a:spcBef>
+                <a:spcPts val="0"/>
+              </a:spcBef>
+              <a:spcAft>
+                <a:spcPts val="200"/>
+              </a:spcAft>
+            </a:pPr>
+            <a:r>
+              <a:rPr sz="1100" b="0">
+                <a:solidFill>
+                  <a:srgbClr val="222222"/>
+                </a:solidFill>
+                <a:latin typeface="游ゴシック"/>
+                <a:ea typeface="游ゴシック"/>
+                <a:cs typeface="游ゴシック"/>
+              </a:rPr>
+              <a:t>・アルデヒド類（A-ALD・F-ALD・アクロレイン）も検出されるが、アクロレイン濃度とAPHAは相関しない。</a:t>
+            </a:r>
+          </a:p>
+        </p:txBody>
+      </p:sp>
+      <p:sp>
+        <p:nvSpPr>
+          <p:cNvPr id="4" name="Rounded Rectangle 3"/>
+          <p:cNvSpPr/>
+          <p:nvPr/>
+        </p:nvSpPr>
+        <p:spPr>
+          <a:xfrm>
+            <a:off x="502920" y="3566160"/>
+            <a:ext cx="6035040" cy="2743200"/>
+          </a:xfrm>
+          <a:prstGeom prst="roundRect">
+            <a:avLst/>
+          </a:prstGeom>
+          <a:solidFill>
+            <a:srgbClr val="E9F0F7"/>
+          </a:solidFill>
+          <a:ln w="12700">
+            <a:solidFill>
+              <a:srgbClr val="C9D2D8"/>
+            </a:solidFill>
+          </a:ln>
+          <a:effectLst/>
+        </p:spPr>
+        <p:style>
+          <a:lnRef idx="1">
+            <a:schemeClr val="accent1"/>
+          </a:lnRef>
+          <a:fillRef idx="3">
+            <a:schemeClr val="accent1"/>
+          </a:fillRef>
+          <a:effectRef idx="2">
+            <a:schemeClr val="accent1"/>
+          </a:effectRef>
+          <a:fontRef idx="minor">
+            <a:schemeClr val="lt1"/>
+          </a:fontRef>
+        </p:style>
+        <p:txBody>
+          <a:bodyPr rtlCol="0" anchor="t" wrap="square" lIns="109728" tIns="54864"/>
+          <a:lstStyle/>
+          <a:p>
+            <a:pPr algn="ctr">
+              <a:spcBef>
+                <a:spcPts val="0"/>
+              </a:spcBef>
+              <a:spcAft>
+                <a:spcPts val="200"/>
+              </a:spcAft>
+            </a:pPr>
+            <a:r>
+              <a:rPr sz="1250" b="1">
+                <a:solidFill>
+                  <a:srgbClr val="003F7E"/>
+                </a:solidFill>
+                <a:latin typeface="游ゴシック"/>
+                <a:ea typeface="游ゴシック"/>
+                <a:cs typeface="游ゴシック"/>
+              </a:rPr>
+              <a:t>■ ここから読める推定</a:t>
+            </a:r>
+          </a:p>
+          <a:p>
+            <a:pPr>
+              <a:spcBef>
+                <a:spcPts val="0"/>
+              </a:spcBef>
+              <a:spcAft>
+                <a:spcPts val="200"/>
+              </a:spcAft>
+            </a:pPr>
+            <a:r>
+              <a:rPr sz="1100" b="0">
+                <a:solidFill>
+                  <a:srgbClr val="222222"/>
+                </a:solidFill>
+                <a:latin typeface="游ゴシック"/>
+                <a:ea typeface="游ゴシック"/>
+                <a:cs typeface="游ゴシック"/>
+              </a:rPr>
+              <a:t>・着色物質は共役ポリエン（CH=CHの連なり）を持つ化合物の混合物と推定。共役が伸びるほど吸収が長波長化し、十分に伸びると可視域450nm（黄）に達する。</a:t>
+            </a:r>
+          </a:p>
+          <a:p>
+            <a:pPr>
+              <a:spcBef>
+                <a:spcPts val="0"/>
+              </a:spcBef>
+              <a:spcAft>
+                <a:spcPts val="200"/>
+              </a:spcAft>
+            </a:pPr>
+            <a:r>
+              <a:rPr sz="1100" b="0">
+                <a:solidFill>
+                  <a:srgbClr val="222222"/>
+                </a:solidFill>
+                <a:latin typeface="游ゴシック"/>
+                <a:ea typeface="游ゴシック"/>
+                <a:cs typeface="游ゴシック"/>
+              </a:rPr>
+              <a:t>・GPCの200〜800という幅は単一物質でなくオリゴマー混合物を示す（分子量は数百のオーダー、上限側はオリゴマー化で大きくなる）。</a:t>
+            </a:r>
+          </a:p>
+          <a:p>
+            <a:pPr>
+              <a:spcBef>
+                <a:spcPts val="0"/>
+              </a:spcBef>
+              <a:spcAft>
+                <a:spcPts val="200"/>
+              </a:spcAft>
+            </a:pPr>
+            <a:r>
+              <a:rPr sz="1100" b="0">
+                <a:solidFill>
+                  <a:srgbClr val="222222"/>
+                </a:solidFill>
+                <a:latin typeface="游ゴシック"/>
+                <a:ea typeface="游ゴシック"/>
+                <a:cs typeface="游ゴシック"/>
+              </a:rPr>
+              <a:t>・存在量は絶対定量が未確立だがppbオーダーの微量（UV吸光度からの換算）。共役系の吸光係数が大きく、微量で色がつく。</a:t>
             </a:r>
           </a:p>
         </p:txBody>
       </p:sp>
       <p:pic>
         <p:nvPicPr>
-          <p:cNvPr id="3" name="Picture 2" descr="aldol_scheme.png"/>
+          <p:cNvPr id="5" name="Picture 4" descr="uv_spectrum.png"/>
           <p:cNvPicPr>
             <a:picLocks noChangeAspect="1"/>
           </p:cNvPicPr>
@@ -16465,68 +16962,48 @@
         </p:blipFill>
         <p:spPr>
           <a:xfrm>
-            <a:off x="457200" y="1325880"/>
-            <a:ext cx="11274552" cy="3753834"/>
+            <a:off x="6720840" y="1280160"/>
+            <a:ext cx="5120640" cy="2939461"/>
           </a:xfrm>
           <a:prstGeom prst="rect">
             <a:avLst/>
           </a:prstGeom>
         </p:spPr>
       </p:pic>
-      <p:sp>
-        <p:nvSpPr>
-          <p:cNvPr id="4" name="TextBox 3"/>
+      <p:pic>
+        <p:nvPicPr>
+          <p:cNvPr id="6" name="Picture 5" descr="polyenal_long.png"/>
+          <p:cNvPicPr>
+            <a:picLocks noChangeAspect="1"/>
+          </p:cNvPicPr>
+          <p:nvPr/>
+        </p:nvPicPr>
+        <p:blipFill>
+          <a:blip r:embed="rId3"/>
+          <a:stretch>
+            <a:fillRect/>
+          </a:stretch>
+        </p:blipFill>
+        <p:spPr>
+          <a:xfrm>
+            <a:off x="6949440" y="4297680"/>
+            <a:ext cx="4663440" cy="2123045"/>
+          </a:xfrm>
+          <a:prstGeom prst="rect">
+            <a:avLst/>
+          </a:prstGeom>
+        </p:spPr>
+      </p:pic>
+      <p:sp>
+        <p:nvSpPr>
+          <p:cNvPr id="7" name="TextBox 6"/>
           <p:cNvSpPr txBox="1"/>
           <p:nvPr/>
         </p:nvSpPr>
         <p:spPr>
           <a:xfrm>
-            <a:off x="548640" y="5074920"/>
-            <a:ext cx="11064240" cy="914400"/>
-          </a:xfrm>
-          <a:prstGeom prst="rect">
-            <a:avLst/>
-          </a:prstGeom>
-          <a:noFill/>
-        </p:spPr>
-        <p:txBody>
-          <a:bodyPr wrap="square">
-            <a:spAutoFit/>
-          </a:bodyPr>
-          <a:lstStyle/>
-          <a:p>
-            <a:pPr>
-              <a:spcBef>
-                <a:spcPts val="0"/>
-              </a:spcBef>
-              <a:spcAft>
-                <a:spcPts val="300"/>
-              </a:spcAft>
-            </a:pPr>
-            <a:r>
-              <a:rPr sz="1250" b="1">
-                <a:solidFill>
-                  <a:srgbClr val="003F7E"/>
-                </a:solidFill>
-                <a:latin typeface="游ゴシック"/>
-                <a:ea typeface="游ゴシック"/>
-                <a:cs typeface="游ゴシック"/>
-              </a:rPr>
-              <a:t>一筋： 触媒劣化で増えたアルデヒドが、アルドール縮合で高沸点の前駆体になってDEG留分へ移り、窒素タンクの長期保管で前駆体どうしが縮合・脱水して共役が伸び、約10ppb（推定）で450nm＝黄色に着色する。前駆体を使い切るとAPHA30程度で頭打ちになる。</a:t>
-            </a:r>
-          </a:p>
-        </p:txBody>
-      </p:sp>
-      <p:sp>
-        <p:nvSpPr>
-          <p:cNvPr id="5" name="TextBox 4"/>
-          <p:cNvSpPr txBox="1"/>
-          <p:nvPr/>
-        </p:nvSpPr>
-        <p:spPr>
-          <a:xfrm>
-            <a:off x="548640" y="6172200"/>
-            <a:ext cx="11064240" cy="548640"/>
+            <a:off x="6766560" y="5897880"/>
+            <a:ext cx="5120640" cy="640080"/>
           </a:xfrm>
           <a:prstGeom prst="rect">
             <a:avLst/>
@@ -16548,15 +17025,15 @@
               </a:spcAft>
             </a:pPr>
             <a:r>
-              <a:rPr sz="1000" b="0">
+              <a:rPr sz="1050" b="1">
                 <a:solidFill>
-                  <a:srgbClr val="666666"/>
+                  <a:srgbClr val="003F7E"/>
                 </a:solidFill>
                 <a:latin typeface="游ゴシック"/>
                 <a:ea typeface="游ゴシック"/>
                 <a:cs typeface="游ゴシック"/>
               </a:rPr>
-              <a:t>※ 本メカニズムは現時点の最有力仮説で、RDベンチでは再現に至っていない（タンク長期保管・pH・前駆体濃度の同時再現が未達）。方向性（共役が伸びて黄色になる／酸素で抑制される）は観測と整合する。</a:t>
+              <a:t>着色物質＝共役ポリエナール CH3-(CH=CH)n-CHO（数〜10ppbで発色）</a:t>
             </a:r>
           </a:p>
         </p:txBody>
@@ -16603,7 +17080,166 @@
                 <a:ea typeface="游ゴシック"/>
                 <a:cs typeface="游ゴシック"/>
               </a:rPr>
-              <a:t>どこで何が起きるか（工程フロー）</a:t>
+              <a:t>推定メカニズム（現時点の最有力仮説・ベンチでは未再現）</a:t>
+            </a:r>
+          </a:p>
+        </p:txBody>
+      </p:sp>
+      <p:pic>
+        <p:nvPicPr>
+          <p:cNvPr id="3" name="Picture 2" descr="aldol_scheme.png"/>
+          <p:cNvPicPr>
+            <a:picLocks noChangeAspect="1"/>
+          </p:cNvPicPr>
+          <p:nvPr/>
+        </p:nvPicPr>
+        <p:blipFill>
+          <a:blip r:embed="rId2"/>
+          <a:stretch>
+            <a:fillRect/>
+          </a:stretch>
+        </p:blipFill>
+        <p:spPr>
+          <a:xfrm>
+            <a:off x="457200" y="1325880"/>
+            <a:ext cx="11274552" cy="3753834"/>
+          </a:xfrm>
+          <a:prstGeom prst="rect">
+            <a:avLst/>
+          </a:prstGeom>
+        </p:spPr>
+      </p:pic>
+      <p:sp>
+        <p:nvSpPr>
+          <p:cNvPr id="4" name="TextBox 3"/>
+          <p:cNvSpPr txBox="1"/>
+          <p:nvPr/>
+        </p:nvSpPr>
+        <p:spPr>
+          <a:xfrm>
+            <a:off x="548640" y="5074920"/>
+            <a:ext cx="11064240" cy="914400"/>
+          </a:xfrm>
+          <a:prstGeom prst="rect">
+            <a:avLst/>
+          </a:prstGeom>
+          <a:noFill/>
+        </p:spPr>
+        <p:txBody>
+          <a:bodyPr wrap="square">
+            <a:spAutoFit/>
+          </a:bodyPr>
+          <a:lstStyle/>
+          <a:p>
+            <a:pPr>
+              <a:spcBef>
+                <a:spcPts val="0"/>
+              </a:spcBef>
+              <a:spcAft>
+                <a:spcPts val="300"/>
+              </a:spcAft>
+            </a:pPr>
+            <a:r>
+              <a:rPr sz="1250" b="1">
+                <a:solidFill>
+                  <a:srgbClr val="003F7E"/>
+                </a:solidFill>
+                <a:latin typeface="游ゴシック"/>
+                <a:ea typeface="游ゴシック"/>
+                <a:cs typeface="游ゴシック"/>
+              </a:rPr>
+              <a:t>一筋： 触媒劣化で増えたアルデヒドが、アルドール縮合で高沸点の前駆体になってDEG留分へ移り、窒素タンクの長期保管で前駆体どうしが縮合・脱水して共役が伸び、約10ppb（推定）で450nm＝黄色に着色する。前駆体を使い切るとAPHA30程度で頭打ちになる。</a:t>
+            </a:r>
+          </a:p>
+        </p:txBody>
+      </p:sp>
+      <p:sp>
+        <p:nvSpPr>
+          <p:cNvPr id="5" name="TextBox 4"/>
+          <p:cNvSpPr txBox="1"/>
+          <p:nvPr/>
+        </p:nvSpPr>
+        <p:spPr>
+          <a:xfrm>
+            <a:off x="548640" y="6172200"/>
+            <a:ext cx="11064240" cy="548640"/>
+          </a:xfrm>
+          <a:prstGeom prst="rect">
+            <a:avLst/>
+          </a:prstGeom>
+          <a:noFill/>
+        </p:spPr>
+        <p:txBody>
+          <a:bodyPr wrap="square">
+            <a:spAutoFit/>
+          </a:bodyPr>
+          <a:lstStyle/>
+          <a:p>
+            <a:pPr>
+              <a:spcBef>
+                <a:spcPts val="0"/>
+              </a:spcBef>
+              <a:spcAft>
+                <a:spcPts val="400"/>
+              </a:spcAft>
+            </a:pPr>
+            <a:r>
+              <a:rPr sz="1000" b="0">
+                <a:solidFill>
+                  <a:srgbClr val="666666"/>
+                </a:solidFill>
+                <a:latin typeface="游ゴシック"/>
+                <a:ea typeface="游ゴシック"/>
+                <a:cs typeface="游ゴシック"/>
+              </a:rPr>
+              <a:t>※ 本メカニズムは現時点の最有力仮説で、RDベンチでは再現に至っていない（タンク長期保管・pH・前駆体濃度の同時再現が未達）。方向性（共役が伸びて黄色になる／酸素で抑制される）は観測と整合する。</a:t>
+            </a:r>
+          </a:p>
+        </p:txBody>
+      </p:sp>
+    </p:spTree>
+  </p:cSld>
+  <p:clrMapOvr>
+    <a:masterClrMapping/>
+  </p:clrMapOvr>
+</p:sld>
+</file>
+
+<file path=ppt/slides/slide14.xml><?xml version="1.0" encoding="utf-8"?>
+<p:sld xmlns:a="http://schemas.openxmlformats.org/drawingml/2006/main" xmlns:p="http://schemas.openxmlformats.org/presentationml/2006/main" xmlns:r="http://schemas.openxmlformats.org/officeDocument/2006/relationships">
+  <p:cSld>
+    <p:spTree>
+      <p:nvGrpSpPr>
+        <p:cNvPr id="1" name=""/>
+        <p:cNvGrpSpPr/>
+        <p:nvPr/>
+      </p:nvGrpSpPr>
+      <p:grpSpPr/>
+      <p:sp>
+        <p:nvSpPr>
+          <p:cNvPr id="2" name="Title 1"/>
+          <p:cNvSpPr>
+            <a:spLocks noGrp="1"/>
+          </p:cNvSpPr>
+          <p:nvPr>
+            <p:ph type="title"/>
+          </p:nvPr>
+        </p:nvSpPr>
+        <p:spPr/>
+        <p:txBody>
+          <a:bodyPr/>
+          <a:lstStyle/>
+          <a:p>
+            <a:r>
+              <a:rPr sz="2200" b="1">
+                <a:solidFill>
+                  <a:srgbClr val="003F7E"/>
+                </a:solidFill>
+                <a:latin typeface="游ゴシック"/>
+                <a:ea typeface="游ゴシック"/>
+                <a:cs typeface="游ゴシック"/>
+              </a:rPr>
+              <a:t>縮合は脱水塔以降で起こる（工程フロー）</a:t>
             </a:r>
           </a:p>
         </p:txBody>
@@ -16684,7 +17320,7 @@
 </p:sld>
 </file>
 
-<file path=ppt/slides/slide14.xml><?xml version="1.0" encoding="utf-8"?>
+<file path=ppt/slides/slide15.xml><?xml version="1.0" encoding="utf-8"?>
 <p:sld xmlns:a="http://schemas.openxmlformats.org/drawingml/2006/main" xmlns:p="http://schemas.openxmlformats.org/presentationml/2006/main" xmlns:r="http://schemas.openxmlformats.org/officeDocument/2006/relationships">
   <p:cSld>
     <p:spTree>
@@ -17402,7 +18038,7 @@
 </p:sld>
 </file>
 
-<file path=ppt/slides/slide15.xml><?xml version="1.0" encoding="utf-8"?>
+<file path=ppt/slides/slide16.xml><?xml version="1.0" encoding="utf-8"?>
 <p:sld xmlns:a="http://schemas.openxmlformats.org/drawingml/2006/main" xmlns:p="http://schemas.openxmlformats.org/presentationml/2006/main" xmlns:r="http://schemas.openxmlformats.org/officeDocument/2006/relationships">
   <p:cSld>
     <p:spTree>
@@ -17805,228 +18441,6 @@
                 <a:cs typeface="游ゴシック"/>
               </a:rPr>
               <a:t>→ 出口でDEGラインIERを検討</a:t>
-            </a:r>
-          </a:p>
-        </p:txBody>
-      </p:sp>
-    </p:spTree>
-  </p:cSld>
-  <p:clrMapOvr>
-    <a:masterClrMapping/>
-  </p:clrMapOvr>
-</p:sld>
-</file>
-
-<file path=ppt/slides/slide16.xml><?xml version="1.0" encoding="utf-8"?>
-<p:sld xmlns:a="http://schemas.openxmlformats.org/drawingml/2006/main" xmlns:p="http://schemas.openxmlformats.org/presentationml/2006/main" xmlns:r="http://schemas.openxmlformats.org/officeDocument/2006/relationships">
-  <p:cSld>
-    <p:spTree>
-      <p:nvGrpSpPr>
-        <p:cNvPr id="1" name=""/>
-        <p:cNvGrpSpPr/>
-        <p:nvPr/>
-      </p:nvGrpSpPr>
-      <p:grpSpPr/>
-      <p:sp>
-        <p:nvSpPr>
-          <p:cNvPr id="2" name="Title 1"/>
-          <p:cNvSpPr>
-            <a:spLocks noGrp="1"/>
-          </p:cNvSpPr>
-          <p:nvPr>
-            <p:ph type="title"/>
-          </p:nvPr>
-        </p:nvSpPr>
-        <p:spPr/>
-        <p:txBody>
-          <a:bodyPr/>
-          <a:lstStyle/>
-          <a:p>
-            <a:r>
-              <a:rPr sz="2200" b="1">
-                <a:solidFill>
-                  <a:srgbClr val="003F7E"/>
-                </a:solidFill>
-                <a:latin typeface="游ゴシック"/>
-                <a:ea typeface="游ゴシック"/>
-                <a:cs typeface="游ゴシック"/>
-              </a:rPr>
-              <a:t>設備（鉄サビ）は色相の主因ではない</a:t>
-            </a:r>
-          </a:p>
-        </p:txBody>
-      </p:sp>
-      <p:sp>
-        <p:nvSpPr>
-          <p:cNvPr id="3" name="TextBox 2"/>
-          <p:cNvSpPr txBox="1"/>
-          <p:nvPr/>
-        </p:nvSpPr>
-        <p:spPr>
-          <a:xfrm>
-            <a:off x="502920" y="1371600"/>
-            <a:ext cx="6400800" cy="4937760"/>
-          </a:xfrm>
-          <a:prstGeom prst="rect">
-            <a:avLst/>
-          </a:prstGeom>
-          <a:noFill/>
-        </p:spPr>
-        <p:txBody>
-          <a:bodyPr wrap="square">
-            <a:spAutoFit/>
-          </a:bodyPr>
-          <a:lstStyle/>
-          <a:p>
-            <a:pPr>
-              <a:spcBef>
-                <a:spcPts val="0"/>
-              </a:spcBef>
-              <a:spcAft>
-                <a:spcPts val="1200"/>
-              </a:spcAft>
-            </a:pPr>
-            <a:r>
-              <a:rPr sz="1200" b="0">
-                <a:solidFill>
-                  <a:srgbClr val="222222"/>
-                </a:solidFill>
-                <a:latin typeface="游ゴシック"/>
-                <a:ea typeface="游ゴシック"/>
-                <a:cs typeface="游ゴシック"/>
-              </a:rPr>
-              <a:t>・C-1503トップに黒色付着物（XRFでほぼ鉄＝サビ）。水抽出からギ酸・グリコール酸を検出＝局所で有機酸が生じ腐食したものと整合。</a:t>
-            </a:r>
-          </a:p>
-          <a:p>
-            <a:pPr>
-              <a:spcBef>
-                <a:spcPts val="0"/>
-              </a:spcBef>
-              <a:spcAft>
-                <a:spcPts val="1200"/>
-              </a:spcAft>
-            </a:pPr>
-            <a:r>
-              <a:rPr sz="1200" b="0">
-                <a:solidFill>
-                  <a:srgbClr val="222222"/>
-                </a:solidFill>
-                <a:latin typeface="游ゴシック"/>
-                <a:ea typeface="游ゴシック"/>
-                <a:cs typeface="游ゴシック"/>
-              </a:rPr>
-              <a:t>・この付着物をDEGに共存させてもλmax380nmが出るのみで、実機の450nmは再現しない。蒸留DEGの短時間保管でも450nmは出ない。</a:t>
-            </a:r>
-          </a:p>
-          <a:p>
-            <a:pPr>
-              <a:spcBef>
-                <a:spcPts val="0"/>
-              </a:spcBef>
-              <a:spcAft>
-                <a:spcPts val="1200"/>
-              </a:spcAft>
-            </a:pPr>
-            <a:r>
-              <a:rPr sz="1200" b="0">
-                <a:solidFill>
-                  <a:srgbClr val="222222"/>
-                </a:solidFill>
-                <a:latin typeface="游ゴシック"/>
-                <a:ea typeface="游ゴシック"/>
-                <a:cs typeface="游ゴシック"/>
-              </a:rPr>
-              <a:t>・T-555タンク内の異物も鉄サビだが、残液は5/18時点のAPHA30から上昇していない。</a:t>
-            </a:r>
-          </a:p>
-          <a:p>
-            <a:pPr>
-              <a:spcBef>
-                <a:spcPts val="0"/>
-              </a:spcBef>
-              <a:spcAft>
-                <a:spcPts val="1200"/>
-              </a:spcAft>
-            </a:pPr>
-            <a:r>
-              <a:rPr sz="1200" b="1">
-                <a:solidFill>
-                  <a:srgbClr val="003F7E"/>
-                </a:solidFill>
-                <a:latin typeface="游ゴシック"/>
-                <a:ea typeface="游ゴシック"/>
-                <a:cs typeface="游ゴシック"/>
-              </a:rPr>
-              <a:t>・以上より、鉄サビ・付着物は色相（450nm）を進める触媒ではなく、寄与は局所の腐食・380nmにとどまる（主因ではない）。保管試験・残液分析という実測で判断している。金属が無くてもアルデヒドとpHだけで着色は説明できる。付着物は予防保全として洗浄する。</a:t>
-            </a:r>
-          </a:p>
-        </p:txBody>
-      </p:sp>
-      <p:pic>
-        <p:nvPicPr>
-          <p:cNvPr id="4" name="Picture 3" descr="uv_spectrum.png"/>
-          <p:cNvPicPr>
-            <a:picLocks noChangeAspect="1"/>
-          </p:cNvPicPr>
-          <p:nvPr/>
-        </p:nvPicPr>
-        <p:blipFill>
-          <a:blip r:embed="rId2"/>
-          <a:stretch>
-            <a:fillRect/>
-          </a:stretch>
-        </p:blipFill>
-        <p:spPr>
-          <a:xfrm>
-            <a:off x="7040880" y="2057400"/>
-            <a:ext cx="4937760" cy="2834481"/>
-          </a:xfrm>
-          <a:prstGeom prst="rect">
-            <a:avLst/>
-          </a:prstGeom>
-        </p:spPr>
-      </p:pic>
-      <p:sp>
-        <p:nvSpPr>
-          <p:cNvPr id="5" name="TextBox 4"/>
-          <p:cNvSpPr txBox="1"/>
-          <p:nvPr/>
-        </p:nvSpPr>
-        <p:spPr>
-          <a:xfrm>
-            <a:off x="7040880" y="5074920"/>
-            <a:ext cx="4937760" cy="731520"/>
-          </a:xfrm>
-          <a:prstGeom prst="rect">
-            <a:avLst/>
-          </a:prstGeom>
-          <a:noFill/>
-        </p:spPr>
-        <p:txBody>
-          <a:bodyPr wrap="square">
-            <a:spAutoFit/>
-          </a:bodyPr>
-          <a:lstStyle/>
-          <a:p>
-            <a:pPr>
-              <a:spcBef>
-                <a:spcPts val="0"/>
-              </a:spcBef>
-              <a:spcAft>
-                <a:spcPts val="400"/>
-              </a:spcAft>
-            </a:pPr>
-            <a:r>
-              <a:rPr sz="1050" b="1">
-                <a:solidFill>
-                  <a:srgbClr val="003F7E"/>
-                </a:solidFill>
-                <a:latin typeface="游ゴシック"/>
-                <a:ea typeface="游ゴシック"/>
-                <a:cs typeface="游ゴシック"/>
-              </a:rPr>
-              <a:t>付着物は380nmのみ・実機は450nm＝別現象（保管試験で確認）</a:t>
             </a:r>
           </a:p>
         </p:txBody>
@@ -18073,7 +18487,221 @@
                 <a:ea typeface="游ゴシック"/>
                 <a:cs typeface="游ゴシック"/>
               </a:rPr>
-              <a:t>開放・検査の整理（仮説駆動）</a:t>
+              <a:t>設備（鉄サビ）は色相の主因ではない</a:t>
+            </a:r>
+          </a:p>
+        </p:txBody>
+      </p:sp>
+      <p:pic>
+        <p:nvPicPr>
+          <p:cNvPr id="3" name="Picture 2" descr="uv_spectrum.png"/>
+          <p:cNvPicPr>
+            <a:picLocks noChangeAspect="1"/>
+          </p:cNvPicPr>
+          <p:nvPr/>
+        </p:nvPicPr>
+        <p:blipFill>
+          <a:blip r:embed="rId2"/>
+          <a:stretch>
+            <a:fillRect/>
+          </a:stretch>
+        </p:blipFill>
+        <p:spPr>
+          <a:xfrm>
+            <a:off x="6126480" y="1417320"/>
+            <a:ext cx="5760720" cy="3306894"/>
+          </a:xfrm>
+          <a:prstGeom prst="rect">
+            <a:avLst/>
+          </a:prstGeom>
+        </p:spPr>
+      </p:pic>
+      <p:sp>
+        <p:nvSpPr>
+          <p:cNvPr id="4" name="TextBox 3"/>
+          <p:cNvSpPr txBox="1"/>
+          <p:nvPr/>
+        </p:nvSpPr>
+        <p:spPr>
+          <a:xfrm>
+            <a:off x="502920" y="1554480"/>
+            <a:ext cx="5440680" cy="3657600"/>
+          </a:xfrm>
+          <a:prstGeom prst="rect">
+            <a:avLst/>
+          </a:prstGeom>
+          <a:noFill/>
+        </p:spPr>
+        <p:txBody>
+          <a:bodyPr wrap="square">
+            <a:spAutoFit/>
+          </a:bodyPr>
+          <a:lstStyle/>
+          <a:p>
+            <a:pPr>
+              <a:spcBef>
+                <a:spcPts val="0"/>
+              </a:spcBef>
+              <a:spcAft>
+                <a:spcPts val="1600"/>
+              </a:spcAft>
+            </a:pPr>
+            <a:r>
+              <a:rPr sz="1300" b="0">
+                <a:solidFill>
+                  <a:srgbClr val="222222"/>
+                </a:solidFill>
+                <a:latin typeface="游ゴシック"/>
+                <a:ea typeface="游ゴシック"/>
+                <a:cs typeface="游ゴシック"/>
+              </a:rPr>
+              <a:t>・C-1503の黒色付着物はほぼ鉄サビ＋有機酸（局所の腐食）。</a:t>
+            </a:r>
+          </a:p>
+          <a:p>
+            <a:pPr>
+              <a:spcBef>
+                <a:spcPts val="0"/>
+              </a:spcBef>
+              <a:spcAft>
+                <a:spcPts val="1600"/>
+              </a:spcAft>
+            </a:pPr>
+            <a:r>
+              <a:rPr sz="1300" b="0">
+                <a:solidFill>
+                  <a:srgbClr val="222222"/>
+                </a:solidFill>
+                <a:latin typeface="游ゴシック"/>
+                <a:ea typeface="游ゴシック"/>
+                <a:cs typeface="游ゴシック"/>
+              </a:rPr>
+              <a:t>・付着物をDEGに加えても380nmのみ＝実機の450nmは再現しない（保管試験）。</a:t>
+            </a:r>
+          </a:p>
+          <a:p>
+            <a:pPr>
+              <a:spcBef>
+                <a:spcPts val="0"/>
+              </a:spcBef>
+              <a:spcAft>
+                <a:spcPts val="1600"/>
+              </a:spcAft>
+            </a:pPr>
+            <a:r>
+              <a:rPr sz="1300" b="0">
+                <a:solidFill>
+                  <a:srgbClr val="222222"/>
+                </a:solidFill>
+                <a:latin typeface="游ゴシック"/>
+                <a:ea typeface="游ゴシック"/>
+                <a:cs typeface="游ゴシック"/>
+              </a:rPr>
+              <a:t>・T-555残液はAPHA30で頭打ち＝タンクの鉄サビは促進触媒でない。</a:t>
+            </a:r>
+          </a:p>
+        </p:txBody>
+      </p:sp>
+      <p:sp>
+        <p:nvSpPr>
+          <p:cNvPr id="5" name="Rounded Rectangle 4"/>
+          <p:cNvSpPr/>
+          <p:nvPr/>
+        </p:nvSpPr>
+        <p:spPr>
+          <a:xfrm>
+            <a:off x="502920" y="5257800"/>
+            <a:ext cx="11155680" cy="868680"/>
+          </a:xfrm>
+          <a:prstGeom prst="roundRect">
+            <a:avLst/>
+          </a:prstGeom>
+          <a:solidFill>
+            <a:srgbClr val="DCE6EF"/>
+          </a:solidFill>
+          <a:ln w="12700">
+            <a:solidFill>
+              <a:srgbClr val="005BAB"/>
+            </a:solidFill>
+          </a:ln>
+          <a:effectLst/>
+        </p:spPr>
+        <p:style>
+          <a:lnRef idx="1">
+            <a:schemeClr val="accent1"/>
+          </a:lnRef>
+          <a:fillRef idx="3">
+            <a:schemeClr val="accent1"/>
+          </a:fillRef>
+          <a:effectRef idx="2">
+            <a:schemeClr val="accent1"/>
+          </a:effectRef>
+          <a:fontRef idx="minor">
+            <a:schemeClr val="lt1"/>
+          </a:fontRef>
+        </p:style>
+        <p:txBody>
+          <a:bodyPr rtlCol="0" anchor="ctr" wrap="square" lIns="109728" rIns="73152"/>
+          <a:lstStyle/>
+          <a:p>
+            <a:pPr algn="l"/>
+            <a:r>
+              <a:rPr sz="1200" b="1">
+                <a:solidFill>
+                  <a:srgbClr val="003F7E"/>
+                </a:solidFill>
+                <a:latin typeface="游ゴシック"/>
+                <a:ea typeface="游ゴシック"/>
+                <a:cs typeface="游ゴシック"/>
+              </a:rPr>
+              <a:t>→ 鉄サビ・付着物は色相（450nm）の主因でなく、寄与は局所380nm。実測で判断（金属が無くてもアルデヒドとpHで着色を説明できる）。洗浄は予防保全。</a:t>
+            </a:r>
+          </a:p>
+        </p:txBody>
+      </p:sp>
+    </p:spTree>
+  </p:cSld>
+  <p:clrMapOvr>
+    <a:masterClrMapping/>
+  </p:clrMapOvr>
+</p:sld>
+</file>
+
+<file path=ppt/slides/slide18.xml><?xml version="1.0" encoding="utf-8"?>
+<p:sld xmlns:a="http://schemas.openxmlformats.org/drawingml/2006/main" xmlns:p="http://schemas.openxmlformats.org/presentationml/2006/main" xmlns:r="http://schemas.openxmlformats.org/officeDocument/2006/relationships">
+  <p:cSld>
+    <p:spTree>
+      <p:nvGrpSpPr>
+        <p:cNvPr id="1" name=""/>
+        <p:cNvGrpSpPr/>
+        <p:nvPr/>
+      </p:nvGrpSpPr>
+      <p:grpSpPr/>
+      <p:sp>
+        <p:nvSpPr>
+          <p:cNvPr id="2" name="Title 1"/>
+          <p:cNvSpPr>
+            <a:spLocks noGrp="1"/>
+          </p:cNvSpPr>
+          <p:nvPr>
+            <p:ph type="title"/>
+          </p:nvPr>
+        </p:nvSpPr>
+        <p:spPr/>
+        <p:txBody>
+          <a:bodyPr/>
+          <a:lstStyle/>
+          <a:p>
+            <a:r>
+              <a:rPr sz="2200" b="1">
+                <a:solidFill>
+                  <a:srgbClr val="003F7E"/>
+                </a:solidFill>
+                <a:latin typeface="游ゴシック"/>
+                <a:ea typeface="游ゴシック"/>
+                <a:cs typeface="游ゴシック"/>
+              </a:rPr>
+              <a:t>設備に色相の主因なし（開放・検査の結論）</a:t>
             </a:r>
           </a:p>
         </p:txBody>
@@ -18556,7 +19184,7 @@
 </p:sld>
 </file>
 
-<file path=ppt/slides/slide18.xml><?xml version="1.0" encoding="utf-8"?>
+<file path=ppt/slides/slide19.xml><?xml version="1.0" encoding="utf-8"?>
 <p:sld xmlns:a="http://schemas.openxmlformats.org/drawingml/2006/main" xmlns:p="http://schemas.openxmlformats.org/presentationml/2006/main" xmlns:r="http://schemas.openxmlformats.org/officeDocument/2006/relationships">
   <p:cSld>
     <p:spTree>
@@ -19155,7 +19783,7 @@
 </p:sld>
 </file>
 
-<file path=ppt/slides/slide19.xml><?xml version="1.0" encoding="utf-8"?>
+<file path=ppt/slides/slide20.xml><?xml version="1.0" encoding="utf-8"?>
 <p:sld xmlns:a="http://schemas.openxmlformats.org/drawingml/2006/main" xmlns:p="http://schemas.openxmlformats.org/presentationml/2006/main" xmlns:r="http://schemas.openxmlformats.org/officeDocument/2006/relationships">
   <p:cSld>
     <p:spTree>
@@ -19375,7 +20003,7 @@
 </p:sld>
 </file>
 
-<file path=ppt/slides/slide20.xml><?xml version="1.0" encoding="utf-8"?>
+<file path=ppt/slides/slide21.xml><?xml version="1.0" encoding="utf-8"?>
 <p:sld xmlns:a="http://schemas.openxmlformats.org/drawingml/2006/main" xmlns:p="http://schemas.openxmlformats.org/presentationml/2006/main" xmlns:r="http://schemas.openxmlformats.org/officeDocument/2006/relationships">
   <p:cSld>
     <p:spTree>
@@ -19416,100 +20044,14 @@
       </p:sp>
       <p:sp>
         <p:nvSpPr>
-          <p:cNvPr id="3" name="TextBox 2"/>
-          <p:cNvSpPr txBox="1"/>
-          <p:nvPr/>
-        </p:nvSpPr>
-        <p:spPr>
-          <a:xfrm>
-            <a:off x="548640" y="1371600"/>
-            <a:ext cx="11064240" cy="3291840"/>
-          </a:xfrm>
-          <a:prstGeom prst="rect">
-            <a:avLst/>
-          </a:prstGeom>
-          <a:noFill/>
-        </p:spPr>
-        <p:txBody>
-          <a:bodyPr wrap="square">
-            <a:spAutoFit/>
-          </a:bodyPr>
-          <a:lstStyle/>
-          <a:p>
-            <a:pPr>
-              <a:spcBef>
-                <a:spcPts val="0"/>
-              </a:spcBef>
-              <a:spcAft>
-                <a:spcPts val="1200"/>
-              </a:spcAft>
-            </a:pPr>
-            <a:r>
-              <a:rPr sz="1400" b="0">
-                <a:solidFill>
-                  <a:srgbClr val="222222"/>
-                </a:solidFill>
-                <a:latin typeface="游ゴシック"/>
-                <a:ea typeface="游ゴシック"/>
-                <a:cs typeface="游ゴシック"/>
-              </a:rPr>
-              <a:t>触媒交換（原因除去）・設備洗浄・スタートアップ運転条件（NaOH非投入ベース／温度を下げない／リン酸で緩和）により、色相悪化の再発を抑える。</a:t>
-            </a:r>
-          </a:p>
-          <a:p>
-            <a:pPr>
-              <a:spcBef>
-                <a:spcPts val="0"/>
-              </a:spcBef>
-              <a:spcAft>
-                <a:spcPts val="1200"/>
-              </a:spcAft>
-            </a:pPr>
-            <a:r>
-              <a:rPr sz="1400" b="0">
-                <a:solidFill>
-                  <a:srgbClr val="222222"/>
-                </a:solidFill>
-                <a:latin typeface="游ゴシック"/>
-                <a:ea typeface="游ゴシック"/>
-                <a:cs typeface="游ゴシック"/>
-              </a:rPr>
-              <a:t>再稼働後の初期流動品は、全項目規格内かつタンク保管中の色相・UVの経時変化が無いことを確認したうえで出荷する。</a:t>
-            </a:r>
-          </a:p>
-          <a:p>
-            <a:pPr>
-              <a:spcBef>
-                <a:spcPts val="0"/>
-              </a:spcBef>
-              <a:spcAft>
-                <a:spcPts val="1200"/>
-              </a:spcAft>
-            </a:pPr>
-            <a:r>
-              <a:rPr sz="1400" b="0">
-                <a:solidFill>
-                  <a:srgbClr val="222222"/>
-                </a:solidFill>
-                <a:latin typeface="游ゴシック"/>
-                <a:ea typeface="游ゴシック"/>
-                <a:cs typeface="游ゴシック"/>
-              </a:rPr>
-              <a:t>早期判定はUV450nm（最も感度が高い）を主指標とし、UV330nmを補助に用いる。判定基準の具体値は本対策会議で確定する。</a:t>
-            </a:r>
-          </a:p>
-        </p:txBody>
-      </p:sp>
-      <p:sp>
-        <p:nvSpPr>
-          <p:cNvPr id="4" name="Rounded Rectangle 3"/>
+          <p:cNvPr id="3" name="Rounded Rectangle 2"/>
           <p:cNvSpPr/>
           <p:nvPr/>
         </p:nvSpPr>
         <p:spPr>
           <a:xfrm>
-            <a:off x="548640" y="4983480"/>
-            <a:ext cx="11064240" cy="868680"/>
+            <a:off x="548640" y="1371600"/>
+            <a:ext cx="11064240" cy="1078992"/>
           </a:xfrm>
           <a:prstGeom prst="roundRect">
             <a:avLst/>
@@ -19517,9 +20059,9 @@
           <a:solidFill>
             <a:srgbClr val="EBEFF2"/>
           </a:solidFill>
-          <a:ln w="15875">
+          <a:ln w="12700">
             <a:solidFill>
-              <a:srgbClr val="005BAB"/>
+              <a:srgbClr val="C9D2D8"/>
             </a:solidFill>
           </a:ln>
           <a:effectLst/>
@@ -19539,6 +20081,216 @@
           </a:fontRef>
         </p:style>
         <p:txBody>
+          <a:bodyPr rtlCol="0" anchor="ctr" wrap="square" lIns="146304" rIns="109728"/>
+          <a:lstStyle/>
+          <a:p>
+            <a:pPr algn="ctr"/>
+            <a:r>
+              <a:rPr sz="1350" b="1">
+                <a:solidFill>
+                  <a:srgbClr val="003F7E"/>
+                </a:solidFill>
+                <a:latin typeface="游ゴシック"/>
+                <a:ea typeface="游ゴシック"/>
+                <a:cs typeface="游ゴシック"/>
+              </a:rPr>
+              <a:t>① まず出口実測で歯止め</a:t>
+            </a:r>
+          </a:p>
+          <a:p>
+            <a:r>
+              <a:rPr sz="1150">
+                <a:solidFill>
+                  <a:srgbClr val="222222"/>
+                </a:solidFill>
+                <a:latin typeface="游ゴシック"/>
+                <a:ea typeface="游ゴシック"/>
+                <a:cs typeface="游ゴシック"/>
+              </a:rPr>
+              <a:t>初期流動品は、全項目が規格内、かつタンク保管中のUV・色相が経時で不変であることを確認したうえでのみ出荷する。仮説の真偽に依らず、実測で歯止めをかける。</a:t>
+            </a:r>
+          </a:p>
+        </p:txBody>
+      </p:sp>
+      <p:sp>
+        <p:nvSpPr>
+          <p:cNvPr id="4" name="Rounded Rectangle 3"/>
+          <p:cNvSpPr/>
+          <p:nvPr/>
+        </p:nvSpPr>
+        <p:spPr>
+          <a:xfrm>
+            <a:off x="548640" y="2560320"/>
+            <a:ext cx="11064240" cy="1078992"/>
+          </a:xfrm>
+          <a:prstGeom prst="roundRect">
+            <a:avLst/>
+          </a:prstGeom>
+          <a:solidFill>
+            <a:srgbClr val="EBEFF2"/>
+          </a:solidFill>
+          <a:ln w="12700">
+            <a:solidFill>
+              <a:srgbClr val="C9D2D8"/>
+            </a:solidFill>
+          </a:ln>
+          <a:effectLst/>
+        </p:spPr>
+        <p:style>
+          <a:lnRef idx="1">
+            <a:schemeClr val="accent1"/>
+          </a:lnRef>
+          <a:fillRef idx="3">
+            <a:schemeClr val="accent1"/>
+          </a:fillRef>
+          <a:effectRef idx="2">
+            <a:schemeClr val="accent1"/>
+          </a:effectRef>
+          <a:fontRef idx="minor">
+            <a:schemeClr val="lt1"/>
+          </a:fontRef>
+        </p:style>
+        <p:txBody>
+          <a:bodyPr rtlCol="0" anchor="ctr" wrap="square" lIns="146304" rIns="109728"/>
+          <a:lstStyle/>
+          <a:p>
+            <a:pPr algn="ctr"/>
+            <a:r>
+              <a:rPr sz="1350" b="1">
+                <a:solidFill>
+                  <a:srgbClr val="003F7E"/>
+                </a:solidFill>
+                <a:latin typeface="游ゴシック"/>
+                <a:ea typeface="游ゴシック"/>
+                <a:cs typeface="游ゴシック"/>
+              </a:rPr>
+              <a:t>② それを支える対応</a:t>
+            </a:r>
+          </a:p>
+          <a:p>
+            <a:r>
+              <a:rPr sz="1150">
+                <a:solidFill>
+                  <a:srgbClr val="222222"/>
+                </a:solidFill>
+                <a:latin typeface="游ゴシック"/>
+                <a:ea typeface="游ゴシック"/>
+                <a:cs typeface="游ゴシック"/>
+              </a:rPr>
+              <a:t>触媒交換（実施済）・設備洗浄・運転条件（NaOH非投入／温度を下げない／リン酸で緩和）。早期判定はUV450nm主・UV330補助。判定基準の具体値は本会議で確定。</a:t>
+            </a:r>
+          </a:p>
+        </p:txBody>
+      </p:sp>
+      <p:sp>
+        <p:nvSpPr>
+          <p:cNvPr id="5" name="Rounded Rectangle 4"/>
+          <p:cNvSpPr/>
+          <p:nvPr/>
+        </p:nvSpPr>
+        <p:spPr>
+          <a:xfrm>
+            <a:off x="548640" y="3749039"/>
+            <a:ext cx="11064240" cy="1078992"/>
+          </a:xfrm>
+          <a:prstGeom prst="roundRect">
+            <a:avLst/>
+          </a:prstGeom>
+          <a:solidFill>
+            <a:srgbClr val="EBEFF2"/>
+          </a:solidFill>
+          <a:ln w="12700">
+            <a:solidFill>
+              <a:srgbClr val="C9D2D8"/>
+            </a:solidFill>
+          </a:ln>
+          <a:effectLst/>
+        </p:spPr>
+        <p:style>
+          <a:lnRef idx="1">
+            <a:schemeClr val="accent1"/>
+          </a:lnRef>
+          <a:fillRef idx="3">
+            <a:schemeClr val="accent1"/>
+          </a:fillRef>
+          <a:effectRef idx="2">
+            <a:schemeClr val="accent1"/>
+          </a:effectRef>
+          <a:fontRef idx="minor">
+            <a:schemeClr val="lt1"/>
+          </a:fontRef>
+        </p:style>
+        <p:txBody>
+          <a:bodyPr rtlCol="0" anchor="ctr" wrap="square" lIns="146304" rIns="109728"/>
+          <a:lstStyle/>
+          <a:p>
+            <a:pPr algn="ctr"/>
+            <a:r>
+              <a:rPr sz="1350" b="1">
+                <a:solidFill>
+                  <a:srgbClr val="003F7E"/>
+                </a:solidFill>
+                <a:latin typeface="游ゴシック"/>
+                <a:ea typeface="游ゴシック"/>
+                <a:cs typeface="游ゴシック"/>
+              </a:rPr>
+              <a:t>③ なぜ起きたか（参考）</a:t>
+            </a:r>
+          </a:p>
+          <a:p>
+            <a:r>
+              <a:rPr sz="1150">
+                <a:solidFill>
+                  <a:srgbClr val="222222"/>
+                </a:solidFill>
+                <a:latin typeface="游ゴシック"/>
+                <a:ea typeface="游ゴシック"/>
+                <a:cs typeface="游ゴシック"/>
+              </a:rPr>
+              <a:t>触媒劣化で増えたアルデヒドが縮合して前駆体になり、タンクで熟成・共役伸長して450nm（最有力仮説・ベンチ未再現）。</a:t>
+            </a:r>
+          </a:p>
+        </p:txBody>
+      </p:sp>
+      <p:sp>
+        <p:nvSpPr>
+          <p:cNvPr id="6" name="Rounded Rectangle 5"/>
+          <p:cNvSpPr/>
+          <p:nvPr/>
+        </p:nvSpPr>
+        <p:spPr>
+          <a:xfrm>
+            <a:off x="548640" y="5074920"/>
+            <a:ext cx="11064240" cy="868680"/>
+          </a:xfrm>
+          <a:prstGeom prst="roundRect">
+            <a:avLst/>
+          </a:prstGeom>
+          <a:solidFill>
+            <a:srgbClr val="DCE6EF"/>
+          </a:solidFill>
+          <a:ln w="15875">
+            <a:solidFill>
+              <a:srgbClr val="005BAB"/>
+            </a:solidFill>
+          </a:ln>
+          <a:effectLst/>
+        </p:spPr>
+        <p:style>
+          <a:lnRef idx="1">
+            <a:schemeClr val="accent1"/>
+          </a:lnRef>
+          <a:fillRef idx="3">
+            <a:schemeClr val="accent1"/>
+          </a:fillRef>
+          <a:effectRef idx="2">
+            <a:schemeClr val="accent1"/>
+          </a:effectRef>
+          <a:fontRef idx="minor">
+            <a:schemeClr val="lt1"/>
+          </a:fontRef>
+        </p:style>
+        <p:txBody>
           <a:bodyPr rtlCol="0" anchor="ctr" wrap="square" lIns="109728" rIns="73152"/>
           <a:lstStyle/>
           <a:p>
@@ -19552,7 +20304,7 @@
                 <a:ea typeface="游ゴシック"/>
                 <a:cs typeface="游ゴシック"/>
               </a:rPr>
-              <a:t>上記の前提で、製品DEGの出荷再開についてご承認をお願いします。</a:t>
+              <a:t>上記の前提（出口実測での歯止め）で、製品DEGの出荷再開についてご承認をお願いします。</a:t>
             </a:r>
           </a:p>
         </p:txBody>

--- a/outputs/製品DEG色相悪化_対策会議.pptx
+++ b/outputs/製品DEG色相悪化_対策会議.pptx
@@ -25,6 +25,7 @@
     <p:sldId id="2147483577" r:id="rId32"/>
     <p:sldId id="2147483578" r:id="rId33"/>
     <p:sldId id="2147483579" r:id="rId34"/>
+    <p:sldId id="2147483580" r:id="rId35"/>
   </p:sldIdLst>
   <p:sldSz cx="12192000" cy="6858000"/>
   <p:notesSz cx="6807200" cy="9939338"/>
@@ -20037,6 +20038,523 @@
                 <a:ea typeface="游ゴシック"/>
                 <a:cs typeface="游ゴシック"/>
               </a:rPr>
+              <a:t>出荷判定の運用（歯止め）</a:t>
+            </a:r>
+          </a:p>
+        </p:txBody>
+      </p:sp>
+      <p:sp>
+        <p:nvSpPr>
+          <p:cNvPr id="3" name="TextBox 2"/>
+          <p:cNvSpPr txBox="1"/>
+          <p:nvPr/>
+        </p:nvSpPr>
+        <p:spPr>
+          <a:xfrm>
+            <a:off x="548640" y="1234440"/>
+            <a:ext cx="11064240" cy="457200"/>
+          </a:xfrm>
+          <a:prstGeom prst="rect">
+            <a:avLst/>
+          </a:prstGeom>
+          <a:noFill/>
+        </p:spPr>
+        <p:txBody>
+          <a:bodyPr wrap="square">
+            <a:spAutoFit/>
+          </a:bodyPr>
+          <a:lstStyle/>
+          <a:p>
+            <a:pPr>
+              <a:spcBef>
+                <a:spcPts val="0"/>
+              </a:spcBef>
+              <a:spcAft>
+                <a:spcPts val="400"/>
+              </a:spcAft>
+            </a:pPr>
+            <a:r>
+              <a:rPr sz="1100" b="0">
+                <a:solidFill>
+                  <a:srgbClr val="666666"/>
+                </a:solidFill>
+                <a:latin typeface="游ゴシック"/>
+                <a:ea typeface="游ゴシック"/>
+                <a:cs typeface="游ゴシック"/>
+              </a:rPr>
+              <a:t>メカニズム（仮説）の真偽に依らず、この出口実測の歯止めで出荷可否を判定する。「本会議で確定」とした具体値（日数・閾値・承認者・回収範囲）を本対策会議で固める。</a:t>
+            </a:r>
+          </a:p>
+        </p:txBody>
+      </p:sp>
+      <p:graphicFrame>
+        <p:nvGraphicFramePr>
+          <p:cNvPr id="4" name="Table 3"/>
+          <p:cNvGraphicFramePr>
+            <a:graphicFrameLocks noGrp="1"/>
+          </p:cNvGraphicFramePr>
+          <p:nvPr/>
+        </p:nvGraphicFramePr>
+        <p:xfrm>
+          <a:off x="548640" y="1783080"/>
+          <a:ext cx="11064240" cy="4297680"/>
+        </p:xfrm>
+        <a:graphic>
+          <a:graphicData uri="http://schemas.openxmlformats.org/drawingml/2006/table">
+            <a:tbl>
+              <a:tblPr firstRow="1" bandRow="1">
+                <a:tableStyleId>{5C22544A-7EE6-4342-B048-85BDC9FD1C3A}</a:tableStyleId>
+              </a:tblPr>
+              <a:tblGrid>
+                <a:gridCol w="2926080"/>
+                <a:gridCol w="8138160"/>
+              </a:tblGrid>
+              <a:tr h="537210">
+                <a:tc>
+                  <a:txBody>
+                    <a:bodyPr/>
+                    <a:lstStyle/>
+                    <a:p>
+                      <a:r>
+                        <a:rPr sz="1100" b="1">
+                          <a:solidFill>
+                            <a:srgbClr val="003F7E"/>
+                          </a:solidFill>
+                          <a:latin typeface="游ゴシック"/>
+                          <a:ea typeface="游ゴシック"/>
+                          <a:cs typeface="游ゴシック"/>
+                        </a:rPr>
+                        <a:t>項目</a:t>
+                      </a:r>
+                    </a:p>
+                  </a:txBody>
+                  <a:tcPr anchor="ctr" marT="27432" marB="27432" marL="54864">
+                    <a:solidFill>
+                      <a:srgbClr val="EBEFF2"/>
+                    </a:solidFill>
+                  </a:tcPr>
+                </a:tc>
+                <a:tc>
+                  <a:txBody>
+                    <a:bodyPr/>
+                    <a:lstStyle/>
+                    <a:p>
+                      <a:r>
+                        <a:rPr sz="1100" b="1">
+                          <a:solidFill>
+                            <a:srgbClr val="003F7E"/>
+                          </a:solidFill>
+                          <a:latin typeface="游ゴシック"/>
+                          <a:ea typeface="游ゴシック"/>
+                          <a:cs typeface="游ゴシック"/>
+                        </a:rPr>
+                        <a:t>運用（「本会議で確定」＝具体値は本対策会議で固める）</a:t>
+                      </a:r>
+                    </a:p>
+                  </a:txBody>
+                  <a:tcPr anchor="ctr" marT="27432" marB="27432" marL="54864">
+                    <a:solidFill>
+                      <a:srgbClr val="EBEFF2"/>
+                    </a:solidFill>
+                  </a:tcPr>
+                </a:tc>
+              </a:tr>
+              <a:tr h="537210">
+                <a:tc>
+                  <a:txBody>
+                    <a:bodyPr/>
+                    <a:lstStyle/>
+                    <a:p>
+                      <a:r>
+                        <a:rPr sz="1050" b="1">
+                          <a:solidFill>
+                            <a:srgbClr val="003F7E"/>
+                          </a:solidFill>
+                          <a:latin typeface="游ゴシック"/>
+                          <a:ea typeface="游ゴシック"/>
+                          <a:cs typeface="游ゴシック"/>
+                        </a:rPr>
+                        <a:t>監視項目</a:t>
+                      </a:r>
+                    </a:p>
+                  </a:txBody>
+                  <a:tcPr anchor="ctr" marT="27432" marB="27432" marL="54864">
+                    <a:solidFill>
+                      <a:srgbClr val="D7E0E5"/>
+                    </a:solidFill>
+                  </a:tcPr>
+                </a:tc>
+                <a:tc>
+                  <a:txBody>
+                    <a:bodyPr/>
+                    <a:lstStyle/>
+                    <a:p>
+                      <a:r>
+                        <a:rPr sz="1000" b="0">
+                          <a:solidFill>
+                            <a:srgbClr val="222222"/>
+                          </a:solidFill>
+                          <a:latin typeface="游ゴシック"/>
+                          <a:ea typeface="游ゴシック"/>
+                          <a:cs typeface="游ゴシック"/>
+                        </a:rPr>
+                        <a:t>APHA（全項目規格）＋UV450nm（早期判定の主指標）＋UV330nm（補助）。</a:t>
+                      </a:r>
+                    </a:p>
+                  </a:txBody>
+                  <a:tcPr anchor="ctr" marT="27432" marB="27432" marL="54864">
+                    <a:solidFill>
+                      <a:srgbClr val="FFFFFF"/>
+                    </a:solidFill>
+                  </a:tcPr>
+                </a:tc>
+              </a:tr>
+              <a:tr h="537210">
+                <a:tc>
+                  <a:txBody>
+                    <a:bodyPr/>
+                    <a:lstStyle/>
+                    <a:p>
+                      <a:r>
+                        <a:rPr sz="1050" b="1">
+                          <a:solidFill>
+                            <a:srgbClr val="003F7E"/>
+                          </a:solidFill>
+                          <a:latin typeface="游ゴシック"/>
+                          <a:ea typeface="游ゴシック"/>
+                          <a:cs typeface="游ゴシック"/>
+                        </a:rPr>
+                        <a:t>監視期間</a:t>
+                      </a:r>
+                    </a:p>
+                  </a:txBody>
+                  <a:tcPr anchor="ctr" marT="27432" marB="27432" marL="54864">
+                    <a:solidFill>
+                      <a:srgbClr val="D7E0E5"/>
+                    </a:solidFill>
+                  </a:tcPr>
+                </a:tc>
+                <a:tc>
+                  <a:txBody>
+                    <a:bodyPr/>
+                    <a:lstStyle/>
+                    <a:p>
+                      <a:r>
+                        <a:rPr sz="1000" b="0">
+                          <a:solidFill>
+                            <a:srgbClr val="222222"/>
+                          </a:solidFill>
+                          <a:latin typeface="游ゴシック"/>
+                          <a:ea typeface="游ゴシック"/>
+                          <a:cs typeface="游ゴシック"/>
+                        </a:rPr>
+                        <a:t>タンク保管中の経時を確認（必要日数は本会議で確定。UV450は実績上1日後から傾きで判別可）。</a:t>
+                      </a:r>
+                    </a:p>
+                  </a:txBody>
+                  <a:tcPr anchor="ctr" marT="27432" marB="27432" marL="54864">
+                    <a:solidFill>
+                      <a:srgbClr val="FFFFFF"/>
+                    </a:solidFill>
+                  </a:tcPr>
+                </a:tc>
+              </a:tr>
+              <a:tr h="537210">
+                <a:tc>
+                  <a:txBody>
+                    <a:bodyPr/>
+                    <a:lstStyle/>
+                    <a:p>
+                      <a:r>
+                        <a:rPr sz="1050" b="1">
+                          <a:solidFill>
+                            <a:srgbClr val="003F7E"/>
+                          </a:solidFill>
+                          <a:latin typeface="游ゴシック"/>
+                          <a:ea typeface="游ゴシック"/>
+                          <a:cs typeface="游ゴシック"/>
+                        </a:rPr>
+                        <a:t>合格基準</a:t>
+                      </a:r>
+                    </a:p>
+                  </a:txBody>
+                  <a:tcPr anchor="ctr" marT="27432" marB="27432" marL="54864">
+                    <a:solidFill>
+                      <a:srgbClr val="D7E0E5"/>
+                    </a:solidFill>
+                  </a:tcPr>
+                </a:tc>
+                <a:tc>
+                  <a:txBody>
+                    <a:bodyPr/>
+                    <a:lstStyle/>
+                    <a:p>
+                      <a:r>
+                        <a:rPr sz="1000" b="0">
+                          <a:solidFill>
+                            <a:srgbClr val="222222"/>
+                          </a:solidFill>
+                          <a:latin typeface="游ゴシック"/>
+                          <a:ea typeface="游ゴシック"/>
+                          <a:cs typeface="游ゴシック"/>
+                        </a:rPr>
+                        <a:t>全項目が規格内、かつUV450nmの日次の傾きが基準内（傾き上限・累積ΔAPHAの具体値は本会議で確定）。</a:t>
+                      </a:r>
+                    </a:p>
+                  </a:txBody>
+                  <a:tcPr anchor="ctr" marT="27432" marB="27432" marL="54864">
+                    <a:solidFill>
+                      <a:srgbClr val="FFFFFF"/>
+                    </a:solidFill>
+                  </a:tcPr>
+                </a:tc>
+              </a:tr>
+              <a:tr h="537210">
+                <a:tc>
+                  <a:txBody>
+                    <a:bodyPr/>
+                    <a:lstStyle/>
+                    <a:p>
+                      <a:r>
+                        <a:rPr sz="1050" b="1">
+                          <a:solidFill>
+                            <a:srgbClr val="003F7E"/>
+                          </a:solidFill>
+                          <a:latin typeface="游ゴシック"/>
+                          <a:ea typeface="游ゴシック"/>
+                          <a:cs typeface="游ゴシック"/>
+                        </a:rPr>
+                        <a:t>出荷可否の承認</a:t>
+                      </a:r>
+                    </a:p>
+                  </a:txBody>
+                  <a:tcPr anchor="ctr" marT="27432" marB="27432" marL="54864">
+                    <a:solidFill>
+                      <a:srgbClr val="D7E0E5"/>
+                    </a:solidFill>
+                  </a:tcPr>
+                </a:tc>
+                <a:tc>
+                  <a:txBody>
+                    <a:bodyPr/>
+                    <a:lstStyle/>
+                    <a:p>
+                      <a:r>
+                        <a:rPr sz="1000" b="0">
+                          <a:solidFill>
+                            <a:srgbClr val="222222"/>
+                          </a:solidFill>
+                          <a:latin typeface="游ゴシック"/>
+                          <a:ea typeface="游ゴシック"/>
+                          <a:cs typeface="游ゴシック"/>
+                        </a:rPr>
+                        <a:t>確認結果に基づき出荷可否を判断（承認の担当・手順は本会議で確定）。</a:t>
+                      </a:r>
+                    </a:p>
+                  </a:txBody>
+                  <a:tcPr anchor="ctr" marT="27432" marB="27432" marL="54864">
+                    <a:solidFill>
+                      <a:srgbClr val="FFFFFF"/>
+                    </a:solidFill>
+                  </a:tcPr>
+                </a:tc>
+              </a:tr>
+              <a:tr h="537210">
+                <a:tc>
+                  <a:txBody>
+                    <a:bodyPr/>
+                    <a:lstStyle/>
+                    <a:p>
+                      <a:r>
+                        <a:rPr sz="1050" b="1">
+                          <a:solidFill>
+                            <a:srgbClr val="003F7E"/>
+                          </a:solidFill>
+                          <a:latin typeface="游ゴシック"/>
+                          <a:ea typeface="游ゴシック"/>
+                          <a:cs typeface="游ゴシック"/>
+                        </a:rPr>
+                        <a:t>出荷停止トリガー</a:t>
+                      </a:r>
+                    </a:p>
+                  </a:txBody>
+                  <a:tcPr anchor="ctr" marT="27432" marB="27432" marL="54864">
+                    <a:solidFill>
+                      <a:srgbClr val="D7E0E5"/>
+                    </a:solidFill>
+                  </a:tcPr>
+                </a:tc>
+                <a:tc>
+                  <a:txBody>
+                    <a:bodyPr/>
+                    <a:lstStyle/>
+                    <a:p>
+                      <a:r>
+                        <a:rPr sz="1000" b="0">
+                          <a:solidFill>
+                            <a:srgbClr val="222222"/>
+                          </a:solidFill>
+                          <a:latin typeface="游ゴシック"/>
+                          <a:ea typeface="游ゴシック"/>
+                          <a:cs typeface="游ゴシック"/>
+                        </a:rPr>
+                        <a:t>初期流動品が規格内でも、その後UV450の傾きが基準を超えたら出荷停止。</a:t>
+                      </a:r>
+                    </a:p>
+                  </a:txBody>
+                  <a:tcPr anchor="ctr" marT="27432" marB="27432" marL="54864">
+                    <a:solidFill>
+                      <a:srgbClr val="FFFFFF"/>
+                    </a:solidFill>
+                  </a:tcPr>
+                </a:tc>
+              </a:tr>
+              <a:tr h="537210">
+                <a:tc>
+                  <a:txBody>
+                    <a:bodyPr/>
+                    <a:lstStyle/>
+                    <a:p>
+                      <a:r>
+                        <a:rPr sz="1050" b="1">
+                          <a:solidFill>
+                            <a:srgbClr val="003F7E"/>
+                          </a:solidFill>
+                          <a:latin typeface="游ゴシック"/>
+                          <a:ea typeface="游ゴシック"/>
+                          <a:cs typeface="游ゴシック"/>
+                        </a:rPr>
+                        <a:t>在庫回収の範囲</a:t>
+                      </a:r>
+                    </a:p>
+                  </a:txBody>
+                  <a:tcPr anchor="ctr" marT="27432" marB="27432" marL="54864">
+                    <a:solidFill>
+                      <a:srgbClr val="D7E0E5"/>
+                    </a:solidFill>
+                  </a:tcPr>
+                </a:tc>
+                <a:tc>
+                  <a:txBody>
+                    <a:bodyPr/>
+                    <a:lstStyle/>
+                    <a:p>
+                      <a:r>
+                        <a:rPr sz="1000" b="0">
+                          <a:solidFill>
+                            <a:srgbClr val="222222"/>
+                          </a:solidFill>
+                          <a:latin typeface="游ゴシック"/>
+                          <a:ea typeface="游ゴシック"/>
+                          <a:cs typeface="游ゴシック"/>
+                        </a:rPr>
+                        <a:t>停止時の対象ロット範囲をあらかじめ規定（本会議で確定）。</a:t>
+                      </a:r>
+                    </a:p>
+                  </a:txBody>
+                  <a:tcPr anchor="ctr" marT="27432" marB="27432" marL="54864">
+                    <a:solidFill>
+                      <a:srgbClr val="FFFFFF"/>
+                    </a:solidFill>
+                  </a:tcPr>
+                </a:tc>
+              </a:tr>
+              <a:tr h="537210">
+                <a:tc>
+                  <a:txBody>
+                    <a:bodyPr/>
+                    <a:lstStyle/>
+                    <a:p>
+                      <a:r>
+                        <a:rPr sz="1050" b="1">
+                          <a:solidFill>
+                            <a:srgbClr val="003F7E"/>
+                          </a:solidFill>
+                          <a:latin typeface="游ゴシック"/>
+                          <a:ea typeface="游ゴシック"/>
+                          <a:cs typeface="游ゴシック"/>
+                        </a:rPr>
+                        <a:t>早期判定の保険</a:t>
+                      </a:r>
+                    </a:p>
+                  </a:txBody>
+                  <a:tcPr anchor="ctr" marT="27432" marB="27432" marL="54864">
+                    <a:solidFill>
+                      <a:srgbClr val="D7E0E5"/>
+                    </a:solidFill>
+                  </a:tcPr>
+                </a:tc>
+                <a:tc>
+                  <a:txBody>
+                    <a:bodyPr/>
+                    <a:lstStyle/>
+                    <a:p>
+                      <a:r>
+                        <a:rPr sz="1000" b="0">
+                          <a:solidFill>
+                            <a:srgbClr val="222222"/>
+                          </a:solidFill>
+                          <a:latin typeface="游ゴシック"/>
+                          <a:ea typeface="游ゴシック"/>
+                          <a:cs typeface="游ゴシック"/>
+                        </a:rPr>
+                        <a:t>UV450単独に依らず、全項目規格内を必須とし保守的マージンを併用（偽陰性対策）。</a:t>
+                      </a:r>
+                    </a:p>
+                  </a:txBody>
+                  <a:tcPr anchor="ctr" marT="27432" marB="27432" marL="54864">
+                    <a:solidFill>
+                      <a:srgbClr val="FFFFFF"/>
+                    </a:solidFill>
+                  </a:tcPr>
+                </a:tc>
+              </a:tr>
+            </a:tbl>
+          </a:graphicData>
+        </a:graphic>
+      </p:graphicFrame>
+    </p:spTree>
+  </p:cSld>
+  <p:clrMapOvr>
+    <a:masterClrMapping/>
+  </p:clrMapOvr>
+</p:sld>
+</file>
+
+<file path=ppt/slides/slide22.xml><?xml version="1.0" encoding="utf-8"?>
+<p:sld xmlns:a="http://schemas.openxmlformats.org/drawingml/2006/main" xmlns:p="http://schemas.openxmlformats.org/presentationml/2006/main" xmlns:r="http://schemas.openxmlformats.org/officeDocument/2006/relationships">
+  <p:cSld>
+    <p:spTree>
+      <p:nvGrpSpPr>
+        <p:cNvPr id="1" name=""/>
+        <p:cNvGrpSpPr/>
+        <p:nvPr/>
+      </p:nvGrpSpPr>
+      <p:grpSpPr/>
+      <p:sp>
+        <p:nvSpPr>
+          <p:cNvPr id="2" name="Title 1"/>
+          <p:cNvSpPr>
+            <a:spLocks noGrp="1"/>
+          </p:cNvSpPr>
+          <p:nvPr>
+            <p:ph type="title"/>
+          </p:nvPr>
+        </p:nvSpPr>
+        <p:spPr/>
+        <p:txBody>
+          <a:bodyPr/>
+          <a:lstStyle/>
+          <a:p>
+            <a:r>
+              <a:rPr sz="2200" b="1">
+                <a:solidFill>
+                  <a:srgbClr val="003F7E"/>
+                </a:solidFill>
+                <a:latin typeface="游ゴシック"/>
+                <a:ea typeface="游ゴシック"/>
+                <a:cs typeface="游ゴシック"/>
+              </a:rPr>
               <a:t>出荷再開の判断（ご承認のお願い）</a:t>
             </a:r>
           </a:p>
@@ -20537,6 +21055,219 @@
                 <a:cs typeface="游ゴシック"/>
               </a:rPr>
               <a:t>2026年6月</a:t>
+            </a:r>
+          </a:p>
+        </p:txBody>
+      </p:sp>
+      <p:sp>
+        <p:nvSpPr>
+          <p:cNvPr id="7" name="Rounded Rectangle 6"/>
+          <p:cNvSpPr/>
+          <p:nvPr/>
+        </p:nvSpPr>
+        <p:spPr>
+          <a:xfrm>
+            <a:off x="822960" y="5257800"/>
+            <a:ext cx="3474720" cy="960120"/>
+          </a:xfrm>
+          <a:prstGeom prst="roundRect">
+            <a:avLst/>
+          </a:prstGeom>
+          <a:solidFill>
+            <a:srgbClr val="EBEFF2"/>
+          </a:solidFill>
+          <a:ln w="12700">
+            <a:solidFill>
+              <a:srgbClr val="005BAB"/>
+            </a:solidFill>
+          </a:ln>
+          <a:effectLst/>
+        </p:spPr>
+        <p:style>
+          <a:lnRef idx="1">
+            <a:schemeClr val="accent1"/>
+          </a:lnRef>
+          <a:fillRef idx="3">
+            <a:schemeClr val="accent1"/>
+          </a:fillRef>
+          <a:effectRef idx="2">
+            <a:schemeClr val="accent1"/>
+          </a:effectRef>
+          <a:fontRef idx="minor">
+            <a:schemeClr val="lt1"/>
+          </a:fontRef>
+        </p:style>
+        <p:txBody>
+          <a:bodyPr rtlCol="0" anchor="ctr" wrap="square" lIns="109728" rIns="73152"/>
+          <a:lstStyle/>
+          <a:p>
+            <a:pPr algn="ctr"/>
+            <a:r>
+              <a:rPr sz="1400" b="1">
+                <a:solidFill>
+                  <a:srgbClr val="003F7E"/>
+                </a:solidFill>
+                <a:latin typeface="游ゴシック"/>
+                <a:ea typeface="游ゴシック"/>
+                <a:cs typeface="游ゴシック"/>
+              </a:rPr>
+              <a:t>① 事実の整理</a:t>
+            </a:r>
+          </a:p>
+          <a:p>
+            <a:pPr algn="ctr"/>
+            <a:r>
+              <a:rPr sz="900" b="0">
+                <a:solidFill>
+                  <a:srgbClr val="666666"/>
+                </a:solidFill>
+                <a:latin typeface="游ゴシック"/>
+                <a:ea typeface="游ゴシック"/>
+                <a:cs typeface="游ゴシック"/>
+              </a:rPr>
+              <a:t>発生事象・着色物質・工程別グリッド</a:t>
+            </a:r>
+          </a:p>
+        </p:txBody>
+      </p:sp>
+      <p:sp>
+        <p:nvSpPr>
+          <p:cNvPr id="8" name="Rounded Rectangle 7"/>
+          <p:cNvSpPr/>
+          <p:nvPr/>
+        </p:nvSpPr>
+        <p:spPr>
+          <a:xfrm>
+            <a:off x="4572000" y="5257800"/>
+            <a:ext cx="3474720" cy="960120"/>
+          </a:xfrm>
+          <a:prstGeom prst="roundRect">
+            <a:avLst/>
+          </a:prstGeom>
+          <a:solidFill>
+            <a:srgbClr val="EBEFF2"/>
+          </a:solidFill>
+          <a:ln w="12700">
+            <a:solidFill>
+              <a:srgbClr val="005BAB"/>
+            </a:solidFill>
+          </a:ln>
+          <a:effectLst/>
+        </p:spPr>
+        <p:style>
+          <a:lnRef idx="1">
+            <a:schemeClr val="accent1"/>
+          </a:lnRef>
+          <a:fillRef idx="3">
+            <a:schemeClr val="accent1"/>
+          </a:fillRef>
+          <a:effectRef idx="2">
+            <a:schemeClr val="accent1"/>
+          </a:effectRef>
+          <a:fontRef idx="minor">
+            <a:schemeClr val="lt1"/>
+          </a:fontRef>
+        </p:style>
+        <p:txBody>
+          <a:bodyPr rtlCol="0" anchor="ctr" wrap="square" lIns="109728" rIns="73152"/>
+          <a:lstStyle/>
+          <a:p>
+            <a:pPr algn="ctr"/>
+            <a:r>
+              <a:rPr sz="1400" b="1">
+                <a:solidFill>
+                  <a:srgbClr val="003F7E"/>
+                </a:solidFill>
+                <a:latin typeface="游ゴシック"/>
+                <a:ea typeface="游ゴシック"/>
+                <a:cs typeface="游ゴシック"/>
+              </a:rPr>
+              <a:t>② 推定メカニズム</a:t>
+            </a:r>
+          </a:p>
+          <a:p>
+            <a:pPr algn="ctr"/>
+            <a:r>
+              <a:rPr sz="900" b="0">
+                <a:solidFill>
+                  <a:srgbClr val="666666"/>
+                </a:solidFill>
+                <a:latin typeface="游ゴシック"/>
+                <a:ea typeface="游ゴシック"/>
+                <a:cs typeface="游ゴシック"/>
+              </a:rPr>
+              <a:t>アルドール縮合→前駆体→タンク熟成→450nm</a:t>
+            </a:r>
+          </a:p>
+        </p:txBody>
+      </p:sp>
+      <p:sp>
+        <p:nvSpPr>
+          <p:cNvPr id="9" name="Rounded Rectangle 8"/>
+          <p:cNvSpPr/>
+          <p:nvPr/>
+        </p:nvSpPr>
+        <p:spPr>
+          <a:xfrm>
+            <a:off x="8321040" y="5257800"/>
+            <a:ext cx="3474720" cy="960120"/>
+          </a:xfrm>
+          <a:prstGeom prst="roundRect">
+            <a:avLst/>
+          </a:prstGeom>
+          <a:solidFill>
+            <a:srgbClr val="EBEFF2"/>
+          </a:solidFill>
+          <a:ln w="12700">
+            <a:solidFill>
+              <a:srgbClr val="005BAB"/>
+            </a:solidFill>
+          </a:ln>
+          <a:effectLst/>
+        </p:spPr>
+        <p:style>
+          <a:lnRef idx="1">
+            <a:schemeClr val="accent1"/>
+          </a:lnRef>
+          <a:fillRef idx="3">
+            <a:schemeClr val="accent1"/>
+          </a:fillRef>
+          <a:effectRef idx="2">
+            <a:schemeClr val="accent1"/>
+          </a:effectRef>
+          <a:fontRef idx="minor">
+            <a:schemeClr val="lt1"/>
+          </a:fontRef>
+        </p:style>
+        <p:txBody>
+          <a:bodyPr rtlCol="0" anchor="ctr" wrap="square" lIns="109728" rIns="73152"/>
+          <a:lstStyle/>
+          <a:p>
+            <a:pPr algn="ctr"/>
+            <a:r>
+              <a:rPr sz="1400" b="1">
+                <a:solidFill>
+                  <a:srgbClr val="003F7E"/>
+                </a:solidFill>
+                <a:latin typeface="游ゴシック"/>
+                <a:ea typeface="游ゴシック"/>
+                <a:cs typeface="游ゴシック"/>
+              </a:rPr>
+              <a:t>③ 対応</a:t>
+            </a:r>
+          </a:p>
+          <a:p>
+            <a:pPr algn="ctr"/>
+            <a:r>
+              <a:rPr sz="900" b="0">
+                <a:solidFill>
+                  <a:srgbClr val="666666"/>
+                </a:solidFill>
+                <a:latin typeface="游ゴシック"/>
+                <a:ea typeface="游ゴシック"/>
+                <a:cs typeface="游ゴシック"/>
+              </a:rPr>
+              <a:t>触媒交換・運転条件・UV450判定</a:t>
             </a:r>
           </a:p>
         </p:txBody>

--- a/outputs/製品DEG色相悪化_対策会議.pptx
+++ b/outputs/製品DEG色相悪化_対策会議.pptx
@@ -26,6 +26,7 @@
     <p:sldId id="2147483578" r:id="rId33"/>
     <p:sldId id="2147483579" r:id="rId34"/>
     <p:sldId id="2147483580" r:id="rId35"/>
+    <p:sldId id="2147483581" r:id="rId36"/>
   </p:sldIdLst>
   <p:sldSz cx="12192000" cy="6858000"/>
   <p:notesSz cx="6807200" cy="9939338"/>
@@ -15846,9 +15847,9 @@
           <a:lstStyle/>
           <a:p>
             <a:r>
-              <a:rPr sz="2200" b="1">
+              <a:rPr sz="2400" b="1">
                 <a:solidFill>
-                  <a:srgbClr val="003F7E"/>
+                  <a:srgbClr val="000000"/>
                 </a:solidFill>
                 <a:latin typeface="游ゴシック"/>
                 <a:ea typeface="游ゴシック"/>
@@ -16001,7 +16002,7 @@
                 <a:ea typeface="游ゴシック"/>
                 <a:cs typeface="游ゴシック"/>
               </a:rPr>
-              <a:t>出口（ストリーム品）は常に規格内。窒素封入タンクの保管で約6週間にAPHA&lt;5→25〜35へ上昇。ドラム・SP（大気接触）は悪化なし。</a:t>
+              <a:t>出口（ストリーム品）は常に規格内。窒素封入タンクの保管で約6週間にAPHA&lt;5→25〜35へ上昇。大気接触（ドラム・SP）では進まず止まる。</a:t>
             </a:r>
           </a:p>
         </p:txBody>
@@ -16398,7 +16399,7 @@
                 <a:ea typeface="游ゴシック"/>
                 <a:cs typeface="游ゴシック"/>
               </a:rPr>
-              <a:t>ご依頼</a:t>
+              <a:t>進め方</a:t>
             </a:r>
           </a:p>
         </p:txBody>
@@ -16442,7 +16443,7 @@
                 <a:ea typeface="游ゴシック"/>
                 <a:cs typeface="游ゴシック"/>
               </a:rPr>
-              <a:t>再稼働後の初期流動品が全項目規格内かつタンク経時でUV・色相が不変であることを確認したうえで、出荷再開をご承認ください。</a:t>
+              <a:t>触媒交換・設備洗浄を終え、上記の運転条件と出口実測の歯止めのもとでプラントを立ち上げる。初期流動品の品質を確認しながら出荷を再開する。</a:t>
             </a:r>
           </a:p>
         </p:txBody>
@@ -16481,9 +16482,9 @@
           <a:lstStyle/>
           <a:p>
             <a:r>
-              <a:rPr sz="2200" b="1">
+              <a:rPr sz="2400" b="1">
                 <a:solidFill>
-                  <a:srgbClr val="003F7E"/>
+                  <a:srgbClr val="000000"/>
                 </a:solidFill>
                 <a:latin typeface="游ゴシック"/>
                 <a:ea typeface="游ゴシック"/>
@@ -16521,11 +16522,11 @@
                 <a:spcPts val="0"/>
               </a:spcBef>
               <a:spcAft>
-                <a:spcPts val="1200"/>
+                <a:spcPts val="1400"/>
               </a:spcAft>
             </a:pPr>
             <a:r>
-              <a:rPr sz="1350" b="0">
+              <a:rPr sz="1500" b="0">
                 <a:solidFill>
                   <a:srgbClr val="222222"/>
                 </a:solidFill>
@@ -16542,11 +16543,11 @@
                 <a:spcPts val="0"/>
               </a:spcBef>
               <a:spcAft>
-                <a:spcPts val="1200"/>
+                <a:spcPts val="1400"/>
               </a:spcAft>
             </a:pPr>
             <a:r>
-              <a:rPr sz="1350" b="0">
+              <a:rPr sz="1500" b="0">
                 <a:solidFill>
                   <a:srgbClr val="222222"/>
                 </a:solidFill>
@@ -16563,11 +16564,11 @@
                 <a:spcPts val="0"/>
               </a:spcBef>
               <a:spcAft>
-                <a:spcPts val="1200"/>
+                <a:spcPts val="1400"/>
               </a:spcAft>
             </a:pPr>
             <a:r>
-              <a:rPr sz="1350" b="0">
+              <a:rPr sz="1500" b="0">
                 <a:solidFill>
                   <a:srgbClr val="222222"/>
                 </a:solidFill>
@@ -16575,7 +16576,7 @@
                 <a:ea typeface="游ゴシック"/>
                 <a:cs typeface="游ゴシック"/>
               </a:rPr>
-              <a:t>・同じ製品でも、ドラム充填品・SP転送品（大気接触）では色相上昇しない。共配ライン残液（27日保管）も悪化なし。</a:t>
+              <a:t>・大気接触（ドラム充填・SP転送）では色相が進まず、悪化したものも大気に触れると進行が止まる。共配ライン残液も悪化していない。</a:t>
             </a:r>
           </a:p>
           <a:p>
@@ -16584,11 +16585,11 @@
                 <a:spcPts val="0"/>
               </a:spcBef>
               <a:spcAft>
-                <a:spcPts val="1200"/>
+                <a:spcPts val="1400"/>
               </a:spcAft>
             </a:pPr>
             <a:r>
-              <a:rPr sz="1350" b="0">
+              <a:rPr sz="1500" b="0">
                 <a:solidFill>
                   <a:srgbClr val="222222"/>
                 </a:solidFill>
@@ -16659,9 +16660,9 @@
           <a:lstStyle/>
           <a:p>
             <a:r>
-              <a:rPr sz="2200" b="1">
+              <a:rPr sz="2400" b="1">
                 <a:solidFill>
-                  <a:srgbClr val="003F7E"/>
+                  <a:srgbClr val="000000"/>
                 </a:solidFill>
                 <a:latin typeface="游ゴシック"/>
                 <a:ea typeface="游ゴシック"/>
@@ -17073,7 +17074,64 @@
           <a:lstStyle/>
           <a:p>
             <a:r>
-              <a:rPr sz="2200" b="1">
+              <a:rPr sz="2400" b="1">
+                <a:solidFill>
+                  <a:srgbClr val="000000"/>
+                </a:solidFill>
+                <a:latin typeface="游ゴシック"/>
+                <a:ea typeface="游ゴシック"/>
+                <a:cs typeface="游ゴシック"/>
+              </a:rPr>
+              <a:t>推定メカニズム（現時点の最有力仮説・ベンチでは未再現）</a:t>
+            </a:r>
+          </a:p>
+        </p:txBody>
+      </p:sp>
+      <p:sp>
+        <p:nvSpPr>
+          <p:cNvPr id="3" name="Rounded Rectangle 2"/>
+          <p:cNvSpPr/>
+          <p:nvPr/>
+        </p:nvSpPr>
+        <p:spPr>
+          <a:xfrm>
+            <a:off x="502920" y="2331720"/>
+            <a:ext cx="2487168" cy="1600200"/>
+          </a:xfrm>
+          <a:prstGeom prst="roundRect">
+            <a:avLst/>
+          </a:prstGeom>
+          <a:solidFill>
+            <a:srgbClr val="EBEFF2"/>
+          </a:solidFill>
+          <a:ln w="15875">
+            <a:solidFill>
+              <a:srgbClr val="005BAB"/>
+            </a:solidFill>
+          </a:ln>
+          <a:effectLst/>
+        </p:spPr>
+        <p:style>
+          <a:lnRef idx="1">
+            <a:schemeClr val="accent1"/>
+          </a:lnRef>
+          <a:fillRef idx="3">
+            <a:schemeClr val="accent1"/>
+          </a:fillRef>
+          <a:effectRef idx="2">
+            <a:schemeClr val="accent1"/>
+          </a:effectRef>
+          <a:fontRef idx="minor">
+            <a:schemeClr val="lt1"/>
+          </a:fontRef>
+        </p:style>
+        <p:txBody>
+          <a:bodyPr rtlCol="0" anchor="ctr" wrap="square" lIns="54864" rIns="54864" tIns="36576" bIns="36576"/>
+          <a:lstStyle/>
+          <a:p>
+            <a:pPr algn="ctr"/>
+            <a:r>
+              <a:rPr sz="1200" b="1">
                 <a:solidFill>
                   <a:srgbClr val="003F7E"/>
                 </a:solidFill>
@@ -17081,45 +17139,612 @@
                 <a:ea typeface="游ゴシック"/>
                 <a:cs typeface="游ゴシック"/>
               </a:rPr>
-              <a:t>推定メカニズム（現時点の最有力仮説・ベンチでは未再現）</a:t>
-            </a:r>
-          </a:p>
-        </p:txBody>
-      </p:sp>
-      <p:pic>
-        <p:nvPicPr>
-          <p:cNvPr id="3" name="Picture 2" descr="aldol_scheme.png"/>
-          <p:cNvPicPr>
-            <a:picLocks noChangeAspect="1"/>
-          </p:cNvPicPr>
+              <a:t>アセトアルデヒド</a:t>
+            </a:r>
+          </a:p>
+          <a:p>
+            <a:pPr algn="ctr"/>
+            <a:r>
+              <a:rPr sz="1200" b="0">
+                <a:solidFill>
+                  <a:srgbClr val="000000"/>
+                </a:solidFill>
+                <a:latin typeface="游ゴシック"/>
+                <a:ea typeface="游ゴシック"/>
+                <a:cs typeface="游ゴシック"/>
+              </a:rPr>
+              <a:t>CH3CHO</a:t>
+            </a:r>
+          </a:p>
+          <a:p>
+            <a:pPr algn="ctr"/>
+            <a:r>
+              <a:rPr sz="1000" b="0">
+                <a:solidFill>
+                  <a:srgbClr val="666666"/>
+                </a:solidFill>
+                <a:latin typeface="游ゴシック"/>
+                <a:ea typeface="游ゴシック"/>
+                <a:cs typeface="游ゴシック"/>
+              </a:rPr>
+              <a:t>（種）</a:t>
+            </a:r>
+          </a:p>
+        </p:txBody>
+      </p:sp>
+      <p:sp>
+        <p:nvSpPr>
+          <p:cNvPr id="4" name="Rounded Rectangle 3"/>
+          <p:cNvSpPr/>
           <p:nvPr/>
-        </p:nvPicPr>
-        <p:blipFill>
-          <a:blip r:embed="rId2"/>
-          <a:stretch>
-            <a:fillRect/>
-          </a:stretch>
-        </p:blipFill>
-        <p:spPr>
-          <a:xfrm>
-            <a:off x="457200" y="1325880"/>
-            <a:ext cx="11274552" cy="3753834"/>
-          </a:xfrm>
-          <a:prstGeom prst="rect">
-            <a:avLst/>
-          </a:prstGeom>
-        </p:spPr>
-      </p:pic>
-      <p:sp>
-        <p:nvSpPr>
-          <p:cNvPr id="4" name="TextBox 3"/>
+        </p:nvSpPr>
+        <p:spPr>
+          <a:xfrm>
+            <a:off x="3377183" y="2331720"/>
+            <a:ext cx="2487168" cy="1600200"/>
+          </a:xfrm>
+          <a:prstGeom prst="roundRect">
+            <a:avLst/>
+          </a:prstGeom>
+          <a:solidFill>
+            <a:srgbClr val="EBEFF2"/>
+          </a:solidFill>
+          <a:ln w="15875">
+            <a:solidFill>
+              <a:srgbClr val="005BAB"/>
+            </a:solidFill>
+          </a:ln>
+          <a:effectLst/>
+        </p:spPr>
+        <p:style>
+          <a:lnRef idx="1">
+            <a:schemeClr val="accent1"/>
+          </a:lnRef>
+          <a:fillRef idx="3">
+            <a:schemeClr val="accent1"/>
+          </a:fillRef>
+          <a:effectRef idx="2">
+            <a:schemeClr val="accent1"/>
+          </a:effectRef>
+          <a:fontRef idx="minor">
+            <a:schemeClr val="lt1"/>
+          </a:fontRef>
+        </p:style>
+        <p:txBody>
+          <a:bodyPr rtlCol="0" anchor="ctr" wrap="square" lIns="54864" rIns="54864" tIns="36576" bIns="36576"/>
+          <a:lstStyle/>
+          <a:p>
+            <a:pPr algn="ctr"/>
+            <a:r>
+              <a:rPr sz="1200" b="1">
+                <a:solidFill>
+                  <a:srgbClr val="003F7E"/>
+                </a:solidFill>
+                <a:latin typeface="游ゴシック"/>
+                <a:ea typeface="游ゴシック"/>
+                <a:cs typeface="游ゴシック"/>
+              </a:rPr>
+              <a:t>クロトンアルデヒド</a:t>
+            </a:r>
+          </a:p>
+          <a:p>
+            <a:pPr algn="ctr"/>
+            <a:r>
+              <a:rPr sz="1200" b="0">
+                <a:solidFill>
+                  <a:srgbClr val="000000"/>
+                </a:solidFill>
+                <a:latin typeface="游ゴシック"/>
+                <a:ea typeface="游ゴシック"/>
+                <a:cs typeface="游ゴシック"/>
+              </a:rPr>
+              <a:t>CH3-CH=CH-CHO</a:t>
+            </a:r>
+          </a:p>
+          <a:p>
+            <a:pPr algn="ctr"/>
+            <a:r>
+              <a:rPr sz="1000" b="0">
+                <a:solidFill>
+                  <a:srgbClr val="666666"/>
+                </a:solidFill>
+                <a:latin typeface="游ゴシック"/>
+                <a:ea typeface="游ゴシック"/>
+                <a:cs typeface="游ゴシック"/>
+              </a:rPr>
+              <a:t>共役2</a:t>
+            </a:r>
+          </a:p>
+        </p:txBody>
+      </p:sp>
+      <p:sp>
+        <p:nvSpPr>
+          <p:cNvPr id="5" name="Rounded Rectangle 4"/>
+          <p:cNvSpPr/>
+          <p:nvPr/>
+        </p:nvSpPr>
+        <p:spPr>
+          <a:xfrm>
+            <a:off x="6251447" y="2331720"/>
+            <a:ext cx="2487168" cy="1600200"/>
+          </a:xfrm>
+          <a:prstGeom prst="roundRect">
+            <a:avLst/>
+          </a:prstGeom>
+          <a:solidFill>
+            <a:srgbClr val="EBEFF2"/>
+          </a:solidFill>
+          <a:ln w="15875">
+            <a:solidFill>
+              <a:srgbClr val="005BAB"/>
+            </a:solidFill>
+          </a:ln>
+          <a:effectLst/>
+        </p:spPr>
+        <p:style>
+          <a:lnRef idx="1">
+            <a:schemeClr val="accent1"/>
+          </a:lnRef>
+          <a:fillRef idx="3">
+            <a:schemeClr val="accent1"/>
+          </a:fillRef>
+          <a:effectRef idx="2">
+            <a:schemeClr val="accent1"/>
+          </a:effectRef>
+          <a:fontRef idx="minor">
+            <a:schemeClr val="lt1"/>
+          </a:fontRef>
+        </p:style>
+        <p:txBody>
+          <a:bodyPr rtlCol="0" anchor="ctr" wrap="square" lIns="54864" rIns="54864" tIns="36576" bIns="36576"/>
+          <a:lstStyle/>
+          <a:p>
+            <a:pPr algn="ctr"/>
+            <a:r>
+              <a:rPr sz="1200" b="1">
+                <a:solidFill>
+                  <a:srgbClr val="003F7E"/>
+                </a:solidFill>
+                <a:latin typeface="游ゴシック"/>
+                <a:ea typeface="游ゴシック"/>
+                <a:cs typeface="游ゴシック"/>
+              </a:rPr>
+              <a:t>短い前駆体</a:t>
+            </a:r>
+          </a:p>
+          <a:p>
+            <a:pPr algn="ctr"/>
+            <a:r>
+              <a:rPr sz="1200" b="0">
+                <a:solidFill>
+                  <a:srgbClr val="000000"/>
+                </a:solidFill>
+                <a:latin typeface="游ゴシック"/>
+                <a:ea typeface="游ゴシック"/>
+                <a:cs typeface="游ゴシック"/>
+              </a:rPr>
+              <a:t>CH3-(CH=CH)3-CHO</a:t>
+            </a:r>
+          </a:p>
+          <a:p>
+            <a:pPr algn="ctr"/>
+            <a:r>
+              <a:rPr sz="1000" b="0">
+                <a:solidFill>
+                  <a:srgbClr val="666666"/>
+                </a:solidFill>
+                <a:latin typeface="游ゴシック"/>
+                <a:ea typeface="游ゴシック"/>
+                <a:cs typeface="游ゴシック"/>
+              </a:rPr>
+              <a:t>共役4・UV330nm</a:t>
+            </a:r>
+          </a:p>
+        </p:txBody>
+      </p:sp>
+      <p:sp>
+        <p:nvSpPr>
+          <p:cNvPr id="6" name="Rounded Rectangle 5"/>
+          <p:cNvSpPr/>
+          <p:nvPr/>
+        </p:nvSpPr>
+        <p:spPr>
+          <a:xfrm>
+            <a:off x="9125711" y="2331720"/>
+            <a:ext cx="2487168" cy="1600200"/>
+          </a:xfrm>
+          <a:prstGeom prst="roundRect">
+            <a:avLst/>
+          </a:prstGeom>
+          <a:solidFill>
+            <a:srgbClr val="FFF6E0"/>
+          </a:solidFill>
+          <a:ln w="15875">
+            <a:solidFill>
+              <a:srgbClr val="C07A00"/>
+            </a:solidFill>
+          </a:ln>
+          <a:effectLst/>
+        </p:spPr>
+        <p:style>
+          <a:lnRef idx="1">
+            <a:schemeClr val="accent1"/>
+          </a:lnRef>
+          <a:fillRef idx="3">
+            <a:schemeClr val="accent1"/>
+          </a:fillRef>
+          <a:effectRef idx="2">
+            <a:schemeClr val="accent1"/>
+          </a:effectRef>
+          <a:fontRef idx="minor">
+            <a:schemeClr val="lt1"/>
+          </a:fontRef>
+        </p:style>
+        <p:txBody>
+          <a:bodyPr rtlCol="0" anchor="ctr" wrap="square" lIns="54864" rIns="54864" tIns="36576" bIns="36576"/>
+          <a:lstStyle/>
+          <a:p>
+            <a:pPr algn="ctr"/>
+            <a:r>
+              <a:rPr sz="1200" b="1">
+                <a:solidFill>
+                  <a:srgbClr val="C07A00"/>
+                </a:solidFill>
+                <a:latin typeface="游ゴシック"/>
+                <a:ea typeface="游ゴシック"/>
+                <a:cs typeface="游ゴシック"/>
+              </a:rPr>
+              <a:t>ポリエナール</a:t>
+            </a:r>
+          </a:p>
+          <a:p>
+            <a:pPr algn="ctr"/>
+            <a:r>
+              <a:rPr sz="1200" b="0">
+                <a:solidFill>
+                  <a:srgbClr val="000000"/>
+                </a:solidFill>
+                <a:latin typeface="游ゴシック"/>
+                <a:ea typeface="游ゴシック"/>
+                <a:cs typeface="游ゴシック"/>
+              </a:rPr>
+              <a:t>CH3-(CH=CH)n-CHO</a:t>
+            </a:r>
+          </a:p>
+          <a:p>
+            <a:pPr algn="ctr"/>
+            <a:r>
+              <a:rPr sz="1050" b="1">
+                <a:solidFill>
+                  <a:srgbClr val="C07A00"/>
+                </a:solidFill>
+                <a:latin typeface="游ゴシック"/>
+                <a:ea typeface="游ゴシック"/>
+                <a:cs typeface="游ゴシック"/>
+              </a:rPr>
+              <a:t>450nm・黄</a:t>
+            </a:r>
+          </a:p>
+        </p:txBody>
+      </p:sp>
+      <p:sp>
+        <p:nvSpPr>
+          <p:cNvPr id="7" name="Right Arrow 6"/>
+          <p:cNvSpPr/>
+          <p:nvPr/>
+        </p:nvSpPr>
+        <p:spPr>
+          <a:xfrm>
+            <a:off x="3026664" y="2985515"/>
+            <a:ext cx="313943" cy="292608"/>
+          </a:xfrm>
+          <a:prstGeom prst="rightArrow">
+            <a:avLst/>
+          </a:prstGeom>
+          <a:solidFill>
+            <a:srgbClr val="005BAB"/>
+          </a:solidFill>
+          <a:ln>
+            <a:noFill/>
+          </a:ln>
+          <a:effectLst/>
+        </p:spPr>
+        <p:style>
+          <a:lnRef idx="1">
+            <a:schemeClr val="accent1"/>
+          </a:lnRef>
+          <a:fillRef idx="3">
+            <a:schemeClr val="accent1"/>
+          </a:fillRef>
+          <a:effectRef idx="2">
+            <a:schemeClr val="accent1"/>
+          </a:effectRef>
+          <a:fontRef idx="minor">
+            <a:schemeClr val="lt1"/>
+          </a:fontRef>
+        </p:style>
+        <p:txBody>
+          <a:bodyPr rtlCol="0" anchor="ctr"/>
+          <a:lstStyle/>
+          <a:p>
+            <a:pPr algn="ctr"/>
+          </a:p>
+        </p:txBody>
+      </p:sp>
+      <p:sp>
+        <p:nvSpPr>
+          <p:cNvPr id="8" name="TextBox 7"/>
           <p:cNvSpPr txBox="1"/>
           <p:nvPr/>
         </p:nvSpPr>
         <p:spPr>
           <a:xfrm>
-            <a:off x="548640" y="5074920"/>
-            <a:ext cx="11064240" cy="914400"/>
+            <a:off x="2761488" y="1874519"/>
+            <a:ext cx="844295" cy="411480"/>
+          </a:xfrm>
+          <a:prstGeom prst="rect">
+            <a:avLst/>
+          </a:prstGeom>
+          <a:noFill/>
+        </p:spPr>
+        <p:txBody>
+          <a:bodyPr wrap="square">
+            <a:spAutoFit/>
+          </a:bodyPr>
+          <a:lstStyle/>
+          <a:p>
+            <a:pPr algn="ctr">
+              <a:spcBef>
+                <a:spcPts val="0"/>
+              </a:spcBef>
+              <a:spcAft>
+                <a:spcPts val="400"/>
+              </a:spcAft>
+            </a:pPr>
+            <a:r>
+              <a:rPr sz="950" b="0">
+                <a:solidFill>
+                  <a:srgbClr val="003F7E"/>
+                </a:solidFill>
+                <a:latin typeface="游ゴシック"/>
+                <a:ea typeface="游ゴシック"/>
+                <a:cs typeface="游ゴシック"/>
+              </a:rPr>
+              <a:t>アルドール縮合＋脱水(−H2O)</a:t>
+            </a:r>
+          </a:p>
+        </p:txBody>
+      </p:sp>
+      <p:sp>
+        <p:nvSpPr>
+          <p:cNvPr id="9" name="Right Arrow 8"/>
+          <p:cNvSpPr/>
+          <p:nvPr/>
+        </p:nvSpPr>
+        <p:spPr>
+          <a:xfrm>
+            <a:off x="5900927" y="2985515"/>
+            <a:ext cx="313943" cy="292608"/>
+          </a:xfrm>
+          <a:prstGeom prst="rightArrow">
+            <a:avLst/>
+          </a:prstGeom>
+          <a:solidFill>
+            <a:srgbClr val="005BAB"/>
+          </a:solidFill>
+          <a:ln>
+            <a:noFill/>
+          </a:ln>
+          <a:effectLst/>
+        </p:spPr>
+        <p:style>
+          <a:lnRef idx="1">
+            <a:schemeClr val="accent1"/>
+          </a:lnRef>
+          <a:fillRef idx="3">
+            <a:schemeClr val="accent1"/>
+          </a:fillRef>
+          <a:effectRef idx="2">
+            <a:schemeClr val="accent1"/>
+          </a:effectRef>
+          <a:fontRef idx="minor">
+            <a:schemeClr val="lt1"/>
+          </a:fontRef>
+        </p:style>
+        <p:txBody>
+          <a:bodyPr rtlCol="0" anchor="ctr"/>
+          <a:lstStyle/>
+          <a:p>
+            <a:pPr algn="ctr"/>
+          </a:p>
+        </p:txBody>
+      </p:sp>
+      <p:sp>
+        <p:nvSpPr>
+          <p:cNvPr id="10" name="TextBox 9"/>
+          <p:cNvSpPr txBox="1"/>
+          <p:nvPr/>
+        </p:nvSpPr>
+        <p:spPr>
+          <a:xfrm>
+            <a:off x="5635751" y="1874519"/>
+            <a:ext cx="844295" cy="411480"/>
+          </a:xfrm>
+          <a:prstGeom prst="rect">
+            <a:avLst/>
+          </a:prstGeom>
+          <a:noFill/>
+        </p:spPr>
+        <p:txBody>
+          <a:bodyPr wrap="square">
+            <a:spAutoFit/>
+          </a:bodyPr>
+          <a:lstStyle/>
+          <a:p>
+            <a:pPr algn="ctr">
+              <a:spcBef>
+                <a:spcPts val="0"/>
+              </a:spcBef>
+              <a:spcAft>
+                <a:spcPts val="400"/>
+              </a:spcAft>
+            </a:pPr>
+            <a:r>
+              <a:rPr sz="950" b="0">
+                <a:solidFill>
+                  <a:srgbClr val="003F7E"/>
+                </a:solidFill>
+                <a:latin typeface="游ゴシック"/>
+                <a:ea typeface="游ゴシック"/>
+                <a:cs typeface="游ゴシック"/>
+              </a:rPr>
+              <a:t>逐次縮合</a:t>
+            </a:r>
+          </a:p>
+        </p:txBody>
+      </p:sp>
+      <p:sp>
+        <p:nvSpPr>
+          <p:cNvPr id="11" name="Right Arrow 10"/>
+          <p:cNvSpPr/>
+          <p:nvPr/>
+        </p:nvSpPr>
+        <p:spPr>
+          <a:xfrm>
+            <a:off x="8775191" y="2985515"/>
+            <a:ext cx="313943" cy="292608"/>
+          </a:xfrm>
+          <a:prstGeom prst="rightArrow">
+            <a:avLst/>
+          </a:prstGeom>
+          <a:solidFill>
+            <a:srgbClr val="005BAB"/>
+          </a:solidFill>
+          <a:ln>
+            <a:noFill/>
+          </a:ln>
+          <a:effectLst/>
+        </p:spPr>
+        <p:style>
+          <a:lnRef idx="1">
+            <a:schemeClr val="accent1"/>
+          </a:lnRef>
+          <a:fillRef idx="3">
+            <a:schemeClr val="accent1"/>
+          </a:fillRef>
+          <a:effectRef idx="2">
+            <a:schemeClr val="accent1"/>
+          </a:effectRef>
+          <a:fontRef idx="minor">
+            <a:schemeClr val="lt1"/>
+          </a:fontRef>
+        </p:style>
+        <p:txBody>
+          <a:bodyPr rtlCol="0" anchor="ctr"/>
+          <a:lstStyle/>
+          <a:p>
+            <a:pPr algn="ctr"/>
+          </a:p>
+        </p:txBody>
+      </p:sp>
+      <p:sp>
+        <p:nvSpPr>
+          <p:cNvPr id="12" name="TextBox 11"/>
+          <p:cNvSpPr txBox="1"/>
+          <p:nvPr/>
+        </p:nvSpPr>
+        <p:spPr>
+          <a:xfrm>
+            <a:off x="8510015" y="1874519"/>
+            <a:ext cx="844295" cy="411480"/>
+          </a:xfrm>
+          <a:prstGeom prst="rect">
+            <a:avLst/>
+          </a:prstGeom>
+          <a:noFill/>
+        </p:spPr>
+        <p:txBody>
+          <a:bodyPr wrap="square">
+            <a:spAutoFit/>
+          </a:bodyPr>
+          <a:lstStyle/>
+          <a:p>
+            <a:pPr algn="ctr">
+              <a:spcBef>
+                <a:spcPts val="0"/>
+              </a:spcBef>
+              <a:spcAft>
+                <a:spcPts val="400"/>
+              </a:spcAft>
+            </a:pPr>
+            <a:r>
+              <a:rPr sz="950" b="0">
+                <a:solidFill>
+                  <a:srgbClr val="003F7E"/>
+                </a:solidFill>
+                <a:latin typeface="游ゴシック"/>
+                <a:ea typeface="游ゴシック"/>
+                <a:cs typeface="游ゴシック"/>
+              </a:rPr>
+              <a:t>タンクで熟成</a:t>
+            </a:r>
+          </a:p>
+        </p:txBody>
+      </p:sp>
+      <p:sp>
+        <p:nvSpPr>
+          <p:cNvPr id="13" name="TextBox 12"/>
+          <p:cNvSpPr txBox="1"/>
+          <p:nvPr/>
+        </p:nvSpPr>
+        <p:spPr>
+          <a:xfrm>
+            <a:off x="502920" y="4160520"/>
+            <a:ext cx="11109960" cy="457200"/>
+          </a:xfrm>
+          <a:prstGeom prst="rect">
+            <a:avLst/>
+          </a:prstGeom>
+          <a:noFill/>
+        </p:spPr>
+        <p:txBody>
+          <a:bodyPr wrap="square">
+            <a:spAutoFit/>
+          </a:bodyPr>
+          <a:lstStyle/>
+          <a:p>
+            <a:pPr algn="ctr">
+              <a:spcBef>
+                <a:spcPts val="0"/>
+              </a:spcBef>
+              <a:spcAft>
+                <a:spcPts val="400"/>
+              </a:spcAft>
+            </a:pPr>
+            <a:r>
+              <a:rPr sz="1150" b="1">
+                <a:solidFill>
+                  <a:srgbClr val="000000"/>
+                </a:solidFill>
+                <a:latin typeface="游ゴシック"/>
+                <a:ea typeface="游ゴシック"/>
+                <a:cs typeface="游ゴシック"/>
+              </a:rPr>
+              <a:t>一般式 CH3-(CH=CH)n-CHO ：共役（CH=CH）が伸びるほど吸収が長波長化し、十分伸びると450nm（黄）。微量（ppbオーダー）で発色。</a:t>
+            </a:r>
+          </a:p>
+        </p:txBody>
+      </p:sp>
+      <p:sp>
+        <p:nvSpPr>
+          <p:cNvPr id="14" name="TextBox 13"/>
+          <p:cNvSpPr txBox="1"/>
+          <p:nvPr/>
+        </p:nvSpPr>
+        <p:spPr>
+          <a:xfrm>
+            <a:off x="502920" y="4800600"/>
+            <a:ext cx="11109960" cy="914400"/>
           </a:xfrm>
           <a:prstGeom prst="rect">
             <a:avLst/>
@@ -17141,29 +17766,29 @@
               </a:spcAft>
             </a:pPr>
             <a:r>
-              <a:rPr sz="1250" b="1">
+              <a:rPr sz="1300" b="1">
                 <a:solidFill>
-                  <a:srgbClr val="003F7E"/>
+                  <a:srgbClr val="000000"/>
                 </a:solidFill>
                 <a:latin typeface="游ゴシック"/>
                 <a:ea typeface="游ゴシック"/>
                 <a:cs typeface="游ゴシック"/>
               </a:rPr>
-              <a:t>一筋： 触媒劣化で増えたアルデヒドが、アルドール縮合で高沸点の前駆体になってDEG留分へ移り、窒素タンクの長期保管で前駆体どうしが縮合・脱水して共役が伸び、約10ppb（推定）で450nm＝黄色に着色する。前駆体を使い切るとAPHA30程度で頭打ちになる。</a:t>
-            </a:r>
-          </a:p>
-        </p:txBody>
-      </p:sp>
-      <p:sp>
-        <p:nvSpPr>
-          <p:cNvPr id="5" name="TextBox 4"/>
+              <a:t>一筋： 触媒劣化で増えたアルデヒドが、アルドール縮合で高沸点の前駆体になってDEG留分へ移り、窒素タンクの長期保管で前駆体どうしが縮合・脱水して共役が伸び、ppbオーダーで450nm＝黄色に着色する。前駆体を使い切るとAPHA30程度で頭打ちになる。</a:t>
+            </a:r>
+          </a:p>
+        </p:txBody>
+      </p:sp>
+      <p:sp>
+        <p:nvSpPr>
+          <p:cNvPr id="15" name="TextBox 14"/>
           <p:cNvSpPr txBox="1"/>
           <p:nvPr/>
         </p:nvSpPr>
         <p:spPr>
           <a:xfrm>
-            <a:off x="548640" y="6172200"/>
-            <a:ext cx="11064240" cy="548640"/>
+            <a:off x="502920" y="5943600"/>
+            <a:ext cx="11109960" cy="640080"/>
           </a:xfrm>
           <a:prstGeom prst="rect">
             <a:avLst/>
@@ -17185,7 +17810,7 @@
               </a:spcAft>
             </a:pPr>
             <a:r>
-              <a:rPr sz="1000" b="0">
+              <a:rPr sz="1100" b="0">
                 <a:solidFill>
                   <a:srgbClr val="666666"/>
                 </a:solidFill>
@@ -17232,7 +17857,64 @@
           <a:lstStyle/>
           <a:p>
             <a:r>
-              <a:rPr sz="2200" b="1">
+              <a:rPr sz="2400" b="1">
+                <a:solidFill>
+                  <a:srgbClr val="000000"/>
+                </a:solidFill>
+                <a:latin typeface="游ゴシック"/>
+                <a:ea typeface="游ゴシック"/>
+                <a:cs typeface="游ゴシック"/>
+              </a:rPr>
+              <a:t>縮合は脱水塔以降で起こる（工程フロー）</a:t>
+            </a:r>
+          </a:p>
+        </p:txBody>
+      </p:sp>
+      <p:sp>
+        <p:nvSpPr>
+          <p:cNvPr id="3" name="Rounded Rectangle 2"/>
+          <p:cNvSpPr/>
+          <p:nvPr/>
+        </p:nvSpPr>
+        <p:spPr>
+          <a:xfrm>
+            <a:off x="457200" y="2194560"/>
+            <a:ext cx="1371600" cy="1737360"/>
+          </a:xfrm>
+          <a:prstGeom prst="roundRect">
+            <a:avLst/>
+          </a:prstGeom>
+          <a:solidFill>
+            <a:srgbClr val="EBEFF2"/>
+          </a:solidFill>
+          <a:ln w="13970">
+            <a:solidFill>
+              <a:srgbClr val="005BAB"/>
+            </a:solidFill>
+          </a:ln>
+          <a:effectLst/>
+        </p:spPr>
+        <p:style>
+          <a:lnRef idx="1">
+            <a:schemeClr val="accent1"/>
+          </a:lnRef>
+          <a:fillRef idx="3">
+            <a:schemeClr val="accent1"/>
+          </a:fillRef>
+          <a:effectRef idx="2">
+            <a:schemeClr val="accent1"/>
+          </a:effectRef>
+          <a:fontRef idx="minor">
+            <a:schemeClr val="lt1"/>
+          </a:fontRef>
+        </p:style>
+        <p:txBody>
+          <a:bodyPr rtlCol="0" anchor="ctr" wrap="square" lIns="54864" rIns="54864" tIns="36576" bIns="36576"/>
+          <a:lstStyle/>
+          <a:p>
+            <a:pPr algn="ctr"/>
+            <a:r>
+              <a:rPr sz="1100" b="1">
                 <a:solidFill>
                   <a:srgbClr val="003F7E"/>
                 </a:solidFill>
@@ -17240,45 +17922,796 @@
                 <a:ea typeface="游ゴシック"/>
                 <a:cs typeface="游ゴシック"/>
               </a:rPr>
-              <a:t>縮合は脱水塔以降で起こる（工程フロー）</a:t>
-            </a:r>
-          </a:p>
-        </p:txBody>
-      </p:sp>
-      <p:pic>
-        <p:nvPicPr>
-          <p:cNvPr id="3" name="Picture 2" descr="mechanism_flow.png"/>
-          <p:cNvPicPr>
-            <a:picLocks noChangeAspect="1"/>
-          </p:cNvPicPr>
+              <a:t>EO反応系</a:t>
+            </a:r>
+          </a:p>
+          <a:p>
+            <a:pPr algn="ctr"/>
+            <a:r>
+              <a:rPr sz="950" b="0">
+                <a:solidFill>
+                  <a:srgbClr val="000000"/>
+                </a:solidFill>
+                <a:latin typeface="游ゴシック"/>
+                <a:ea typeface="游ゴシック"/>
+                <a:cs typeface="游ゴシック"/>
+              </a:rPr>
+              <a:t>①アルデヒド増加</a:t>
+            </a:r>
+          </a:p>
+        </p:txBody>
+      </p:sp>
+      <p:sp>
+        <p:nvSpPr>
+          <p:cNvPr id="4" name="Rounded Rectangle 3"/>
+          <p:cNvSpPr/>
           <p:nvPr/>
-        </p:nvPicPr>
-        <p:blipFill>
-          <a:blip r:embed="rId2"/>
-          <a:stretch>
-            <a:fillRect/>
-          </a:stretch>
-        </p:blipFill>
-        <p:spPr>
-          <a:xfrm>
-            <a:off x="320040" y="1600200"/>
-            <a:ext cx="11521440" cy="2848442"/>
-          </a:xfrm>
-          <a:prstGeom prst="rect">
-            <a:avLst/>
-          </a:prstGeom>
-        </p:spPr>
-      </p:pic>
-      <p:sp>
-        <p:nvSpPr>
-          <p:cNvPr id="4" name="TextBox 3"/>
+        </p:nvSpPr>
+        <p:spPr>
+          <a:xfrm>
+            <a:off x="2110740" y="2194560"/>
+            <a:ext cx="1371600" cy="1737360"/>
+          </a:xfrm>
+          <a:prstGeom prst="roundRect">
+            <a:avLst/>
+          </a:prstGeom>
+          <a:solidFill>
+            <a:srgbClr val="EBEFF2"/>
+          </a:solidFill>
+          <a:ln w="13970">
+            <a:solidFill>
+              <a:srgbClr val="005BAB"/>
+            </a:solidFill>
+          </a:ln>
+          <a:effectLst/>
+        </p:spPr>
+        <p:style>
+          <a:lnRef idx="1">
+            <a:schemeClr val="accent1"/>
+          </a:lnRef>
+          <a:fillRef idx="3">
+            <a:schemeClr val="accent1"/>
+          </a:fillRef>
+          <a:effectRef idx="2">
+            <a:schemeClr val="accent1"/>
+          </a:effectRef>
+          <a:fontRef idx="minor">
+            <a:schemeClr val="lt1"/>
+          </a:fontRef>
+        </p:style>
+        <p:txBody>
+          <a:bodyPr rtlCol="0" anchor="ctr" wrap="square" lIns="54864" rIns="54864" tIns="36576" bIns="36576"/>
+          <a:lstStyle/>
+          <a:p>
+            <a:pPr algn="ctr"/>
+            <a:r>
+              <a:rPr sz="1100" b="1">
+                <a:solidFill>
+                  <a:srgbClr val="003F7E"/>
+                </a:solidFill>
+                <a:latin typeface="游ゴシック"/>
+                <a:ea typeface="游ゴシック"/>
+                <a:cs typeface="游ゴシック"/>
+              </a:rPr>
+              <a:t>EG反応系</a:t>
+            </a:r>
+          </a:p>
+          <a:p>
+            <a:pPr algn="ctr"/>
+            <a:r>
+              <a:rPr sz="950" b="0">
+                <a:solidFill>
+                  <a:srgbClr val="000000"/>
+                </a:solidFill>
+                <a:latin typeface="游ゴシック"/>
+                <a:ea typeface="游ゴシック"/>
+                <a:cs typeface="游ゴシック"/>
+              </a:rPr>
+              <a:t>グリコールと共存</a:t>
+            </a:r>
+          </a:p>
+        </p:txBody>
+      </p:sp>
+      <p:sp>
+        <p:nvSpPr>
+          <p:cNvPr id="5" name="Rounded Rectangle 4"/>
+          <p:cNvSpPr/>
+          <p:nvPr/>
+        </p:nvSpPr>
+        <p:spPr>
+          <a:xfrm>
+            <a:off x="3764280" y="2194560"/>
+            <a:ext cx="1371600" cy="1737360"/>
+          </a:xfrm>
+          <a:prstGeom prst="roundRect">
+            <a:avLst/>
+          </a:prstGeom>
+          <a:solidFill>
+            <a:srgbClr val="EBEFF2"/>
+          </a:solidFill>
+          <a:ln w="13970">
+            <a:solidFill>
+              <a:srgbClr val="005BAB"/>
+            </a:solidFill>
+          </a:ln>
+          <a:effectLst/>
+        </p:spPr>
+        <p:style>
+          <a:lnRef idx="1">
+            <a:schemeClr val="accent1"/>
+          </a:lnRef>
+          <a:fillRef idx="3">
+            <a:schemeClr val="accent1"/>
+          </a:fillRef>
+          <a:effectRef idx="2">
+            <a:schemeClr val="accent1"/>
+          </a:effectRef>
+          <a:fontRef idx="minor">
+            <a:schemeClr val="lt1"/>
+          </a:fontRef>
+        </p:style>
+        <p:txBody>
+          <a:bodyPr rtlCol="0" anchor="ctr" wrap="square" lIns="54864" rIns="54864" tIns="36576" bIns="36576"/>
+          <a:lstStyle/>
+          <a:p>
+            <a:pPr algn="ctr"/>
+            <a:r>
+              <a:rPr sz="1100" b="1">
+                <a:solidFill>
+                  <a:srgbClr val="003F7E"/>
+                </a:solidFill>
+                <a:latin typeface="游ゴシック"/>
+                <a:ea typeface="游ゴシック"/>
+                <a:cs typeface="游ゴシック"/>
+              </a:rPr>
+              <a:t>EG濃縮系</a:t>
+            </a:r>
+          </a:p>
+          <a:p>
+            <a:pPr algn="ctr"/>
+            <a:r>
+              <a:rPr sz="950" b="0">
+                <a:solidFill>
+                  <a:srgbClr val="000000"/>
+                </a:solidFill>
+                <a:latin typeface="游ゴシック"/>
+                <a:ea typeface="游ゴシック"/>
+                <a:cs typeface="游ゴシック"/>
+              </a:rPr>
+              <a:t>大半パージ</a:t>
+            </a:r>
+          </a:p>
+        </p:txBody>
+      </p:sp>
+      <p:sp>
+        <p:nvSpPr>
+          <p:cNvPr id="6" name="Rounded Rectangle 5"/>
+          <p:cNvSpPr/>
+          <p:nvPr/>
+        </p:nvSpPr>
+        <p:spPr>
+          <a:xfrm>
+            <a:off x="5417820" y="2194560"/>
+            <a:ext cx="1371600" cy="1737360"/>
+          </a:xfrm>
+          <a:prstGeom prst="roundRect">
+            <a:avLst/>
+          </a:prstGeom>
+          <a:solidFill>
+            <a:srgbClr val="EBEFF2"/>
+          </a:solidFill>
+          <a:ln w="13970">
+            <a:solidFill>
+              <a:srgbClr val="005BAB"/>
+            </a:solidFill>
+          </a:ln>
+          <a:effectLst/>
+        </p:spPr>
+        <p:style>
+          <a:lnRef idx="1">
+            <a:schemeClr val="accent1"/>
+          </a:lnRef>
+          <a:fillRef idx="3">
+            <a:schemeClr val="accent1"/>
+          </a:fillRef>
+          <a:effectRef idx="2">
+            <a:schemeClr val="accent1"/>
+          </a:effectRef>
+          <a:fontRef idx="minor">
+            <a:schemeClr val="lt1"/>
+          </a:fontRef>
+        </p:style>
+        <p:txBody>
+          <a:bodyPr rtlCol="0" anchor="ctr" wrap="square" lIns="54864" rIns="54864" tIns="36576" bIns="36576"/>
+          <a:lstStyle/>
+          <a:p>
+            <a:pPr algn="ctr"/>
+            <a:r>
+              <a:rPr sz="1100" b="1">
+                <a:solidFill>
+                  <a:srgbClr val="003F7E"/>
+                </a:solidFill>
+                <a:latin typeface="游ゴシック"/>
+                <a:ea typeface="游ゴシック"/>
+                <a:cs typeface="游ゴシック"/>
+              </a:rPr>
+              <a:t>EG脱水系</a:t>
+            </a:r>
+          </a:p>
+          <a:p>
+            <a:pPr algn="ctr"/>
+            <a:r>
+              <a:rPr sz="950" b="0">
+                <a:solidFill>
+                  <a:srgbClr val="000000"/>
+                </a:solidFill>
+                <a:latin typeface="游ゴシック"/>
+                <a:ea typeface="游ゴシック"/>
+                <a:cs typeface="游ゴシック"/>
+              </a:rPr>
+              <a:t>縮合が進む</a:t>
+            </a:r>
+          </a:p>
+        </p:txBody>
+      </p:sp>
+      <p:sp>
+        <p:nvSpPr>
+          <p:cNvPr id="7" name="Rounded Rectangle 6"/>
+          <p:cNvSpPr/>
+          <p:nvPr/>
+        </p:nvSpPr>
+        <p:spPr>
+          <a:xfrm>
+            <a:off x="7071360" y="2194560"/>
+            <a:ext cx="1371600" cy="1737360"/>
+          </a:xfrm>
+          <a:prstGeom prst="roundRect">
+            <a:avLst/>
+          </a:prstGeom>
+          <a:solidFill>
+            <a:srgbClr val="EBEFF2"/>
+          </a:solidFill>
+          <a:ln w="13970">
+            <a:solidFill>
+              <a:srgbClr val="005BAB"/>
+            </a:solidFill>
+          </a:ln>
+          <a:effectLst/>
+        </p:spPr>
+        <p:style>
+          <a:lnRef idx="1">
+            <a:schemeClr val="accent1"/>
+          </a:lnRef>
+          <a:fillRef idx="3">
+            <a:schemeClr val="accent1"/>
+          </a:fillRef>
+          <a:effectRef idx="2">
+            <a:schemeClr val="accent1"/>
+          </a:effectRef>
+          <a:fontRef idx="minor">
+            <a:schemeClr val="lt1"/>
+          </a:fontRef>
+        </p:style>
+        <p:txBody>
+          <a:bodyPr rtlCol="0" anchor="ctr" wrap="square" lIns="54864" rIns="54864" tIns="36576" bIns="36576"/>
+          <a:lstStyle/>
+          <a:p>
+            <a:pPr algn="ctr"/>
+            <a:r>
+              <a:rPr sz="1100" b="1">
+                <a:solidFill>
+                  <a:srgbClr val="003F7E"/>
+                </a:solidFill>
+                <a:latin typeface="游ゴシック"/>
+                <a:ea typeface="游ゴシック"/>
+                <a:cs typeface="游ゴシック"/>
+              </a:rPr>
+              <a:t>MEG精製系</a:t>
+            </a:r>
+          </a:p>
+          <a:p>
+            <a:pPr algn="ctr"/>
+            <a:r>
+              <a:rPr sz="950" b="0">
+                <a:solidFill>
+                  <a:srgbClr val="000000"/>
+                </a:solidFill>
+                <a:latin typeface="游ゴシック"/>
+                <a:ea typeface="游ゴシック"/>
+                <a:cs typeface="游ゴシック"/>
+              </a:rPr>
+              <a:t>通過点</a:t>
+            </a:r>
+          </a:p>
+        </p:txBody>
+      </p:sp>
+      <p:sp>
+        <p:nvSpPr>
+          <p:cNvPr id="8" name="Rounded Rectangle 7"/>
+          <p:cNvSpPr/>
+          <p:nvPr/>
+        </p:nvSpPr>
+        <p:spPr>
+          <a:xfrm>
+            <a:off x="8724900" y="2194560"/>
+            <a:ext cx="1371600" cy="1737360"/>
+          </a:xfrm>
+          <a:prstGeom prst="roundRect">
+            <a:avLst/>
+          </a:prstGeom>
+          <a:solidFill>
+            <a:srgbClr val="EBEFF2"/>
+          </a:solidFill>
+          <a:ln w="13970">
+            <a:solidFill>
+              <a:srgbClr val="005BAB"/>
+            </a:solidFill>
+          </a:ln>
+          <a:effectLst/>
+        </p:spPr>
+        <p:style>
+          <a:lnRef idx="1">
+            <a:schemeClr val="accent1"/>
+          </a:lnRef>
+          <a:fillRef idx="3">
+            <a:schemeClr val="accent1"/>
+          </a:fillRef>
+          <a:effectRef idx="2">
+            <a:schemeClr val="accent1"/>
+          </a:effectRef>
+          <a:fontRef idx="minor">
+            <a:schemeClr val="lt1"/>
+          </a:fontRef>
+        </p:style>
+        <p:txBody>
+          <a:bodyPr rtlCol="0" anchor="ctr" wrap="square" lIns="54864" rIns="54864" tIns="36576" bIns="36576"/>
+          <a:lstStyle/>
+          <a:p>
+            <a:pPr algn="ctr"/>
+            <a:r>
+              <a:rPr sz="1100" b="1">
+                <a:solidFill>
+                  <a:srgbClr val="003F7E"/>
+                </a:solidFill>
+                <a:latin typeface="游ゴシック"/>
+                <a:ea typeface="游ゴシック"/>
+                <a:cs typeface="游ゴシック"/>
+              </a:rPr>
+              <a:t>DEG精製系</a:t>
+            </a:r>
+          </a:p>
+          <a:p>
+            <a:pPr algn="ctr"/>
+            <a:r>
+              <a:rPr sz="950" b="0">
+                <a:solidFill>
+                  <a:srgbClr val="000000"/>
+                </a:solidFill>
+                <a:latin typeface="游ゴシック"/>
+                <a:ea typeface="游ゴシック"/>
+                <a:cs typeface="游ゴシック"/>
+              </a:rPr>
+              <a:t>②前駆体生成</a:t>
+            </a:r>
+          </a:p>
+          <a:p>
+            <a:pPr algn="ctr"/>
+            <a:r>
+              <a:rPr sz="950" b="0">
+                <a:solidFill>
+                  <a:srgbClr val="000000"/>
+                </a:solidFill>
+                <a:latin typeface="游ゴシック"/>
+                <a:ea typeface="游ゴシック"/>
+                <a:cs typeface="游ゴシック"/>
+              </a:rPr>
+              <a:t>330nm</a:t>
+            </a:r>
+          </a:p>
+        </p:txBody>
+      </p:sp>
+      <p:sp>
+        <p:nvSpPr>
+          <p:cNvPr id="9" name="Rounded Rectangle 8"/>
+          <p:cNvSpPr/>
+          <p:nvPr/>
+        </p:nvSpPr>
+        <p:spPr>
+          <a:xfrm>
+            <a:off x="10378440" y="2194560"/>
+            <a:ext cx="1371600" cy="1737360"/>
+          </a:xfrm>
+          <a:prstGeom prst="roundRect">
+            <a:avLst/>
+          </a:prstGeom>
+          <a:solidFill>
+            <a:srgbClr val="FFF6E0"/>
+          </a:solidFill>
+          <a:ln w="13970">
+            <a:solidFill>
+              <a:srgbClr val="C07A00"/>
+            </a:solidFill>
+          </a:ln>
+          <a:effectLst/>
+        </p:spPr>
+        <p:style>
+          <a:lnRef idx="1">
+            <a:schemeClr val="accent1"/>
+          </a:lnRef>
+          <a:fillRef idx="3">
+            <a:schemeClr val="accent1"/>
+          </a:fillRef>
+          <a:effectRef idx="2">
+            <a:schemeClr val="accent1"/>
+          </a:effectRef>
+          <a:fontRef idx="minor">
+            <a:schemeClr val="lt1"/>
+          </a:fontRef>
+        </p:style>
+        <p:txBody>
+          <a:bodyPr rtlCol="0" anchor="ctr" wrap="square" lIns="54864" rIns="54864" tIns="36576" bIns="36576"/>
+          <a:lstStyle/>
+          <a:p>
+            <a:pPr algn="ctr"/>
+            <a:r>
+              <a:rPr sz="1100" b="1">
+                <a:solidFill>
+                  <a:srgbClr val="C07A00"/>
+                </a:solidFill>
+                <a:latin typeface="游ゴシック"/>
+                <a:ea typeface="游ゴシック"/>
+                <a:cs typeface="游ゴシック"/>
+              </a:rPr>
+              <a:t>製品タンク</a:t>
+            </a:r>
+          </a:p>
+          <a:p>
+            <a:pPr algn="ctr"/>
+            <a:r>
+              <a:rPr sz="950" b="0">
+                <a:solidFill>
+                  <a:srgbClr val="000000"/>
+                </a:solidFill>
+                <a:latin typeface="游ゴシック"/>
+                <a:ea typeface="游ゴシック"/>
+                <a:cs typeface="游ゴシック"/>
+              </a:rPr>
+              <a:t>③熟成→450nm</a:t>
+            </a:r>
+          </a:p>
+        </p:txBody>
+      </p:sp>
+      <p:sp>
+        <p:nvSpPr>
+          <p:cNvPr id="10" name="Right Arrow 9"/>
+          <p:cNvSpPr/>
+          <p:nvPr/>
+        </p:nvSpPr>
+        <p:spPr>
+          <a:xfrm>
+            <a:off x="1847088" y="2944368"/>
+            <a:ext cx="245363" cy="237744"/>
+          </a:xfrm>
+          <a:prstGeom prst="rightArrow">
+            <a:avLst/>
+          </a:prstGeom>
+          <a:solidFill>
+            <a:srgbClr val="005BAB"/>
+          </a:solidFill>
+          <a:ln>
+            <a:noFill/>
+          </a:ln>
+          <a:effectLst/>
+        </p:spPr>
+        <p:style>
+          <a:lnRef idx="1">
+            <a:schemeClr val="accent1"/>
+          </a:lnRef>
+          <a:fillRef idx="3">
+            <a:schemeClr val="accent1"/>
+          </a:fillRef>
+          <a:effectRef idx="2">
+            <a:schemeClr val="accent1"/>
+          </a:effectRef>
+          <a:fontRef idx="minor">
+            <a:schemeClr val="lt1"/>
+          </a:fontRef>
+        </p:style>
+        <p:txBody>
+          <a:bodyPr rtlCol="0" anchor="ctr"/>
+          <a:lstStyle/>
+          <a:p>
+            <a:pPr algn="ctr"/>
+          </a:p>
+        </p:txBody>
+      </p:sp>
+      <p:sp>
+        <p:nvSpPr>
+          <p:cNvPr id="11" name="Right Arrow 10"/>
+          <p:cNvSpPr/>
+          <p:nvPr/>
+        </p:nvSpPr>
+        <p:spPr>
+          <a:xfrm>
+            <a:off x="3500628" y="2944368"/>
+            <a:ext cx="245363" cy="237744"/>
+          </a:xfrm>
+          <a:prstGeom prst="rightArrow">
+            <a:avLst/>
+          </a:prstGeom>
+          <a:solidFill>
+            <a:srgbClr val="005BAB"/>
+          </a:solidFill>
+          <a:ln>
+            <a:noFill/>
+          </a:ln>
+          <a:effectLst/>
+        </p:spPr>
+        <p:style>
+          <a:lnRef idx="1">
+            <a:schemeClr val="accent1"/>
+          </a:lnRef>
+          <a:fillRef idx="3">
+            <a:schemeClr val="accent1"/>
+          </a:fillRef>
+          <a:effectRef idx="2">
+            <a:schemeClr val="accent1"/>
+          </a:effectRef>
+          <a:fontRef idx="minor">
+            <a:schemeClr val="lt1"/>
+          </a:fontRef>
+        </p:style>
+        <p:txBody>
+          <a:bodyPr rtlCol="0" anchor="ctr"/>
+          <a:lstStyle/>
+          <a:p>
+            <a:pPr algn="ctr"/>
+          </a:p>
+        </p:txBody>
+      </p:sp>
+      <p:sp>
+        <p:nvSpPr>
+          <p:cNvPr id="12" name="Right Arrow 11"/>
+          <p:cNvSpPr/>
+          <p:nvPr/>
+        </p:nvSpPr>
+        <p:spPr>
+          <a:xfrm>
+            <a:off x="5154168" y="2944368"/>
+            <a:ext cx="245363" cy="237744"/>
+          </a:xfrm>
+          <a:prstGeom prst="rightArrow">
+            <a:avLst/>
+          </a:prstGeom>
+          <a:solidFill>
+            <a:srgbClr val="005BAB"/>
+          </a:solidFill>
+          <a:ln>
+            <a:noFill/>
+          </a:ln>
+          <a:effectLst/>
+        </p:spPr>
+        <p:style>
+          <a:lnRef idx="1">
+            <a:schemeClr val="accent1"/>
+          </a:lnRef>
+          <a:fillRef idx="3">
+            <a:schemeClr val="accent1"/>
+          </a:fillRef>
+          <a:effectRef idx="2">
+            <a:schemeClr val="accent1"/>
+          </a:effectRef>
+          <a:fontRef idx="minor">
+            <a:schemeClr val="lt1"/>
+          </a:fontRef>
+        </p:style>
+        <p:txBody>
+          <a:bodyPr rtlCol="0" anchor="ctr"/>
+          <a:lstStyle/>
+          <a:p>
+            <a:pPr algn="ctr"/>
+          </a:p>
+        </p:txBody>
+      </p:sp>
+      <p:sp>
+        <p:nvSpPr>
+          <p:cNvPr id="13" name="Right Arrow 12"/>
+          <p:cNvSpPr/>
+          <p:nvPr/>
+        </p:nvSpPr>
+        <p:spPr>
+          <a:xfrm>
+            <a:off x="6807708" y="2944368"/>
+            <a:ext cx="245363" cy="237744"/>
+          </a:xfrm>
+          <a:prstGeom prst="rightArrow">
+            <a:avLst/>
+          </a:prstGeom>
+          <a:solidFill>
+            <a:srgbClr val="005BAB"/>
+          </a:solidFill>
+          <a:ln>
+            <a:noFill/>
+          </a:ln>
+          <a:effectLst/>
+        </p:spPr>
+        <p:style>
+          <a:lnRef idx="1">
+            <a:schemeClr val="accent1"/>
+          </a:lnRef>
+          <a:fillRef idx="3">
+            <a:schemeClr val="accent1"/>
+          </a:fillRef>
+          <a:effectRef idx="2">
+            <a:schemeClr val="accent1"/>
+          </a:effectRef>
+          <a:fontRef idx="minor">
+            <a:schemeClr val="lt1"/>
+          </a:fontRef>
+        </p:style>
+        <p:txBody>
+          <a:bodyPr rtlCol="0" anchor="ctr"/>
+          <a:lstStyle/>
+          <a:p>
+            <a:pPr algn="ctr"/>
+          </a:p>
+        </p:txBody>
+      </p:sp>
+      <p:sp>
+        <p:nvSpPr>
+          <p:cNvPr id="14" name="Right Arrow 13"/>
+          <p:cNvSpPr/>
+          <p:nvPr/>
+        </p:nvSpPr>
+        <p:spPr>
+          <a:xfrm>
+            <a:off x="8461248" y="2944368"/>
+            <a:ext cx="245363" cy="237744"/>
+          </a:xfrm>
+          <a:prstGeom prst="rightArrow">
+            <a:avLst/>
+          </a:prstGeom>
+          <a:solidFill>
+            <a:srgbClr val="005BAB"/>
+          </a:solidFill>
+          <a:ln>
+            <a:noFill/>
+          </a:ln>
+          <a:effectLst/>
+        </p:spPr>
+        <p:style>
+          <a:lnRef idx="1">
+            <a:schemeClr val="accent1"/>
+          </a:lnRef>
+          <a:fillRef idx="3">
+            <a:schemeClr val="accent1"/>
+          </a:fillRef>
+          <a:effectRef idx="2">
+            <a:schemeClr val="accent1"/>
+          </a:effectRef>
+          <a:fontRef idx="minor">
+            <a:schemeClr val="lt1"/>
+          </a:fontRef>
+        </p:style>
+        <p:txBody>
+          <a:bodyPr rtlCol="0" anchor="ctr"/>
+          <a:lstStyle/>
+          <a:p>
+            <a:pPr algn="ctr"/>
+          </a:p>
+        </p:txBody>
+      </p:sp>
+      <p:sp>
+        <p:nvSpPr>
+          <p:cNvPr id="15" name="Right Arrow 14"/>
+          <p:cNvSpPr/>
+          <p:nvPr/>
+        </p:nvSpPr>
+        <p:spPr>
+          <a:xfrm>
+            <a:off x="10114788" y="2944368"/>
+            <a:ext cx="245363" cy="237744"/>
+          </a:xfrm>
+          <a:prstGeom prst="rightArrow">
+            <a:avLst/>
+          </a:prstGeom>
+          <a:solidFill>
+            <a:srgbClr val="005BAB"/>
+          </a:solidFill>
+          <a:ln>
+            <a:noFill/>
+          </a:ln>
+          <a:effectLst/>
+        </p:spPr>
+        <p:style>
+          <a:lnRef idx="1">
+            <a:schemeClr val="accent1"/>
+          </a:lnRef>
+          <a:fillRef idx="3">
+            <a:schemeClr val="accent1"/>
+          </a:fillRef>
+          <a:effectRef idx="2">
+            <a:schemeClr val="accent1"/>
+          </a:effectRef>
+          <a:fontRef idx="minor">
+            <a:schemeClr val="lt1"/>
+          </a:fontRef>
+        </p:style>
+        <p:txBody>
+          <a:bodyPr rtlCol="0" anchor="ctr"/>
+          <a:lstStyle/>
+          <a:p>
+            <a:pPr algn="ctr"/>
+          </a:p>
+        </p:txBody>
+      </p:sp>
+      <p:sp>
+        <p:nvSpPr>
+          <p:cNvPr id="16" name="Rounded Rectangle 15"/>
+          <p:cNvSpPr/>
+          <p:nvPr/>
+        </p:nvSpPr>
+        <p:spPr>
+          <a:xfrm>
+            <a:off x="457200" y="4251960"/>
+            <a:ext cx="11292840" cy="731520"/>
+          </a:xfrm>
+          <a:prstGeom prst="roundRect">
+            <a:avLst/>
+          </a:prstGeom>
+          <a:solidFill>
+            <a:srgbClr val="F5F5F5"/>
+          </a:solidFill>
+          <a:ln w="12700">
+            <a:solidFill>
+              <a:srgbClr val="C9D2D8"/>
+            </a:solidFill>
+          </a:ln>
+          <a:effectLst/>
+        </p:spPr>
+        <p:style>
+          <a:lnRef idx="1">
+            <a:schemeClr val="accent1"/>
+          </a:lnRef>
+          <a:fillRef idx="3">
+            <a:schemeClr val="accent1"/>
+          </a:fillRef>
+          <a:effectRef idx="2">
+            <a:schemeClr val="accent1"/>
+          </a:effectRef>
+          <a:fontRef idx="minor">
+            <a:schemeClr val="lt1"/>
+          </a:fontRef>
+        </p:style>
+        <p:txBody>
+          <a:bodyPr rtlCol="0" anchor="ctr" wrap="square" lIns="109728" rIns="73152"/>
+          <a:lstStyle/>
+          <a:p>
+            <a:pPr algn="ctr"/>
+            <a:r>
+              <a:rPr sz="1150" b="1">
+                <a:solidFill>
+                  <a:srgbClr val="000000"/>
+                </a:solidFill>
+                <a:latin typeface="游ゴシック"/>
+                <a:ea typeface="游ゴシック"/>
+                <a:cs typeface="游ゴシック"/>
+              </a:rPr>
+              <a:t>酸素があると前駆体が有機酸へ酸化され縮合が進みにくい：窒素タンクで進み、大気接触（ドラム・SP）で止まる。</a:t>
+            </a:r>
+          </a:p>
+        </p:txBody>
+      </p:sp>
+      <p:sp>
+        <p:nvSpPr>
+          <p:cNvPr id="17" name="TextBox 16"/>
           <p:cNvSpPr txBox="1"/>
           <p:nvPr/>
         </p:nvSpPr>
         <p:spPr>
           <a:xfrm>
-            <a:off x="548640" y="5212080"/>
-            <a:ext cx="11064240" cy="1097280"/>
+            <a:off x="502920" y="5120640"/>
+            <a:ext cx="11109960" cy="1097280"/>
           </a:xfrm>
           <a:prstGeom prst="rect">
             <a:avLst/>
@@ -17308,7 +18741,7 @@
                 <a:ea typeface="游ゴシック"/>
                 <a:cs typeface="游ゴシック"/>
               </a:rPr>
-              <a:t>工程ごとの事実（運転・解放・RD）／文献・社外知見／一般原理の切り分けは「事実整理（工程別グリッド）」に整理。</a:t>
+              <a:t>工程ごとの事実（運転・開放・RD）と一般原理の切り分けは「事実整理（工程別グリッド）」に整理。</a:t>
             </a:r>
           </a:p>
         </p:txBody>
@@ -17347,9 +18780,9 @@
           <a:lstStyle/>
           <a:p>
             <a:r>
-              <a:rPr sz="2200" b="1">
+              <a:rPr sz="2400" b="1">
                 <a:solidFill>
-                  <a:srgbClr val="003F7E"/>
+                  <a:srgbClr val="000000"/>
                 </a:solidFill>
                 <a:latin typeface="游ゴシック"/>
                 <a:ea typeface="游ゴシック"/>
@@ -17716,7 +19149,7 @@
                           <a:ea typeface="游ゴシック"/>
                           <a:cs typeface="游ゴシック"/>
                         </a:rPr>
-                        <a:t>収支上は大半パージ・一部下流と推定（解放・RDの裏付けなし＝確度低）。</a:t>
+                        <a:t>大半はパージされ、一部が下流へ持ち込まれ得る。</a:t>
                       </a:r>
                     </a:p>
                   </a:txBody>
@@ -17791,7 +19224,7 @@
                           <a:ea typeface="游ゴシック"/>
                           <a:cs typeface="游ゴシック"/>
                         </a:rPr>
-                        <a:t>低水分が縮合を後押し。重質化し得る形（原理上）で下流へ運ばれる。</a:t>
+                        <a:t>アルデヒドが多い条件では、ここで縮合が進み、重い形で下流へ運ばれ得る。</a:t>
                       </a:r>
                     </a:p>
                   </a:txBody>
@@ -17866,7 +19299,7 @@
                           <a:ea typeface="游ゴシック"/>
                           <a:cs typeface="游ゴシック"/>
                         </a:rPr>
-                        <a:t>活性金属なし＝着色の生成場でない。C-1502の見かけ生成は循環由来の通過点（循環解釈は収支依存で要追検証）。</a:t>
+                        <a:t>活性金属がなく、着色の生成場ではない。C-1502の見かけの生成は循環由来で通過点（要追検証）。</a:t>
                       </a:r>
                     </a:p>
                   </a:txBody>
@@ -17941,7 +19374,7 @@
                           <a:ea typeface="游ゴシック"/>
                           <a:cs typeface="游ゴシック"/>
                         </a:rPr>
-                        <a:t>前駆体が生成する場。鉄サビ・付着物は450nmの主因でない（局所380nm）。</a:t>
+                        <a:t>前駆体が生成する場。鉄サビ・付着物は450nmの主因ではない（局所の380nm）。</a:t>
                       </a:r>
                     </a:p>
                   </a:txBody>
@@ -18016,7 +19449,7 @@
                           <a:ea typeface="游ゴシック"/>
                           <a:cs typeface="游ゴシック"/>
                         </a:rPr>
-                        <a:t>着色が成長＝熟成の場。窒素で進行・大気で抑制。</a:t>
+                        <a:t>着色が成長する＝熟成の場。窒素で進み、大気で止まる。</a:t>
                       </a:r>
                     </a:p>
                   </a:txBody>
@@ -18065,9 +19498,9 @@
           <a:lstStyle/>
           <a:p>
             <a:r>
-              <a:rPr sz="2200" b="1">
+              <a:rPr sz="2400" b="1">
                 <a:solidFill>
-                  <a:srgbClr val="003F7E"/>
+                  <a:srgbClr val="000000"/>
                 </a:solidFill>
                 <a:latin typeface="游ゴシック"/>
                 <a:ea typeface="游ゴシック"/>
@@ -18086,8 +19519,8 @@
         </p:nvSpPr>
         <p:spPr>
           <a:xfrm>
-            <a:off x="548640" y="1325880"/>
-            <a:ext cx="11064240" cy="457200"/>
+            <a:off x="548640" y="1280160"/>
+            <a:ext cx="11064240" cy="731520"/>
           </a:xfrm>
           <a:prstGeom prst="rect">
             <a:avLst/>
@@ -18109,7 +19542,7 @@
               </a:spcAft>
             </a:pPr>
             <a:r>
-              <a:rPr sz="1250" b="0">
+              <a:rPr sz="1300" b="0">
                 <a:solidFill>
                   <a:srgbClr val="666666"/>
                 </a:solidFill>
@@ -18117,7 +19550,7 @@
                 <a:ea typeface="游ゴシック"/>
                 <a:cs typeface="游ゴシック"/>
               </a:rPr>
-              <a:t>過去にもアルデヒドが高い時期はあったが、今回は反応させてしまう条件がそろった。</a:t>
+              <a:t>脱水以降の塔は元々水分が少なく、アルデヒドが多いと縮合が進みやすい。脱水のプロセスを変えたわけではなく、今回はアルデヒドが多かったことが引き金で、塩基条件とDEG特有の事情が重なった。</a:t>
             </a:r>
           </a:p>
         </p:txBody>
@@ -18130,8 +19563,8 @@
         </p:nvSpPr>
         <p:spPr>
           <a:xfrm>
-            <a:off x="548640" y="1874519"/>
-            <a:ext cx="11064240" cy="960120"/>
+            <a:off x="548640" y="2194560"/>
+            <a:ext cx="11064240" cy="1143000"/>
           </a:xfrm>
           <a:prstGeom prst="roundRect">
             <a:avLst/>
@@ -18161,12 +19594,12 @@
           </a:fontRef>
         </p:style>
         <p:txBody>
-          <a:bodyPr rtlCol="0" anchor="ctr" wrap="square" lIns="128016"/>
+          <a:bodyPr rtlCol="0" anchor="ctr" wrap="square" lIns="146304" rIns="109728"/>
           <a:lstStyle/>
           <a:p>
             <a:pPr algn="ctr"/>
             <a:r>
-              <a:rPr sz="1300" b="1">
+              <a:rPr sz="1450" b="1">
                 <a:solidFill>
                   <a:srgbClr val="003F7E"/>
                 </a:solidFill>
@@ -18174,10 +19607,10 @@
                 <a:ea typeface="游ゴシック"/>
                 <a:cs typeface="游ゴシック"/>
               </a:rPr>
-              <a:t>【アルデヒドが多かった（必要条件）】 </a:t>
-            </a:r>
-            <a:r>
-              <a:rPr sz="1150">
+              <a:t>【アルデヒドが過去最大級に多かった（引き金）】 </a:t>
+            </a:r>
+            <a:r>
+              <a:rPr sz="1300">
                 <a:solidFill>
                   <a:srgbClr val="222222"/>
                 </a:solidFill>
@@ -18185,12 +19618,12 @@
                 <a:ea typeface="游ゴシック"/>
                 <a:cs typeface="游ゴシック"/>
               </a:rPr>
-              <a:t>触媒選択性低下でA-ALD・F-ALDが増加（A-ALD/EO=0.78kg/t、過去実績の上位）。種となるアルデヒドの絶対量が多かった。</a:t>
-            </a:r>
-          </a:p>
-          <a:p>
-            <a:r>
-              <a:rPr sz="1150" b="1">
+              <a:t>触媒選択性の低下でA-ALD・F-ALDが増加（原料EO中A-ALD/EO=0.78kg/t、過去実績の上位）。種となるアルデヒドの絶対量が多かった。</a:t>
+            </a:r>
+          </a:p>
+          <a:p>
+            <a:r>
+              <a:rPr sz="1300" b="1">
                 <a:solidFill>
                   <a:srgbClr val="005BAB"/>
                 </a:solidFill>
@@ -18211,8 +19644,8 @@
         </p:nvSpPr>
         <p:spPr>
           <a:xfrm>
-            <a:off x="548640" y="2935224"/>
-            <a:ext cx="11064240" cy="960120"/>
+            <a:off x="548640" y="3456432"/>
+            <a:ext cx="11064240" cy="1143000"/>
           </a:xfrm>
           <a:prstGeom prst="roundRect">
             <a:avLst/>
@@ -18242,12 +19675,12 @@
           </a:fontRef>
         </p:style>
         <p:txBody>
-          <a:bodyPr rtlCol="0" anchor="ctr" wrap="square" lIns="128016"/>
+          <a:bodyPr rtlCol="0" anchor="ctr" wrap="square" lIns="146304" rIns="109728"/>
           <a:lstStyle/>
           <a:p>
             <a:pPr algn="ctr"/>
             <a:r>
-              <a:rPr sz="1300" b="1">
+              <a:rPr sz="1450" b="1">
                 <a:solidFill>
                   <a:srgbClr val="003F7E"/>
                 </a:solidFill>
@@ -18255,10 +19688,10 @@
                 <a:ea typeface="游ゴシック"/>
                 <a:cs typeface="游ゴシック"/>
               </a:rPr>
-              <a:t>【水分が少ない条件だった（促進）】 </a:t>
-            </a:r>
-            <a:r>
-              <a:rPr sz="1150">
+              <a:t>【塩基条件（苛性ソーダ）が縮合を後押しした（促進）】 </a:t>
+            </a:r>
+            <a:r>
+              <a:rPr sz="1300">
                 <a:solidFill>
                   <a:srgbClr val="222222"/>
                 </a:solidFill>
@@ -18266,12 +19699,12 @@
                 <a:ea typeface="游ゴシック"/>
                 <a:cs typeface="游ゴシック"/>
               </a:rPr>
-              <a:t>脱水・縮合は水があると進みにくい平衡反応。脱水塔ボトムが低水分で縮合が進みやすかった。</a:t>
-            </a:r>
-          </a:p>
-          <a:p>
-            <a:r>
-              <a:rPr sz="1150" b="1">
+              <a:t>NaOHの塩基がアルドール縮合を促進する側に働いた（NaOHからリン酸Naへ切替で330nmが低下した実績と整合）。</a:t>
+            </a:r>
+          </a:p>
+          <a:p>
+            <a:r>
+              <a:rPr sz="1300" b="1">
                 <a:solidFill>
                   <a:srgbClr val="005BAB"/>
                 </a:solidFill>
@@ -18279,7 +19712,7 @@
                 <a:ea typeface="游ゴシック"/>
                 <a:cs typeface="游ゴシック"/>
               </a:rPr>
-              <a:t>→ 水分管理で確認</a:t>
+              <a:t>→ スタートアップ時はNaOH非投入</a:t>
             </a:r>
           </a:p>
         </p:txBody>
@@ -18292,8 +19725,8 @@
         </p:nvSpPr>
         <p:spPr>
           <a:xfrm>
-            <a:off x="548640" y="3995928"/>
-            <a:ext cx="11064240" cy="960120"/>
+            <a:off x="548640" y="4718304"/>
+            <a:ext cx="11064240" cy="1143000"/>
           </a:xfrm>
           <a:prstGeom prst="roundRect">
             <a:avLst/>
@@ -18323,12 +19756,12 @@
           </a:fontRef>
         </p:style>
         <p:txBody>
-          <a:bodyPr rtlCol="0" anchor="ctr" wrap="square" lIns="128016"/>
+          <a:bodyPr rtlCol="0" anchor="ctr" wrap="square" lIns="146304" rIns="109728"/>
           <a:lstStyle/>
           <a:p>
             <a:pPr algn="ctr"/>
             <a:r>
-              <a:rPr sz="1300" b="1">
+              <a:rPr sz="1450" b="1">
                 <a:solidFill>
                   <a:srgbClr val="003F7E"/>
                 </a:solidFill>
@@ -18336,10 +19769,10 @@
                 <a:ea typeface="游ゴシック"/>
                 <a:cs typeface="游ゴシック"/>
               </a:rPr>
-              <a:t>【塩基条件（苛性ソーダ）が後押し（促進）】 </a:t>
-            </a:r>
-            <a:r>
-              <a:rPr sz="1150">
+              <a:t>【DEG留分には樹脂（IER）が無い（DEG特有の事情）】 </a:t>
+            </a:r>
+            <a:r>
+              <a:rPr sz="1300">
                 <a:solidFill>
                   <a:srgbClr val="222222"/>
                 </a:solidFill>
@@ -18347,12 +19780,12 @@
                 <a:ea typeface="游ゴシック"/>
                 <a:cs typeface="游ゴシック"/>
               </a:rPr>
-              <a:t>NaOHの塩基がアルドール縮合を促進する側に働いた（NaOH→リン酸Na切替で330nm低下と整合）。</a:t>
-            </a:r>
-          </a:p>
-          <a:p>
-            <a:r>
-              <a:rPr sz="1150" b="1">
+              <a:t>MEG・TEGはイオン交換樹脂で前駆体を除去して製品を安定化できるが、DEG留分には樹脂が無く、前駆体がそのまま製品に残る。</a:t>
+            </a:r>
+          </a:p>
+          <a:p>
+            <a:r>
+              <a:rPr sz="1300" b="1">
                 <a:solidFill>
                   <a:srgbClr val="005BAB"/>
                 </a:solidFill>
@@ -18360,88 +19793,7 @@
                 <a:ea typeface="游ゴシック"/>
                 <a:cs typeface="游ゴシック"/>
               </a:rPr>
-              <a:t>→ SU時はNaOH非投入</a:t>
-            </a:r>
-          </a:p>
-        </p:txBody>
-      </p:sp>
-      <p:sp>
-        <p:nvSpPr>
-          <p:cNvPr id="7" name="Rounded Rectangle 6"/>
-          <p:cNvSpPr/>
-          <p:nvPr/>
-        </p:nvSpPr>
-        <p:spPr>
-          <a:xfrm>
-            <a:off x="548640" y="5056632"/>
-            <a:ext cx="11064240" cy="960120"/>
-          </a:xfrm>
-          <a:prstGeom prst="roundRect">
-            <a:avLst/>
-          </a:prstGeom>
-          <a:solidFill>
-            <a:srgbClr val="EBEFF2"/>
-          </a:solidFill>
-          <a:ln w="12700">
-            <a:solidFill>
-              <a:srgbClr val="C9D2D8"/>
-            </a:solidFill>
-          </a:ln>
-          <a:effectLst/>
-        </p:spPr>
-        <p:style>
-          <a:lnRef idx="1">
-            <a:schemeClr val="accent1"/>
-          </a:lnRef>
-          <a:fillRef idx="3">
-            <a:schemeClr val="accent1"/>
-          </a:fillRef>
-          <a:effectRef idx="2">
-            <a:schemeClr val="accent1"/>
-          </a:effectRef>
-          <a:fontRef idx="minor">
-            <a:schemeClr val="lt1"/>
-          </a:fontRef>
-        </p:style>
-        <p:txBody>
-          <a:bodyPr rtlCol="0" anchor="ctr" wrap="square" lIns="128016"/>
-          <a:lstStyle/>
-          <a:p>
-            <a:pPr algn="ctr"/>
-            <a:r>
-              <a:rPr sz="1300" b="1">
-                <a:solidFill>
-                  <a:srgbClr val="003F7E"/>
-                </a:solidFill>
-                <a:latin typeface="游ゴシック"/>
-                <a:ea typeface="游ゴシック"/>
-                <a:cs typeface="游ゴシック"/>
-              </a:rPr>
-              <a:t>【DEG留分には樹脂（IER）が無い（DEG特有・除去機構の欠如）】 </a:t>
-            </a:r>
-            <a:r>
-              <a:rPr sz="1150">
-                <a:solidFill>
-                  <a:srgbClr val="222222"/>
-                </a:solidFill>
-                <a:latin typeface="游ゴシック"/>
-                <a:ea typeface="游ゴシック"/>
-                <a:cs typeface="游ゴシック"/>
-              </a:rPr>
-              <a:t>MEG・TEGはイオン交換樹脂で前駆体を除去して製品を安定化できるが、DEG留分には樹脂が無く前駆体がそのまま製品に持ち込まれる。</a:t>
-            </a:r>
-          </a:p>
-          <a:p>
-            <a:r>
-              <a:rPr sz="1150" b="1">
-                <a:solidFill>
-                  <a:srgbClr val="005BAB"/>
-                </a:solidFill>
-                <a:latin typeface="游ゴシック"/>
-                <a:ea typeface="游ゴシック"/>
-                <a:cs typeface="游ゴシック"/>
-              </a:rPr>
-              <a:t>→ 出口でDEGラインIERを検討</a:t>
+              <a:t>→ 出口でDEGラインのIERを検討</a:t>
             </a:r>
           </a:p>
         </p:txBody>
@@ -18480,9 +19832,9 @@
           <a:lstStyle/>
           <a:p>
             <a:r>
-              <a:rPr sz="2200" b="1">
+              <a:rPr sz="2400" b="1">
                 <a:solidFill>
-                  <a:srgbClr val="003F7E"/>
+                  <a:srgbClr val="000000"/>
                 </a:solidFill>
                 <a:latin typeface="游ゴシック"/>
                 <a:ea typeface="游ゴシック"/>
@@ -18647,15 +19999,15 @@
           <a:p>
             <a:pPr algn="l"/>
             <a:r>
-              <a:rPr sz="1200" b="1">
+              <a:rPr sz="1250" b="1">
                 <a:solidFill>
-                  <a:srgbClr val="003F7E"/>
+                  <a:srgbClr val="000000"/>
                 </a:solidFill>
                 <a:latin typeface="游ゴシック"/>
                 <a:ea typeface="游ゴシック"/>
                 <a:cs typeface="游ゴシック"/>
               </a:rPr>
-              <a:t>→ 鉄サビ・付着物は色相（450nm）の主因でなく、寄与は局所380nm。実測で判断（金属が無くてもアルデヒドとpHで着色を説明できる）。洗浄は予防保全。</a:t>
+              <a:t>→ 鉄サビ・付着物は色相（450nm）の主因ではなく、寄与は局所の380nmにとどまる。保管試験・残液分析の実測で判断。付着物は洗浄して除去する。</a:t>
             </a:r>
           </a:p>
         </p:txBody>
@@ -18694,9 +20046,9 @@
           <a:lstStyle/>
           <a:p>
             <a:r>
-              <a:rPr sz="2200" b="1">
+              <a:rPr sz="2400" b="1">
                 <a:solidFill>
-                  <a:srgbClr val="003F7E"/>
+                  <a:srgbClr val="000000"/>
                 </a:solidFill>
                 <a:latin typeface="游ゴシック"/>
                 <a:ea typeface="游ゴシック"/>
@@ -18746,7 +20098,7 @@
                 <a:ea typeface="游ゴシック"/>
                 <a:cs typeface="游ゴシック"/>
               </a:rPr>
-              <a:t>開放は『推定メカニズムに基づき、縮合反応が起こり得る脱水塔以降に絞って当該機器を確認し、結果を仮説に沿って解釈する』順序で行う。機器を開けた結果から逆に範囲を決めるのではなく、技術→推定メカニズム→該当機器の確認→補足、の順とする。</a:t>
+              <a:t>今定修で開放・検査した箇所の結果を整理した。いずれも色相（450nm）の主因となる異常はなく、推定メカニズム（縮合は脱水塔以降で起こる）とも整合する。結果から範囲を決めたのではなく、確認結果を仮説に沿って位置づけている。</a:t>
             </a:r>
           </a:p>
         </p:txBody>
@@ -19211,9 +20563,9 @@
           <a:lstStyle/>
           <a:p>
             <a:r>
-              <a:rPr sz="2200" b="1">
+              <a:rPr sz="2400" b="1">
                 <a:solidFill>
-                  <a:srgbClr val="003F7E"/>
+                  <a:srgbClr val="000000"/>
                 </a:solidFill>
                 <a:latin typeface="游ゴシック"/>
                 <a:ea typeface="游ゴシック"/>
@@ -19810,9 +21162,9 @@
           <a:lstStyle/>
           <a:p>
             <a:r>
-              <a:rPr sz="2200" b="1">
+              <a:rPr sz="2400" b="1">
                 <a:solidFill>
-                  <a:srgbClr val="003F7E"/>
+                  <a:srgbClr val="000000"/>
                 </a:solidFill>
                 <a:latin typeface="游ゴシック"/>
                 <a:ea typeface="游ゴシック"/>
@@ -19850,11 +21202,11 @@
                 <a:spcPts val="0"/>
               </a:spcBef>
               <a:spcAft>
-                <a:spcPts val="1100"/>
+                <a:spcPts val="1200"/>
               </a:spcAft>
             </a:pPr>
             <a:r>
-              <a:rPr sz="1200" b="0">
+              <a:rPr sz="1300" b="0">
                 <a:solidFill>
                   <a:srgbClr val="222222"/>
                 </a:solidFill>
@@ -19871,11 +21223,11 @@
                 <a:spcPts val="0"/>
               </a:spcBef>
               <a:spcAft>
-                <a:spcPts val="1100"/>
+                <a:spcPts val="1200"/>
               </a:spcAft>
             </a:pPr>
             <a:r>
-              <a:rPr sz="1200" b="0">
+              <a:rPr sz="1300" b="0">
                 <a:solidFill>
                   <a:srgbClr val="222222"/>
                 </a:solidFill>
@@ -19892,11 +21244,11 @@
                 <a:spcPts val="0"/>
               </a:spcBef>
               <a:spcAft>
-                <a:spcPts val="1100"/>
+                <a:spcPts val="1200"/>
               </a:spcAft>
             </a:pPr>
             <a:r>
-              <a:rPr sz="1200" b="0">
+              <a:rPr sz="1300" b="0">
                 <a:solidFill>
                   <a:srgbClr val="222222"/>
                 </a:solidFill>
@@ -19913,11 +21265,11 @@
                 <a:spcPts val="0"/>
               </a:spcBef>
               <a:spcAft>
-                <a:spcPts val="1100"/>
+                <a:spcPts val="1200"/>
               </a:spcAft>
             </a:pPr>
             <a:r>
-              <a:rPr sz="1200" b="0">
+              <a:rPr sz="1300" b="0">
                 <a:solidFill>
                   <a:srgbClr val="222222"/>
                 </a:solidFill>
@@ -19934,11 +21286,11 @@
                 <a:spcPts val="0"/>
               </a:spcBef>
               <a:spcAft>
-                <a:spcPts val="1100"/>
+                <a:spcPts val="1200"/>
               </a:spcAft>
             </a:pPr>
             <a:r>
-              <a:rPr sz="1200" b="0">
+              <a:rPr sz="1300" b="0">
                 <a:solidFill>
                   <a:srgbClr val="222222"/>
                 </a:solidFill>
@@ -19955,11 +21307,11 @@
                 <a:spcPts val="0"/>
               </a:spcBef>
               <a:spcAft>
-                <a:spcPts val="1100"/>
+                <a:spcPts val="1200"/>
               </a:spcAft>
             </a:pPr>
             <a:r>
-              <a:rPr sz="1200" b="0">
+              <a:rPr sz="1300" b="0">
                 <a:solidFill>
                   <a:srgbClr val="222222"/>
                 </a:solidFill>
@@ -20030,9 +21382,9 @@
           <a:lstStyle/>
           <a:p>
             <a:r>
-              <a:rPr sz="2200" b="1">
+              <a:rPr sz="2400" b="1">
                 <a:solidFill>
-                  <a:srgbClr val="003F7E"/>
+                  <a:srgbClr val="000000"/>
                 </a:solidFill>
                 <a:latin typeface="游ゴシック"/>
                 <a:ea typeface="游ゴシック"/>
@@ -20547,15 +21899,15 @@
           <a:lstStyle/>
           <a:p>
             <a:r>
-              <a:rPr sz="2200" b="1">
+              <a:rPr sz="2400" b="1">
                 <a:solidFill>
-                  <a:srgbClr val="003F7E"/>
+                  <a:srgbClr val="000000"/>
                 </a:solidFill>
                 <a:latin typeface="游ゴシック"/>
                 <a:ea typeface="游ゴシック"/>
                 <a:cs typeface="游ゴシック"/>
               </a:rPr>
-              <a:t>出荷再開の判断（ご承認のお願い）</a:t>
+              <a:t>スタートアップに向けて（対応と進め方）</a:t>
             </a:r>
           </a:p>
         </p:txBody>
@@ -20604,20 +21956,20 @@
           <a:p>
             <a:pPr algn="ctr"/>
             <a:r>
-              <a:rPr sz="1350" b="1">
+              <a:rPr sz="1400" b="1">
                 <a:solidFill>
-                  <a:srgbClr val="003F7E"/>
+                  <a:srgbClr val="000000"/>
                 </a:solidFill>
                 <a:latin typeface="游ゴシック"/>
                 <a:ea typeface="游ゴシック"/>
                 <a:cs typeface="游ゴシック"/>
               </a:rPr>
-              <a:t>① まず出口実測で歯止め</a:t>
-            </a:r>
-          </a:p>
-          <a:p>
-            <a:r>
-              <a:rPr sz="1150">
+              <a:t>① 対応は整った</a:t>
+            </a:r>
+          </a:p>
+          <a:p>
+            <a:r>
+              <a:rPr sz="1200">
                 <a:solidFill>
                   <a:srgbClr val="222222"/>
                 </a:solidFill>
@@ -20625,7 +21977,7 @@
                 <a:ea typeface="游ゴシック"/>
                 <a:cs typeface="游ゴシック"/>
               </a:rPr>
-              <a:t>初期流動品は、全項目が規格内、かつタンク保管中のUV・色相が経時で不変であることを確認したうえでのみ出荷する。仮説の真偽に依らず、実測で歯止めをかける。</a:t>
+              <a:t>触媒交換（実施済）・設備洗浄（実施済）・運転条件（NaOH非投入／MEG塔温度を下げない／リン酸で緩和）。色相悪化の再発を抑える備えができた。</a:t>
             </a:r>
           </a:p>
         </p:txBody>
@@ -20674,20 +22026,20 @@
           <a:p>
             <a:pPr algn="ctr"/>
             <a:r>
-              <a:rPr sz="1350" b="1">
+              <a:rPr sz="1400" b="1">
                 <a:solidFill>
-                  <a:srgbClr val="003F7E"/>
+                  <a:srgbClr val="000000"/>
                 </a:solidFill>
                 <a:latin typeface="游ゴシック"/>
                 <a:ea typeface="游ゴシック"/>
                 <a:cs typeface="游ゴシック"/>
               </a:rPr>
-              <a:t>② それを支える対応</a:t>
-            </a:r>
-          </a:p>
-          <a:p>
-            <a:r>
-              <a:rPr sz="1150">
+              <a:t>② 出口実測で歯止めをかけながら進める</a:t>
+            </a:r>
+          </a:p>
+          <a:p>
+            <a:r>
+              <a:rPr sz="1200">
                 <a:solidFill>
                   <a:srgbClr val="222222"/>
                 </a:solidFill>
@@ -20695,7 +22047,7 @@
                 <a:ea typeface="游ゴシック"/>
                 <a:cs typeface="游ゴシック"/>
               </a:rPr>
-              <a:t>触媒交換（実施済）・設備洗浄・運転条件（NaOH非投入／温度を下げない／リン酸で緩和）。早期判定はUV450nm主・UV330補助。判定基準の具体値は本会議で確定。</a:t>
+              <a:t>初期流動品が全項目規格内、かつタンク保管中のUV・色相が経時で不変であることを確認しながら出荷を再開する。仮説の真偽に依らず実測で歯止め。判定基準の具体値は本会議で確定。</a:t>
             </a:r>
           </a:p>
         </p:txBody>
@@ -20744,9 +22096,9 @@
           <a:p>
             <a:pPr algn="ctr"/>
             <a:r>
-              <a:rPr sz="1350" b="1">
+              <a:rPr sz="1400" b="1">
                 <a:solidFill>
-                  <a:srgbClr val="003F7E"/>
+                  <a:srgbClr val="000000"/>
                 </a:solidFill>
                 <a:latin typeface="游ゴシック"/>
                 <a:ea typeface="游ゴシック"/>
@@ -20757,7 +22109,7 @@
           </a:p>
           <a:p>
             <a:r>
-              <a:rPr sz="1150">
+              <a:rPr sz="1200">
                 <a:solidFill>
                   <a:srgbClr val="222222"/>
                 </a:solidFill>
@@ -20814,19 +22166,1500 @@
           <a:p>
             <a:pPr algn="ctr"/>
             <a:r>
-              <a:rPr sz="1500" b="1">
+              <a:rPr sz="1550" b="1">
                 <a:solidFill>
-                  <a:srgbClr val="003F7E"/>
+                  <a:srgbClr val="000000"/>
                 </a:solidFill>
                 <a:latin typeface="游ゴシック"/>
                 <a:ea typeface="游ゴシック"/>
                 <a:cs typeface="游ゴシック"/>
               </a:rPr>
-              <a:t>上記の前提（出口実測での歯止め）で、製品DEGの出荷再開についてご承認をお願いします。</a:t>
-            </a:r>
-          </a:p>
-        </p:txBody>
-      </p:sp>
+              <a:t>上記の対応と出口実測の歯止めのもとで、プラントのスタートアップを進める。</a:t>
+            </a:r>
+          </a:p>
+        </p:txBody>
+      </p:sp>
+    </p:spTree>
+  </p:cSld>
+  <p:clrMapOvr>
+    <a:masterClrMapping/>
+  </p:clrMapOvr>
+</p:sld>
+</file>
+
+<file path=ppt/slides/slide23.xml><?xml version="1.0" encoding="utf-8"?>
+<p:sld xmlns:a="http://schemas.openxmlformats.org/drawingml/2006/main" xmlns:p="http://schemas.openxmlformats.org/presentationml/2006/main" xmlns:r="http://schemas.openxmlformats.org/officeDocument/2006/relationships">
+  <p:cSld>
+    <p:spTree>
+      <p:nvGrpSpPr>
+        <p:cNvPr id="1" name=""/>
+        <p:cNvGrpSpPr/>
+        <p:nvPr/>
+      </p:nvGrpSpPr>
+      <p:grpSpPr/>
+      <p:sp>
+        <p:nvSpPr>
+          <p:cNvPr id="2" name="Title 1"/>
+          <p:cNvSpPr>
+            <a:spLocks noGrp="1"/>
+          </p:cNvSpPr>
+          <p:nvPr>
+            <p:ph type="title"/>
+          </p:nvPr>
+        </p:nvSpPr>
+        <p:spPr/>
+        <p:txBody>
+          <a:bodyPr/>
+          <a:lstStyle/>
+          <a:p>
+            <a:r>
+              <a:rPr sz="2400" b="1">
+                <a:solidFill>
+                  <a:srgbClr val="000000"/>
+                </a:solidFill>
+                <a:latin typeface="游ゴシック"/>
+                <a:ea typeface="游ゴシック"/>
+                <a:cs typeface="游ゴシック"/>
+              </a:rPr>
+              <a:t>（参考）工程別グリッド</a:t>
+            </a:r>
+          </a:p>
+        </p:txBody>
+      </p:sp>
+      <p:sp>
+        <p:nvSpPr>
+          <p:cNvPr id="3" name="TextBox 2"/>
+          <p:cNvSpPr txBox="1"/>
+          <p:nvPr/>
+        </p:nvSpPr>
+        <p:spPr>
+          <a:xfrm>
+            <a:off x="320040" y="1170432"/>
+            <a:ext cx="11521440" cy="411480"/>
+          </a:xfrm>
+          <a:prstGeom prst="rect">
+            <a:avLst/>
+          </a:prstGeom>
+          <a:noFill/>
+        </p:spPr>
+        <p:txBody>
+          <a:bodyPr wrap="square">
+            <a:spAutoFit/>
+          </a:bodyPr>
+          <a:lstStyle/>
+          <a:p>
+            <a:pPr>
+              <a:spcBef>
+                <a:spcPts val="0"/>
+              </a:spcBef>
+              <a:spcAft>
+                <a:spcPts val="400"/>
+              </a:spcAft>
+            </a:pPr>
+            <a:r>
+              <a:rPr sz="1000" b="0">
+                <a:solidFill>
+                  <a:srgbClr val="666666"/>
+                </a:solidFill>
+                <a:latin typeface="游ゴシック"/>
+                <a:ea typeface="游ゴシック"/>
+                <a:cs typeface="游ゴシック"/>
+              </a:rPr>
+              <a:t>横＝工程／縦＝項目。空欄＝確実な情報なし（無理に埋めない）。◎○△＝裏付けの強さ。色＝緑：事実／灰：一般原理／青灰：小結論。</a:t>
+            </a:r>
+          </a:p>
+        </p:txBody>
+      </p:sp>
+      <p:graphicFrame>
+        <p:nvGraphicFramePr>
+          <p:cNvPr id="4" name="Table 3"/>
+          <p:cNvGraphicFramePr>
+            <a:graphicFrameLocks noGrp="1"/>
+          </p:cNvGraphicFramePr>
+          <p:nvPr/>
+        </p:nvGraphicFramePr>
+        <p:xfrm>
+          <a:off x="320040" y="1627632"/>
+          <a:ext cx="11521439" cy="4846320"/>
+        </p:xfrm>
+        <a:graphic>
+          <a:graphicData uri="http://schemas.openxmlformats.org/drawingml/2006/table">
+            <a:tbl>
+              <a:tblPr firstRow="1" bandRow="1">
+                <a:tableStyleId>{5C22544A-7EE6-4342-B048-85BDC9FD1C3A}</a:tableStyleId>
+              </a:tblPr>
+              <a:tblGrid>
+                <a:gridCol w="1371600"/>
+                <a:gridCol w="1449977"/>
+                <a:gridCol w="1449977"/>
+                <a:gridCol w="1449977"/>
+                <a:gridCol w="1449977"/>
+                <a:gridCol w="1449977"/>
+                <a:gridCol w="1449977"/>
+                <a:gridCol w="1449977"/>
+              </a:tblGrid>
+              <a:tr h="692331">
+                <a:tc>
+                  <a:txBody>
+                    <a:bodyPr/>
+                    <a:lstStyle/>
+                    <a:p>
+                      <a:r>
+                        <a:rPr sz="800" b="1">
+                          <a:solidFill>
+                            <a:srgbClr val="003F7E"/>
+                          </a:solidFill>
+                          <a:latin typeface="游ゴシック"/>
+                          <a:ea typeface="游ゴシック"/>
+                          <a:cs typeface="游ゴシック"/>
+                        </a:rPr>
+                        <a:t>項目</a:t>
+                      </a:r>
+                    </a:p>
+                  </a:txBody>
+                  <a:tcPr anchor="t" marL="27432" marR="18288" marT="18288" marB="18288">
+                    <a:solidFill>
+                      <a:srgbClr val="EBEFF2"/>
+                    </a:solidFill>
+                  </a:tcPr>
+                </a:tc>
+                <a:tc>
+                  <a:txBody>
+                    <a:bodyPr/>
+                    <a:lstStyle/>
+                    <a:p>
+                      <a:r>
+                        <a:rPr sz="750" b="1">
+                          <a:solidFill>
+                            <a:srgbClr val="003F7E"/>
+                          </a:solidFill>
+                          <a:latin typeface="游ゴシック"/>
+                          <a:ea typeface="游ゴシック"/>
+                          <a:cs typeface="游ゴシック"/>
+                        </a:rPr>
+                        <a:t>EO反応系 (R-1101)</a:t>
+                      </a:r>
+                    </a:p>
+                  </a:txBody>
+                  <a:tcPr anchor="t" marL="27432" marR="18288" marT="18288" marB="18288">
+                    <a:solidFill>
+                      <a:srgbClr val="D7E0E5"/>
+                    </a:solidFill>
+                  </a:tcPr>
+                </a:tc>
+                <a:tc>
+                  <a:txBody>
+                    <a:bodyPr/>
+                    <a:lstStyle/>
+                    <a:p>
+                      <a:r>
+                        <a:rPr sz="750" b="1">
+                          <a:solidFill>
+                            <a:srgbClr val="003F7E"/>
+                          </a:solidFill>
+                          <a:latin typeface="游ゴシック"/>
+                          <a:ea typeface="游ゴシック"/>
+                          <a:cs typeface="游ゴシック"/>
+                        </a:rPr>
+                        <a:t>EG反応系 (R-1401)</a:t>
+                      </a:r>
+                    </a:p>
+                  </a:txBody>
+                  <a:tcPr anchor="t" marL="27432" marR="18288" marT="18288" marB="18288">
+                    <a:solidFill>
+                      <a:srgbClr val="D7E0E5"/>
+                    </a:solidFill>
+                  </a:tcPr>
+                </a:tc>
+                <a:tc>
+                  <a:txBody>
+                    <a:bodyPr/>
+                    <a:lstStyle/>
+                    <a:p>
+                      <a:r>
+                        <a:rPr sz="750" b="1">
+                          <a:solidFill>
+                            <a:srgbClr val="003F7E"/>
+                          </a:solidFill>
+                          <a:latin typeface="游ゴシック"/>
+                          <a:ea typeface="游ゴシック"/>
+                          <a:cs typeface="游ゴシック"/>
+                        </a:rPr>
+                        <a:t>EG濃縮系</a:t>
+                      </a:r>
+                    </a:p>
+                  </a:txBody>
+                  <a:tcPr anchor="t" marL="27432" marR="18288" marT="18288" marB="18288">
+                    <a:solidFill>
+                      <a:srgbClr val="D7E0E5"/>
+                    </a:solidFill>
+                  </a:tcPr>
+                </a:tc>
+                <a:tc>
+                  <a:txBody>
+                    <a:bodyPr/>
+                    <a:lstStyle/>
+                    <a:p>
+                      <a:r>
+                        <a:rPr sz="750" b="1">
+                          <a:solidFill>
+                            <a:srgbClr val="003F7E"/>
+                          </a:solidFill>
+                          <a:latin typeface="游ゴシック"/>
+                          <a:ea typeface="游ゴシック"/>
+                          <a:cs typeface="游ゴシック"/>
+                        </a:rPr>
+                        <a:t>EG脱水系 (C-1404)</a:t>
+                      </a:r>
+                    </a:p>
+                  </a:txBody>
+                  <a:tcPr anchor="t" marL="27432" marR="18288" marT="18288" marB="18288">
+                    <a:solidFill>
+                      <a:srgbClr val="D7E0E5"/>
+                    </a:solidFill>
+                  </a:tcPr>
+                </a:tc>
+                <a:tc>
+                  <a:txBody>
+                    <a:bodyPr/>
+                    <a:lstStyle/>
+                    <a:p>
+                      <a:r>
+                        <a:rPr sz="750" b="1">
+                          <a:solidFill>
+                            <a:srgbClr val="003F7E"/>
+                          </a:solidFill>
+                          <a:latin typeface="游ゴシック"/>
+                          <a:ea typeface="游ゴシック"/>
+                          <a:cs typeface="游ゴシック"/>
+                        </a:rPr>
+                        <a:t>MEG精製系 (C-1501/1502)</a:t>
+                      </a:r>
+                    </a:p>
+                  </a:txBody>
+                  <a:tcPr anchor="t" marL="27432" marR="18288" marT="18288" marB="18288">
+                    <a:solidFill>
+                      <a:srgbClr val="D7E0E5"/>
+                    </a:solidFill>
+                  </a:tcPr>
+                </a:tc>
+                <a:tc>
+                  <a:txBody>
+                    <a:bodyPr/>
+                    <a:lstStyle/>
+                    <a:p>
+                      <a:r>
+                        <a:rPr sz="750" b="1">
+                          <a:solidFill>
+                            <a:srgbClr val="003F7E"/>
+                          </a:solidFill>
+                          <a:latin typeface="游ゴシック"/>
+                          <a:ea typeface="游ゴシック"/>
+                          <a:cs typeface="游ゴシック"/>
+                        </a:rPr>
+                        <a:t>DEG精製系 (C-1503)</a:t>
+                      </a:r>
+                    </a:p>
+                  </a:txBody>
+                  <a:tcPr anchor="t" marL="27432" marR="18288" marT="18288" marB="18288">
+                    <a:solidFill>
+                      <a:srgbClr val="D7E0E5"/>
+                    </a:solidFill>
+                  </a:tcPr>
+                </a:tc>
+                <a:tc>
+                  <a:txBody>
+                    <a:bodyPr/>
+                    <a:lstStyle/>
+                    <a:p>
+                      <a:r>
+                        <a:rPr sz="750" b="1">
+                          <a:solidFill>
+                            <a:srgbClr val="003F7E"/>
+                          </a:solidFill>
+                          <a:latin typeface="游ゴシック"/>
+                          <a:ea typeface="游ゴシック"/>
+                          <a:cs typeface="游ゴシック"/>
+                        </a:rPr>
+                        <a:t>製品タンク (T-555)</a:t>
+                      </a:r>
+                    </a:p>
+                  </a:txBody>
+                  <a:tcPr anchor="t" marL="27432" marR="18288" marT="18288" marB="18288">
+                    <a:solidFill>
+                      <a:srgbClr val="D7E0E5"/>
+                    </a:solidFill>
+                  </a:tcPr>
+                </a:tc>
+              </a:tr>
+              <a:tr h="692331">
+                <a:tc>
+                  <a:txBody>
+                    <a:bodyPr/>
+                    <a:lstStyle/>
+                    <a:p>
+                      <a:r>
+                        <a:rPr sz="800" b="1">
+                          <a:solidFill>
+                            <a:srgbClr val="003F7E"/>
+                          </a:solidFill>
+                          <a:latin typeface="游ゴシック"/>
+                          <a:ea typeface="游ゴシック"/>
+                          <a:cs typeface="游ゴシック"/>
+                        </a:rPr>
+                        <a:t>裏付け強度</a:t>
+                      </a:r>
+                    </a:p>
+                  </a:txBody>
+                  <a:tcPr anchor="t" marL="27432" marR="18288" marT="18288" marB="18288">
+                    <a:solidFill>
+                      <a:srgbClr val="EBEFF2"/>
+                    </a:solidFill>
+                  </a:tcPr>
+                </a:tc>
+                <a:tc>
+                  <a:txBody>
+                    <a:bodyPr/>
+                    <a:lstStyle/>
+                    <a:p>
+                      <a:r>
+                        <a:rPr sz="1200" b="1">
+                          <a:solidFill>
+                            <a:srgbClr val="003F7E"/>
+                          </a:solidFill>
+                          <a:latin typeface="游ゴシック"/>
+                          <a:ea typeface="游ゴシック"/>
+                          <a:cs typeface="游ゴシック"/>
+                        </a:rPr>
+                        <a:t>○</a:t>
+                      </a:r>
+                    </a:p>
+                  </a:txBody>
+                  <a:tcPr anchor="t" marL="27432" marR="18288" marT="18288" marB="18288">
+                    <a:solidFill>
+                      <a:srgbClr val="FFFFFF"/>
+                    </a:solidFill>
+                  </a:tcPr>
+                </a:tc>
+                <a:tc>
+                  <a:txBody>
+                    <a:bodyPr/>
+                    <a:lstStyle/>
+                    <a:p>
+                      <a:r>
+                        <a:rPr sz="1200" b="1">
+                          <a:solidFill>
+                            <a:srgbClr val="003F7E"/>
+                          </a:solidFill>
+                          <a:latin typeface="游ゴシック"/>
+                          <a:ea typeface="游ゴシック"/>
+                          <a:cs typeface="游ゴシック"/>
+                        </a:rPr>
+                        <a:t>○</a:t>
+                      </a:r>
+                    </a:p>
+                  </a:txBody>
+                  <a:tcPr anchor="t" marL="27432" marR="18288" marT="18288" marB="18288">
+                    <a:solidFill>
+                      <a:srgbClr val="FFFFFF"/>
+                    </a:solidFill>
+                  </a:tcPr>
+                </a:tc>
+                <a:tc>
+                  <a:txBody>
+                    <a:bodyPr/>
+                    <a:lstStyle/>
+                    <a:p>
+                      <a:r>
+                        <a:rPr sz="1200" b="1">
+                          <a:solidFill>
+                            <a:srgbClr val="C07A00"/>
+                          </a:solidFill>
+                          <a:latin typeface="游ゴシック"/>
+                          <a:ea typeface="游ゴシック"/>
+                          <a:cs typeface="游ゴシック"/>
+                        </a:rPr>
+                        <a:t>△</a:t>
+                      </a:r>
+                    </a:p>
+                  </a:txBody>
+                  <a:tcPr anchor="t" marL="27432" marR="18288" marT="18288" marB="18288">
+                    <a:solidFill>
+                      <a:srgbClr val="FFFFFF"/>
+                    </a:solidFill>
+                  </a:tcPr>
+                </a:tc>
+                <a:tc>
+                  <a:txBody>
+                    <a:bodyPr/>
+                    <a:lstStyle/>
+                    <a:p>
+                      <a:r>
+                        <a:rPr sz="1200" b="1">
+                          <a:solidFill>
+                            <a:srgbClr val="003F7E"/>
+                          </a:solidFill>
+                          <a:latin typeface="游ゴシック"/>
+                          <a:ea typeface="游ゴシック"/>
+                          <a:cs typeface="游ゴシック"/>
+                        </a:rPr>
+                        <a:t>○</a:t>
+                      </a:r>
+                    </a:p>
+                  </a:txBody>
+                  <a:tcPr anchor="t" marL="27432" marR="18288" marT="18288" marB="18288">
+                    <a:solidFill>
+                      <a:srgbClr val="FFFFFF"/>
+                    </a:solidFill>
+                  </a:tcPr>
+                </a:tc>
+                <a:tc>
+                  <a:txBody>
+                    <a:bodyPr/>
+                    <a:lstStyle/>
+                    <a:p>
+                      <a:r>
+                        <a:rPr sz="1200" b="1">
+                          <a:solidFill>
+                            <a:srgbClr val="003F7E"/>
+                          </a:solidFill>
+                          <a:latin typeface="游ゴシック"/>
+                          <a:ea typeface="游ゴシック"/>
+                          <a:cs typeface="游ゴシック"/>
+                        </a:rPr>
+                        <a:t>○</a:t>
+                      </a:r>
+                    </a:p>
+                  </a:txBody>
+                  <a:tcPr anchor="t" marL="27432" marR="18288" marT="18288" marB="18288">
+                    <a:solidFill>
+                      <a:srgbClr val="FFFFFF"/>
+                    </a:solidFill>
+                  </a:tcPr>
+                </a:tc>
+                <a:tc>
+                  <a:txBody>
+                    <a:bodyPr/>
+                    <a:lstStyle/>
+                    <a:p>
+                      <a:r>
+                        <a:rPr sz="1200" b="1">
+                          <a:solidFill>
+                            <a:srgbClr val="005BAB"/>
+                          </a:solidFill>
+                          <a:latin typeface="游ゴシック"/>
+                          <a:ea typeface="游ゴシック"/>
+                          <a:cs typeface="游ゴシック"/>
+                        </a:rPr>
+                        <a:t>◎</a:t>
+                      </a:r>
+                    </a:p>
+                  </a:txBody>
+                  <a:tcPr anchor="t" marL="27432" marR="18288" marT="18288" marB="18288">
+                    <a:solidFill>
+                      <a:srgbClr val="FFFFFF"/>
+                    </a:solidFill>
+                  </a:tcPr>
+                </a:tc>
+                <a:tc>
+                  <a:txBody>
+                    <a:bodyPr/>
+                    <a:lstStyle/>
+                    <a:p>
+                      <a:r>
+                        <a:rPr sz="1200" b="1">
+                          <a:solidFill>
+                            <a:srgbClr val="005BAB"/>
+                          </a:solidFill>
+                          <a:latin typeface="游ゴシック"/>
+                          <a:ea typeface="游ゴシック"/>
+                          <a:cs typeface="游ゴシック"/>
+                        </a:rPr>
+                        <a:t>◎</a:t>
+                      </a:r>
+                    </a:p>
+                  </a:txBody>
+                  <a:tcPr anchor="t" marL="27432" marR="18288" marT="18288" marB="18288">
+                    <a:solidFill>
+                      <a:srgbClr val="FFFFFF"/>
+                    </a:solidFill>
+                  </a:tcPr>
+                </a:tc>
+              </a:tr>
+              <a:tr h="692331">
+                <a:tc>
+                  <a:txBody>
+                    <a:bodyPr/>
+                    <a:lstStyle/>
+                    <a:p>
+                      <a:r>
+                        <a:rPr sz="750" b="1">
+                          <a:solidFill>
+                            <a:srgbClr val="003F7E"/>
+                          </a:solidFill>
+                          <a:latin typeface="游ゴシック"/>
+                          <a:ea typeface="游ゴシック"/>
+                          <a:cs typeface="游ゴシック"/>
+                        </a:rPr>
+                        <a:t>① 運転で見えた事実</a:t>
+                      </a:r>
+                    </a:p>
+                  </a:txBody>
+                  <a:tcPr anchor="t" marL="27432" marR="18288" marT="18288" marB="18288">
+                    <a:solidFill>
+                      <a:srgbClr val="EBEFF2"/>
+                    </a:solidFill>
+                  </a:tcPr>
+                </a:tc>
+                <a:tc>
+                  <a:txBody>
+                    <a:bodyPr/>
+                    <a:lstStyle/>
+                    <a:p>
+                      <a:r>
+                        <a:rPr sz="700" b="0">
+                          <a:solidFill>
+                            <a:srgbClr val="222222"/>
+                          </a:solidFill>
+                          <a:latin typeface="游ゴシック"/>
+                          <a:ea typeface="游ゴシック"/>
+                          <a:cs typeface="游ゴシック"/>
+                        </a:rPr>
+                        <a:t>触媒選択性の低下で、アルデヒド類（A-ALD・F-ALD）の副生が増えた。</a:t>
+                      </a:r>
+                    </a:p>
+                  </a:txBody>
+                  <a:tcPr anchor="t" marL="27432" marR="18288" marT="18288" marB="18288">
+                    <a:solidFill>
+                      <a:srgbClr val="E8F1E5"/>
+                    </a:solidFill>
+                  </a:tcPr>
+                </a:tc>
+                <a:tc>
+                  <a:txBody>
+                    <a:bodyPr/>
+                    <a:lstStyle/>
+                    <a:p>
+                      <a:r>
+                        <a:rPr sz="700" b="0">
+                          <a:solidFill>
+                            <a:srgbClr val="222222"/>
+                          </a:solidFill>
+                          <a:latin typeface="游ゴシック"/>
+                          <a:ea typeface="游ゴシック"/>
+                          <a:cs typeface="游ゴシック"/>
+                        </a:rPr>
+                        <a:t>原料EO中のA-ALD/EO＝0.78kg/t（過去実績の上位、通常0.11〜0.35）。F-ALDも増加。</a:t>
+                      </a:r>
+                    </a:p>
+                  </a:txBody>
+                  <a:tcPr anchor="t" marL="27432" marR="18288" marT="18288" marB="18288">
+                    <a:solidFill>
+                      <a:srgbClr val="E8F1E5"/>
+                    </a:solidFill>
+                  </a:tcPr>
+                </a:tc>
+                <a:tc>
+                  <a:txBody>
+                    <a:bodyPr/>
+                    <a:lstStyle/>
+                    <a:p>
+                      <a:r>
+                        <a:rPr sz="700" b="0">
+                          <a:solidFill>
+                            <a:srgbClr val="222222"/>
+                          </a:solidFill>
+                          <a:latin typeface="游ゴシック"/>
+                          <a:ea typeface="游ゴシック"/>
+                          <a:cs typeface="游ゴシック"/>
+                        </a:rPr>
+                        <a:t>EG濃縮系出口（C-1403ボトム）のアルデヒド濃度は過去並み。</a:t>
+                      </a:r>
+                    </a:p>
+                  </a:txBody>
+                  <a:tcPr anchor="t" marL="27432" marR="18288" marT="18288" marB="18288">
+                    <a:solidFill>
+                      <a:srgbClr val="E8F1E5"/>
+                    </a:solidFill>
+                  </a:tcPr>
+                </a:tc>
+                <a:tc>
+                  <a:txBody>
+                    <a:bodyPr/>
+                    <a:lstStyle/>
+                    <a:p>
+                      <a:r>
+                        <a:rPr sz="700" b="0">
+                          <a:solidFill>
+                            <a:srgbClr val="222222"/>
+                          </a:solidFill>
+                          <a:latin typeface="游ゴシック"/>
+                          <a:ea typeface="游ゴシック"/>
+                          <a:cs typeface="游ゴシック"/>
+                        </a:rPr>
+                        <a:t>EG脱水塔ボトム（C-1404）のアルデヒド濃度は過去並み。</a:t>
+                      </a:r>
+                    </a:p>
+                  </a:txBody>
+                  <a:tcPr anchor="t" marL="27432" marR="18288" marT="18288" marB="18288">
+                    <a:solidFill>
+                      <a:srgbClr val="E8F1E5"/>
+                    </a:solidFill>
+                  </a:tcPr>
+                </a:tc>
+                <a:tc>
+                  <a:txBody>
+                    <a:bodyPr/>
+                    <a:lstStyle/>
+                    <a:p>
+                      <a:r>
+                        <a:rPr sz="700" b="0">
+                          <a:solidFill>
+                            <a:srgbClr val="222222"/>
+                          </a:solidFill>
+                          <a:latin typeface="游ゴシック"/>
+                          <a:ea typeface="游ゴシック"/>
+                          <a:cs typeface="游ゴシック"/>
+                        </a:rPr>
+                        <a:t>MEG精製塔C-1502トップでA-ALDが一時的に異常高（3〜7ppm、過去1ppm以下）。物質収支の入量より多い。C-1501塔底温度を下げるとA-ALDが低下。</a:t>
+                      </a:r>
+                    </a:p>
+                  </a:txBody>
+                  <a:tcPr anchor="t" marL="27432" marR="18288" marT="18288" marB="18288">
+                    <a:solidFill>
+                      <a:srgbClr val="E8F1E5"/>
+                    </a:solidFill>
+                  </a:tcPr>
+                </a:tc>
+                <a:tc>
+                  <a:txBody>
+                    <a:bodyPr/>
+                    <a:lstStyle/>
+                    <a:p>
+                      <a:r>
+                        <a:rPr sz="700" b="0">
+                          <a:solidFill>
+                            <a:srgbClr val="222222"/>
+                          </a:solidFill>
+                          <a:latin typeface="游ゴシック"/>
+                          <a:ea typeface="游ゴシック"/>
+                          <a:cs typeface="游ゴシック"/>
+                        </a:rPr>
+                        <a:t>製品DEG出口は常に規格内（APHA&lt;5）。</a:t>
+                      </a:r>
+                    </a:p>
+                  </a:txBody>
+                  <a:tcPr anchor="t" marL="27432" marR="18288" marT="18288" marB="18288">
+                    <a:solidFill>
+                      <a:srgbClr val="E8F1E5"/>
+                    </a:solidFill>
+                  </a:tcPr>
+                </a:tc>
+                <a:tc>
+                  <a:txBody>
+                    <a:bodyPr/>
+                    <a:lstStyle/>
+                    <a:p>
+                      <a:r>
+                        <a:rPr sz="700" b="0">
+                          <a:solidFill>
+                            <a:srgbClr val="222222"/>
+                          </a:solidFill>
+                          <a:latin typeface="游ゴシック"/>
+                          <a:ea typeface="游ゴシック"/>
+                          <a:cs typeface="游ゴシック"/>
+                        </a:rPr>
+                        <a:t>窒素封入タンクで約6週間にAPHA&lt;5→25〜35へ上昇。残液は5/18（APHA30）以降は上昇せず。大気接触のドラム・SPでは進まない。</a:t>
+                      </a:r>
+                    </a:p>
+                  </a:txBody>
+                  <a:tcPr anchor="t" marL="27432" marR="18288" marT="18288" marB="18288">
+                    <a:solidFill>
+                      <a:srgbClr val="E8F1E5"/>
+                    </a:solidFill>
+                  </a:tcPr>
+                </a:tc>
+              </a:tr>
+              <a:tr h="692331">
+                <a:tc>
+                  <a:txBody>
+                    <a:bodyPr/>
+                    <a:lstStyle/>
+                    <a:p>
+                      <a:r>
+                        <a:rPr sz="750" b="1">
+                          <a:solidFill>
+                            <a:srgbClr val="003F7E"/>
+                          </a:solidFill>
+                          <a:latin typeface="游ゴシック"/>
+                          <a:ea typeface="游ゴシック"/>
+                          <a:cs typeface="游ゴシック"/>
+                        </a:rPr>
+                        <a:t>② 開放・検査で見えた事実</a:t>
+                      </a:r>
+                    </a:p>
+                  </a:txBody>
+                  <a:tcPr anchor="t" marL="27432" marR="18288" marT="18288" marB="18288">
+                    <a:solidFill>
+                      <a:srgbClr val="EBEFF2"/>
+                    </a:solidFill>
+                  </a:tcPr>
+                </a:tc>
+                <a:tc>
+                  <a:txBody>
+                    <a:bodyPr/>
+                    <a:lstStyle/>
+                    <a:p>
+                      <a:r>
+                        <a:rPr sz="700" b="0">
+                          <a:solidFill>
+                            <a:srgbClr val="222222"/>
+                          </a:solidFill>
+                          <a:latin typeface="游ゴシック"/>
+                          <a:ea typeface="游ゴシック"/>
+                          <a:cs typeface="游ゴシック"/>
+                        </a:rPr>
+                        <a:t/>
+                      </a:r>
+                    </a:p>
+                  </a:txBody>
+                  <a:tcPr anchor="t" marL="27432" marR="18288" marT="18288" marB="18288">
+                    <a:solidFill>
+                      <a:srgbClr val="E8F1E5"/>
+                    </a:solidFill>
+                  </a:tcPr>
+                </a:tc>
+                <a:tc>
+                  <a:txBody>
+                    <a:bodyPr/>
+                    <a:lstStyle/>
+                    <a:p>
+                      <a:r>
+                        <a:rPr sz="700" b="0">
+                          <a:solidFill>
+                            <a:srgbClr val="222222"/>
+                          </a:solidFill>
+                          <a:latin typeface="游ゴシック"/>
+                          <a:ea typeface="游ゴシック"/>
+                          <a:cs typeface="游ゴシック"/>
+                        </a:rPr>
+                        <a:t/>
+                      </a:r>
+                    </a:p>
+                  </a:txBody>
+                  <a:tcPr anchor="t" marL="27432" marR="18288" marT="18288" marB="18288">
+                    <a:solidFill>
+                      <a:srgbClr val="E8F1E5"/>
+                    </a:solidFill>
+                  </a:tcPr>
+                </a:tc>
+                <a:tc>
+                  <a:txBody>
+                    <a:bodyPr/>
+                    <a:lstStyle/>
+                    <a:p>
+                      <a:r>
+                        <a:rPr sz="700" b="0">
+                          <a:solidFill>
+                            <a:srgbClr val="222222"/>
+                          </a:solidFill>
+                          <a:latin typeface="游ゴシック"/>
+                          <a:ea typeface="游ゴシック"/>
+                          <a:cs typeface="游ゴシック"/>
+                        </a:rPr>
+                        <a:t/>
+                      </a:r>
+                    </a:p>
+                  </a:txBody>
+                  <a:tcPr anchor="t" marL="27432" marR="18288" marT="18288" marB="18288">
+                    <a:solidFill>
+                      <a:srgbClr val="E8F1E5"/>
+                    </a:solidFill>
+                  </a:tcPr>
+                </a:tc>
+                <a:tc>
+                  <a:txBody>
+                    <a:bodyPr/>
+                    <a:lstStyle/>
+                    <a:p>
+                      <a:r>
+                        <a:rPr sz="700" b="0">
+                          <a:solidFill>
+                            <a:srgbClr val="222222"/>
+                          </a:solidFill>
+                          <a:latin typeface="游ゴシック"/>
+                          <a:ea typeface="游ゴシック"/>
+                          <a:cs typeface="游ゴシック"/>
+                        </a:rPr>
+                        <a:t>EG脱水塔の鉄錆を除去（健全化）。</a:t>
+                      </a:r>
+                    </a:p>
+                  </a:txBody>
+                  <a:tcPr anchor="t" marL="27432" marR="18288" marT="18288" marB="18288">
+                    <a:solidFill>
+                      <a:srgbClr val="E8F1E5"/>
+                    </a:solidFill>
+                  </a:tcPr>
+                </a:tc>
+                <a:tc>
+                  <a:txBody>
+                    <a:bodyPr/>
+                    <a:lstStyle/>
+                    <a:p>
+                      <a:r>
+                        <a:rPr sz="700" b="0">
+                          <a:solidFill>
+                            <a:srgbClr val="222222"/>
+                          </a:solidFill>
+                          <a:latin typeface="游ゴシック"/>
+                          <a:ea typeface="游ゴシック"/>
+                          <a:cs typeface="游ゴシック"/>
+                        </a:rPr>
+                        <a:t>MEG精製塔C-1501／C-1502を開放、異常な汚れ・活性金属なし。C-1501塔底〜C-1502配管のSUS化部も錆込みなし。</a:t>
+                      </a:r>
+                    </a:p>
+                  </a:txBody>
+                  <a:tcPr anchor="t" marL="27432" marR="18288" marT="18288" marB="18288">
+                    <a:solidFill>
+                      <a:srgbClr val="E8F1E5"/>
+                    </a:solidFill>
+                  </a:tcPr>
+                </a:tc>
+                <a:tc>
+                  <a:txBody>
+                    <a:bodyPr/>
+                    <a:lstStyle/>
+                    <a:p>
+                      <a:r>
+                        <a:rPr sz="700" b="0">
+                          <a:solidFill>
+                            <a:srgbClr val="222222"/>
+                          </a:solidFill>
+                          <a:latin typeface="游ゴシック"/>
+                          <a:ea typeface="游ゴシック"/>
+                          <a:cs typeface="游ゴシック"/>
+                        </a:rPr>
+                        <a:t>DEG精製塔C-1503トップに黒色付着物（XRFでほぼ鉄＝サビ）。水抽出でギ酸70ppm・グリコール酸12ppm。</a:t>
+                      </a:r>
+                    </a:p>
+                  </a:txBody>
+                  <a:tcPr anchor="t" marL="27432" marR="18288" marT="18288" marB="18288">
+                    <a:solidFill>
+                      <a:srgbClr val="E8F1E5"/>
+                    </a:solidFill>
+                  </a:tcPr>
+                </a:tc>
+                <a:tc>
+                  <a:txBody>
+                    <a:bodyPr/>
+                    <a:lstStyle/>
+                    <a:p>
+                      <a:r>
+                        <a:rPr sz="700" b="0">
+                          <a:solidFill>
+                            <a:srgbClr val="222222"/>
+                          </a:solidFill>
+                          <a:latin typeface="游ゴシック"/>
+                          <a:ea typeface="游ゴシック"/>
+                          <a:cs typeface="游ゴシック"/>
+                        </a:rPr>
+                        <a:t>製品タンクT-555／T-615を開放。異物は鉄サビ（T-615の一部は砂が過半＋鉄10〜12%）。</a:t>
+                      </a:r>
+                    </a:p>
+                  </a:txBody>
+                  <a:tcPr anchor="t" marL="27432" marR="18288" marT="18288" marB="18288">
+                    <a:solidFill>
+                      <a:srgbClr val="E8F1E5"/>
+                    </a:solidFill>
+                  </a:tcPr>
+                </a:tc>
+              </a:tr>
+              <a:tr h="692331">
+                <a:tc>
+                  <a:txBody>
+                    <a:bodyPr/>
+                    <a:lstStyle/>
+                    <a:p>
+                      <a:r>
+                        <a:rPr sz="750" b="1">
+                          <a:solidFill>
+                            <a:srgbClr val="003F7E"/>
+                          </a:solidFill>
+                          <a:latin typeface="游ゴシック"/>
+                          <a:ea typeface="游ゴシック"/>
+                          <a:cs typeface="游ゴシック"/>
+                        </a:rPr>
+                        <a:t>③ RDで検証した事実</a:t>
+                      </a:r>
+                    </a:p>
+                  </a:txBody>
+                  <a:tcPr anchor="t" marL="27432" marR="18288" marT="18288" marB="18288">
+                    <a:solidFill>
+                      <a:srgbClr val="EBEFF2"/>
+                    </a:solidFill>
+                  </a:tcPr>
+                </a:tc>
+                <a:tc>
+                  <a:txBody>
+                    <a:bodyPr/>
+                    <a:lstStyle/>
+                    <a:p>
+                      <a:r>
+                        <a:rPr sz="700" b="0">
+                          <a:solidFill>
+                            <a:srgbClr val="222222"/>
+                          </a:solidFill>
+                          <a:latin typeface="游ゴシック"/>
+                          <a:ea typeface="游ゴシック"/>
+                          <a:cs typeface="游ゴシック"/>
+                        </a:rPr>
+                        <a:t/>
+                      </a:r>
+                    </a:p>
+                  </a:txBody>
+                  <a:tcPr anchor="t" marL="27432" marR="18288" marT="18288" marB="18288">
+                    <a:solidFill>
+                      <a:srgbClr val="E8F1E5"/>
+                    </a:solidFill>
+                  </a:tcPr>
+                </a:tc>
+                <a:tc>
+                  <a:txBody>
+                    <a:bodyPr/>
+                    <a:lstStyle/>
+                    <a:p>
+                      <a:r>
+                        <a:rPr sz="700" b="0">
+                          <a:solidFill>
+                            <a:srgbClr val="222222"/>
+                          </a:solidFill>
+                          <a:latin typeface="游ゴシック"/>
+                          <a:ea typeface="游ゴシック"/>
+                          <a:cs typeface="游ゴシック"/>
+                        </a:rPr>
+                        <a:t>ラボでEG反応器出口を模擬し、F-ALD・A-ALDを添加するとUVが悪化（両者の共存でより大きい）。</a:t>
+                      </a:r>
+                    </a:p>
+                  </a:txBody>
+                  <a:tcPr anchor="t" marL="27432" marR="18288" marT="18288" marB="18288">
+                    <a:solidFill>
+                      <a:srgbClr val="E8F1E5"/>
+                    </a:solidFill>
+                  </a:tcPr>
+                </a:tc>
+                <a:tc>
+                  <a:txBody>
+                    <a:bodyPr/>
+                    <a:lstStyle/>
+                    <a:p>
+                      <a:r>
+                        <a:rPr sz="700" b="0">
+                          <a:solidFill>
+                            <a:srgbClr val="222222"/>
+                          </a:solidFill>
+                          <a:latin typeface="游ゴシック"/>
+                          <a:ea typeface="游ゴシック"/>
+                          <a:cs typeface="游ゴシック"/>
+                        </a:rPr>
+                        <a:t/>
+                      </a:r>
+                    </a:p>
+                  </a:txBody>
+                  <a:tcPr anchor="t" marL="27432" marR="18288" marT="18288" marB="18288">
+                    <a:solidFill>
+                      <a:srgbClr val="E8F1E5"/>
+                    </a:solidFill>
+                  </a:tcPr>
+                </a:tc>
+                <a:tc>
+                  <a:txBody>
+                    <a:bodyPr/>
+                    <a:lstStyle/>
+                    <a:p>
+                      <a:r>
+                        <a:rPr sz="700" b="0">
+                          <a:solidFill>
+                            <a:srgbClr val="222222"/>
+                          </a:solidFill>
+                          <a:latin typeface="游ゴシック"/>
+                          <a:ea typeface="游ゴシック"/>
+                          <a:cs typeface="游ゴシック"/>
+                        </a:rPr>
+                        <a:t>基礎研の見立てでは、水分が多いほど縮合は進みにくく、効きは感度として全体の2〜3割程度。</a:t>
+                      </a:r>
+                    </a:p>
+                  </a:txBody>
+                  <a:tcPr anchor="t" marL="27432" marR="18288" marT="18288" marB="18288">
+                    <a:solidFill>
+                      <a:srgbClr val="E8F1E5"/>
+                    </a:solidFill>
+                  </a:tcPr>
+                </a:tc>
+                <a:tc>
+                  <a:txBody>
+                    <a:bodyPr/>
+                    <a:lstStyle/>
+                    <a:p>
+                      <a:r>
+                        <a:rPr sz="700" b="0">
+                          <a:solidFill>
+                            <a:srgbClr val="222222"/>
+                          </a:solidFill>
+                          <a:latin typeface="游ゴシック"/>
+                          <a:ea typeface="游ゴシック"/>
+                          <a:cs typeface="游ゴシック"/>
+                        </a:rPr>
+                        <a:t/>
+                      </a:r>
+                    </a:p>
+                  </a:txBody>
+                  <a:tcPr anchor="t" marL="27432" marR="18288" marT="18288" marB="18288">
+                    <a:solidFill>
+                      <a:srgbClr val="E8F1E5"/>
+                    </a:solidFill>
+                  </a:tcPr>
+                </a:tc>
+                <a:tc>
+                  <a:txBody>
+                    <a:bodyPr/>
+                    <a:lstStyle/>
+                    <a:p>
+                      <a:r>
+                        <a:rPr sz="700" b="0">
+                          <a:solidFill>
+                            <a:srgbClr val="222222"/>
+                          </a:solidFill>
+                          <a:latin typeface="游ゴシック"/>
+                          <a:ea typeface="游ゴシック"/>
+                          <a:cs typeface="游ゴシック"/>
+                        </a:rPr>
+                        <a:t>C-1503の付着物をDEGに加えて保管すると380nmの吸収は出るが、実機の450nmは出ない。蒸留DEGを短時間置いても450nmは出ない＝付着物は実機の着色（450nm）を作らない。</a:t>
+                      </a:r>
+                    </a:p>
+                  </a:txBody>
+                  <a:tcPr anchor="t" marL="27432" marR="18288" marT="18288" marB="18288">
+                    <a:solidFill>
+                      <a:srgbClr val="E8F1E5"/>
+                    </a:solidFill>
+                  </a:tcPr>
+                </a:tc>
+                <a:tc>
+                  <a:txBody>
+                    <a:bodyPr/>
+                    <a:lstStyle/>
+                    <a:p>
+                      <a:r>
+                        <a:rPr sz="700" b="0">
+                          <a:solidFill>
+                            <a:srgbClr val="222222"/>
+                          </a:solidFill>
+                          <a:latin typeface="游ゴシック"/>
+                          <a:ea typeface="游ゴシック"/>
+                          <a:cs typeface="游ゴシック"/>
+                        </a:rPr>
+                        <a:t>着色物質をGPC・GCで分析＝分子量200〜800・457nm吸収のポリエナール（ppbオーダー）。酸素があると前駆体が有機酸へ酸化され、縮合が進まない。</a:t>
+                      </a:r>
+                    </a:p>
+                  </a:txBody>
+                  <a:tcPr anchor="t" marL="27432" marR="18288" marT="18288" marB="18288">
+                    <a:solidFill>
+                      <a:srgbClr val="E8F1E5"/>
+                    </a:solidFill>
+                  </a:tcPr>
+                </a:tc>
+              </a:tr>
+              <a:tr h="692331">
+                <a:tc>
+                  <a:txBody>
+                    <a:bodyPr/>
+                    <a:lstStyle/>
+                    <a:p>
+                      <a:r>
+                        <a:rPr sz="750" b="1">
+                          <a:solidFill>
+                            <a:srgbClr val="003F7E"/>
+                          </a:solidFill>
+                          <a:latin typeface="游ゴシック"/>
+                          <a:ea typeface="游ゴシック"/>
+                          <a:cs typeface="游ゴシック"/>
+                        </a:rPr>
+                        <a:t>④ 一般原理（起こり得る反応）</a:t>
+                      </a:r>
+                    </a:p>
+                  </a:txBody>
+                  <a:tcPr anchor="t" marL="27432" marR="18288" marT="18288" marB="18288">
+                    <a:solidFill>
+                      <a:srgbClr val="EBEFF2"/>
+                    </a:solidFill>
+                  </a:tcPr>
+                </a:tc>
+                <a:tc>
+                  <a:txBody>
+                    <a:bodyPr/>
+                    <a:lstStyle/>
+                    <a:p>
+                      <a:r>
+                        <a:rPr sz="700" b="0">
+                          <a:solidFill>
+                            <a:srgbClr val="222222"/>
+                          </a:solidFill>
+                          <a:latin typeface="游ゴシック"/>
+                          <a:ea typeface="游ゴシック"/>
+                          <a:cs typeface="游ゴシック"/>
+                        </a:rPr>
+                        <a:t/>
+                      </a:r>
+                    </a:p>
+                  </a:txBody>
+                  <a:tcPr anchor="t" marL="27432" marR="18288" marT="18288" marB="18288">
+                    <a:solidFill>
+                      <a:srgbClr val="F1F1F1"/>
+                    </a:solidFill>
+                  </a:tcPr>
+                </a:tc>
+                <a:tc>
+                  <a:txBody>
+                    <a:bodyPr/>
+                    <a:lstStyle/>
+                    <a:p>
+                      <a:r>
+                        <a:rPr sz="700" b="0">
+                          <a:solidFill>
+                            <a:srgbClr val="222222"/>
+                          </a:solidFill>
+                          <a:latin typeface="游ゴシック"/>
+                          <a:ea typeface="游ゴシック"/>
+                          <a:cs typeface="游ゴシック"/>
+                        </a:rPr>
+                        <a:t>水和反応でEGを生成。ここでアルデヒドがグリコールと共存し始める。</a:t>
+                      </a:r>
+                    </a:p>
+                  </a:txBody>
+                  <a:tcPr anchor="t" marL="27432" marR="18288" marT="18288" marB="18288">
+                    <a:solidFill>
+                      <a:srgbClr val="F1F1F1"/>
+                    </a:solidFill>
+                  </a:tcPr>
+                </a:tc>
+                <a:tc>
+                  <a:txBody>
+                    <a:bodyPr/>
+                    <a:lstStyle/>
+                    <a:p>
+                      <a:r>
+                        <a:rPr sz="700" b="0">
+                          <a:solidFill>
+                            <a:srgbClr val="222222"/>
+                          </a:solidFill>
+                          <a:latin typeface="游ゴシック"/>
+                          <a:ea typeface="游ゴシック"/>
+                          <a:cs typeface="游ゴシック"/>
+                        </a:rPr>
+                        <a:t>アルデヒドの大半は蒸気側からパージで系外へ。軽いアルデヒドは抜けるが、一部は下流へ持ち込まれ得る。</a:t>
+                      </a:r>
+                    </a:p>
+                  </a:txBody>
+                  <a:tcPr anchor="t" marL="27432" marR="18288" marT="18288" marB="18288">
+                    <a:solidFill>
+                      <a:srgbClr val="F1F1F1"/>
+                    </a:solidFill>
+                  </a:tcPr>
+                </a:tc>
+                <a:tc>
+                  <a:txBody>
+                    <a:bodyPr/>
+                    <a:lstStyle/>
+                    <a:p>
+                      <a:r>
+                        <a:rPr sz="700" b="0">
+                          <a:solidFill>
+                            <a:srgbClr val="222222"/>
+                          </a:solidFill>
+                          <a:latin typeface="游ゴシック"/>
+                          <a:ea typeface="游ゴシック"/>
+                          <a:cs typeface="游ゴシック"/>
+                        </a:rPr>
+                        <a:t>アルドール縮合は水を出す平衡反応で、水が少ないほど縮合が進む。縮合した重い化合物は沸点が高く、重質側（DEG留分）に残りやすい。</a:t>
+                      </a:r>
+                    </a:p>
+                  </a:txBody>
+                  <a:tcPr anchor="t" marL="27432" marR="18288" marT="18288" marB="18288">
+                    <a:solidFill>
+                      <a:srgbClr val="F1F1F1"/>
+                    </a:solidFill>
+                  </a:tcPr>
+                </a:tc>
+                <a:tc>
+                  <a:txBody>
+                    <a:bodyPr/>
+                    <a:lstStyle/>
+                    <a:p>
+                      <a:r>
+                        <a:rPr sz="700" b="0">
+                          <a:solidFill>
+                            <a:srgbClr val="222222"/>
+                          </a:solidFill>
+                          <a:latin typeface="游ゴシック"/>
+                          <a:ea typeface="游ゴシック"/>
+                          <a:cs typeface="游ゴシック"/>
+                        </a:rPr>
+                        <a:t>検出位置＝生成位置とは限らない。重い縮合物が塔間の循環で運ばれ、C-1502付近でレトロアルドールによりアルデヒドに戻って検出され得る。</a:t>
+                      </a:r>
+                    </a:p>
+                  </a:txBody>
+                  <a:tcPr anchor="t" marL="27432" marR="18288" marT="18288" marB="18288">
+                    <a:solidFill>
+                      <a:srgbClr val="F1F1F1"/>
+                    </a:solidFill>
+                  </a:tcPr>
+                </a:tc>
+                <a:tc>
+                  <a:txBody>
+                    <a:bodyPr/>
+                    <a:lstStyle/>
+                    <a:p>
+                      <a:r>
+                        <a:rPr sz="700" b="0">
+                          <a:solidFill>
+                            <a:srgbClr val="222222"/>
+                          </a:solidFill>
+                          <a:latin typeface="游ゴシック"/>
+                          <a:ea typeface="游ゴシック"/>
+                          <a:cs typeface="游ゴシック"/>
+                        </a:rPr>
+                        <a:t>塩基性・高温下でアルドール縮合が進み、共役の短い前駆体（UV330nm付近・分子量150程度）ができる。</a:t>
+                      </a:r>
+                    </a:p>
+                  </a:txBody>
+                  <a:tcPr anchor="t" marL="27432" marR="18288" marT="18288" marB="18288">
+                    <a:solidFill>
+                      <a:srgbClr val="F1F1F1"/>
+                    </a:solidFill>
+                  </a:tcPr>
+                </a:tc>
+                <a:tc>
+                  <a:txBody>
+                    <a:bodyPr/>
+                    <a:lstStyle/>
+                    <a:p>
+                      <a:r>
+                        <a:rPr sz="700" b="0">
+                          <a:solidFill>
+                            <a:srgbClr val="222222"/>
+                          </a:solidFill>
+                          <a:latin typeface="游ゴシック"/>
+                          <a:ea typeface="游ゴシック"/>
+                          <a:cs typeface="游ゴシック"/>
+                        </a:rPr>
+                        <a:t>前駆体どうしがさらに脱水縮合して共役が伸び、450nm（黄）に達する。前駆体を使い切るとAPHA30程度で頭打ち。共役系は微量で発色する。</a:t>
+                      </a:r>
+                    </a:p>
+                  </a:txBody>
+                  <a:tcPr anchor="t" marL="27432" marR="18288" marT="18288" marB="18288">
+                    <a:solidFill>
+                      <a:srgbClr val="F1F1F1"/>
+                    </a:solidFill>
+                  </a:tcPr>
+                </a:tc>
+              </a:tr>
+              <a:tr h="692334">
+                <a:tc>
+                  <a:txBody>
+                    <a:bodyPr/>
+                    <a:lstStyle/>
+                    <a:p>
+                      <a:r>
+                        <a:rPr sz="750" b="1">
+                          <a:solidFill>
+                            <a:srgbClr val="003F7E"/>
+                          </a:solidFill>
+                          <a:latin typeface="游ゴシック"/>
+                          <a:ea typeface="游ゴシック"/>
+                          <a:cs typeface="游ゴシック"/>
+                        </a:rPr>
+                        <a:t>⑤ この工程で言えること</a:t>
+                      </a:r>
+                    </a:p>
+                  </a:txBody>
+                  <a:tcPr anchor="t" marL="27432" marR="18288" marT="18288" marB="18288">
+                    <a:solidFill>
+                      <a:srgbClr val="EBEFF2"/>
+                    </a:solidFill>
+                  </a:tcPr>
+                </a:tc>
+                <a:tc>
+                  <a:txBody>
+                    <a:bodyPr/>
+                    <a:lstStyle/>
+                    <a:p>
+                      <a:r>
+                        <a:rPr sz="700" b="0">
+                          <a:solidFill>
+                            <a:srgbClr val="222222"/>
+                          </a:solidFill>
+                          <a:latin typeface="游ゴシック"/>
+                          <a:ea typeface="游ゴシック"/>
+                          <a:cs typeface="游ゴシック"/>
+                        </a:rPr>
+                        <a:t>種となるアルデヒドが増えた＝着色の起点。</a:t>
+                      </a:r>
+                    </a:p>
+                  </a:txBody>
+                  <a:tcPr anchor="t" marL="27432" marR="18288" marT="18288" marB="18288">
+                    <a:solidFill>
+                      <a:srgbClr val="DCE6EF"/>
+                    </a:solidFill>
+                  </a:tcPr>
+                </a:tc>
+                <a:tc>
+                  <a:txBody>
+                    <a:bodyPr/>
+                    <a:lstStyle/>
+                    <a:p>
+                      <a:r>
+                        <a:rPr sz="700" b="0">
+                          <a:solidFill>
+                            <a:srgbClr val="222222"/>
+                          </a:solidFill>
+                          <a:latin typeface="游ゴシック"/>
+                          <a:ea typeface="游ゴシック"/>
+                          <a:cs typeface="游ゴシック"/>
+                        </a:rPr>
+                        <a:t>アルデヒドがEG生成系に持ち込まれ、UV成分の素地になる。</a:t>
+                      </a:r>
+                    </a:p>
+                  </a:txBody>
+                  <a:tcPr anchor="t" marL="27432" marR="18288" marT="18288" marB="18288">
+                    <a:solidFill>
+                      <a:srgbClr val="DCE6EF"/>
+                    </a:solidFill>
+                  </a:tcPr>
+                </a:tc>
+                <a:tc>
+                  <a:txBody>
+                    <a:bodyPr/>
+                    <a:lstStyle/>
+                    <a:p>
+                      <a:r>
+                        <a:rPr sz="700" b="0">
+                          <a:solidFill>
+                            <a:srgbClr val="222222"/>
+                          </a:solidFill>
+                          <a:latin typeface="游ゴシック"/>
+                          <a:ea typeface="游ゴシック"/>
+                          <a:cs typeface="游ゴシック"/>
+                        </a:rPr>
+                        <a:t>大半はパージされ、一部が下流へ持ち込まれ得る。</a:t>
+                      </a:r>
+                    </a:p>
+                  </a:txBody>
+                  <a:tcPr anchor="t" marL="27432" marR="18288" marT="18288" marB="18288">
+                    <a:solidFill>
+                      <a:srgbClr val="DCE6EF"/>
+                    </a:solidFill>
+                  </a:tcPr>
+                </a:tc>
+                <a:tc>
+                  <a:txBody>
+                    <a:bodyPr/>
+                    <a:lstStyle/>
+                    <a:p>
+                      <a:r>
+                        <a:rPr sz="700" b="0">
+                          <a:solidFill>
+                            <a:srgbClr val="222222"/>
+                          </a:solidFill>
+                          <a:latin typeface="游ゴシック"/>
+                          <a:ea typeface="游ゴシック"/>
+                          <a:cs typeface="游ゴシック"/>
+                        </a:rPr>
+                        <a:t>アルデヒドが多い条件では、ここで縮合が進み、重い形で下流へ運ばれ得る。</a:t>
+                      </a:r>
+                    </a:p>
+                  </a:txBody>
+                  <a:tcPr anchor="t" marL="27432" marR="18288" marT="18288" marB="18288">
+                    <a:solidFill>
+                      <a:srgbClr val="DCE6EF"/>
+                    </a:solidFill>
+                  </a:tcPr>
+                </a:tc>
+                <a:tc>
+                  <a:txBody>
+                    <a:bodyPr/>
+                    <a:lstStyle/>
+                    <a:p>
+                      <a:r>
+                        <a:rPr sz="700" b="0">
+                          <a:solidFill>
+                            <a:srgbClr val="222222"/>
+                          </a:solidFill>
+                          <a:latin typeface="游ゴシック"/>
+                          <a:ea typeface="游ゴシック"/>
+                          <a:cs typeface="游ゴシック"/>
+                        </a:rPr>
+                        <a:t>活性金属がなく、着色の生成場ではない。C-1502の見かけの生成は循環由来で通過点（要追検証）。</a:t>
+                      </a:r>
+                    </a:p>
+                  </a:txBody>
+                  <a:tcPr anchor="t" marL="27432" marR="18288" marT="18288" marB="18288">
+                    <a:solidFill>
+                      <a:srgbClr val="DCE6EF"/>
+                    </a:solidFill>
+                  </a:tcPr>
+                </a:tc>
+                <a:tc>
+                  <a:txBody>
+                    <a:bodyPr/>
+                    <a:lstStyle/>
+                    <a:p>
+                      <a:r>
+                        <a:rPr sz="700" b="0">
+                          <a:solidFill>
+                            <a:srgbClr val="222222"/>
+                          </a:solidFill>
+                          <a:latin typeface="游ゴシック"/>
+                          <a:ea typeface="游ゴシック"/>
+                          <a:cs typeface="游ゴシック"/>
+                        </a:rPr>
+                        <a:t>前駆体が生成する場。鉄サビ・付着物は450nmの主因ではない（局所の380nm）。</a:t>
+                      </a:r>
+                    </a:p>
+                  </a:txBody>
+                  <a:tcPr anchor="t" marL="27432" marR="18288" marT="18288" marB="18288">
+                    <a:solidFill>
+                      <a:srgbClr val="DCE6EF"/>
+                    </a:solidFill>
+                  </a:tcPr>
+                </a:tc>
+                <a:tc>
+                  <a:txBody>
+                    <a:bodyPr/>
+                    <a:lstStyle/>
+                    <a:p>
+                      <a:r>
+                        <a:rPr sz="700" b="0">
+                          <a:solidFill>
+                            <a:srgbClr val="222222"/>
+                          </a:solidFill>
+                          <a:latin typeface="游ゴシック"/>
+                          <a:ea typeface="游ゴシック"/>
+                          <a:cs typeface="游ゴシック"/>
+                        </a:rPr>
+                        <a:t>着色が成長する＝熟成の場。窒素で進み、大気で止まる。</a:t>
+                      </a:r>
+                    </a:p>
+                  </a:txBody>
+                  <a:tcPr anchor="t" marL="27432" marR="18288" marT="18288" marB="18288">
+                    <a:solidFill>
+                      <a:srgbClr val="DCE6EF"/>
+                    </a:solidFill>
+                  </a:tcPr>
+                </a:tc>
+              </a:tr>
+            </a:tbl>
+          </a:graphicData>
+        </a:graphic>
+      </p:graphicFrame>
     </p:spTree>
   </p:cSld>
   <p:clrMapOvr>
@@ -20983,7 +23816,7 @@
             <a:r>
               <a:rPr sz="3400" b="1">
                 <a:solidFill>
-                  <a:srgbClr val="003F7E"/>
+                  <a:srgbClr val="000000"/>
                 </a:solidFill>
                 <a:latin typeface="游ゴシック"/>
                 <a:ea typeface="游ゴシック"/>

--- a/outputs/製品DEG色相悪化_対策会議.pptx
+++ b/outputs/製品DEG色相悪化_対策会議.pptx
@@ -27,6 +27,7 @@
     <p:sldId id="2147483579" r:id="rId34"/>
     <p:sldId id="2147483580" r:id="rId35"/>
     <p:sldId id="2147483581" r:id="rId36"/>
+    <p:sldId id="2147483582" r:id="rId37"/>
   </p:sldIdLst>
   <p:sldSz cx="12192000" cy="6858000"/>
   <p:notesSz cx="6807200" cy="9939338"/>
@@ -19299,7 +19300,7 @@
                           <a:ea typeface="游ゴシック"/>
                           <a:cs typeface="游ゴシック"/>
                         </a:rPr>
-                        <a:t>活性金属がなく、着色の生成場ではない。C-1502の見かけの生成は循環由来で通過点（要追検証）。</a:t>
+                        <a:t>活性金属がなく、着色の生成場ではない。C-1502の見かけの生成は循環由来で通過点（要追検証）。温度を下げるとアルデヒド・前駆体が分解されず下流（DEG）へ回りやすい。</a:t>
                       </a:r>
                     </a:p>
                   </a:txBody>
@@ -19519,8 +19520,8 @@
         </p:nvSpPr>
         <p:spPr>
           <a:xfrm>
-            <a:off x="548640" y="1280160"/>
-            <a:ext cx="11064240" cy="731520"/>
+            <a:off x="548640" y="1207008"/>
+            <a:ext cx="11064240" cy="1005840"/>
           </a:xfrm>
           <a:prstGeom prst="rect">
             <a:avLst/>
@@ -19542,7 +19543,7 @@
               </a:spcAft>
             </a:pPr>
             <a:r>
-              <a:rPr sz="1300" b="0">
+              <a:rPr sz="1250" b="0">
                 <a:solidFill>
                   <a:srgbClr val="666666"/>
                 </a:solidFill>
@@ -19550,7 +19551,7 @@
                 <a:ea typeface="游ゴシック"/>
                 <a:cs typeface="游ゴシック"/>
               </a:rPr>
-              <a:t>脱水以降の塔は元々水分が少なく、アルデヒドが多いと縮合が進みやすい。脱水のプロセスを変えたわけではなく、今回はアルデヒドが多かったことが引き金で、塩基条件とDEG特有の事情が重なった。</a:t>
+              <a:t>EG反応から脱水の手前までは水が多く、アルドール縮合は進みにくい（アルデヒドは主に遊離のまま運ばれる）。水が抜ける脱水塔以降で初めて縮合が進む。脱水のプロセスを変えたわけではなく、今回はアルデヒドが多かったことが引き金で、温度操作・塩基条件・DEG特有の事情が重なった。</a:t>
             </a:r>
           </a:p>
         </p:txBody>
@@ -19563,8 +19564,8 @@
         </p:nvSpPr>
         <p:spPr>
           <a:xfrm>
-            <a:off x="548640" y="2194560"/>
-            <a:ext cx="11064240" cy="1143000"/>
+            <a:off x="548640" y="2331720"/>
+            <a:ext cx="11064240" cy="914400"/>
           </a:xfrm>
           <a:prstGeom prst="roundRect">
             <a:avLst/>
@@ -19599,7 +19600,7 @@
           <a:p>
             <a:pPr algn="ctr"/>
             <a:r>
-              <a:rPr sz="1450" b="1">
+              <a:rPr sz="1350" b="1">
                 <a:solidFill>
                   <a:srgbClr val="003F7E"/>
                 </a:solidFill>
@@ -19610,7 +19611,7 @@
               <a:t>【アルデヒドが過去最大級に多かった（引き金）】 </a:t>
             </a:r>
             <a:r>
-              <a:rPr sz="1300">
+              <a:rPr sz="1200">
                 <a:solidFill>
                   <a:srgbClr val="222222"/>
                 </a:solidFill>
@@ -19623,7 +19624,7 @@
           </a:p>
           <a:p>
             <a:r>
-              <a:rPr sz="1300" b="1">
+              <a:rPr sz="1200" b="1">
                 <a:solidFill>
                   <a:srgbClr val="005BAB"/>
                 </a:solidFill>
@@ -19644,8 +19645,8 @@
         </p:nvSpPr>
         <p:spPr>
           <a:xfrm>
-            <a:off x="548640" y="3456432"/>
-            <a:ext cx="11064240" cy="1143000"/>
+            <a:off x="548640" y="3355848"/>
+            <a:ext cx="11064240" cy="914400"/>
           </a:xfrm>
           <a:prstGeom prst="roundRect">
             <a:avLst/>
@@ -19680,7 +19681,7 @@
           <a:p>
             <a:pPr algn="ctr"/>
             <a:r>
-              <a:rPr sz="1450" b="1">
+              <a:rPr sz="1350" b="1">
                 <a:solidFill>
                   <a:srgbClr val="003F7E"/>
                 </a:solidFill>
@@ -19688,10 +19689,10 @@
                 <a:ea typeface="游ゴシック"/>
                 <a:cs typeface="游ゴシック"/>
               </a:rPr>
-              <a:t>【塩基条件（苛性ソーダ）が縮合を後押しした（促進）】 </a:t>
-            </a:r>
-            <a:r>
-              <a:rPr sz="1300">
+              <a:t>【MEG-HUV対策で塔温度を下げたことが重なった（促進）】 </a:t>
+            </a:r>
+            <a:r>
+              <a:rPr sz="1200">
                 <a:solidFill>
                   <a:srgbClr val="222222"/>
                 </a:solidFill>
@@ -19699,12 +19700,12 @@
                 <a:ea typeface="游ゴシック"/>
                 <a:cs typeface="游ゴシック"/>
               </a:rPr>
-              <a:t>NaOHの塩基がアルドール縮合を促進する側に働いた（NaOHからリン酸Naへ切替で330nmが低下した実績と整合）。</a:t>
-            </a:r>
-          </a:p>
-          <a:p>
-            <a:r>
-              <a:rPr sz="1300" b="1">
+              <a:t>温度を下げると、本来は熱で分解されるアルデヒド・前駆体が分解されずに重い形で下流（DEG）へ回る。MEG-HUVは改善したが、DEG色相は数日遅れて悪化した（時差）。</a:t>
+            </a:r>
+          </a:p>
+          <a:p>
+            <a:r>
+              <a:rPr sz="1200" b="1">
                 <a:solidFill>
                   <a:srgbClr val="005BAB"/>
                 </a:solidFill>
@@ -19712,7 +19713,7 @@
                 <a:ea typeface="游ゴシック"/>
                 <a:cs typeface="游ゴシック"/>
               </a:rPr>
-              <a:t>→ スタートアップ時はNaOH非投入</a:t>
+              <a:t>→ スタートアップ時はMEG塔温度を下げない</a:t>
             </a:r>
           </a:p>
         </p:txBody>
@@ -19725,8 +19726,8 @@
         </p:nvSpPr>
         <p:spPr>
           <a:xfrm>
-            <a:off x="548640" y="4718304"/>
-            <a:ext cx="11064240" cy="1143000"/>
+            <a:off x="548640" y="4379976"/>
+            <a:ext cx="11064240" cy="914400"/>
           </a:xfrm>
           <a:prstGeom prst="roundRect">
             <a:avLst/>
@@ -19761,7 +19762,88 @@
           <a:p>
             <a:pPr algn="ctr"/>
             <a:r>
-              <a:rPr sz="1450" b="1">
+              <a:rPr sz="1350" b="1">
+                <a:solidFill>
+                  <a:srgbClr val="003F7E"/>
+                </a:solidFill>
+                <a:latin typeface="游ゴシック"/>
+                <a:ea typeface="游ゴシック"/>
+                <a:cs typeface="游ゴシック"/>
+              </a:rPr>
+              <a:t>【塩基条件（苛性ソーダ）が縮合を後押しした（促進）】 </a:t>
+            </a:r>
+            <a:r>
+              <a:rPr sz="1200">
+                <a:solidFill>
+                  <a:srgbClr val="222222"/>
+                </a:solidFill>
+                <a:latin typeface="游ゴシック"/>
+                <a:ea typeface="游ゴシック"/>
+                <a:cs typeface="游ゴシック"/>
+              </a:rPr>
+              <a:t>NaOHの塩基がアルドール縮合を促進する側に働いた（NaOHからリン酸Naへ切替で330nmが低下した実績と整合）。</a:t>
+            </a:r>
+          </a:p>
+          <a:p>
+            <a:r>
+              <a:rPr sz="1200" b="1">
+                <a:solidFill>
+                  <a:srgbClr val="005BAB"/>
+                </a:solidFill>
+                <a:latin typeface="游ゴシック"/>
+                <a:ea typeface="游ゴシック"/>
+                <a:cs typeface="游ゴシック"/>
+              </a:rPr>
+              <a:t>→ スタートアップ時はNaOH非投入</a:t>
+            </a:r>
+          </a:p>
+        </p:txBody>
+      </p:sp>
+      <p:sp>
+        <p:nvSpPr>
+          <p:cNvPr id="7" name="Rounded Rectangle 6"/>
+          <p:cNvSpPr/>
+          <p:nvPr/>
+        </p:nvSpPr>
+        <p:spPr>
+          <a:xfrm>
+            <a:off x="548640" y="5404104"/>
+            <a:ext cx="11064240" cy="914400"/>
+          </a:xfrm>
+          <a:prstGeom prst="roundRect">
+            <a:avLst/>
+          </a:prstGeom>
+          <a:solidFill>
+            <a:srgbClr val="EBEFF2"/>
+          </a:solidFill>
+          <a:ln w="12700">
+            <a:solidFill>
+              <a:srgbClr val="C9D2D8"/>
+            </a:solidFill>
+          </a:ln>
+          <a:effectLst/>
+        </p:spPr>
+        <p:style>
+          <a:lnRef idx="1">
+            <a:schemeClr val="accent1"/>
+          </a:lnRef>
+          <a:fillRef idx="3">
+            <a:schemeClr val="accent1"/>
+          </a:fillRef>
+          <a:effectRef idx="2">
+            <a:schemeClr val="accent1"/>
+          </a:effectRef>
+          <a:fontRef idx="minor">
+            <a:schemeClr val="lt1"/>
+          </a:fontRef>
+        </p:style>
+        <p:txBody>
+          <a:bodyPr rtlCol="0" anchor="ctr" wrap="square" lIns="146304" rIns="109728"/>
+          <a:lstStyle/>
+          <a:p>
+            <a:pPr algn="ctr"/>
+            <a:r>
+              <a:rPr sz="1350" b="1">
                 <a:solidFill>
                   <a:srgbClr val="003F7E"/>
                 </a:solidFill>
@@ -19772,7 +19854,7 @@
               <a:t>【DEG留分には樹脂（IER）が無い（DEG特有の事情）】 </a:t>
             </a:r>
             <a:r>
-              <a:rPr sz="1300">
+              <a:rPr sz="1200">
                 <a:solidFill>
                   <a:srgbClr val="222222"/>
                 </a:solidFill>
@@ -19785,7 +19867,7 @@
           </a:p>
           <a:p>
             <a:r>
-              <a:rPr sz="1300" b="1">
+              <a:rPr sz="1200" b="1">
                 <a:solidFill>
                   <a:srgbClr val="005BAB"/>
                 </a:solidFill>
@@ -23331,7 +23413,7 @@
                           <a:ea typeface="游ゴシック"/>
                           <a:cs typeface="游ゴシック"/>
                         </a:rPr>
-                        <a:t>水和反応でEGを生成。ここでアルデヒドがグリコールと共存し始める。</a:t>
+                        <a:t>水和反応でEGを生成。ここはまだ水が多く、アルドール縮合は進みにくい。アルデヒドは主に遊離のままグリコールと共存して運ばれる。</a:t>
                       </a:r>
                     </a:p>
                   </a:txBody>
@@ -23355,7 +23437,7 @@
                           <a:ea typeface="游ゴシック"/>
                           <a:cs typeface="游ゴシック"/>
                         </a:rPr>
-                        <a:t>アルデヒドの大半は蒸気側からパージで系外へ。軽いアルデヒドは抜けるが、一部は下流へ持ち込まれ得る。</a:t>
+                        <a:t>水が多い環境では縮合は進みにくい。アルデヒドの大半は蒸気側からパージで系外へ抜け、一部は遊離のまま下流へ持ち込まれ得る。</a:t>
                       </a:r>
                     </a:p>
                   </a:txBody>
@@ -23597,7 +23679,7 @@
                           <a:ea typeface="游ゴシック"/>
                           <a:cs typeface="游ゴシック"/>
                         </a:rPr>
-                        <a:t>活性金属がなく、着色の生成場ではない。C-1502の見かけの生成は循環由来で通過点（要追検証）。</a:t>
+                        <a:t>活性金属がなく、着色の生成場ではない。C-1502の見かけの生成は循環由来で通過点（要追検証）。温度を下げるとアルデヒド・前駆体が分解されず下流（DEG）へ回りやすい。</a:t>
                       </a:r>
                     </a:p>
                   </a:txBody>
@@ -23652,6 +23734,1430 @@
                   <a:tcPr anchor="t" marL="27432" marR="18288" marT="18288" marB="18288">
                     <a:solidFill>
                       <a:srgbClr val="DCE6EF"/>
+                    </a:solidFill>
+                  </a:tcPr>
+                </a:tc>
+              </a:tr>
+            </a:tbl>
+          </a:graphicData>
+        </a:graphic>
+      </p:graphicFrame>
+    </p:spTree>
+  </p:cSld>
+  <p:clrMapOvr>
+    <a:masterClrMapping/>
+  </p:clrMapOvr>
+</p:sld>
+</file>
+
+<file path=ppt/slides/slide24.xml><?xml version="1.0" encoding="utf-8"?>
+<p:sld xmlns:a="http://schemas.openxmlformats.org/drawingml/2006/main" xmlns:p="http://schemas.openxmlformats.org/presentationml/2006/main" xmlns:r="http://schemas.openxmlformats.org/officeDocument/2006/relationships">
+  <p:cSld>
+    <p:spTree>
+      <p:nvGrpSpPr>
+        <p:cNvPr id="1" name=""/>
+        <p:cNvGrpSpPr/>
+        <p:nvPr/>
+      </p:nvGrpSpPr>
+      <p:grpSpPr/>
+      <p:sp>
+        <p:nvSpPr>
+          <p:cNvPr id="2" name="Title 1"/>
+          <p:cNvSpPr>
+            <a:spLocks noGrp="1"/>
+          </p:cNvSpPr>
+          <p:nvPr>
+            <p:ph type="title"/>
+          </p:nvPr>
+        </p:nvSpPr>
+        <p:spPr/>
+        <p:txBody>
+          <a:bodyPr/>
+          <a:lstStyle/>
+          <a:p>
+            <a:r>
+              <a:rPr sz="2400" b="1">
+                <a:solidFill>
+                  <a:srgbClr val="000000"/>
+                </a:solidFill>
+                <a:latin typeface="游ゴシック"/>
+                <a:ea typeface="游ゴシック"/>
+                <a:cs typeface="游ゴシック"/>
+              </a:rPr>
+              <a:t>（参考）候補の取捨選択（何を採り、何を落としたか）</a:t>
+            </a:r>
+          </a:p>
+        </p:txBody>
+      </p:sp>
+      <p:graphicFrame>
+        <p:nvGraphicFramePr>
+          <p:cNvPr id="3" name="Table 2"/>
+          <p:cNvGraphicFramePr>
+            <a:graphicFrameLocks noGrp="1"/>
+          </p:cNvGraphicFramePr>
+          <p:nvPr/>
+        </p:nvGraphicFramePr>
+        <p:xfrm>
+          <a:off x="365760" y="1325880"/>
+          <a:ext cx="11430000" cy="5166360"/>
+        </p:xfrm>
+        <a:graphic>
+          <a:graphicData uri="http://schemas.openxmlformats.org/drawingml/2006/table">
+            <a:tbl>
+              <a:tblPr firstRow="1" bandRow="1">
+                <a:tableStyleId>{5C22544A-7EE6-4342-B048-85BDC9FD1C3A}</a:tableStyleId>
+              </a:tblPr>
+              <a:tblGrid>
+                <a:gridCol w="3566160"/>
+                <a:gridCol w="1554480"/>
+                <a:gridCol w="6309360"/>
+              </a:tblGrid>
+              <a:tr h="287020">
+                <a:tc>
+                  <a:txBody>
+                    <a:bodyPr/>
+                    <a:lstStyle/>
+                    <a:p>
+                      <a:r>
+                        <a:rPr sz="850" b="1">
+                          <a:solidFill>
+                            <a:srgbClr val="003F7E"/>
+                          </a:solidFill>
+                          <a:latin typeface="游ゴシック"/>
+                          <a:ea typeface="游ゴシック"/>
+                          <a:cs typeface="游ゴシック"/>
+                        </a:rPr>
+                        <a:t>候補（仮説・観測）</a:t>
+                      </a:r>
+                    </a:p>
+                  </a:txBody>
+                  <a:tcPr anchor="ctr" marL="36576" marR="27432" marT="9144" marB="9144">
+                    <a:solidFill>
+                      <a:srgbClr val="EBEFF2"/>
+                    </a:solidFill>
+                  </a:tcPr>
+                </a:tc>
+                <a:tc>
+                  <a:txBody>
+                    <a:bodyPr/>
+                    <a:lstStyle/>
+                    <a:p>
+                      <a:pPr algn="ctr"/>
+                      <a:r>
+                        <a:rPr sz="850" b="1">
+                          <a:solidFill>
+                            <a:srgbClr val="003F7E"/>
+                          </a:solidFill>
+                          <a:latin typeface="游ゴシック"/>
+                          <a:ea typeface="游ゴシック"/>
+                          <a:cs typeface="游ゴシック"/>
+                        </a:rPr>
+                        <a:t>採否</a:t>
+                      </a:r>
+                    </a:p>
+                  </a:txBody>
+                  <a:tcPr anchor="ctr" marL="36576" marR="27432" marT="9144" marB="9144">
+                    <a:solidFill>
+                      <a:srgbClr val="EBEFF2"/>
+                    </a:solidFill>
+                  </a:tcPr>
+                </a:tc>
+                <a:tc>
+                  <a:txBody>
+                    <a:bodyPr/>
+                    <a:lstStyle/>
+                    <a:p>
+                      <a:r>
+                        <a:rPr sz="850" b="1">
+                          <a:solidFill>
+                            <a:srgbClr val="003F7E"/>
+                          </a:solidFill>
+                          <a:latin typeface="游ゴシック"/>
+                          <a:ea typeface="游ゴシック"/>
+                          <a:cs typeface="游ゴシック"/>
+                        </a:rPr>
+                        <a:t>理由</a:t>
+                      </a:r>
+                    </a:p>
+                  </a:txBody>
+                  <a:tcPr anchor="ctr" marL="36576" marR="27432" marT="9144" marB="9144">
+                    <a:solidFill>
+                      <a:srgbClr val="EBEFF2"/>
+                    </a:solidFill>
+                  </a:tcPr>
+                </a:tc>
+              </a:tr>
+              <a:tr h="287020">
+                <a:tc>
+                  <a:txBody>
+                    <a:bodyPr/>
+                    <a:lstStyle/>
+                    <a:p>
+                      <a:r>
+                        <a:rPr sz="750" b="1">
+                          <a:solidFill>
+                            <a:srgbClr val="003F7E"/>
+                          </a:solidFill>
+                          <a:latin typeface="游ゴシック"/>
+                          <a:ea typeface="游ゴシック"/>
+                          <a:cs typeface="游ゴシック"/>
+                        </a:rPr>
+                        <a:t>アルドール縮合→前駆体→タンク熟成で450nm</a:t>
+                      </a:r>
+                    </a:p>
+                  </a:txBody>
+                  <a:tcPr anchor="ctr" marL="36576" marR="27432" marT="9144" marB="9144">
+                    <a:solidFill>
+                      <a:srgbClr val="E8F1E5"/>
+                    </a:solidFill>
+                  </a:tcPr>
+                </a:tc>
+                <a:tc>
+                  <a:txBody>
+                    <a:bodyPr/>
+                    <a:lstStyle/>
+                    <a:p>
+                      <a:pPr algn="ctr"/>
+                      <a:r>
+                        <a:rPr sz="750" b="1">
+                          <a:solidFill>
+                            <a:srgbClr val="1F7A1F"/>
+                          </a:solidFill>
+                          <a:latin typeface="游ゴシック"/>
+                          <a:ea typeface="游ゴシック"/>
+                          <a:cs typeface="游ゴシック"/>
+                        </a:rPr>
+                        <a:t>採用（主筋）</a:t>
+                      </a:r>
+                    </a:p>
+                  </a:txBody>
+                  <a:tcPr anchor="ctr" marL="36576" marR="27432" marT="9144" marB="9144">
+                    <a:solidFill>
+                      <a:srgbClr val="E8F1E5"/>
+                    </a:solidFill>
+                  </a:tcPr>
+                </a:tc>
+                <a:tc>
+                  <a:txBody>
+                    <a:bodyPr/>
+                    <a:lstStyle/>
+                    <a:p>
+                      <a:r>
+                        <a:rPr sz="750" b="0">
+                          <a:solidFill>
+                            <a:srgbClr val="222222"/>
+                          </a:solidFill>
+                          <a:latin typeface="游ゴシック"/>
+                          <a:ea typeface="游ゴシック"/>
+                          <a:cs typeface="游ゴシック"/>
+                        </a:rPr>
+                        <a:t>GPC・GCでポリエナール確定。酸素で止まる・APHA30で頭打ちの事実と整合。</a:t>
+                      </a:r>
+                    </a:p>
+                  </a:txBody>
+                  <a:tcPr anchor="ctr" marL="36576" marR="27432" marT="9144" marB="9144">
+                    <a:solidFill>
+                      <a:srgbClr val="E8F1E5"/>
+                    </a:solidFill>
+                  </a:tcPr>
+                </a:tc>
+              </a:tr>
+              <a:tr h="287020">
+                <a:tc>
+                  <a:txBody>
+                    <a:bodyPr/>
+                    <a:lstStyle/>
+                    <a:p>
+                      <a:r>
+                        <a:rPr sz="750" b="1">
+                          <a:solidFill>
+                            <a:srgbClr val="003F7E"/>
+                          </a:solidFill>
+                          <a:latin typeface="游ゴシック"/>
+                          <a:ea typeface="游ゴシック"/>
+                          <a:cs typeface="游ゴシック"/>
+                        </a:rPr>
+                        <a:t>水が多い上流では縮合が進みにくい</a:t>
+                      </a:r>
+                    </a:p>
+                  </a:txBody>
+                  <a:tcPr anchor="ctr" marL="36576" marR="27432" marT="9144" marB="9144">
+                    <a:solidFill>
+                      <a:srgbClr val="E8F1E5"/>
+                    </a:solidFill>
+                  </a:tcPr>
+                </a:tc>
+                <a:tc>
+                  <a:txBody>
+                    <a:bodyPr/>
+                    <a:lstStyle/>
+                    <a:p>
+                      <a:pPr algn="ctr"/>
+                      <a:r>
+                        <a:rPr sz="750" b="1">
+                          <a:solidFill>
+                            <a:srgbClr val="1F7A1F"/>
+                          </a:solidFill>
+                          <a:latin typeface="游ゴシック"/>
+                          <a:ea typeface="游ゴシック"/>
+                          <a:cs typeface="游ゴシック"/>
+                        </a:rPr>
+                        <a:t>採用（条件）</a:t>
+                      </a:r>
+                    </a:p>
+                  </a:txBody>
+                  <a:tcPr anchor="ctr" marL="36576" marR="27432" marT="9144" marB="9144">
+                    <a:solidFill>
+                      <a:srgbClr val="E8F1E5"/>
+                    </a:solidFill>
+                  </a:tcPr>
+                </a:tc>
+                <a:tc>
+                  <a:txBody>
+                    <a:bodyPr/>
+                    <a:lstStyle/>
+                    <a:p>
+                      <a:r>
+                        <a:rPr sz="750" b="0">
+                          <a:solidFill>
+                            <a:srgbClr val="222222"/>
+                          </a:solidFill>
+                          <a:latin typeface="游ゴシック"/>
+                          <a:ea typeface="游ゴシック"/>
+                          <a:cs typeface="游ゴシック"/>
+                        </a:rPr>
+                        <a:t>アルドールは脱水反応。水が抜ける脱水以降で縮合が進む。</a:t>
+                      </a:r>
+                    </a:p>
+                  </a:txBody>
+                  <a:tcPr anchor="ctr" marL="36576" marR="27432" marT="9144" marB="9144">
+                    <a:solidFill>
+                      <a:srgbClr val="E8F1E5"/>
+                    </a:solidFill>
+                  </a:tcPr>
+                </a:tc>
+              </a:tr>
+              <a:tr h="287020">
+                <a:tc>
+                  <a:txBody>
+                    <a:bodyPr/>
+                    <a:lstStyle/>
+                    <a:p>
+                      <a:r>
+                        <a:rPr sz="750" b="1">
+                          <a:solidFill>
+                            <a:srgbClr val="003F7E"/>
+                          </a:solidFill>
+                          <a:latin typeface="游ゴシック"/>
+                          <a:ea typeface="游ゴシック"/>
+                          <a:cs typeface="游ゴシック"/>
+                        </a:rPr>
+                        <a:t>低水分が縮合を後押し</a:t>
+                      </a:r>
+                    </a:p>
+                  </a:txBody>
+                  <a:tcPr anchor="ctr" marL="36576" marR="27432" marT="9144" marB="9144">
+                    <a:solidFill>
+                      <a:srgbClr val="E8F1E5"/>
+                    </a:solidFill>
+                  </a:tcPr>
+                </a:tc>
+                <a:tc>
+                  <a:txBody>
+                    <a:bodyPr/>
+                    <a:lstStyle/>
+                    <a:p>
+                      <a:pPr algn="ctr"/>
+                      <a:r>
+                        <a:rPr sz="750" b="1">
+                          <a:solidFill>
+                            <a:srgbClr val="1F7A1F"/>
+                          </a:solidFill>
+                          <a:latin typeface="游ゴシック"/>
+                          <a:ea typeface="游ゴシック"/>
+                          <a:cs typeface="游ゴシック"/>
+                        </a:rPr>
+                        <a:t>採用（条件）</a:t>
+                      </a:r>
+                    </a:p>
+                  </a:txBody>
+                  <a:tcPr anchor="ctr" marL="36576" marR="27432" marT="9144" marB="9144">
+                    <a:solidFill>
+                      <a:srgbClr val="E8F1E5"/>
+                    </a:solidFill>
+                  </a:tcPr>
+                </a:tc>
+                <a:tc>
+                  <a:txBody>
+                    <a:bodyPr/>
+                    <a:lstStyle/>
+                    <a:p>
+                      <a:r>
+                        <a:rPr sz="750" b="0">
+                          <a:solidFill>
+                            <a:srgbClr val="222222"/>
+                          </a:solidFill>
+                          <a:latin typeface="游ゴシック"/>
+                          <a:ea typeface="游ゴシック"/>
+                          <a:cs typeface="游ゴシック"/>
+                        </a:rPr>
+                        <a:t>基礎研の見立てで水分感度2〜3割。</a:t>
+                      </a:r>
+                    </a:p>
+                  </a:txBody>
+                  <a:tcPr anchor="ctr" marL="36576" marR="27432" marT="9144" marB="9144">
+                    <a:solidFill>
+                      <a:srgbClr val="E8F1E5"/>
+                    </a:solidFill>
+                  </a:tcPr>
+                </a:tc>
+              </a:tr>
+              <a:tr h="287020">
+                <a:tc>
+                  <a:txBody>
+                    <a:bodyPr/>
+                    <a:lstStyle/>
+                    <a:p>
+                      <a:r>
+                        <a:rPr sz="750" b="1">
+                          <a:solidFill>
+                            <a:srgbClr val="003F7E"/>
+                          </a:solidFill>
+                          <a:latin typeface="游ゴシック"/>
+                          <a:ea typeface="游ゴシック"/>
+                          <a:cs typeface="游ゴシック"/>
+                        </a:rPr>
+                        <a:t>塩基（苛性ソーダ）がアルドールを促進</a:t>
+                      </a:r>
+                    </a:p>
+                  </a:txBody>
+                  <a:tcPr anchor="ctr" marL="36576" marR="27432" marT="9144" marB="9144">
+                    <a:solidFill>
+                      <a:srgbClr val="E8F1E5"/>
+                    </a:solidFill>
+                  </a:tcPr>
+                </a:tc>
+                <a:tc>
+                  <a:txBody>
+                    <a:bodyPr/>
+                    <a:lstStyle/>
+                    <a:p>
+                      <a:pPr algn="ctr"/>
+                      <a:r>
+                        <a:rPr sz="750" b="1">
+                          <a:solidFill>
+                            <a:srgbClr val="1F7A1F"/>
+                          </a:solidFill>
+                          <a:latin typeface="游ゴシック"/>
+                          <a:ea typeface="游ゴシック"/>
+                          <a:cs typeface="游ゴシック"/>
+                        </a:rPr>
+                        <a:t>採用（条件）</a:t>
+                      </a:r>
+                    </a:p>
+                  </a:txBody>
+                  <a:tcPr anchor="ctr" marL="36576" marR="27432" marT="9144" marB="9144">
+                    <a:solidFill>
+                      <a:srgbClr val="E8F1E5"/>
+                    </a:solidFill>
+                  </a:tcPr>
+                </a:tc>
+                <a:tc>
+                  <a:txBody>
+                    <a:bodyPr/>
+                    <a:lstStyle/>
+                    <a:p>
+                      <a:r>
+                        <a:rPr sz="750" b="0">
+                          <a:solidFill>
+                            <a:srgbClr val="222222"/>
+                          </a:solidFill>
+                          <a:latin typeface="游ゴシック"/>
+                          <a:ea typeface="游ゴシック"/>
+                          <a:cs typeface="游ゴシック"/>
+                        </a:rPr>
+                        <a:t>NaOH→リン酸Na切替で330nm低下と整合。</a:t>
+                      </a:r>
+                    </a:p>
+                  </a:txBody>
+                  <a:tcPr anchor="ctr" marL="36576" marR="27432" marT="9144" marB="9144">
+                    <a:solidFill>
+                      <a:srgbClr val="E8F1E5"/>
+                    </a:solidFill>
+                  </a:tcPr>
+                </a:tc>
+              </a:tr>
+              <a:tr h="287020">
+                <a:tc>
+                  <a:txBody>
+                    <a:bodyPr/>
+                    <a:lstStyle/>
+                    <a:p>
+                      <a:r>
+                        <a:rPr sz="750" b="1">
+                          <a:solidFill>
+                            <a:srgbClr val="003F7E"/>
+                          </a:solidFill>
+                          <a:latin typeface="游ゴシック"/>
+                          <a:ea typeface="游ゴシック"/>
+                          <a:cs typeface="游ゴシック"/>
+                        </a:rPr>
+                        <a:t>温度ダウンが前駆体を下流へ回す</a:t>
+                      </a:r>
+                    </a:p>
+                  </a:txBody>
+                  <a:tcPr anchor="ctr" marL="36576" marR="27432" marT="9144" marB="9144">
+                    <a:solidFill>
+                      <a:srgbClr val="E8F1E5"/>
+                    </a:solidFill>
+                  </a:tcPr>
+                </a:tc>
+                <a:tc>
+                  <a:txBody>
+                    <a:bodyPr/>
+                    <a:lstStyle/>
+                    <a:p>
+                      <a:pPr algn="ctr"/>
+                      <a:r>
+                        <a:rPr sz="750" b="1">
+                          <a:solidFill>
+                            <a:srgbClr val="1F7A1F"/>
+                          </a:solidFill>
+                          <a:latin typeface="游ゴシック"/>
+                          <a:ea typeface="游ゴシック"/>
+                          <a:cs typeface="游ゴシック"/>
+                        </a:rPr>
+                        <a:t>採用（条件）</a:t>
+                      </a:r>
+                    </a:p>
+                  </a:txBody>
+                  <a:tcPr anchor="ctr" marL="36576" marR="27432" marT="9144" marB="9144">
+                    <a:solidFill>
+                      <a:srgbClr val="E8F1E5"/>
+                    </a:solidFill>
+                  </a:tcPr>
+                </a:tc>
+                <a:tc>
+                  <a:txBody>
+                    <a:bodyPr/>
+                    <a:lstStyle/>
+                    <a:p>
+                      <a:r>
+                        <a:rPr sz="750" b="0">
+                          <a:solidFill>
+                            <a:srgbClr val="222222"/>
+                          </a:solidFill>
+                          <a:latin typeface="游ゴシック"/>
+                          <a:ea typeface="游ゴシック"/>
+                          <a:cs typeface="游ゴシック"/>
+                        </a:rPr>
+                        <a:t>MEG-HUV改善とDEG悪化の時差と整合。対応＝温度を下げない。</a:t>
+                      </a:r>
+                    </a:p>
+                  </a:txBody>
+                  <a:tcPr anchor="ctr" marL="36576" marR="27432" marT="9144" marB="9144">
+                    <a:solidFill>
+                      <a:srgbClr val="E8F1E5"/>
+                    </a:solidFill>
+                  </a:tcPr>
+                </a:tc>
+              </a:tr>
+              <a:tr h="287020">
+                <a:tc>
+                  <a:txBody>
+                    <a:bodyPr/>
+                    <a:lstStyle/>
+                    <a:p>
+                      <a:r>
+                        <a:rPr sz="750" b="1">
+                          <a:solidFill>
+                            <a:srgbClr val="003F7E"/>
+                          </a:solidFill>
+                          <a:latin typeface="游ゴシック"/>
+                          <a:ea typeface="游ゴシック"/>
+                          <a:cs typeface="游ゴシック"/>
+                        </a:rPr>
+                        <a:t>DEG留分に樹脂（IER）が無い</a:t>
+                      </a:r>
+                    </a:p>
+                  </a:txBody>
+                  <a:tcPr anchor="ctr" marL="36576" marR="27432" marT="9144" marB="9144">
+                    <a:solidFill>
+                      <a:srgbClr val="E8F1E5"/>
+                    </a:solidFill>
+                  </a:tcPr>
+                </a:tc>
+                <a:tc>
+                  <a:txBody>
+                    <a:bodyPr/>
+                    <a:lstStyle/>
+                    <a:p>
+                      <a:pPr algn="ctr"/>
+                      <a:r>
+                        <a:rPr sz="750" b="1">
+                          <a:solidFill>
+                            <a:srgbClr val="1F7A1F"/>
+                          </a:solidFill>
+                          <a:latin typeface="游ゴシック"/>
+                          <a:ea typeface="游ゴシック"/>
+                          <a:cs typeface="游ゴシック"/>
+                        </a:rPr>
+                        <a:t>採用（条件）</a:t>
+                      </a:r>
+                    </a:p>
+                  </a:txBody>
+                  <a:tcPr anchor="ctr" marL="36576" marR="27432" marT="9144" marB="9144">
+                    <a:solidFill>
+                      <a:srgbClr val="E8F1E5"/>
+                    </a:solidFill>
+                  </a:tcPr>
+                </a:tc>
+                <a:tc>
+                  <a:txBody>
+                    <a:bodyPr/>
+                    <a:lstStyle/>
+                    <a:p>
+                      <a:r>
+                        <a:rPr sz="750" b="0">
+                          <a:solidFill>
+                            <a:srgbClr val="222222"/>
+                          </a:solidFill>
+                          <a:latin typeface="游ゴシック"/>
+                          <a:ea typeface="游ゴシック"/>
+                          <a:cs typeface="游ゴシック"/>
+                        </a:rPr>
+                        <a:t>DEG特有。前駆体がそのまま製品に残る。</a:t>
+                      </a:r>
+                    </a:p>
+                  </a:txBody>
+                  <a:tcPr anchor="ctr" marL="36576" marR="27432" marT="9144" marB="9144">
+                    <a:solidFill>
+                      <a:srgbClr val="E8F1E5"/>
+                    </a:solidFill>
+                  </a:tcPr>
+                </a:tc>
+              </a:tr>
+              <a:tr h="287020">
+                <a:tc>
+                  <a:txBody>
+                    <a:bodyPr/>
+                    <a:lstStyle/>
+                    <a:p>
+                      <a:r>
+                        <a:rPr sz="750" b="1">
+                          <a:solidFill>
+                            <a:srgbClr val="003F7E"/>
+                          </a:solidFill>
+                          <a:latin typeface="游ゴシック"/>
+                          <a:ea typeface="游ゴシック"/>
+                          <a:cs typeface="游ゴシック"/>
+                        </a:rPr>
+                        <a:t>塔間循環でC-1502に見かけ生成</a:t>
+                      </a:r>
+                    </a:p>
+                  </a:txBody>
+                  <a:tcPr anchor="ctr" marL="36576" marR="27432" marT="9144" marB="9144">
+                    <a:solidFill>
+                      <a:srgbClr val="E8F1E5"/>
+                    </a:solidFill>
+                  </a:tcPr>
+                </a:tc>
+                <a:tc>
+                  <a:txBody>
+                    <a:bodyPr/>
+                    <a:lstStyle/>
+                    <a:p>
+                      <a:pPr algn="ctr"/>
+                      <a:r>
+                        <a:rPr sz="750" b="1">
+                          <a:solidFill>
+                            <a:srgbClr val="1F7A1F"/>
+                          </a:solidFill>
+                          <a:latin typeface="游ゴシック"/>
+                          <a:ea typeface="游ゴシック"/>
+                          <a:cs typeface="游ゴシック"/>
+                        </a:rPr>
+                        <a:t>採用（解釈）</a:t>
+                      </a:r>
+                    </a:p>
+                  </a:txBody>
+                  <a:tcPr anchor="ctr" marL="36576" marR="27432" marT="9144" marB="9144">
+                    <a:solidFill>
+                      <a:srgbClr val="E8F1E5"/>
+                    </a:solidFill>
+                  </a:tcPr>
+                </a:tc>
+                <a:tc>
+                  <a:txBody>
+                    <a:bodyPr/>
+                    <a:lstStyle/>
+                    <a:p>
+                      <a:r>
+                        <a:rPr sz="750" b="0">
+                          <a:solidFill>
+                            <a:srgbClr val="222222"/>
+                          </a:solidFill>
+                          <a:latin typeface="游ゴシック"/>
+                          <a:ea typeface="游ゴシック"/>
+                          <a:cs typeface="游ゴシック"/>
+                        </a:rPr>
+                        <a:t>収支と整合。ただし要追検証。</a:t>
+                      </a:r>
+                    </a:p>
+                  </a:txBody>
+                  <a:tcPr anchor="ctr" marL="36576" marR="27432" marT="9144" marB="9144">
+                    <a:solidFill>
+                      <a:srgbClr val="E8F1E5"/>
+                    </a:solidFill>
+                  </a:tcPr>
+                </a:tc>
+              </a:tr>
+              <a:tr h="287020">
+                <a:tc>
+                  <a:txBody>
+                    <a:bodyPr/>
+                    <a:lstStyle/>
+                    <a:p>
+                      <a:r>
+                        <a:rPr sz="750" b="1">
+                          <a:solidFill>
+                            <a:srgbClr val="003F7E"/>
+                          </a:solidFill>
+                          <a:latin typeface="游ゴシック"/>
+                          <a:ea typeface="游ゴシック"/>
+                          <a:cs typeface="游ゴシック"/>
+                        </a:rPr>
+                        <a:t>リン酸の緩和（pH低下／金属不活性化）</a:t>
+                      </a:r>
+                    </a:p>
+                  </a:txBody>
+                  <a:tcPr anchor="ctr" marL="36576" marR="27432" marT="9144" marB="9144">
+                    <a:solidFill>
+                      <a:srgbClr val="E8F1E5"/>
+                    </a:solidFill>
+                  </a:tcPr>
+                </a:tc>
+                <a:tc>
+                  <a:txBody>
+                    <a:bodyPr/>
+                    <a:lstStyle/>
+                    <a:p>
+                      <a:pPr algn="ctr"/>
+                      <a:r>
+                        <a:rPr sz="750" b="1">
+                          <a:solidFill>
+                            <a:srgbClr val="1F7A1F"/>
+                          </a:solidFill>
+                          <a:latin typeface="游ゴシック"/>
+                          <a:ea typeface="游ゴシック"/>
+                          <a:cs typeface="游ゴシック"/>
+                        </a:rPr>
+                        <a:t>採用（緩和・要検証）</a:t>
+                      </a:r>
+                    </a:p>
+                  </a:txBody>
+                  <a:tcPr anchor="ctr" marL="36576" marR="27432" marT="9144" marB="9144">
+                    <a:solidFill>
+                      <a:srgbClr val="E8F1E5"/>
+                    </a:solidFill>
+                  </a:tcPr>
+                </a:tc>
+                <a:tc>
+                  <a:txBody>
+                    <a:bodyPr/>
+                    <a:lstStyle/>
+                    <a:p>
+                      <a:r>
+                        <a:rPr sz="750" b="0">
+                          <a:solidFill>
+                            <a:srgbClr val="222222"/>
+                          </a:solidFill>
+                          <a:latin typeface="游ゴシック"/>
+                          <a:ea typeface="游ゴシック"/>
+                          <a:cs typeface="游ゴシック"/>
+                        </a:rPr>
+                        <a:t>効き方はC-1503壁面のP分析で切り分け。</a:t>
+                      </a:r>
+                    </a:p>
+                  </a:txBody>
+                  <a:tcPr anchor="ctr" marL="36576" marR="27432" marT="9144" marB="9144">
+                    <a:solidFill>
+                      <a:srgbClr val="E8F1E5"/>
+                    </a:solidFill>
+                  </a:tcPr>
+                </a:tc>
+              </a:tr>
+              <a:tr h="287020">
+                <a:tc>
+                  <a:txBody>
+                    <a:bodyPr/>
+                    <a:lstStyle/>
+                    <a:p>
+                      <a:r>
+                        <a:rPr sz="750" b="1">
+                          <a:solidFill>
+                            <a:srgbClr val="003F7E"/>
+                          </a:solidFill>
+                          <a:latin typeface="游ゴシック"/>
+                          <a:ea typeface="游ゴシック"/>
+                          <a:cs typeface="游ゴシック"/>
+                        </a:rPr>
+                        <a:t>UV450nmで早期判定</a:t>
+                      </a:r>
+                    </a:p>
+                  </a:txBody>
+                  <a:tcPr anchor="ctr" marL="36576" marR="27432" marT="9144" marB="9144">
+                    <a:solidFill>
+                      <a:srgbClr val="E8F1E5"/>
+                    </a:solidFill>
+                  </a:tcPr>
+                </a:tc>
+                <a:tc>
+                  <a:txBody>
+                    <a:bodyPr/>
+                    <a:lstStyle/>
+                    <a:p>
+                      <a:pPr algn="ctr"/>
+                      <a:r>
+                        <a:rPr sz="750" b="1">
+                          <a:solidFill>
+                            <a:srgbClr val="1F7A1F"/>
+                          </a:solidFill>
+                          <a:latin typeface="游ゴシック"/>
+                          <a:ea typeface="游ゴシック"/>
+                          <a:cs typeface="游ゴシック"/>
+                        </a:rPr>
+                        <a:t>採用（指標）</a:t>
+                      </a:r>
+                    </a:p>
+                  </a:txBody>
+                  <a:tcPr anchor="ctr" marL="36576" marR="27432" marT="9144" marB="9144">
+                    <a:solidFill>
+                      <a:srgbClr val="E8F1E5"/>
+                    </a:solidFill>
+                  </a:tcPr>
+                </a:tc>
+                <a:tc>
+                  <a:txBody>
+                    <a:bodyPr/>
+                    <a:lstStyle/>
+                    <a:p>
+                      <a:r>
+                        <a:rPr sz="750" b="0">
+                          <a:solidFill>
+                            <a:srgbClr val="222222"/>
+                          </a:solidFill>
+                          <a:latin typeface="游ゴシック"/>
+                          <a:ea typeface="游ゴシック"/>
+                          <a:cs typeface="游ゴシック"/>
+                        </a:rPr>
+                        <a:t>T-604実績。APHAより早く判別。</a:t>
+                      </a:r>
+                    </a:p>
+                  </a:txBody>
+                  <a:tcPr anchor="ctr" marL="36576" marR="27432" marT="9144" marB="9144">
+                    <a:solidFill>
+                      <a:srgbClr val="E8F1E5"/>
+                    </a:solidFill>
+                  </a:tcPr>
+                </a:tc>
+              </a:tr>
+              <a:tr h="287020">
+                <a:tc>
+                  <a:txBody>
+                    <a:bodyPr/>
+                    <a:lstStyle/>
+                    <a:p>
+                      <a:r>
+                        <a:rPr sz="750" b="1">
+                          <a:solidFill>
+                            <a:srgbClr val="003F7E"/>
+                          </a:solidFill>
+                          <a:latin typeface="游ゴシック"/>
+                          <a:ea typeface="游ゴシック"/>
+                          <a:cs typeface="游ゴシック"/>
+                        </a:rPr>
+                        <a:t>鉄サビが450nmの触媒</a:t>
+                      </a:r>
+                    </a:p>
+                  </a:txBody>
+                  <a:tcPr anchor="ctr" marL="36576" marR="27432" marT="9144" marB="9144">
+                    <a:solidFill>
+                      <a:srgbClr val="F3D9D4"/>
+                    </a:solidFill>
+                  </a:tcPr>
+                </a:tc>
+                <a:tc>
+                  <a:txBody>
+                    <a:bodyPr/>
+                    <a:lstStyle/>
+                    <a:p>
+                      <a:pPr algn="ctr"/>
+                      <a:r>
+                        <a:rPr sz="750" b="1">
+                          <a:solidFill>
+                            <a:srgbClr val="B03030"/>
+                          </a:solidFill>
+                          <a:latin typeface="游ゴシック"/>
+                          <a:ea typeface="游ゴシック"/>
+                          <a:cs typeface="游ゴシック"/>
+                        </a:rPr>
+                        <a:t>不採用（副次）</a:t>
+                      </a:r>
+                    </a:p>
+                  </a:txBody>
+                  <a:tcPr anchor="ctr" marL="36576" marR="27432" marT="9144" marB="9144">
+                    <a:solidFill>
+                      <a:srgbClr val="F3D9D4"/>
+                    </a:solidFill>
+                  </a:tcPr>
+                </a:tc>
+                <a:tc>
+                  <a:txBody>
+                    <a:bodyPr/>
+                    <a:lstStyle/>
+                    <a:p>
+                      <a:r>
+                        <a:rPr sz="750" b="0">
+                          <a:solidFill>
+                            <a:srgbClr val="222222"/>
+                          </a:solidFill>
+                          <a:latin typeface="游ゴシック"/>
+                          <a:ea typeface="游ゴシック"/>
+                          <a:cs typeface="游ゴシック"/>
+                        </a:rPr>
+                        <a:t>付着物＋DEGは380nmのみ・残液APHA30で頭打ち＝触媒でない。局所380nmに限定。</a:t>
+                      </a:r>
+                    </a:p>
+                  </a:txBody>
+                  <a:tcPr anchor="ctr" marL="36576" marR="27432" marT="9144" marB="9144">
+                    <a:solidFill>
+                      <a:srgbClr val="F3D9D4"/>
+                    </a:solidFill>
+                  </a:tcPr>
+                </a:tc>
+              </a:tr>
+              <a:tr h="287020">
+                <a:tc>
+                  <a:txBody>
+                    <a:bodyPr/>
+                    <a:lstStyle/>
+                    <a:p>
+                      <a:r>
+                        <a:rPr sz="750" b="1">
+                          <a:solidFill>
+                            <a:srgbClr val="003F7E"/>
+                          </a:solidFill>
+                          <a:latin typeface="游ゴシック"/>
+                          <a:ea typeface="游ゴシック"/>
+                          <a:cs typeface="游ゴシック"/>
+                        </a:rPr>
+                        <a:t>アセタール化で重質化しDEGまで輸送（HEME/開鎖）</a:t>
+                      </a:r>
+                    </a:p>
+                  </a:txBody>
+                  <a:tcPr anchor="ctr" marL="36576" marR="27432" marT="9144" marB="9144">
+                    <a:solidFill>
+                      <a:srgbClr val="F3D9D4"/>
+                    </a:solidFill>
+                  </a:tcPr>
+                </a:tc>
+                <a:tc>
+                  <a:txBody>
+                    <a:bodyPr/>
+                    <a:lstStyle/>
+                    <a:p>
+                      <a:pPr algn="ctr"/>
+                      <a:r>
+                        <a:rPr sz="750" b="1">
+                          <a:solidFill>
+                            <a:srgbClr val="B03030"/>
+                          </a:solidFill>
+                          <a:latin typeface="游ゴシック"/>
+                          <a:ea typeface="游ゴシック"/>
+                          <a:cs typeface="游ゴシック"/>
+                        </a:rPr>
+                        <a:t>不採用</a:t>
+                      </a:r>
+                    </a:p>
+                  </a:txBody>
+                  <a:tcPr anchor="ctr" marL="36576" marR="27432" marT="9144" marB="9144">
+                    <a:solidFill>
+                      <a:srgbClr val="F3D9D4"/>
+                    </a:solidFill>
+                  </a:tcPr>
+                </a:tc>
+                <a:tc>
+                  <a:txBody>
+                    <a:bodyPr/>
+                    <a:lstStyle/>
+                    <a:p>
+                      <a:r>
+                        <a:rPr sz="750" b="0">
+                          <a:solidFill>
+                            <a:srgbClr val="222222"/>
+                          </a:solidFill>
+                          <a:latin typeface="游ゴシック"/>
+                          <a:ea typeface="游ゴシック"/>
+                          <a:cs typeface="游ゴシック"/>
+                        </a:rPr>
+                        <a:t>環状アセタールは沸点82℃で揮発し反証。縮合体としての高沸点化に一本化。</a:t>
+                      </a:r>
+                    </a:p>
+                  </a:txBody>
+                  <a:tcPr anchor="ctr" marL="36576" marR="27432" marT="9144" marB="9144">
+                    <a:solidFill>
+                      <a:srgbClr val="F3D9D4"/>
+                    </a:solidFill>
+                  </a:tcPr>
+                </a:tc>
+              </a:tr>
+              <a:tr h="287020">
+                <a:tc>
+                  <a:txBody>
+                    <a:bodyPr/>
+                    <a:lstStyle/>
+                    <a:p>
+                      <a:r>
+                        <a:rPr sz="750" b="1">
+                          <a:solidFill>
+                            <a:srgbClr val="003F7E"/>
+                          </a:solidFill>
+                          <a:latin typeface="游ゴシック"/>
+                          <a:ea typeface="游ゴシック"/>
+                          <a:cs typeface="游ゴシック"/>
+                        </a:rPr>
+                        <a:t>鉄＋酸素のラジカル重合で着色</a:t>
+                      </a:r>
+                    </a:p>
+                  </a:txBody>
+                  <a:tcPr anchor="ctr" marL="36576" marR="27432" marT="9144" marB="9144">
+                    <a:solidFill>
+                      <a:srgbClr val="F3D9D4"/>
+                    </a:solidFill>
+                  </a:tcPr>
+                </a:tc>
+                <a:tc>
+                  <a:txBody>
+                    <a:bodyPr/>
+                    <a:lstStyle/>
+                    <a:p>
+                      <a:pPr algn="ctr"/>
+                      <a:r>
+                        <a:rPr sz="750" b="1">
+                          <a:solidFill>
+                            <a:srgbClr val="B03030"/>
+                          </a:solidFill>
+                          <a:latin typeface="游ゴシック"/>
+                          <a:ea typeface="游ゴシック"/>
+                          <a:cs typeface="游ゴシック"/>
+                        </a:rPr>
+                        <a:t>不採用</a:t>
+                      </a:r>
+                    </a:p>
+                  </a:txBody>
+                  <a:tcPr anchor="ctr" marL="36576" marR="27432" marT="9144" marB="9144">
+                    <a:solidFill>
+                      <a:srgbClr val="F3D9D4"/>
+                    </a:solidFill>
+                  </a:tcPr>
+                </a:tc>
+                <a:tc>
+                  <a:txBody>
+                    <a:bodyPr/>
+                    <a:lstStyle/>
+                    <a:p>
+                      <a:r>
+                        <a:rPr sz="750" b="0">
+                          <a:solidFill>
+                            <a:srgbClr val="222222"/>
+                          </a:solidFill>
+                          <a:latin typeface="游ゴシック"/>
+                          <a:ea typeface="游ゴシック"/>
+                          <a:cs typeface="游ゴシック"/>
+                        </a:rPr>
+                        <a:t>酸素で止まる事実と逆（ラジカルは酸素が開始剤）。</a:t>
+                      </a:r>
+                    </a:p>
+                  </a:txBody>
+                  <a:tcPr anchor="ctr" marL="36576" marR="27432" marT="9144" marB="9144">
+                    <a:solidFill>
+                      <a:srgbClr val="F3D9D4"/>
+                    </a:solidFill>
+                  </a:tcPr>
+                </a:tc>
+              </a:tr>
+              <a:tr h="287020">
+                <a:tc>
+                  <a:txBody>
+                    <a:bodyPr/>
+                    <a:lstStyle/>
+                    <a:p>
+                      <a:r>
+                        <a:rPr sz="750" b="1">
+                          <a:solidFill>
+                            <a:srgbClr val="003F7E"/>
+                          </a:solidFill>
+                          <a:latin typeface="游ゴシック"/>
+                          <a:ea typeface="游ゴシック"/>
+                          <a:cs typeface="游ゴシック"/>
+                        </a:rPr>
+                        <a:t>アクロレインが着色指標</a:t>
+                      </a:r>
+                    </a:p>
+                  </a:txBody>
+                  <a:tcPr anchor="ctr" marL="36576" marR="27432" marT="9144" marB="9144">
+                    <a:solidFill>
+                      <a:srgbClr val="F3D9D4"/>
+                    </a:solidFill>
+                  </a:tcPr>
+                </a:tc>
+                <a:tc>
+                  <a:txBody>
+                    <a:bodyPr/>
+                    <a:lstStyle/>
+                    <a:p>
+                      <a:pPr algn="ctr"/>
+                      <a:r>
+                        <a:rPr sz="750" b="1">
+                          <a:solidFill>
+                            <a:srgbClr val="B03030"/>
+                          </a:solidFill>
+                          <a:latin typeface="游ゴシック"/>
+                          <a:ea typeface="游ゴシック"/>
+                          <a:cs typeface="游ゴシック"/>
+                        </a:rPr>
+                        <a:t>不採用（指標にせず）</a:t>
+                      </a:r>
+                    </a:p>
+                  </a:txBody>
+                  <a:tcPr anchor="ctr" marL="36576" marR="27432" marT="9144" marB="9144">
+                    <a:solidFill>
+                      <a:srgbClr val="F3D9D4"/>
+                    </a:solidFill>
+                  </a:tcPr>
+                </a:tc>
+                <a:tc>
+                  <a:txBody>
+                    <a:bodyPr/>
+                    <a:lstStyle/>
+                    <a:p>
+                      <a:r>
+                        <a:rPr sz="750" b="0">
+                          <a:solidFill>
+                            <a:srgbClr val="222222"/>
+                          </a:solidFill>
+                          <a:latin typeface="游ゴシック"/>
+                          <a:ea typeface="游ゴシック"/>
+                          <a:cs typeface="游ゴシック"/>
+                        </a:rPr>
+                        <a:t>アクロレイン濃度とAPHAは非相関。</a:t>
+                      </a:r>
+                    </a:p>
+                  </a:txBody>
+                  <a:tcPr anchor="ctr" marL="36576" marR="27432" marT="9144" marB="9144">
+                    <a:solidFill>
+                      <a:srgbClr val="F3D9D4"/>
+                    </a:solidFill>
+                  </a:tcPr>
+                </a:tc>
+              </a:tr>
+              <a:tr h="287020">
+                <a:tc>
+                  <a:txBody>
+                    <a:bodyPr/>
+                    <a:lstStyle/>
+                    <a:p>
+                      <a:r>
+                        <a:rPr sz="750" b="1">
+                          <a:solidFill>
+                            <a:srgbClr val="003F7E"/>
+                          </a:solidFill>
+                          <a:latin typeface="游ゴシック"/>
+                          <a:ea typeface="游ゴシック"/>
+                          <a:cs typeface="游ゴシック"/>
+                        </a:rPr>
+                        <a:t>アミン（清缶剤由来）が原因</a:t>
+                      </a:r>
+                    </a:p>
+                  </a:txBody>
+                  <a:tcPr anchor="ctr" marL="36576" marR="27432" marT="9144" marB="9144">
+                    <a:solidFill>
+                      <a:srgbClr val="F3D9D4"/>
+                    </a:solidFill>
+                  </a:tcPr>
+                </a:tc>
+                <a:tc>
+                  <a:txBody>
+                    <a:bodyPr/>
+                    <a:lstStyle/>
+                    <a:p>
+                      <a:pPr algn="ctr"/>
+                      <a:r>
+                        <a:rPr sz="750" b="1">
+                          <a:solidFill>
+                            <a:srgbClr val="B03030"/>
+                          </a:solidFill>
+                          <a:latin typeface="游ゴシック"/>
+                          <a:ea typeface="游ゴシック"/>
+                          <a:cs typeface="游ゴシック"/>
+                        </a:rPr>
+                        <a:t>不採用（今回は別）</a:t>
+                      </a:r>
+                    </a:p>
+                  </a:txBody>
+                  <a:tcPr anchor="ctr" marL="36576" marR="27432" marT="9144" marB="9144">
+                    <a:solidFill>
+                      <a:srgbClr val="F3D9D4"/>
+                    </a:solidFill>
+                  </a:tcPr>
+                </a:tc>
+                <a:tc>
+                  <a:txBody>
+                    <a:bodyPr/>
+                    <a:lstStyle/>
+                    <a:p>
+                      <a:r>
+                        <a:rPr sz="750" b="0">
+                          <a:solidFill>
+                            <a:srgbClr val="222222"/>
+                          </a:solidFill>
+                          <a:latin typeface="游ゴシック"/>
+                          <a:ea typeface="游ゴシック"/>
+                          <a:cs typeface="游ゴシック"/>
+                        </a:rPr>
+                        <a:t>今回はアミンが低い。分子量が過去と異なる。N分は残論点。</a:t>
+                      </a:r>
+                    </a:p>
+                  </a:txBody>
+                  <a:tcPr anchor="ctr" marL="36576" marR="27432" marT="9144" marB="9144">
+                    <a:solidFill>
+                      <a:srgbClr val="F3D9D4"/>
+                    </a:solidFill>
+                  </a:tcPr>
+                </a:tc>
+              </a:tr>
+              <a:tr h="287020">
+                <a:tc>
+                  <a:txBody>
+                    <a:bodyPr/>
+                    <a:lstStyle/>
+                    <a:p>
+                      <a:r>
+                        <a:rPr sz="750" b="1">
+                          <a:solidFill>
+                            <a:srgbClr val="003F7E"/>
+                          </a:solidFill>
+                          <a:latin typeface="游ゴシック"/>
+                          <a:ea typeface="游ゴシック"/>
+                          <a:cs typeface="游ゴシック"/>
+                        </a:rPr>
+                        <a:t>DEG/TEGがペルオキシ酸化で分解しアルデヒド生成（社外）</a:t>
+                      </a:r>
+                    </a:p>
+                  </a:txBody>
+                  <a:tcPr anchor="ctr" marL="36576" marR="27432" marT="9144" marB="9144">
+                    <a:solidFill>
+                      <a:srgbClr val="F3D9D4"/>
+                    </a:solidFill>
+                  </a:tcPr>
+                </a:tc>
+                <a:tc>
+                  <a:txBody>
+                    <a:bodyPr/>
+                    <a:lstStyle/>
+                    <a:p>
+                      <a:pPr algn="ctr"/>
+                      <a:r>
+                        <a:rPr sz="750" b="1">
+                          <a:solidFill>
+                            <a:srgbClr val="B03030"/>
+                          </a:solidFill>
+                          <a:latin typeface="游ゴシック"/>
+                          <a:ea typeface="游ゴシック"/>
+                          <a:cs typeface="游ゴシック"/>
+                        </a:rPr>
+                        <a:t>不採用</a:t>
+                      </a:r>
+                    </a:p>
+                  </a:txBody>
+                  <a:tcPr anchor="ctr" marL="36576" marR="27432" marT="9144" marB="9144">
+                    <a:solidFill>
+                      <a:srgbClr val="F3D9D4"/>
+                    </a:solidFill>
+                  </a:tcPr>
+                </a:tc>
+                <a:tc>
+                  <a:txBody>
+                    <a:bodyPr/>
+                    <a:lstStyle/>
+                    <a:p>
+                      <a:r>
+                        <a:rPr sz="750" b="0">
+                          <a:solidFill>
+                            <a:srgbClr val="222222"/>
+                          </a:solidFill>
+                          <a:latin typeface="游ゴシック"/>
+                          <a:ea typeface="游ゴシック"/>
+                          <a:cs typeface="游ゴシック"/>
+                        </a:rPr>
+                        <a:t>社外資料・基礎研『可能性2』だが主因には量的根拠不足。主筋に非中核。</a:t>
+                      </a:r>
+                    </a:p>
+                  </a:txBody>
+                  <a:tcPr anchor="ctr" marL="36576" marR="27432" marT="9144" marB="9144">
+                    <a:solidFill>
+                      <a:srgbClr val="F3D9D4"/>
+                    </a:solidFill>
+                  </a:tcPr>
+                </a:tc>
+              </a:tr>
+              <a:tr h="287020">
+                <a:tc>
+                  <a:txBody>
+                    <a:bodyPr/>
+                    <a:lstStyle/>
+                    <a:p>
+                      <a:r>
+                        <a:rPr sz="750" b="1">
+                          <a:solidFill>
+                            <a:srgbClr val="003F7E"/>
+                          </a:solidFill>
+                          <a:latin typeface="游ゴシック"/>
+                          <a:ea typeface="游ゴシック"/>
+                          <a:cs typeface="游ゴシック"/>
+                        </a:rPr>
+                        <a:t>トータルアルデヒドで監視</a:t>
+                      </a:r>
+                    </a:p>
+                  </a:txBody>
+                  <a:tcPr anchor="ctr" marL="36576" marR="27432" marT="9144" marB="9144">
+                    <a:solidFill>
+                      <a:srgbClr val="F3D9D4"/>
+                    </a:solidFill>
+                  </a:tcPr>
+                </a:tc>
+                <a:tc>
+                  <a:txBody>
+                    <a:bodyPr/>
+                    <a:lstStyle/>
+                    <a:p>
+                      <a:pPr algn="ctr"/>
+                      <a:r>
+                        <a:rPr sz="750" b="1">
+                          <a:solidFill>
+                            <a:srgbClr val="B03030"/>
+                          </a:solidFill>
+                          <a:latin typeface="游ゴシック"/>
+                          <a:ea typeface="游ゴシック"/>
+                          <a:cs typeface="游ゴシック"/>
+                        </a:rPr>
+                        <a:t>不採用</a:t>
+                      </a:r>
+                    </a:p>
+                  </a:txBody>
+                  <a:tcPr anchor="ctr" marL="36576" marR="27432" marT="9144" marB="9144">
+                    <a:solidFill>
+                      <a:srgbClr val="F3D9D4"/>
+                    </a:solidFill>
+                  </a:tcPr>
+                </a:tc>
+                <a:tc>
+                  <a:txBody>
+                    <a:bodyPr/>
+                    <a:lstStyle/>
+                    <a:p>
+                      <a:r>
+                        <a:rPr sz="750" b="0">
+                          <a:solidFill>
+                            <a:srgbClr val="222222"/>
+                          </a:solidFill>
+                          <a:latin typeface="游ゴシック"/>
+                          <a:ea typeface="游ゴシック"/>
+                          <a:cs typeface="游ゴシック"/>
+                        </a:rPr>
+                        <a:t>共役アルデヒドを捉えにくく相関が弱い。UV系に絞る。</a:t>
+                      </a:r>
+                    </a:p>
+                  </a:txBody>
+                  <a:tcPr anchor="ctr" marL="36576" marR="27432" marT="9144" marB="9144">
+                    <a:solidFill>
+                      <a:srgbClr val="F3D9D4"/>
+                    </a:solidFill>
+                  </a:tcPr>
+                </a:tc>
+              </a:tr>
+              <a:tr h="287020">
+                <a:tc>
+                  <a:txBody>
+                    <a:bodyPr/>
+                    <a:lstStyle/>
+                    <a:p>
+                      <a:r>
+                        <a:rPr sz="750" b="1">
+                          <a:solidFill>
+                            <a:srgbClr val="003F7E"/>
+                          </a:solidFill>
+                          <a:latin typeface="游ゴシック"/>
+                          <a:ea typeface="游ゴシック"/>
+                          <a:cs typeface="游ゴシック"/>
+                        </a:rPr>
+                        <a:t>リボイラー穴で水分を誤認していた</a:t>
+                      </a:r>
+                    </a:p>
+                  </a:txBody>
+                  <a:tcPr anchor="ctr" marL="36576" marR="27432" marT="9144" marB="9144">
+                    <a:solidFill>
+                      <a:srgbClr val="E8F1E5"/>
+                    </a:solidFill>
+                  </a:tcPr>
+                </a:tc>
+                <a:tc>
+                  <a:txBody>
+                    <a:bodyPr/>
+                    <a:lstStyle/>
+                    <a:p>
+                      <a:pPr algn="ctr"/>
+                      <a:r>
+                        <a:rPr sz="750" b="1">
+                          <a:solidFill>
+                            <a:srgbClr val="1F7A1F"/>
+                          </a:solidFill>
+                          <a:latin typeface="游ゴシック"/>
+                          <a:ea typeface="游ゴシック"/>
+                          <a:cs typeface="游ゴシック"/>
+                        </a:rPr>
+                        <a:t>採用（注記）</a:t>
+                      </a:r>
+                    </a:p>
+                  </a:txBody>
+                  <a:tcPr anchor="ctr" marL="36576" marR="27432" marT="9144" marB="9144">
+                    <a:solidFill>
+                      <a:srgbClr val="E8F1E5"/>
+                    </a:solidFill>
+                  </a:tcPr>
+                </a:tc>
+                <a:tc>
+                  <a:txBody>
+                    <a:bodyPr/>
+                    <a:lstStyle/>
+                    <a:p>
+                      <a:r>
+                        <a:rPr sz="750" b="0">
+                          <a:solidFill>
+                            <a:srgbClr val="222222"/>
+                          </a:solidFill>
+                          <a:latin typeface="游ゴシック"/>
+                          <a:ea typeface="游ゴシック"/>
+                          <a:cs typeface="游ゴシック"/>
+                        </a:rPr>
+                        <a:t>水分時系列の解釈に影響。修理後は10ppm台。</a:t>
+                      </a:r>
+                    </a:p>
+                  </a:txBody>
+                  <a:tcPr anchor="ctr" marL="36576" marR="27432" marT="9144" marB="9144">
+                    <a:solidFill>
+                      <a:srgbClr val="E8F1E5"/>
                     </a:solidFill>
                   </a:tcPr>
                 </a:tc>
